--- a/문서/포트폴리오/황수지/황수지포트폴리오.pptx
+++ b/문서/포트폴리오/황수지/황수지포트폴리오.pptx
@@ -12309,7 +12309,31 @@
                 <a:cs typeface="Source Han Sans KR"/>
                 <a:sym typeface="Source Han Sans KR"/>
               </a:rPr>
-              <a:t>  CPU 과부하, 지연 증가</a:t>
+              <a:t>  </a:t>
+            </a:r>
+            <a:r>
+              <a:rPr lang="ko-KR" altLang="en-US" sz="3199">
+                <a:solidFill>
+                  <a:srgbClr val="475570"/>
+                </a:solidFill>
+                <a:latin typeface="한컴 윤고딕 740"/>
+                <a:ea typeface="한컴 윤고딕 740"/>
+                <a:cs typeface="Source Han Sans KR"/>
+                <a:sym typeface="Source Han Sans KR"/>
+              </a:rPr>
+              <a:t> </a:t>
+            </a:r>
+            <a:r>
+              <a:rPr lang="en-US" sz="3199">
+                <a:solidFill>
+                  <a:srgbClr val="475570"/>
+                </a:solidFill>
+                <a:latin typeface="한컴 윤고딕 740"/>
+                <a:ea typeface="한컴 윤고딕 740"/>
+                <a:cs typeface="Source Han Sans KR"/>
+                <a:sym typeface="Source Han Sans KR"/>
+              </a:rPr>
+              <a:t>CPU 과부하, 지연 증가</a:t>
             </a:r>
             <a:endParaRPr lang="en-US" sz="3199">
               <a:solidFill>
@@ -13022,7 +13046,7 @@
                 <a:cs typeface="Source Han Sans KR"/>
                 <a:sym typeface="Source Han Sans KR"/>
               </a:rPr>
-              <a:t>월드를 그리드 파티셔닝하고 ViewList 기반으로 근접 객체만 브로드캐스트</a:t>
+              <a:t>섹터 기반 ViewList로 인접 객체만 전송</a:t>
             </a:r>
             <a:endParaRPr lang="en-US" sz="3199">
               <a:solidFill>
@@ -13257,43 +13281,19 @@
                 <a:solidFill>
                   <a:srgbClr val="475570"/>
                 </a:solidFill>
-                <a:latin typeface="Source Han Sans KR"/>
-                <a:ea typeface="Source Han Sans KR"/>
-                <a:cs typeface="Source Han Sans KR"/>
-                <a:sym typeface="Source Han Sans KR"/>
-              </a:rPr>
-              <a:t>GameWorldManager에서 상태 기반 </a:t>
-            </a:r>
-            <a:r>
-              <a:rPr lang="en-US" sz="3199">
-                <a:solidFill>
-                  <a:srgbClr val="475570"/>
-                </a:solidFill>
                 <a:latin typeface="한컴 윤고딕 740"/>
                 <a:ea typeface="한컴 윤고딕 740"/>
                 <a:cs typeface="Source Han Sans KR"/>
                 <a:sym typeface="Source Han Sans KR"/>
               </a:rPr>
-              <a:t>채널링으로</a:t>
-            </a:r>
-            <a:r>
-              <a:rPr lang="en-US" sz="3199">
-                <a:solidFill>
-                  <a:srgbClr val="475570"/>
-                </a:solidFill>
-                <a:latin typeface="Source Han Sans KR"/>
-                <a:ea typeface="Source Han Sans KR"/>
-                <a:cs typeface="Source Han Sans KR"/>
-                <a:sym typeface="Source Han Sans KR"/>
-              </a:rPr>
-              <a:t> 상태를 주기적으로 갱신·공지</a:t>
+              <a:t>GameWorldManager에서 상태 기반 채널링으로 상태를 주기적으로 갱신·공지</a:t>
             </a:r>
             <a:endParaRPr lang="en-US" sz="3199">
               <a:solidFill>
                 <a:srgbClr val="475570"/>
               </a:solidFill>
-              <a:latin typeface="Source Han Sans KR"/>
-              <a:ea typeface="Source Han Sans KR"/>
+              <a:latin typeface="한컴 윤고딕 740"/>
+              <a:ea typeface="한컴 윤고딕 740"/>
               <a:cs typeface="Source Han Sans KR"/>
               <a:sym typeface="Source Han Sans KR"/>
             </a:endParaRPr>

--- a/문서/포트폴리오/황수지/황수지포트폴리오.pptx
+++ b/문서/포트폴리오/황수지/황수지포트폴리오.pptx
@@ -1,6 +1,6 @@
 
 <file path=ppt/presentation.xml><?xml version="1.0" encoding="utf-8"?>
-<p:presentation xmlns:r="http://schemas.openxmlformats.org/officeDocument/2006/relationships" xmlns:c="http://schemas.openxmlformats.org/drawingml/2006/chart" xmlns:a="http://schemas.openxmlformats.org/drawingml/2006/main" xmlns:dgm="http://schemas.openxmlformats.org/drawingml/2006/diagram" xmlns:dsp="http://schemas.microsoft.com/office/drawing/2008/diagram" xmlns:p="http://schemas.openxmlformats.org/presentationml/2006/main">
+<p:presentation xmlns:a="http://schemas.openxmlformats.org/drawingml/2006/main" xmlns:r="http://schemas.openxmlformats.org/officeDocument/2006/relationships" xmlns:p="http://schemas.openxmlformats.org/presentationml/2006/main">
   <p:sldMasterIdLst>
     <p:sldMasterId id="2147483648" r:id="rId1"/>
   </p:sldMasterIdLst>
@@ -127,6 +127,22 @@
       </a:defRPr>
     </a:lvl9pPr>
   </p:defaultTextStyle>
+  <p:extLst>
+    <p:ext uri="{EFAFB233-063F-42B5-8137-9DF3F51BA10A}">
+      <p15:sldGuideLst xmlns:p15="http://schemas.microsoft.com/office/powerpoint/2012/main">
+        <p15:guide id="1" orient="horz" pos="3239">
+          <p15:clr>
+            <a:srgbClr val="A4A3A4"/>
+          </p15:clr>
+        </p15:guide>
+        <p15:guide id="2" pos="5759">
+          <p15:clr>
+            <a:srgbClr val="A4A3A4"/>
+          </p15:clr>
+        </p15:guide>
+      </p15:sldGuideLst>
+    </p:ext>
+  </p:extLst>
 </p:presentation>
 </file>
 
@@ -168,10 +184,9 @@
           <a:lstStyle/>
           <a:p>
             <a:r>
-              <a:rPr lang="en-US" smtClean="0"/>
+              <a:rPr lang="en-US"/>
               <a:t>Click to edit Master title style</a:t>
             </a:r>
-            <a:endParaRPr lang="en-US"/>
           </a:p>
         </p:txBody>
       </p:sp>
@@ -287,10 +302,9 @@
           </a:lstStyle>
           <a:p>
             <a:r>
-              <a:rPr lang="en-US" smtClean="0"/>
+              <a:rPr lang="en-US"/>
               <a:t>Click to edit Master subtitle style</a:t>
             </a:r>
-            <a:endParaRPr lang="en-US"/>
           </a:p>
         </p:txBody>
       </p:sp>
@@ -312,7 +326,7 @@
             <a:fld id="{1D8BD707-D9CF-40AE-B4C6-C98DA3205C09}" type="datetimeFigureOut">
               <a:rPr lang="en-US" smtClean="0"/>
               <a:pPr/>
-              <a:t>8/1/2011</a:t>
+              <a:t>9/4/2025</a:t>
             </a:fld>
             <a:endParaRPr lang="en-US"/>
           </a:p>
@@ -402,10 +416,9 @@
           <a:lstStyle/>
           <a:p>
             <a:r>
-              <a:rPr lang="en-US" smtClean="0"/>
+              <a:rPr lang="en-US"/>
               <a:t>Click to edit Master title style</a:t>
             </a:r>
-            <a:endParaRPr lang="en-US"/>
           </a:p>
         </p:txBody>
       </p:sp>
@@ -426,38 +439,37 @@
           <a:p>
             <a:pPr lvl="0"/>
             <a:r>
-              <a:rPr lang="en-US" smtClean="0"/>
+              <a:rPr lang="en-US"/>
               <a:t>Click to edit Master text styles</a:t>
             </a:r>
           </a:p>
           <a:p>
             <a:pPr lvl="1"/>
             <a:r>
-              <a:rPr lang="en-US" smtClean="0"/>
+              <a:rPr lang="en-US"/>
               <a:t>Second level</a:t>
             </a:r>
           </a:p>
           <a:p>
             <a:pPr lvl="2"/>
             <a:r>
-              <a:rPr lang="en-US" smtClean="0"/>
+              <a:rPr lang="en-US"/>
               <a:t>Third level</a:t>
             </a:r>
           </a:p>
           <a:p>
             <a:pPr lvl="3"/>
             <a:r>
-              <a:rPr lang="en-US" smtClean="0"/>
+              <a:rPr lang="en-US"/>
               <a:t>Fourth level</a:t>
             </a:r>
           </a:p>
           <a:p>
             <a:pPr lvl="4"/>
             <a:r>
-              <a:rPr lang="en-US" smtClean="0"/>
+              <a:rPr lang="en-US"/>
               <a:t>Fifth level</a:t>
             </a:r>
-            <a:endParaRPr lang="en-US"/>
           </a:p>
         </p:txBody>
       </p:sp>
@@ -479,7 +491,7 @@
             <a:fld id="{1D8BD707-D9CF-40AE-B4C6-C98DA3205C09}" type="datetimeFigureOut">
               <a:rPr lang="en-US" smtClean="0"/>
               <a:pPr/>
-              <a:t>8/1/2011</a:t>
+              <a:t>9/4/2025</a:t>
             </a:fld>
             <a:endParaRPr lang="en-US"/>
           </a:p>
@@ -574,10 +586,9 @@
           <a:lstStyle/>
           <a:p>
             <a:r>
-              <a:rPr lang="en-US" smtClean="0"/>
+              <a:rPr lang="en-US"/>
               <a:t>Click to edit Master title style</a:t>
             </a:r>
-            <a:endParaRPr lang="en-US"/>
           </a:p>
         </p:txBody>
       </p:sp>
@@ -603,38 +614,37 @@
           <a:p>
             <a:pPr lvl="0"/>
             <a:r>
-              <a:rPr lang="en-US" smtClean="0"/>
+              <a:rPr lang="en-US"/>
               <a:t>Click to edit Master text styles</a:t>
             </a:r>
           </a:p>
           <a:p>
             <a:pPr lvl="1"/>
             <a:r>
-              <a:rPr lang="en-US" smtClean="0"/>
+              <a:rPr lang="en-US"/>
               <a:t>Second level</a:t>
             </a:r>
           </a:p>
           <a:p>
             <a:pPr lvl="2"/>
             <a:r>
-              <a:rPr lang="en-US" smtClean="0"/>
+              <a:rPr lang="en-US"/>
               <a:t>Third level</a:t>
             </a:r>
           </a:p>
           <a:p>
             <a:pPr lvl="3"/>
             <a:r>
-              <a:rPr lang="en-US" smtClean="0"/>
+              <a:rPr lang="en-US"/>
               <a:t>Fourth level</a:t>
             </a:r>
           </a:p>
           <a:p>
             <a:pPr lvl="4"/>
             <a:r>
-              <a:rPr lang="en-US" smtClean="0"/>
+              <a:rPr lang="en-US"/>
               <a:t>Fifth level</a:t>
             </a:r>
-            <a:endParaRPr lang="en-US"/>
           </a:p>
         </p:txBody>
       </p:sp>
@@ -656,7 +666,7 @@
             <a:fld id="{1D8BD707-D9CF-40AE-B4C6-C98DA3205C09}" type="datetimeFigureOut">
               <a:rPr lang="en-US" smtClean="0"/>
               <a:pPr/>
-              <a:t>8/1/2011</a:t>
+              <a:t>9/4/2025</a:t>
             </a:fld>
             <a:endParaRPr lang="en-US"/>
           </a:p>
@@ -746,10 +756,9 @@
           <a:lstStyle/>
           <a:p>
             <a:r>
-              <a:rPr lang="en-US" smtClean="0"/>
+              <a:rPr lang="en-US"/>
               <a:t>Click to edit Master title style</a:t>
             </a:r>
-            <a:endParaRPr lang="en-US"/>
           </a:p>
         </p:txBody>
       </p:sp>
@@ -770,38 +779,37 @@
           <a:p>
             <a:pPr lvl="0"/>
             <a:r>
-              <a:rPr lang="en-US" smtClean="0"/>
+              <a:rPr lang="en-US"/>
               <a:t>Click to edit Master text styles</a:t>
             </a:r>
           </a:p>
           <a:p>
             <a:pPr lvl="1"/>
             <a:r>
-              <a:rPr lang="en-US" smtClean="0"/>
+              <a:rPr lang="en-US"/>
               <a:t>Second level</a:t>
             </a:r>
           </a:p>
           <a:p>
             <a:pPr lvl="2"/>
             <a:r>
-              <a:rPr lang="en-US" smtClean="0"/>
+              <a:rPr lang="en-US"/>
               <a:t>Third level</a:t>
             </a:r>
           </a:p>
           <a:p>
             <a:pPr lvl="3"/>
             <a:r>
-              <a:rPr lang="en-US" smtClean="0"/>
+              <a:rPr lang="en-US"/>
               <a:t>Fourth level</a:t>
             </a:r>
           </a:p>
           <a:p>
             <a:pPr lvl="4"/>
             <a:r>
-              <a:rPr lang="en-US" smtClean="0"/>
+              <a:rPr lang="en-US"/>
               <a:t>Fifth level</a:t>
             </a:r>
-            <a:endParaRPr lang="en-US"/>
           </a:p>
         </p:txBody>
       </p:sp>
@@ -823,7 +831,7 @@
             <a:fld id="{1D8BD707-D9CF-40AE-B4C6-C98DA3205C09}" type="datetimeFigureOut">
               <a:rPr lang="en-US" smtClean="0"/>
               <a:pPr/>
-              <a:t>8/1/2011</a:t>
+              <a:t>9/4/2025</a:t>
             </a:fld>
             <a:endParaRPr lang="en-US"/>
           </a:p>
@@ -922,10 +930,9 @@
           </a:lstStyle>
           <a:p>
             <a:r>
-              <a:rPr lang="en-US" smtClean="0"/>
+              <a:rPr lang="en-US"/>
               <a:t>Click to edit Master title style</a:t>
             </a:r>
-            <a:endParaRPr lang="en-US"/>
           </a:p>
         </p:txBody>
       </p:sp>
@@ -1042,7 +1049,7 @@
           <a:p>
             <a:pPr lvl="0"/>
             <a:r>
-              <a:rPr lang="en-US" smtClean="0"/>
+              <a:rPr lang="en-US"/>
               <a:t>Click to edit Master text styles</a:t>
             </a:r>
           </a:p>
@@ -1066,7 +1073,7 @@
             <a:fld id="{1D8BD707-D9CF-40AE-B4C6-C98DA3205C09}" type="datetimeFigureOut">
               <a:rPr lang="en-US" smtClean="0"/>
               <a:pPr/>
-              <a:t>8/1/2011</a:t>
+              <a:t>9/4/2025</a:t>
             </a:fld>
             <a:endParaRPr lang="en-US"/>
           </a:p>
@@ -1156,10 +1163,9 @@
           <a:lstStyle/>
           <a:p>
             <a:r>
-              <a:rPr lang="en-US" smtClean="0"/>
+              <a:rPr lang="en-US"/>
               <a:t>Click to edit Master title style</a:t>
             </a:r>
-            <a:endParaRPr lang="en-US"/>
           </a:p>
         </p:txBody>
       </p:sp>
@@ -1213,38 +1219,37 @@
           <a:p>
             <a:pPr lvl="0"/>
             <a:r>
-              <a:rPr lang="en-US" smtClean="0"/>
+              <a:rPr lang="en-US"/>
               <a:t>Click to edit Master text styles</a:t>
             </a:r>
           </a:p>
           <a:p>
             <a:pPr lvl="1"/>
             <a:r>
-              <a:rPr lang="en-US" smtClean="0"/>
+              <a:rPr lang="en-US"/>
               <a:t>Second level</a:t>
             </a:r>
           </a:p>
           <a:p>
             <a:pPr lvl="2"/>
             <a:r>
-              <a:rPr lang="en-US" smtClean="0"/>
+              <a:rPr lang="en-US"/>
               <a:t>Third level</a:t>
             </a:r>
           </a:p>
           <a:p>
             <a:pPr lvl="3"/>
             <a:r>
-              <a:rPr lang="en-US" smtClean="0"/>
+              <a:rPr lang="en-US"/>
               <a:t>Fourth level</a:t>
             </a:r>
           </a:p>
           <a:p>
             <a:pPr lvl="4"/>
             <a:r>
-              <a:rPr lang="en-US" smtClean="0"/>
+              <a:rPr lang="en-US"/>
               <a:t>Fifth level</a:t>
             </a:r>
-            <a:endParaRPr lang="en-US"/>
           </a:p>
         </p:txBody>
       </p:sp>
@@ -1298,38 +1303,37 @@
           <a:p>
             <a:pPr lvl="0"/>
             <a:r>
-              <a:rPr lang="en-US" smtClean="0"/>
+              <a:rPr lang="en-US"/>
               <a:t>Click to edit Master text styles</a:t>
             </a:r>
           </a:p>
           <a:p>
             <a:pPr lvl="1"/>
             <a:r>
-              <a:rPr lang="en-US" smtClean="0"/>
+              <a:rPr lang="en-US"/>
               <a:t>Second level</a:t>
             </a:r>
           </a:p>
           <a:p>
             <a:pPr lvl="2"/>
             <a:r>
-              <a:rPr lang="en-US" smtClean="0"/>
+              <a:rPr lang="en-US"/>
               <a:t>Third level</a:t>
             </a:r>
           </a:p>
           <a:p>
             <a:pPr lvl="3"/>
             <a:r>
-              <a:rPr lang="en-US" smtClean="0"/>
+              <a:rPr lang="en-US"/>
               <a:t>Fourth level</a:t>
             </a:r>
           </a:p>
           <a:p>
             <a:pPr lvl="4"/>
             <a:r>
-              <a:rPr lang="en-US" smtClean="0"/>
+              <a:rPr lang="en-US"/>
               <a:t>Fifth level</a:t>
             </a:r>
-            <a:endParaRPr lang="en-US"/>
           </a:p>
         </p:txBody>
       </p:sp>
@@ -1351,7 +1355,7 @@
             <a:fld id="{1D8BD707-D9CF-40AE-B4C6-C98DA3205C09}" type="datetimeFigureOut">
               <a:rPr lang="en-US" smtClean="0"/>
               <a:pPr/>
-              <a:t>8/1/2011</a:t>
+              <a:t>9/4/2025</a:t>
             </a:fld>
             <a:endParaRPr lang="en-US"/>
           </a:p>
@@ -1445,10 +1449,9 @@
           </a:lstStyle>
           <a:p>
             <a:r>
-              <a:rPr lang="en-US" smtClean="0"/>
+              <a:rPr lang="en-US"/>
               <a:t>Click to edit Master title style</a:t>
             </a:r>
-            <a:endParaRPr lang="en-US"/>
           </a:p>
         </p:txBody>
       </p:sp>
@@ -1511,7 +1514,7 @@
           <a:p>
             <a:pPr lvl="0"/>
             <a:r>
-              <a:rPr lang="en-US" smtClean="0"/>
+              <a:rPr lang="en-US"/>
               <a:t>Click to edit Master text styles</a:t>
             </a:r>
           </a:p>
@@ -1567,38 +1570,37 @@
           <a:p>
             <a:pPr lvl="0"/>
             <a:r>
-              <a:rPr lang="en-US" smtClean="0"/>
+              <a:rPr lang="en-US"/>
               <a:t>Click to edit Master text styles</a:t>
             </a:r>
           </a:p>
           <a:p>
             <a:pPr lvl="1"/>
             <a:r>
-              <a:rPr lang="en-US" smtClean="0"/>
+              <a:rPr lang="en-US"/>
               <a:t>Second level</a:t>
             </a:r>
           </a:p>
           <a:p>
             <a:pPr lvl="2"/>
             <a:r>
-              <a:rPr lang="en-US" smtClean="0"/>
+              <a:rPr lang="en-US"/>
               <a:t>Third level</a:t>
             </a:r>
           </a:p>
           <a:p>
             <a:pPr lvl="3"/>
             <a:r>
-              <a:rPr lang="en-US" smtClean="0"/>
+              <a:rPr lang="en-US"/>
               <a:t>Fourth level</a:t>
             </a:r>
           </a:p>
           <a:p>
             <a:pPr lvl="4"/>
             <a:r>
-              <a:rPr lang="en-US" smtClean="0"/>
+              <a:rPr lang="en-US"/>
               <a:t>Fifth level</a:t>
             </a:r>
-            <a:endParaRPr lang="en-US"/>
           </a:p>
         </p:txBody>
       </p:sp>
@@ -1661,7 +1663,7 @@
           <a:p>
             <a:pPr lvl="0"/>
             <a:r>
-              <a:rPr lang="en-US" smtClean="0"/>
+              <a:rPr lang="en-US"/>
               <a:t>Click to edit Master text styles</a:t>
             </a:r>
           </a:p>
@@ -1717,38 +1719,37 @@
           <a:p>
             <a:pPr lvl="0"/>
             <a:r>
-              <a:rPr lang="en-US" smtClean="0"/>
+              <a:rPr lang="en-US"/>
               <a:t>Click to edit Master text styles</a:t>
             </a:r>
           </a:p>
           <a:p>
             <a:pPr lvl="1"/>
             <a:r>
-              <a:rPr lang="en-US" smtClean="0"/>
+              <a:rPr lang="en-US"/>
               <a:t>Second level</a:t>
             </a:r>
           </a:p>
           <a:p>
             <a:pPr lvl="2"/>
             <a:r>
-              <a:rPr lang="en-US" smtClean="0"/>
+              <a:rPr lang="en-US"/>
               <a:t>Third level</a:t>
             </a:r>
           </a:p>
           <a:p>
             <a:pPr lvl="3"/>
             <a:r>
-              <a:rPr lang="en-US" smtClean="0"/>
+              <a:rPr lang="en-US"/>
               <a:t>Fourth level</a:t>
             </a:r>
           </a:p>
           <a:p>
             <a:pPr lvl="4"/>
             <a:r>
-              <a:rPr lang="en-US" smtClean="0"/>
+              <a:rPr lang="en-US"/>
               <a:t>Fifth level</a:t>
             </a:r>
-            <a:endParaRPr lang="en-US"/>
           </a:p>
         </p:txBody>
       </p:sp>
@@ -1770,7 +1771,7 @@
             <a:fld id="{1D8BD707-D9CF-40AE-B4C6-C98DA3205C09}" type="datetimeFigureOut">
               <a:rPr lang="en-US" smtClean="0"/>
               <a:pPr/>
-              <a:t>8/1/2011</a:t>
+              <a:t>9/4/2025</a:t>
             </a:fld>
             <a:endParaRPr lang="en-US"/>
           </a:p>
@@ -1860,10 +1861,9 @@
           <a:lstStyle/>
           <a:p>
             <a:r>
-              <a:rPr lang="en-US" smtClean="0"/>
+              <a:rPr lang="en-US"/>
               <a:t>Click to edit Master title style</a:t>
             </a:r>
-            <a:endParaRPr lang="en-US"/>
           </a:p>
         </p:txBody>
       </p:sp>
@@ -1885,7 +1885,7 @@
             <a:fld id="{1D8BD707-D9CF-40AE-B4C6-C98DA3205C09}" type="datetimeFigureOut">
               <a:rPr lang="en-US" smtClean="0"/>
               <a:pPr/>
-              <a:t>8/1/2011</a:t>
+              <a:t>9/4/2025</a:t>
             </a:fld>
             <a:endParaRPr lang="en-US"/>
           </a:p>
@@ -1977,7 +1977,7 @@
             <a:fld id="{1D8BD707-D9CF-40AE-B4C6-C98DA3205C09}" type="datetimeFigureOut">
               <a:rPr lang="en-US" smtClean="0"/>
               <a:pPr/>
-              <a:t>8/1/2011</a:t>
+              <a:t>9/4/2025</a:t>
             </a:fld>
             <a:endParaRPr lang="en-US"/>
           </a:p>
@@ -2076,10 +2076,9 @@
           </a:lstStyle>
           <a:p>
             <a:r>
-              <a:rPr lang="en-US" smtClean="0"/>
+              <a:rPr lang="en-US"/>
               <a:t>Click to edit Master title style</a:t>
             </a:r>
-            <a:endParaRPr lang="en-US"/>
           </a:p>
         </p:txBody>
       </p:sp>
@@ -2133,38 +2132,37 @@
           <a:p>
             <a:pPr lvl="0"/>
             <a:r>
-              <a:rPr lang="en-US" smtClean="0"/>
+              <a:rPr lang="en-US"/>
               <a:t>Click to edit Master text styles</a:t>
             </a:r>
           </a:p>
           <a:p>
             <a:pPr lvl="1"/>
             <a:r>
-              <a:rPr lang="en-US" smtClean="0"/>
+              <a:rPr lang="en-US"/>
               <a:t>Second level</a:t>
             </a:r>
           </a:p>
           <a:p>
             <a:pPr lvl="2"/>
             <a:r>
-              <a:rPr lang="en-US" smtClean="0"/>
+              <a:rPr lang="en-US"/>
               <a:t>Third level</a:t>
             </a:r>
           </a:p>
           <a:p>
             <a:pPr lvl="3"/>
             <a:r>
-              <a:rPr lang="en-US" smtClean="0"/>
+              <a:rPr lang="en-US"/>
               <a:t>Fourth level</a:t>
             </a:r>
           </a:p>
           <a:p>
             <a:pPr lvl="4"/>
             <a:r>
-              <a:rPr lang="en-US" smtClean="0"/>
+              <a:rPr lang="en-US"/>
               <a:t>Fifth level</a:t>
             </a:r>
-            <a:endParaRPr lang="en-US"/>
           </a:p>
         </p:txBody>
       </p:sp>
@@ -2227,7 +2225,7 @@
           <a:p>
             <a:pPr lvl="0"/>
             <a:r>
-              <a:rPr lang="en-US" smtClean="0"/>
+              <a:rPr lang="en-US"/>
               <a:t>Click to edit Master text styles</a:t>
             </a:r>
           </a:p>
@@ -2251,7 +2249,7 @@
             <a:fld id="{1D8BD707-D9CF-40AE-B4C6-C98DA3205C09}" type="datetimeFigureOut">
               <a:rPr lang="en-US" smtClean="0"/>
               <a:pPr/>
-              <a:t>8/1/2011</a:t>
+              <a:t>9/4/2025</a:t>
             </a:fld>
             <a:endParaRPr lang="en-US"/>
           </a:p>
@@ -2350,10 +2348,9 @@
           </a:lstStyle>
           <a:p>
             <a:r>
-              <a:rPr lang="en-US" smtClean="0"/>
+              <a:rPr lang="en-US"/>
               <a:t>Click to edit Master title style</a:t>
             </a:r>
-            <a:endParaRPr lang="en-US"/>
           </a:p>
         </p:txBody>
       </p:sp>
@@ -2477,7 +2474,7 @@
           <a:p>
             <a:pPr lvl="0"/>
             <a:r>
-              <a:rPr lang="en-US" smtClean="0"/>
+              <a:rPr lang="en-US"/>
               <a:t>Click to edit Master text styles</a:t>
             </a:r>
           </a:p>
@@ -2501,7 +2498,7 @@
             <a:fld id="{1D8BD707-D9CF-40AE-B4C6-C98DA3205C09}" type="datetimeFigureOut">
               <a:rPr lang="en-US" smtClean="0"/>
               <a:pPr/>
-              <a:t>8/1/2011</a:t>
+              <a:t>9/4/2025</a:t>
             </a:fld>
             <a:endParaRPr lang="en-US"/>
           </a:p>
@@ -2606,10 +2603,9 @@
           <a:lstStyle/>
           <a:p>
             <a:r>
-              <a:rPr lang="en-US" smtClean="0"/>
+              <a:rPr lang="en-US"/>
               <a:t>Click to edit Master title style</a:t>
             </a:r>
-            <a:endParaRPr lang="en-US"/>
           </a:p>
         </p:txBody>
       </p:sp>
@@ -2640,38 +2636,37 @@
           <a:p>
             <a:pPr lvl="0"/>
             <a:r>
-              <a:rPr lang="en-US" smtClean="0"/>
+              <a:rPr lang="en-US"/>
               <a:t>Click to edit Master text styles</a:t>
             </a:r>
           </a:p>
           <a:p>
             <a:pPr lvl="1"/>
             <a:r>
-              <a:rPr lang="en-US" smtClean="0"/>
+              <a:rPr lang="en-US"/>
               <a:t>Second level</a:t>
             </a:r>
           </a:p>
           <a:p>
             <a:pPr lvl="2"/>
             <a:r>
-              <a:rPr lang="en-US" smtClean="0"/>
+              <a:rPr lang="en-US"/>
               <a:t>Third level</a:t>
             </a:r>
           </a:p>
           <a:p>
             <a:pPr lvl="3"/>
             <a:r>
-              <a:rPr lang="en-US" smtClean="0"/>
+              <a:rPr lang="en-US"/>
               <a:t>Fourth level</a:t>
             </a:r>
           </a:p>
           <a:p>
             <a:pPr lvl="4"/>
             <a:r>
-              <a:rPr lang="en-US" smtClean="0"/>
+              <a:rPr lang="en-US"/>
               <a:t>Fifth level</a:t>
             </a:r>
-            <a:endParaRPr lang="en-US"/>
           </a:p>
         </p:txBody>
       </p:sp>
@@ -2711,7 +2706,7 @@
             <a:fld id="{1D8BD707-D9CF-40AE-B4C6-C98DA3205C09}" type="datetimeFigureOut">
               <a:rPr lang="en-US" smtClean="0"/>
               <a:pPr/>
-              <a:t>8/1/2011</a:t>
+              <a:t>9/4/2025</a:t>
             </a:fld>
             <a:endParaRPr lang="en-US"/>
           </a:p>
@@ -3066,13 +3061,14 @@
 </file>
 
 <file path=ppt/slides/slide1.xml><?xml version="1.0" encoding="utf-8"?>
-<p:sld xmlns:r="http://schemas.openxmlformats.org/officeDocument/2006/relationships" xmlns:c="http://schemas.openxmlformats.org/drawingml/2006/chart" xmlns:a="http://schemas.openxmlformats.org/drawingml/2006/main" xmlns:dgm="http://schemas.openxmlformats.org/drawingml/2006/diagram" xmlns:dsp="http://schemas.microsoft.com/office/drawing/2008/diagram" xmlns:p="http://schemas.openxmlformats.org/presentationml/2006/main">
+<p:sld xmlns:a="http://schemas.openxmlformats.org/drawingml/2006/main" xmlns:r="http://schemas.openxmlformats.org/officeDocument/2006/relationships" xmlns:p="http://schemas.openxmlformats.org/presentationml/2006/main">
   <p:cSld>
     <p:bg>
-      <p:bgPr shadeToTitle="0">
+      <p:bgPr>
         <a:solidFill>
-          <a:srgbClr val="fcfdf8"/>
+          <a:srgbClr val="FCFDF8"/>
         </a:solidFill>
+        <a:effectLst/>
       </p:bgPr>
     </p:bg>
     <p:spTree>
@@ -3116,6 +3112,7 @@
         </p:spPr>
         <p:txBody>
           <a:bodyPr wrap="square" anchor="ctr"/>
+          <a:lstStyle/>
           <a:p>
             <a:pPr lvl="0" algn="ctr">
               <a:defRPr/>
@@ -3170,15 +3167,6 @@
               </a:rPr>
               <a:t>포트폴리오</a:t>
             </a:r>
-            <a:endParaRPr lang="en-US" sz="10184" b="1">
-              <a:solidFill>
-                <a:srgbClr val="475570"/>
-              </a:solidFill>
-              <a:latin typeface="한컴 윤고딕 760"/>
-              <a:ea typeface="한컴 윤고딕 760"/>
-              <a:cs typeface="Arial"/>
-              <a:sym typeface="Cabin Bold"/>
-            </a:endParaRPr>
           </a:p>
         </p:txBody>
       </p:sp>
@@ -3224,15 +3212,6 @@
               </a:rPr>
               <a:t>게임서버 신입프로그래머</a:t>
             </a:r>
-            <a:endParaRPr lang="en-US" sz="3999">
-              <a:solidFill>
-                <a:srgbClr val="475570"/>
-              </a:solidFill>
-              <a:latin typeface="한컴 윤고딕 760"/>
-              <a:ea typeface="한컴 윤고딕 760"/>
-              <a:cs typeface="Arial"/>
-              <a:sym typeface="Canva Sans"/>
-            </a:endParaRPr>
           </a:p>
         </p:txBody>
       </p:sp>
@@ -3278,15 +3257,6 @@
               </a:rPr>
               <a:t>황수지</a:t>
             </a:r>
-            <a:endParaRPr lang="en-US" sz="4499">
-              <a:solidFill>
-                <a:srgbClr val="475570"/>
-              </a:solidFill>
-              <a:latin typeface="한컴 윤고딕 760"/>
-              <a:ea typeface="한컴 윤고딕 760"/>
-              <a:cs typeface="Arial"/>
-              <a:sym typeface="Canva Sans"/>
-            </a:endParaRPr>
           </a:p>
         </p:txBody>
       </p:sp>
@@ -3299,13 +3269,14 @@
 </file>
 
 <file path=ppt/slides/slide10.xml><?xml version="1.0" encoding="utf-8"?>
-<p:sld xmlns:r="http://schemas.openxmlformats.org/officeDocument/2006/relationships" xmlns:c="http://schemas.openxmlformats.org/drawingml/2006/chart" xmlns:a="http://schemas.openxmlformats.org/drawingml/2006/main" xmlns:dgm="http://schemas.openxmlformats.org/drawingml/2006/diagram" xmlns:dsp="http://schemas.microsoft.com/office/drawing/2008/diagram" xmlns:p="http://schemas.openxmlformats.org/presentationml/2006/main">
+<p:sld xmlns:a="http://schemas.openxmlformats.org/drawingml/2006/main" xmlns:r="http://schemas.openxmlformats.org/officeDocument/2006/relationships" xmlns:p="http://schemas.openxmlformats.org/presentationml/2006/main">
   <p:cSld>
     <p:bg>
-      <p:bgPr shadeToTitle="0">
+      <p:bgPr>
         <a:solidFill>
-          <a:srgbClr val="fcfdf8"/>
+          <a:srgbClr val="FCFDF8"/>
         </a:solidFill>
+        <a:effectLst/>
       </p:bgPr>
     </p:bg>
     <p:spTree>
@@ -3331,7 +3302,7 @@
         <p:spPr>
           <a:xfrm>
             <a:off x="1224586" y="4285395"/>
-            <a:ext cx="16670630" cy="3039330"/>
+            <a:ext cx="16670630" cy="4977453"/>
           </a:xfrm>
           <a:prstGeom prst="rect">
             <a:avLst/>
@@ -3350,7 +3321,7 @@
               <a:defRPr/>
             </a:pPr>
             <a:r>
-              <a:rPr lang="en-US" sz="3199" b="1">
+              <a:rPr lang="en-US" sz="3199" b="1" dirty="0" err="1">
                 <a:solidFill>
                   <a:srgbClr val="475570"/>
                 </a:solidFill>
@@ -3362,18 +3333,246 @@
               <a:t>문제</a:t>
             </a:r>
             <a:r>
-              <a:rPr lang="en-US" sz="3199">
-                <a:solidFill>
-                  <a:srgbClr val="475570"/>
-                </a:solidFill>
-                <a:latin typeface="한컴 윤고딕 740"/>
-                <a:ea typeface="한컴 윤고딕 740"/>
-                <a:cs typeface="Source Han Sans KR"/>
-                <a:sym typeface="Source Han Sans KR"/>
-              </a:rPr>
-              <a:t>   하드코딩 스폰/전환 좌표는 맵 구조가 바뀔 때마다 충돌·위치 오류 발생</a:t>
-            </a:r>
-            <a:endParaRPr lang="en-US" sz="3199">
+              <a:rPr lang="en-US" sz="3199" dirty="0">
+                <a:solidFill>
+                  <a:srgbClr val="475570"/>
+                </a:solidFill>
+                <a:latin typeface="한컴 윤고딕 740"/>
+                <a:ea typeface="한컴 윤고딕 740"/>
+                <a:cs typeface="Source Han Sans KR"/>
+                <a:sym typeface="Source Han Sans KR"/>
+              </a:rPr>
+              <a:t>   </a:t>
+            </a:r>
+            <a:r>
+              <a:rPr lang="en-US" sz="3199" dirty="0" err="1">
+                <a:solidFill>
+                  <a:srgbClr val="475570"/>
+                </a:solidFill>
+                <a:latin typeface="한컴 윤고딕 740"/>
+                <a:ea typeface="한컴 윤고딕 740"/>
+                <a:cs typeface="Source Han Sans KR"/>
+                <a:sym typeface="Source Han Sans KR"/>
+              </a:rPr>
+              <a:t>하드코딩</a:t>
+            </a:r>
+            <a:r>
+              <a:rPr lang="en-US" sz="3199" dirty="0">
+                <a:solidFill>
+                  <a:srgbClr val="475570"/>
+                </a:solidFill>
+                <a:latin typeface="한컴 윤고딕 740"/>
+                <a:ea typeface="한컴 윤고딕 740"/>
+                <a:cs typeface="Source Han Sans KR"/>
+                <a:sym typeface="Source Han Sans KR"/>
+              </a:rPr>
+              <a:t> </a:t>
+            </a:r>
+            <a:r>
+              <a:rPr lang="en-US" sz="3199" dirty="0" err="1">
+                <a:solidFill>
+                  <a:srgbClr val="475570"/>
+                </a:solidFill>
+                <a:latin typeface="한컴 윤고딕 740"/>
+                <a:ea typeface="한컴 윤고딕 740"/>
+                <a:cs typeface="Source Han Sans KR"/>
+                <a:sym typeface="Source Han Sans KR"/>
+              </a:rPr>
+              <a:t>스폰</a:t>
+            </a:r>
+            <a:r>
+              <a:rPr lang="en-US" sz="3199" dirty="0">
+                <a:solidFill>
+                  <a:srgbClr val="475570"/>
+                </a:solidFill>
+                <a:latin typeface="한컴 윤고딕 740"/>
+                <a:ea typeface="한컴 윤고딕 740"/>
+                <a:cs typeface="Source Han Sans KR"/>
+                <a:sym typeface="Source Han Sans KR"/>
+              </a:rPr>
+              <a:t>/</a:t>
+            </a:r>
+            <a:r>
+              <a:rPr lang="en-US" sz="3199" dirty="0" err="1">
+                <a:solidFill>
+                  <a:srgbClr val="475570"/>
+                </a:solidFill>
+                <a:latin typeface="한컴 윤고딕 740"/>
+                <a:ea typeface="한컴 윤고딕 740"/>
+                <a:cs typeface="Source Han Sans KR"/>
+                <a:sym typeface="Source Han Sans KR"/>
+              </a:rPr>
+              <a:t>전환</a:t>
+            </a:r>
+            <a:r>
+              <a:rPr lang="en-US" sz="3199" dirty="0">
+                <a:solidFill>
+                  <a:srgbClr val="475570"/>
+                </a:solidFill>
+                <a:latin typeface="한컴 윤고딕 740"/>
+                <a:ea typeface="한컴 윤고딕 740"/>
+                <a:cs typeface="Source Han Sans KR"/>
+                <a:sym typeface="Source Han Sans KR"/>
+              </a:rPr>
+              <a:t> </a:t>
+            </a:r>
+            <a:r>
+              <a:rPr lang="en-US" sz="3199" dirty="0" err="1">
+                <a:solidFill>
+                  <a:srgbClr val="475570"/>
+                </a:solidFill>
+                <a:latin typeface="한컴 윤고딕 740"/>
+                <a:ea typeface="한컴 윤고딕 740"/>
+                <a:cs typeface="Source Han Sans KR"/>
+                <a:sym typeface="Source Han Sans KR"/>
+              </a:rPr>
+              <a:t>좌표는</a:t>
+            </a:r>
+            <a:r>
+              <a:rPr lang="en-US" sz="3199" dirty="0">
+                <a:solidFill>
+                  <a:srgbClr val="475570"/>
+                </a:solidFill>
+                <a:latin typeface="한컴 윤고딕 740"/>
+                <a:ea typeface="한컴 윤고딕 740"/>
+                <a:cs typeface="Source Han Sans KR"/>
+                <a:sym typeface="Source Han Sans KR"/>
+              </a:rPr>
+              <a:t> 맵 </a:t>
+            </a:r>
+            <a:r>
+              <a:rPr lang="en-US" sz="3199" dirty="0" err="1">
+                <a:solidFill>
+                  <a:srgbClr val="475570"/>
+                </a:solidFill>
+                <a:latin typeface="한컴 윤고딕 740"/>
+                <a:ea typeface="한컴 윤고딕 740"/>
+                <a:cs typeface="Source Han Sans KR"/>
+                <a:sym typeface="Source Han Sans KR"/>
+              </a:rPr>
+              <a:t>구조가</a:t>
+            </a:r>
+            <a:r>
+              <a:rPr lang="en-US" sz="3199" dirty="0">
+                <a:solidFill>
+                  <a:srgbClr val="475570"/>
+                </a:solidFill>
+                <a:latin typeface="한컴 윤고딕 740"/>
+                <a:ea typeface="한컴 윤고딕 740"/>
+                <a:cs typeface="Source Han Sans KR"/>
+                <a:sym typeface="Source Han Sans KR"/>
+              </a:rPr>
+              <a:t> </a:t>
+            </a:r>
+            <a:r>
+              <a:rPr lang="en-US" sz="3199" dirty="0" err="1">
+                <a:solidFill>
+                  <a:srgbClr val="475570"/>
+                </a:solidFill>
+                <a:latin typeface="한컴 윤고딕 740"/>
+                <a:ea typeface="한컴 윤고딕 740"/>
+                <a:cs typeface="Source Han Sans KR"/>
+                <a:sym typeface="Source Han Sans KR"/>
+              </a:rPr>
+              <a:t>바뀔</a:t>
+            </a:r>
+            <a:r>
+              <a:rPr lang="en-US" sz="3199" dirty="0">
+                <a:solidFill>
+                  <a:srgbClr val="475570"/>
+                </a:solidFill>
+                <a:latin typeface="한컴 윤고딕 740"/>
+                <a:ea typeface="한컴 윤고딕 740"/>
+                <a:cs typeface="Source Han Sans KR"/>
+                <a:sym typeface="Source Han Sans KR"/>
+              </a:rPr>
+              <a:t> </a:t>
+            </a:r>
+            <a:r>
+              <a:rPr lang="en-US" sz="3199" dirty="0" err="1">
+                <a:solidFill>
+                  <a:srgbClr val="475570"/>
+                </a:solidFill>
+                <a:latin typeface="한컴 윤고딕 740"/>
+                <a:ea typeface="한컴 윤고딕 740"/>
+                <a:cs typeface="Source Han Sans KR"/>
+                <a:sym typeface="Source Han Sans KR"/>
+              </a:rPr>
+              <a:t>때마다</a:t>
+            </a:r>
+            <a:r>
+              <a:rPr lang="en-US" sz="3199" dirty="0">
+                <a:solidFill>
+                  <a:srgbClr val="475570"/>
+                </a:solidFill>
+                <a:latin typeface="한컴 윤고딕 740"/>
+                <a:ea typeface="한컴 윤고딕 740"/>
+                <a:cs typeface="Source Han Sans KR"/>
+                <a:sym typeface="Source Han Sans KR"/>
+              </a:rPr>
+              <a:t> </a:t>
+            </a:r>
+            <a:r>
+              <a:rPr lang="en-US" sz="3199" dirty="0" err="1">
+                <a:solidFill>
+                  <a:srgbClr val="475570"/>
+                </a:solidFill>
+                <a:latin typeface="한컴 윤고딕 740"/>
+                <a:ea typeface="한컴 윤고딕 740"/>
+                <a:cs typeface="Source Han Sans KR"/>
+                <a:sym typeface="Source Han Sans KR"/>
+              </a:rPr>
+              <a:t>충돌·위치</a:t>
+            </a:r>
+            <a:r>
+              <a:rPr lang="en-US" sz="3199" dirty="0">
+                <a:solidFill>
+                  <a:srgbClr val="475570"/>
+                </a:solidFill>
+                <a:latin typeface="한컴 윤고딕 740"/>
+                <a:ea typeface="한컴 윤고딕 740"/>
+                <a:cs typeface="Source Han Sans KR"/>
+                <a:sym typeface="Source Han Sans KR"/>
+              </a:rPr>
+              <a:t> </a:t>
+            </a:r>
+            <a:r>
+              <a:rPr lang="en-US" sz="3199" dirty="0" err="1">
+                <a:solidFill>
+                  <a:srgbClr val="475570"/>
+                </a:solidFill>
+                <a:latin typeface="한컴 윤고딕 740"/>
+                <a:ea typeface="한컴 윤고딕 740"/>
+                <a:cs typeface="Source Han Sans KR"/>
+                <a:sym typeface="Source Han Sans KR"/>
+              </a:rPr>
+              <a:t>오류</a:t>
+            </a:r>
+            <a:r>
+              <a:rPr lang="en-US" sz="3199" dirty="0">
+                <a:solidFill>
+                  <a:srgbClr val="475570"/>
+                </a:solidFill>
+                <a:latin typeface="한컴 윤고딕 740"/>
+                <a:ea typeface="한컴 윤고딕 740"/>
+                <a:cs typeface="Source Han Sans KR"/>
+                <a:sym typeface="Source Han Sans KR"/>
+              </a:rPr>
+              <a:t> </a:t>
+            </a:r>
+            <a:r>
+              <a:rPr lang="en-US" sz="3199" dirty="0" err="1">
+                <a:solidFill>
+                  <a:srgbClr val="475570"/>
+                </a:solidFill>
+                <a:latin typeface="한컴 윤고딕 740"/>
+                <a:ea typeface="한컴 윤고딕 740"/>
+                <a:cs typeface="Source Han Sans KR"/>
+                <a:sym typeface="Source Han Sans KR"/>
+              </a:rPr>
+              <a:t>발생</a:t>
+            </a:r>
+            <a:endParaRPr lang="en-US" sz="3199" dirty="0">
               <a:solidFill>
                 <a:srgbClr val="475570"/>
               </a:solidFill>
@@ -3391,7 +3590,7 @@
               <a:defRPr/>
             </a:pPr>
             <a:r>
-              <a:rPr lang="en-US" sz="3199" b="1">
+              <a:rPr lang="en-US" sz="3199" b="1" dirty="0" err="1">
                 <a:solidFill>
                   <a:srgbClr val="475570"/>
                 </a:solidFill>
@@ -3400,21 +3599,269 @@
                 <a:cs typeface="Source Han Sans KR Bold"/>
                 <a:sym typeface="Source Han Sans KR Bold"/>
               </a:rPr>
-              <a:t>해결 </a:t>
-            </a:r>
-            <a:r>
-              <a:rPr lang="en-US" sz="3199">
-                <a:solidFill>
-                  <a:srgbClr val="475570"/>
-                </a:solidFill>
-                <a:latin typeface="한컴 윤고딕 740"/>
-                <a:ea typeface="한컴 윤고딕 740"/>
-                <a:cs typeface="Source Han Sans KR"/>
-                <a:sym typeface="Source Han Sans KR"/>
-              </a:rPr>
-              <a:t>  존·게이트마다 NavMesh에서 좌표를 자동 계산하도록 통합</a:t>
-            </a:r>
-            <a:endParaRPr lang="en-US" sz="3199">
+              <a:t>해결</a:t>
+            </a:r>
+            <a:r>
+              <a:rPr lang="en-US" sz="3199" b="1" dirty="0">
+                <a:solidFill>
+                  <a:srgbClr val="475570"/>
+                </a:solidFill>
+                <a:latin typeface="한컴 윤고딕 740"/>
+                <a:ea typeface="한컴 윤고딕 740"/>
+                <a:cs typeface="Source Han Sans KR Bold"/>
+                <a:sym typeface="Source Han Sans KR Bold"/>
+              </a:rPr>
+              <a:t> </a:t>
+            </a:r>
+            <a:r>
+              <a:rPr lang="en-US" sz="3199" dirty="0">
+                <a:solidFill>
+                  <a:srgbClr val="475570"/>
+                </a:solidFill>
+                <a:latin typeface="한컴 윤고딕 740"/>
+                <a:ea typeface="한컴 윤고딕 740"/>
+                <a:cs typeface="Source Han Sans KR"/>
+                <a:sym typeface="Source Han Sans KR"/>
+              </a:rPr>
+              <a:t>  </a:t>
+            </a:r>
+            <a:r>
+              <a:rPr lang="ko-KR" altLang="en-US" sz="3199" dirty="0" err="1">
+                <a:solidFill>
+                  <a:srgbClr val="475570"/>
+                </a:solidFill>
+                <a:latin typeface="한컴 윤고딕 740"/>
+                <a:ea typeface="한컴 윤고딕 740"/>
+                <a:cs typeface="Source Han Sans KR"/>
+                <a:sym typeface="Source Han Sans KR"/>
+              </a:rPr>
+              <a:t>언리얼에서</a:t>
+            </a:r>
+            <a:r>
+              <a:rPr lang="ko-KR" altLang="en-US" sz="3199" dirty="0">
+                <a:solidFill>
+                  <a:srgbClr val="475570"/>
+                </a:solidFill>
+                <a:latin typeface="한컴 윤고딕 740"/>
+                <a:ea typeface="한컴 윤고딕 740"/>
+                <a:cs typeface="Source Han Sans KR"/>
+                <a:sym typeface="Source Han Sans KR"/>
+              </a:rPr>
+              <a:t> 추출한 </a:t>
+            </a:r>
+            <a:r>
+              <a:rPr lang="en-US" altLang="ko-KR" sz="3199" dirty="0" err="1">
+                <a:solidFill>
+                  <a:srgbClr val="475570"/>
+                </a:solidFill>
+                <a:latin typeface="한컴 윤고딕 740"/>
+                <a:ea typeface="한컴 윤고딕 740"/>
+                <a:cs typeface="Source Han Sans KR"/>
+                <a:sym typeface="Source Han Sans KR"/>
+              </a:rPr>
+              <a:t>NavMesh</a:t>
+            </a:r>
+            <a:r>
+              <a:rPr lang="ko-KR" altLang="en-US" sz="3199" dirty="0">
+                <a:solidFill>
+                  <a:srgbClr val="475570"/>
+                </a:solidFill>
+                <a:latin typeface="한컴 윤고딕 740"/>
+                <a:ea typeface="한컴 윤고딕 740"/>
+                <a:cs typeface="Source Han Sans KR"/>
+                <a:sym typeface="Source Han Sans KR"/>
+              </a:rPr>
+              <a:t>를 서버에서 로딩해서 충돌검사 및 </a:t>
+            </a:r>
+            <a:r>
+              <a:rPr lang="ko-KR" altLang="en-US" sz="3199" dirty="0" err="1">
+                <a:solidFill>
+                  <a:srgbClr val="475570"/>
+                </a:solidFill>
+                <a:latin typeface="한컴 윤고딕 740"/>
+                <a:ea typeface="한컴 윤고딕 740"/>
+                <a:cs typeface="Source Han Sans KR"/>
+                <a:sym typeface="Source Han Sans KR"/>
+              </a:rPr>
+              <a:t>길찾기에</a:t>
+            </a:r>
+            <a:r>
+              <a:rPr lang="ko-KR" altLang="en-US" sz="3199" dirty="0">
+                <a:solidFill>
+                  <a:srgbClr val="475570"/>
+                </a:solidFill>
+                <a:latin typeface="한컴 윤고딕 740"/>
+                <a:ea typeface="한컴 윤고딕 740"/>
+                <a:cs typeface="Source Han Sans KR"/>
+                <a:sym typeface="Source Han Sans KR"/>
+              </a:rPr>
+              <a:t> 사용</a:t>
+            </a:r>
+            <a:r>
+              <a:rPr lang="en-US" altLang="ko-KR" sz="3199" dirty="0">
+                <a:solidFill>
+                  <a:srgbClr val="475570"/>
+                </a:solidFill>
+                <a:latin typeface="한컴 윤고딕 740"/>
+                <a:ea typeface="한컴 윤고딕 740"/>
+                <a:cs typeface="Source Han Sans KR"/>
+                <a:sym typeface="Source Han Sans KR"/>
+              </a:rPr>
+              <a:t>. </a:t>
+            </a:r>
+          </a:p>
+          <a:p>
+            <a:pPr lvl="0" algn="l">
+              <a:lnSpc>
+                <a:spcPts val="7999"/>
+              </a:lnSpc>
+              <a:defRPr/>
+            </a:pPr>
+            <a:r>
+              <a:rPr lang="en-US" sz="3199" dirty="0">
+                <a:solidFill>
+                  <a:srgbClr val="475570"/>
+                </a:solidFill>
+                <a:latin typeface="한컴 윤고딕 740"/>
+                <a:ea typeface="한컴 윤고딕 740"/>
+                <a:cs typeface="Source Han Sans KR"/>
+                <a:sym typeface="Source Han Sans KR"/>
+              </a:rPr>
+              <a:t>            </a:t>
+            </a:r>
+            <a:r>
+              <a:rPr lang="en-US" sz="3199" dirty="0" err="1">
+                <a:solidFill>
+                  <a:srgbClr val="475570"/>
+                </a:solidFill>
+                <a:latin typeface="한컴 윤고딕 740"/>
+                <a:ea typeface="한컴 윤고딕 740"/>
+                <a:cs typeface="Source Han Sans KR"/>
+                <a:sym typeface="Source Han Sans KR"/>
+              </a:rPr>
+              <a:t>존·게이트마다</a:t>
+            </a:r>
+            <a:r>
+              <a:rPr lang="en-US" sz="3199" dirty="0">
+                <a:solidFill>
+                  <a:srgbClr val="475570"/>
+                </a:solidFill>
+                <a:latin typeface="한컴 윤고딕 740"/>
+                <a:ea typeface="한컴 윤고딕 740"/>
+                <a:cs typeface="Source Han Sans KR"/>
+                <a:sym typeface="Source Han Sans KR"/>
+              </a:rPr>
+              <a:t> </a:t>
+            </a:r>
+            <a:r>
+              <a:rPr lang="en-US" sz="3199" dirty="0" err="1">
+                <a:solidFill>
+                  <a:srgbClr val="475570"/>
+                </a:solidFill>
+                <a:latin typeface="한컴 윤고딕 740"/>
+                <a:ea typeface="한컴 윤고딕 740"/>
+                <a:cs typeface="Source Han Sans KR"/>
+                <a:sym typeface="Source Han Sans KR"/>
+              </a:rPr>
+              <a:t>NavMesh에서</a:t>
+            </a:r>
+            <a:r>
+              <a:rPr lang="en-US" sz="3199" dirty="0">
+                <a:solidFill>
+                  <a:srgbClr val="475570"/>
+                </a:solidFill>
+                <a:latin typeface="한컴 윤고딕 740"/>
+                <a:ea typeface="한컴 윤고딕 740"/>
+                <a:cs typeface="Source Han Sans KR"/>
+                <a:sym typeface="Source Han Sans KR"/>
+              </a:rPr>
+              <a:t> </a:t>
+            </a:r>
+            <a:r>
+              <a:rPr lang="en-US" sz="3199" dirty="0" err="1">
+                <a:solidFill>
+                  <a:srgbClr val="475570"/>
+                </a:solidFill>
+                <a:latin typeface="한컴 윤고딕 740"/>
+                <a:ea typeface="한컴 윤고딕 740"/>
+                <a:cs typeface="Source Han Sans KR"/>
+                <a:sym typeface="Source Han Sans KR"/>
+              </a:rPr>
+              <a:t>좌표를</a:t>
+            </a:r>
+            <a:r>
+              <a:rPr lang="en-US" sz="3199" dirty="0">
+                <a:solidFill>
+                  <a:srgbClr val="475570"/>
+                </a:solidFill>
+                <a:latin typeface="한컴 윤고딕 740"/>
+                <a:ea typeface="한컴 윤고딕 740"/>
+                <a:cs typeface="Source Han Sans KR"/>
+                <a:sym typeface="Source Han Sans KR"/>
+              </a:rPr>
+              <a:t> </a:t>
+            </a:r>
+            <a:r>
+              <a:rPr lang="en-US" sz="3199" dirty="0" err="1">
+                <a:solidFill>
+                  <a:srgbClr val="475570"/>
+                </a:solidFill>
+                <a:latin typeface="한컴 윤고딕 740"/>
+                <a:ea typeface="한컴 윤고딕 740"/>
+                <a:cs typeface="Source Han Sans KR"/>
+                <a:sym typeface="Source Han Sans KR"/>
+              </a:rPr>
+              <a:t>자동</a:t>
+            </a:r>
+            <a:r>
+              <a:rPr lang="en-US" sz="3199" dirty="0">
+                <a:solidFill>
+                  <a:srgbClr val="475570"/>
+                </a:solidFill>
+                <a:latin typeface="한컴 윤고딕 740"/>
+                <a:ea typeface="한컴 윤고딕 740"/>
+                <a:cs typeface="Source Han Sans KR"/>
+                <a:sym typeface="Source Han Sans KR"/>
+              </a:rPr>
+              <a:t> </a:t>
+            </a:r>
+            <a:r>
+              <a:rPr lang="en-US" sz="3199" dirty="0" err="1">
+                <a:solidFill>
+                  <a:srgbClr val="475570"/>
+                </a:solidFill>
+                <a:latin typeface="한컴 윤고딕 740"/>
+                <a:ea typeface="한컴 윤고딕 740"/>
+                <a:cs typeface="Source Han Sans KR"/>
+                <a:sym typeface="Source Han Sans KR"/>
+              </a:rPr>
+              <a:t>계산하도록</a:t>
+            </a:r>
+            <a:r>
+              <a:rPr lang="en-US" sz="3199" dirty="0">
+                <a:solidFill>
+                  <a:srgbClr val="475570"/>
+                </a:solidFill>
+                <a:latin typeface="한컴 윤고딕 740"/>
+                <a:ea typeface="한컴 윤고딕 740"/>
+                <a:cs typeface="Source Han Sans KR"/>
+                <a:sym typeface="Source Han Sans KR"/>
+              </a:rPr>
+              <a:t> </a:t>
+            </a:r>
+            <a:r>
+              <a:rPr lang="en-US" sz="3199" dirty="0" err="1">
+                <a:solidFill>
+                  <a:srgbClr val="475570"/>
+                </a:solidFill>
+                <a:latin typeface="한컴 윤고딕 740"/>
+                <a:ea typeface="한컴 윤고딕 740"/>
+                <a:cs typeface="Source Han Sans KR"/>
+                <a:sym typeface="Source Han Sans KR"/>
+              </a:rPr>
+              <a:t>통합</a:t>
+            </a:r>
+            <a:endParaRPr lang="en-US" sz="3199" dirty="0">
               <a:solidFill>
                 <a:srgbClr val="475570"/>
               </a:solidFill>
@@ -3432,7 +3879,7 @@
               <a:defRPr/>
             </a:pPr>
             <a:r>
-              <a:rPr lang="en-US" sz="3199" b="1">
+              <a:rPr lang="en-US" sz="3199" b="1" dirty="0" err="1">
                 <a:solidFill>
                   <a:srgbClr val="475570"/>
                 </a:solidFill>
@@ -3441,21 +3888,257 @@
                 <a:cs typeface="Source Han Sans KR Bold"/>
                 <a:sym typeface="Source Han Sans KR Bold"/>
               </a:rPr>
-              <a:t>결과 </a:t>
-            </a:r>
-            <a:r>
-              <a:rPr lang="en-US" sz="3199">
-                <a:solidFill>
-                  <a:srgbClr val="475570"/>
-                </a:solidFill>
-                <a:latin typeface="한컴 윤고딕 740"/>
-                <a:ea typeface="한컴 윤고딕 740"/>
-                <a:cs typeface="Source Han Sans KR"/>
-                <a:sym typeface="Source Han Sans KR"/>
-              </a:rPr>
-              <a:t>  맵을 수정해도 안전하게 배치 가능, 클라이언트와 항상 동기화 유지</a:t>
-            </a:r>
-            <a:endParaRPr lang="en-US" sz="3199">
+              <a:t>결과</a:t>
+            </a:r>
+            <a:r>
+              <a:rPr lang="en-US" sz="3199" b="1" dirty="0">
+                <a:solidFill>
+                  <a:srgbClr val="475570"/>
+                </a:solidFill>
+                <a:latin typeface="한컴 윤고딕 740"/>
+                <a:ea typeface="한컴 윤고딕 740"/>
+                <a:cs typeface="Source Han Sans KR Bold"/>
+                <a:sym typeface="Source Han Sans KR Bold"/>
+              </a:rPr>
+              <a:t> </a:t>
+            </a:r>
+            <a:r>
+              <a:rPr lang="en-US" sz="3199" dirty="0">
+                <a:solidFill>
+                  <a:srgbClr val="475570"/>
+                </a:solidFill>
+                <a:latin typeface="한컴 윤고딕 740"/>
+                <a:ea typeface="한컴 윤고딕 740"/>
+                <a:cs typeface="Source Han Sans KR"/>
+                <a:sym typeface="Source Han Sans KR"/>
+              </a:rPr>
+              <a:t>  </a:t>
+            </a:r>
+            <a:r>
+              <a:rPr lang="en-US" sz="3199" dirty="0" err="1">
+                <a:solidFill>
+                  <a:srgbClr val="475570"/>
+                </a:solidFill>
+                <a:latin typeface="한컴 윤고딕 740"/>
+                <a:ea typeface="한컴 윤고딕 740"/>
+                <a:cs typeface="Source Han Sans KR"/>
+                <a:sym typeface="Source Han Sans KR"/>
+              </a:rPr>
+              <a:t>맵을</a:t>
+            </a:r>
+            <a:r>
+              <a:rPr lang="en-US" sz="3199" dirty="0">
+                <a:solidFill>
+                  <a:srgbClr val="475570"/>
+                </a:solidFill>
+                <a:latin typeface="한컴 윤고딕 740"/>
+                <a:ea typeface="한컴 윤고딕 740"/>
+                <a:cs typeface="Source Han Sans KR"/>
+                <a:sym typeface="Source Han Sans KR"/>
+              </a:rPr>
+              <a:t> </a:t>
+            </a:r>
+            <a:r>
+              <a:rPr lang="en-US" sz="3199" dirty="0" err="1">
+                <a:solidFill>
+                  <a:srgbClr val="475570"/>
+                </a:solidFill>
+                <a:latin typeface="한컴 윤고딕 740"/>
+                <a:ea typeface="한컴 윤고딕 740"/>
+                <a:cs typeface="Source Han Sans KR"/>
+                <a:sym typeface="Source Han Sans KR"/>
+              </a:rPr>
+              <a:t>수정해도</a:t>
+            </a:r>
+            <a:r>
+              <a:rPr lang="en-US" sz="3199" dirty="0">
+                <a:solidFill>
+                  <a:srgbClr val="475570"/>
+                </a:solidFill>
+                <a:latin typeface="한컴 윤고딕 740"/>
+                <a:ea typeface="한컴 윤고딕 740"/>
+                <a:cs typeface="Source Han Sans KR"/>
+                <a:sym typeface="Source Han Sans KR"/>
+              </a:rPr>
+              <a:t> </a:t>
+            </a:r>
+            <a:r>
+              <a:rPr lang="ko-KR" altLang="en-US" sz="3199" dirty="0">
+                <a:solidFill>
+                  <a:srgbClr val="475570"/>
+                </a:solidFill>
+                <a:latin typeface="한컴 윤고딕 740"/>
+                <a:ea typeface="한컴 윤고딕 740"/>
+                <a:cs typeface="Source Han Sans KR"/>
+                <a:sym typeface="Source Han Sans KR"/>
+              </a:rPr>
+              <a:t>서버에 즉시 반영하여</a:t>
+            </a:r>
+            <a:r>
+              <a:rPr lang="en-US" altLang="ko-KR" sz="3199" dirty="0">
+                <a:solidFill>
+                  <a:srgbClr val="475570"/>
+                </a:solidFill>
+                <a:latin typeface="한컴 윤고딕 740"/>
+                <a:ea typeface="한컴 윤고딕 740"/>
+                <a:cs typeface="Source Han Sans KR"/>
+                <a:sym typeface="Source Han Sans KR"/>
+              </a:rPr>
+              <a:t>, </a:t>
+            </a:r>
+            <a:r>
+              <a:rPr lang="en-US" sz="3199" dirty="0" err="1">
+                <a:solidFill>
+                  <a:srgbClr val="475570"/>
+                </a:solidFill>
+                <a:latin typeface="한컴 윤고딕 740"/>
+                <a:ea typeface="한컴 윤고딕 740"/>
+                <a:cs typeface="Source Han Sans KR"/>
+                <a:sym typeface="Source Han Sans KR"/>
+              </a:rPr>
+              <a:t>안전하게</a:t>
+            </a:r>
+            <a:r>
+              <a:rPr lang="en-US" sz="3199" dirty="0">
+                <a:solidFill>
+                  <a:srgbClr val="475570"/>
+                </a:solidFill>
+                <a:latin typeface="한컴 윤고딕 740"/>
+                <a:ea typeface="한컴 윤고딕 740"/>
+                <a:cs typeface="Source Han Sans KR"/>
+                <a:sym typeface="Source Han Sans KR"/>
+              </a:rPr>
+              <a:t> </a:t>
+            </a:r>
+            <a:r>
+              <a:rPr lang="en-US" sz="3199" dirty="0" err="1">
+                <a:solidFill>
+                  <a:srgbClr val="475570"/>
+                </a:solidFill>
+                <a:latin typeface="한컴 윤고딕 740"/>
+                <a:ea typeface="한컴 윤고딕 740"/>
+                <a:cs typeface="Source Han Sans KR"/>
+                <a:sym typeface="Source Han Sans KR"/>
+              </a:rPr>
+              <a:t>배치</a:t>
+            </a:r>
+            <a:r>
+              <a:rPr lang="en-US" sz="3199" dirty="0">
+                <a:solidFill>
+                  <a:srgbClr val="475570"/>
+                </a:solidFill>
+                <a:latin typeface="한컴 윤고딕 740"/>
+                <a:ea typeface="한컴 윤고딕 740"/>
+                <a:cs typeface="Source Han Sans KR"/>
+                <a:sym typeface="Source Han Sans KR"/>
+              </a:rPr>
+              <a:t> </a:t>
+            </a:r>
+            <a:r>
+              <a:rPr lang="en-US" sz="3199" dirty="0" err="1">
+                <a:solidFill>
+                  <a:srgbClr val="475570"/>
+                </a:solidFill>
+                <a:latin typeface="한컴 윤고딕 740"/>
+                <a:ea typeface="한컴 윤고딕 740"/>
+                <a:cs typeface="Source Han Sans KR"/>
+                <a:sym typeface="Source Han Sans KR"/>
+              </a:rPr>
+              <a:t>가능</a:t>
+            </a:r>
+            <a:r>
+              <a:rPr lang="en-US" sz="3199" dirty="0">
+                <a:solidFill>
+                  <a:srgbClr val="475570"/>
+                </a:solidFill>
+                <a:latin typeface="한컴 윤고딕 740"/>
+                <a:ea typeface="한컴 윤고딕 740"/>
+                <a:cs typeface="Source Han Sans KR"/>
+                <a:sym typeface="Source Han Sans KR"/>
+              </a:rPr>
+              <a:t>,</a:t>
+            </a:r>
+          </a:p>
+          <a:p>
+            <a:pPr lvl="0" algn="l">
+              <a:lnSpc>
+                <a:spcPts val="7999"/>
+              </a:lnSpc>
+              <a:defRPr/>
+            </a:pPr>
+            <a:r>
+              <a:rPr lang="en-US" sz="3199" dirty="0">
+                <a:solidFill>
+                  <a:srgbClr val="475570"/>
+                </a:solidFill>
+                <a:latin typeface="한컴 윤고딕 740"/>
+                <a:ea typeface="한컴 윤고딕 740"/>
+                <a:cs typeface="Source Han Sans KR"/>
+                <a:sym typeface="Source Han Sans KR"/>
+              </a:rPr>
+              <a:t>            </a:t>
+            </a:r>
+            <a:r>
+              <a:rPr lang="en-US" sz="3199" dirty="0" err="1">
+                <a:solidFill>
+                  <a:srgbClr val="475570"/>
+                </a:solidFill>
+                <a:latin typeface="한컴 윤고딕 740"/>
+                <a:ea typeface="한컴 윤고딕 740"/>
+                <a:cs typeface="Source Han Sans KR"/>
+                <a:sym typeface="Source Han Sans KR"/>
+              </a:rPr>
+              <a:t>클라이언트와</a:t>
+            </a:r>
+            <a:r>
+              <a:rPr lang="en-US" sz="3199" dirty="0">
+                <a:solidFill>
+                  <a:srgbClr val="475570"/>
+                </a:solidFill>
+                <a:latin typeface="한컴 윤고딕 740"/>
+                <a:ea typeface="한컴 윤고딕 740"/>
+                <a:cs typeface="Source Han Sans KR"/>
+                <a:sym typeface="Source Han Sans KR"/>
+              </a:rPr>
+              <a:t> </a:t>
+            </a:r>
+            <a:r>
+              <a:rPr lang="en-US" sz="3199" dirty="0" err="1">
+                <a:solidFill>
+                  <a:srgbClr val="475570"/>
+                </a:solidFill>
+                <a:latin typeface="한컴 윤고딕 740"/>
+                <a:ea typeface="한컴 윤고딕 740"/>
+                <a:cs typeface="Source Han Sans KR"/>
+                <a:sym typeface="Source Han Sans KR"/>
+              </a:rPr>
+              <a:t>항상</a:t>
+            </a:r>
+            <a:r>
+              <a:rPr lang="en-US" sz="3199" dirty="0">
+                <a:solidFill>
+                  <a:srgbClr val="475570"/>
+                </a:solidFill>
+                <a:latin typeface="한컴 윤고딕 740"/>
+                <a:ea typeface="한컴 윤고딕 740"/>
+                <a:cs typeface="Source Han Sans KR"/>
+                <a:sym typeface="Source Han Sans KR"/>
+              </a:rPr>
+              <a:t> </a:t>
+            </a:r>
+            <a:r>
+              <a:rPr lang="ko-KR" altLang="en-US" sz="3199" dirty="0">
+                <a:solidFill>
+                  <a:srgbClr val="475570"/>
+                </a:solidFill>
+                <a:latin typeface="한컴 윤고딕 740"/>
+                <a:ea typeface="한컴 윤고딕 740"/>
+                <a:cs typeface="Source Han Sans KR"/>
+                <a:sym typeface="Source Han Sans KR"/>
+              </a:rPr>
+              <a:t>지형 일치</a:t>
+            </a:r>
+            <a:endParaRPr lang="en-US" sz="3199" dirty="0">
               <a:solidFill>
                 <a:srgbClr val="475570"/>
               </a:solidFill>
@@ -3509,15 +4192,6 @@
               </a:rPr>
               <a:t>NavMesh 기반 스폰·길찾기·맵전환</a:t>
             </a:r>
-            <a:endParaRPr lang="en-US" sz="5000" b="1">
-              <a:solidFill>
-                <a:srgbClr val="475570"/>
-              </a:solidFill>
-              <a:latin typeface="한컴 윤고딕 740"/>
-              <a:ea typeface="한컴 윤고딕 740"/>
-              <a:cs typeface="Canva Sans Bold"/>
-              <a:sym typeface="Canva Sans Bold"/>
-            </a:endParaRPr>
           </a:p>
         </p:txBody>
       </p:sp>
@@ -3563,15 +4237,6 @@
               </a:rPr>
               <a:t>티유월드</a:t>
             </a:r>
-            <a:endParaRPr lang="en-US" sz="5000" b="1">
-              <a:solidFill>
-                <a:srgbClr val="475570"/>
-              </a:solidFill>
-              <a:latin typeface="한컴 윤고딕 760"/>
-              <a:ea typeface="한컴 윤고딕 760"/>
-              <a:cs typeface="Canva Sans Bold"/>
-              <a:sym typeface="Canva Sans Bold"/>
-            </a:endParaRPr>
           </a:p>
         </p:txBody>
       </p:sp>
@@ -3617,15 +4282,6 @@
               </a:rPr>
               <a:t>PROJECTS</a:t>
             </a:r>
-            <a:endParaRPr lang="en-US" sz="2000">
-              <a:solidFill>
-                <a:srgbClr val="475570"/>
-              </a:solidFill>
-              <a:latin typeface="한컴 윤고딕 760"/>
-              <a:ea typeface="한컴 윤고딕 760"/>
-              <a:cs typeface="Cabin"/>
-              <a:sym typeface="Cabin"/>
-            </a:endParaRPr>
           </a:p>
         </p:txBody>
       </p:sp>
@@ -3638,13 +4294,14 @@
 </file>
 
 <file path=ppt/slides/slide11.xml><?xml version="1.0" encoding="utf-8"?>
-<p:sld xmlns:r="http://schemas.openxmlformats.org/officeDocument/2006/relationships" xmlns:c="http://schemas.openxmlformats.org/drawingml/2006/chart" xmlns:a="http://schemas.openxmlformats.org/drawingml/2006/main" xmlns:dgm="http://schemas.openxmlformats.org/drawingml/2006/diagram" xmlns:dsp="http://schemas.microsoft.com/office/drawing/2008/diagram" xmlns:p="http://schemas.openxmlformats.org/presentationml/2006/main">
+<p:sld xmlns:a="http://schemas.openxmlformats.org/drawingml/2006/main" xmlns:r="http://schemas.openxmlformats.org/officeDocument/2006/relationships" xmlns:p="http://schemas.openxmlformats.org/presentationml/2006/main">
   <p:cSld>
     <p:bg>
-      <p:bgPr shadeToTitle="0">
+      <p:bgPr>
         <a:solidFill>
-          <a:srgbClr val="fcfdf8"/>
+          <a:srgbClr val="FCFDF8"/>
         </a:solidFill>
+        <a:effectLst/>
       </p:bgPr>
     </p:bg>
     <p:spTree>
@@ -3663,12 +4320,12 @@
       </p:grpSpPr>
       <p:sp>
         <p:nvSpPr>
-          <p:cNvPr name="Freeform 2" id="2"/>
+          <p:cNvPr id="2" name="Freeform 2"/>
           <p:cNvSpPr/>
           <p:nvPr/>
         </p:nvSpPr>
         <p:spPr>
-          <a:xfrm flipH="false" flipV="false" rot="0">
+          <a:xfrm>
             <a:off x="2737460" y="3456235"/>
             <a:ext cx="12068066" cy="5281906"/>
           </a:xfrm>
@@ -3677,9 +4334,9 @@
             <a:gdLst/>
             <a:ahLst/>
             <a:cxnLst/>
-            <a:rect r="r" b="b" t="t" l="l"/>
+            <a:rect l="l" t="t" r="r" b="b"/>
             <a:pathLst>
-              <a:path h="5281906" w="12068066">
+              <a:path w="12068066" h="5281906">
                 <a:moveTo>
                   <a:pt x="0" y="0"/>
                 </a:moveTo>
@@ -3702,19 +4359,26 @@
           <a:blipFill>
             <a:blip r:embed="rId2"/>
             <a:stretch>
-              <a:fillRect l="-634" t="-52132" r="-634" b="0"/>
+              <a:fillRect l="-634" t="-52132" r="-634"/>
             </a:stretch>
           </a:blipFill>
         </p:spPr>
-      </p:sp>
-      <p:sp>
-        <p:nvSpPr>
-          <p:cNvPr name="Freeform 3" id="3"/>
+        <p:txBody>
+          <a:bodyPr/>
+          <a:lstStyle/>
+          <a:p>
+            <a:endParaRPr lang="ko-KR" altLang="en-US"/>
+          </a:p>
+        </p:txBody>
+      </p:sp>
+      <p:sp>
+        <p:nvSpPr>
+          <p:cNvPr id="3" name="Freeform 3"/>
           <p:cNvSpPr/>
           <p:nvPr/>
         </p:nvSpPr>
         <p:spPr>
-          <a:xfrm flipH="false" flipV="false" rot="0">
+          <a:xfrm>
             <a:off x="4324535" y="800100"/>
             <a:ext cx="8893914" cy="2127992"/>
           </a:xfrm>
@@ -3723,9 +4387,9 @@
             <a:gdLst/>
             <a:ahLst/>
             <a:cxnLst/>
-            <a:rect r="r" b="b" t="t" l="l"/>
+            <a:rect l="l" t="t" r="r" b="b"/>
             <a:pathLst>
-              <a:path h="2127992" w="8893914">
+              <a:path w="8893914" h="2127992">
                 <a:moveTo>
                   <a:pt x="0" y="0"/>
                 </a:moveTo>
@@ -3748,10 +4412,17 @@
           <a:blipFill>
             <a:blip r:embed="rId3"/>
             <a:stretch>
-              <a:fillRect l="0" t="0" r="0" b="0"/>
+              <a:fillRect/>
             </a:stretch>
           </a:blipFill>
         </p:spPr>
+        <p:txBody>
+          <a:bodyPr/>
+          <a:lstStyle/>
+          <a:p>
+            <a:endParaRPr lang="ko-KR" altLang="en-US"/>
+          </a:p>
+        </p:txBody>
       </p:sp>
       <p:sp>
         <p:nvSpPr>
@@ -3792,15 +4463,6 @@
               </a:rPr>
               <a:t>서버에서 JSON파일 파싱 및 서버용 NavMesh 빌드</a:t>
             </a:r>
-            <a:endParaRPr lang="en-US" sz="3199">
-              <a:solidFill>
-                <a:srgbClr val="475570"/>
-              </a:solidFill>
-              <a:latin typeface="한컴 윤고딕 740"/>
-              <a:ea typeface="한컴 윤고딕 740"/>
-              <a:cs typeface="Source Han Sans KR"/>
-              <a:sym typeface="Source Han Sans KR"/>
-            </a:endParaRPr>
           </a:p>
           <a:p>
             <a:pPr lvl="0" algn="ctr">
@@ -3824,15 +4486,6 @@
               </a:rPr>
               <a:t>NavMesh 기반 A* 알고리즘으로 폴리곤 중심 경로 탐색</a:t>
             </a:r>
-            <a:endParaRPr lang="en-US" sz="3199">
-              <a:solidFill>
-                <a:srgbClr val="475570"/>
-              </a:solidFill>
-              <a:latin typeface="한컴 윤고딕 740"/>
-              <a:ea typeface="한컴 윤고딕 740"/>
-              <a:cs typeface="Source Han Sans KR"/>
-              <a:sym typeface="Source Han Sans KR"/>
-            </a:endParaRPr>
           </a:p>
         </p:txBody>
       </p:sp>
@@ -3878,15 +4531,6 @@
               </a:rPr>
               <a:t>언리얼에서 NavMesh를 JSON으로 추출</a:t>
             </a:r>
-            <a:endParaRPr lang="en-US" sz="3199">
-              <a:solidFill>
-                <a:srgbClr val="475570"/>
-              </a:solidFill>
-              <a:latin typeface="한컴 윤고딕 740"/>
-              <a:ea typeface="한컴 윤고딕 740"/>
-              <a:cs typeface="Source Han Sans KR"/>
-              <a:sym typeface="Source Han Sans KR"/>
-            </a:endParaRPr>
           </a:p>
         </p:txBody>
       </p:sp>
@@ -3932,15 +4576,6 @@
               </a:rPr>
               <a:t>티유월드</a:t>
             </a:r>
-            <a:endParaRPr lang="en-US" sz="5000" b="1">
-              <a:solidFill>
-                <a:srgbClr val="475570"/>
-              </a:solidFill>
-              <a:latin typeface="한컴 윤고딕 760"/>
-              <a:ea typeface="한컴 윤고딕 760"/>
-              <a:cs typeface="Canva Sans Bold"/>
-              <a:sym typeface="Canva Sans Bold"/>
-            </a:endParaRPr>
           </a:p>
         </p:txBody>
       </p:sp>
@@ -3986,15 +4621,6 @@
               </a:rPr>
               <a:t>PROJECTS</a:t>
             </a:r>
-            <a:endParaRPr lang="en-US" sz="2000">
-              <a:solidFill>
-                <a:srgbClr val="475570"/>
-              </a:solidFill>
-              <a:latin typeface="한컴 윤고딕 760"/>
-              <a:ea typeface="한컴 윤고딕 760"/>
-              <a:cs typeface="Cabin"/>
-              <a:sym typeface="Cabin"/>
-            </a:endParaRPr>
           </a:p>
         </p:txBody>
       </p:sp>
@@ -4007,13 +4633,14 @@
 </file>
 
 <file path=ppt/slides/slide12.xml><?xml version="1.0" encoding="utf-8"?>
-<p:sld xmlns:r="http://schemas.openxmlformats.org/officeDocument/2006/relationships" xmlns:c="http://schemas.openxmlformats.org/drawingml/2006/chart" xmlns:a="http://schemas.openxmlformats.org/drawingml/2006/main" xmlns:dgm="http://schemas.openxmlformats.org/drawingml/2006/diagram" xmlns:dsp="http://schemas.microsoft.com/office/drawing/2008/diagram" xmlns:p="http://schemas.openxmlformats.org/presentationml/2006/main">
+<p:sld xmlns:a="http://schemas.openxmlformats.org/drawingml/2006/main" xmlns:r="http://schemas.openxmlformats.org/officeDocument/2006/relationships" xmlns:p="http://schemas.openxmlformats.org/presentationml/2006/main">
   <p:cSld>
     <p:bg>
-      <p:bgPr shadeToTitle="0">
+      <p:bgPr>
         <a:solidFill>
-          <a:srgbClr val="fcfdf8"/>
+          <a:srgbClr val="FCFDF8"/>
         </a:solidFill>
+        <a:effectLst/>
       </p:bgPr>
     </p:bg>
     <p:spTree>
@@ -4032,12 +4659,12 @@
       </p:grpSpPr>
       <p:sp>
         <p:nvSpPr>
-          <p:cNvPr name="Freeform 2" id="2"/>
+          <p:cNvPr id="2" name="Freeform 2"/>
           <p:cNvSpPr/>
           <p:nvPr/>
         </p:nvSpPr>
         <p:spPr>
-          <a:xfrm flipH="false" flipV="false" rot="0">
+          <a:xfrm>
             <a:off x="1224586" y="1974503"/>
             <a:ext cx="7173257" cy="1896783"/>
           </a:xfrm>
@@ -4046,9 +4673,9 @@
             <a:gdLst/>
             <a:ahLst/>
             <a:cxnLst/>
-            <a:rect r="r" b="b" t="t" l="l"/>
+            <a:rect l="l" t="t" r="r" b="b"/>
             <a:pathLst>
-              <a:path h="1896783" w="7173257">
+              <a:path w="7173257" h="1896783">
                 <a:moveTo>
                   <a:pt x="0" y="0"/>
                 </a:moveTo>
@@ -4071,19 +4698,26 @@
           <a:blipFill>
             <a:blip r:embed="rId2"/>
             <a:stretch>
-              <a:fillRect l="0" t="0" r="-10426" b="0"/>
+              <a:fillRect r="-10426"/>
             </a:stretch>
           </a:blipFill>
         </p:spPr>
-      </p:sp>
-      <p:sp>
-        <p:nvSpPr>
-          <p:cNvPr name="Freeform 3" id="3"/>
+        <p:txBody>
+          <a:bodyPr/>
+          <a:lstStyle/>
+          <a:p>
+            <a:endParaRPr lang="ko-KR" altLang="en-US"/>
+          </a:p>
+        </p:txBody>
+      </p:sp>
+      <p:sp>
+        <p:nvSpPr>
+          <p:cNvPr id="3" name="Freeform 3"/>
           <p:cNvSpPr/>
           <p:nvPr/>
         </p:nvSpPr>
         <p:spPr>
-          <a:xfrm flipH="false" flipV="false" rot="0">
+          <a:xfrm>
             <a:off x="1224586" y="4030728"/>
             <a:ext cx="7173257" cy="5835102"/>
           </a:xfrm>
@@ -4092,9 +4726,9 @@
             <a:gdLst/>
             <a:ahLst/>
             <a:cxnLst/>
-            <a:rect r="r" b="b" t="t" l="l"/>
+            <a:rect l="l" t="t" r="r" b="b"/>
             <a:pathLst>
-              <a:path h="5835102" w="7173257">
+              <a:path w="7173257" h="5835102">
                 <a:moveTo>
                   <a:pt x="0" y="0"/>
                 </a:moveTo>
@@ -4117,10 +4751,17 @@
           <a:blipFill>
             <a:blip r:embed="rId3"/>
             <a:stretch>
-              <a:fillRect l="0" t="0" r="-7137" b="0"/>
+              <a:fillRect r="-7137"/>
             </a:stretch>
           </a:blipFill>
         </p:spPr>
+        <p:txBody>
+          <a:bodyPr/>
+          <a:lstStyle/>
+          <a:p>
+            <a:endParaRPr lang="ko-KR" altLang="en-US"/>
+          </a:p>
+        </p:txBody>
       </p:sp>
       <p:sp>
         <p:nvSpPr>
@@ -4161,15 +4802,6 @@
               </a:rPr>
               <a:t>NavMesh 활용 ①</a:t>
             </a:r>
-            <a:endParaRPr lang="en-US" sz="3199" b="1">
-              <a:solidFill>
-                <a:srgbClr val="475570"/>
-              </a:solidFill>
-              <a:latin typeface="한컴 윤고딕 740"/>
-              <a:ea typeface="한컴 윤고딕 740"/>
-              <a:cs typeface="Source Han Sans KR Bold"/>
-              <a:sym typeface="Source Han Sans KR Bold"/>
-            </a:endParaRPr>
           </a:p>
           <a:p>
             <a:pPr lvl="0">
@@ -4193,15 +4825,6 @@
               </a:rPr>
               <a:t> : 스폰</a:t>
             </a:r>
-            <a:endParaRPr lang="en-US" sz="3199">
-              <a:solidFill>
-                <a:srgbClr val="475570"/>
-              </a:solidFill>
-              <a:latin typeface="한컴 윤고딕 740"/>
-              <a:ea typeface="한컴 윤고딕 740"/>
-              <a:cs typeface="Source Han Sans KR"/>
-              <a:sym typeface="Source Han Sans KR"/>
-            </a:endParaRPr>
           </a:p>
         </p:txBody>
       </p:sp>
@@ -4247,15 +4870,6 @@
               </a:rPr>
               <a:t>플레이어/몬스터 스폰 위치 설정</a:t>
             </a:r>
-            <a:endParaRPr lang="en-US" sz="3199">
-              <a:solidFill>
-                <a:srgbClr val="475570"/>
-              </a:solidFill>
-              <a:latin typeface="한컴 윤고딕 740"/>
-              <a:ea typeface="한컴 윤고딕 740"/>
-              <a:cs typeface="Source Han Sans KR"/>
-              <a:sym typeface="Source Han Sans KR"/>
-            </a:endParaRPr>
           </a:p>
         </p:txBody>
       </p:sp>
@@ -4301,15 +4915,6 @@
               </a:rPr>
               <a:t>티유월드</a:t>
             </a:r>
-            <a:endParaRPr lang="en-US" sz="5000" b="1">
-              <a:solidFill>
-                <a:srgbClr val="475570"/>
-              </a:solidFill>
-              <a:latin typeface="한컴 윤고딕 760"/>
-              <a:ea typeface="한컴 윤고딕 760"/>
-              <a:cs typeface="Canva Sans Bold"/>
-              <a:sym typeface="Canva Sans Bold"/>
-            </a:endParaRPr>
           </a:p>
         </p:txBody>
       </p:sp>
@@ -4355,15 +4960,6 @@
               </a:rPr>
               <a:t>PROJECTS</a:t>
             </a:r>
-            <a:endParaRPr lang="en-US" sz="2000">
-              <a:solidFill>
-                <a:srgbClr val="475570"/>
-              </a:solidFill>
-              <a:latin typeface="한컴 윤고딕 760"/>
-              <a:ea typeface="한컴 윤고딕 760"/>
-              <a:cs typeface="Cabin"/>
-              <a:sym typeface="Cabin"/>
-            </a:endParaRPr>
           </a:p>
         </p:txBody>
       </p:sp>
@@ -4376,13 +4972,14 @@
 </file>
 
 <file path=ppt/slides/slide13.xml><?xml version="1.0" encoding="utf-8"?>
-<p:sld xmlns:r="http://schemas.openxmlformats.org/officeDocument/2006/relationships" xmlns:c="http://schemas.openxmlformats.org/drawingml/2006/chart" xmlns:a="http://schemas.openxmlformats.org/drawingml/2006/main" xmlns:dgm="http://schemas.openxmlformats.org/drawingml/2006/diagram" xmlns:dsp="http://schemas.microsoft.com/office/drawing/2008/diagram" xmlns:p="http://schemas.openxmlformats.org/presentationml/2006/main">
+<p:sld xmlns:a="http://schemas.openxmlformats.org/drawingml/2006/main" xmlns:r="http://schemas.openxmlformats.org/officeDocument/2006/relationships" xmlns:p="http://schemas.openxmlformats.org/presentationml/2006/main">
   <p:cSld>
     <p:bg>
-      <p:bgPr shadeToTitle="0">
+      <p:bgPr>
         <a:solidFill>
-          <a:srgbClr val="fcfdf8"/>
+          <a:srgbClr val="FCFDF8"/>
         </a:solidFill>
+        <a:effectLst/>
       </p:bgPr>
     </p:bg>
     <p:spTree>
@@ -4401,12 +4998,12 @@
       </p:grpSpPr>
       <p:sp>
         <p:nvSpPr>
-          <p:cNvPr name="Freeform 2" id="2"/>
+          <p:cNvPr id="2" name="Freeform 2"/>
           <p:cNvSpPr/>
           <p:nvPr/>
         </p:nvSpPr>
         <p:spPr>
-          <a:xfrm flipH="false" flipV="false" rot="0">
+          <a:xfrm>
             <a:off x="1028700" y="1799260"/>
             <a:ext cx="8921584" cy="7766489"/>
           </a:xfrm>
@@ -4415,9 +5012,9 @@
             <a:gdLst/>
             <a:ahLst/>
             <a:cxnLst/>
-            <a:rect r="r" b="b" t="t" l="l"/>
+            <a:rect l="l" t="t" r="r" b="b"/>
             <a:pathLst>
-              <a:path h="7766489" w="8921584">
+              <a:path w="8921584" h="7766489">
                 <a:moveTo>
                   <a:pt x="0" y="0"/>
                 </a:moveTo>
@@ -4440,10 +5037,17 @@
           <a:blipFill>
             <a:blip r:embed="rId2"/>
             <a:stretch>
-              <a:fillRect l="0" t="0" r="0" b="0"/>
+              <a:fillRect/>
             </a:stretch>
           </a:blipFill>
         </p:spPr>
+        <p:txBody>
+          <a:bodyPr/>
+          <a:lstStyle/>
+          <a:p>
+            <a:endParaRPr lang="ko-KR" altLang="en-US"/>
+          </a:p>
+        </p:txBody>
       </p:sp>
       <p:sp>
         <p:nvSpPr>
@@ -4484,15 +5088,6 @@
               </a:rPr>
               <a:t>NavMesh 활용 ②</a:t>
             </a:r>
-            <a:endParaRPr lang="en-US" sz="3199" b="1">
-              <a:solidFill>
-                <a:srgbClr val="475570"/>
-              </a:solidFill>
-              <a:latin typeface="한컴 윤고딕 740"/>
-              <a:ea typeface="한컴 윤고딕 740"/>
-              <a:cs typeface="Source Han Sans KR Bold"/>
-              <a:sym typeface="Source Han Sans KR Bold"/>
-            </a:endParaRPr>
           </a:p>
           <a:p>
             <a:pPr lvl="0">
@@ -4516,15 +5111,6 @@
               </a:rPr>
               <a:t> : 길찾기</a:t>
             </a:r>
-            <a:endParaRPr lang="en-US" sz="3199">
-              <a:solidFill>
-                <a:srgbClr val="475570"/>
-              </a:solidFill>
-              <a:latin typeface="한컴 윤고딕 740"/>
-              <a:ea typeface="한컴 윤고딕 740"/>
-              <a:cs typeface="Source Han Sans KR"/>
-              <a:sym typeface="Source Han Sans KR"/>
-            </a:endParaRPr>
           </a:p>
         </p:txBody>
       </p:sp>
@@ -4570,15 +5156,6 @@
               </a:rPr>
               <a:t>몬스터 플레이어 쫓기 </a:t>
             </a:r>
-            <a:endParaRPr lang="en-US" sz="3199">
-              <a:solidFill>
-                <a:srgbClr val="475570"/>
-              </a:solidFill>
-              <a:latin typeface="한컴 윤고딕 740"/>
-              <a:ea typeface="한컴 윤고딕 740"/>
-              <a:cs typeface="Source Han Sans KR"/>
-              <a:sym typeface="Source Han Sans KR"/>
-            </a:endParaRPr>
           </a:p>
         </p:txBody>
       </p:sp>
@@ -4624,15 +5201,6 @@
               </a:rPr>
               <a:t>티유월드</a:t>
             </a:r>
-            <a:endParaRPr lang="en-US" sz="5000" b="1">
-              <a:solidFill>
-                <a:srgbClr val="475570"/>
-              </a:solidFill>
-              <a:latin typeface="한컴 윤고딕 760"/>
-              <a:ea typeface="한컴 윤고딕 760"/>
-              <a:cs typeface="Canva Sans Bold"/>
-              <a:sym typeface="Canva Sans Bold"/>
-            </a:endParaRPr>
           </a:p>
         </p:txBody>
       </p:sp>
@@ -4678,15 +5246,6 @@
               </a:rPr>
               <a:t>PROJECTS</a:t>
             </a:r>
-            <a:endParaRPr lang="en-US" sz="2000">
-              <a:solidFill>
-                <a:srgbClr val="475570"/>
-              </a:solidFill>
-              <a:latin typeface="한컴 윤고딕 760"/>
-              <a:ea typeface="한컴 윤고딕 760"/>
-              <a:cs typeface="Cabin"/>
-              <a:sym typeface="Cabin"/>
-            </a:endParaRPr>
           </a:p>
         </p:txBody>
       </p:sp>
@@ -4699,13 +5258,14 @@
 </file>
 
 <file path=ppt/slides/slide14.xml><?xml version="1.0" encoding="utf-8"?>
-<p:sld xmlns:r="http://schemas.openxmlformats.org/officeDocument/2006/relationships" xmlns:c="http://schemas.openxmlformats.org/drawingml/2006/chart" xmlns:a="http://schemas.openxmlformats.org/drawingml/2006/main" xmlns:dgm="http://schemas.openxmlformats.org/drawingml/2006/diagram" xmlns:dsp="http://schemas.microsoft.com/office/drawing/2008/diagram" xmlns:p="http://schemas.openxmlformats.org/presentationml/2006/main">
+<p:sld xmlns:a="http://schemas.openxmlformats.org/drawingml/2006/main" xmlns:r="http://schemas.openxmlformats.org/officeDocument/2006/relationships" xmlns:p="http://schemas.openxmlformats.org/presentationml/2006/main">
   <p:cSld>
     <p:bg>
-      <p:bgPr shadeToTitle="0">
+      <p:bgPr>
         <a:solidFill>
-          <a:srgbClr val="fcfdf8"/>
+          <a:srgbClr val="FCFDF8"/>
         </a:solidFill>
+        <a:effectLst/>
       </p:bgPr>
     </p:bg>
     <p:spTree>
@@ -4724,12 +5284,12 @@
       </p:grpSpPr>
       <p:sp>
         <p:nvSpPr>
-          <p:cNvPr name="Freeform 2" id="2"/>
+          <p:cNvPr id="2" name="Freeform 2"/>
           <p:cNvSpPr/>
           <p:nvPr/>
         </p:nvSpPr>
         <p:spPr>
-          <a:xfrm flipH="false" flipV="false" rot="0">
+          <a:xfrm>
             <a:off x="1224586" y="2134752"/>
             <a:ext cx="9652331" cy="6933795"/>
           </a:xfrm>
@@ -4738,9 +5298,9 @@
             <a:gdLst/>
             <a:ahLst/>
             <a:cxnLst/>
-            <a:rect r="r" b="b" t="t" l="l"/>
+            <a:rect l="l" t="t" r="r" b="b"/>
             <a:pathLst>
-              <a:path h="6933795" w="9652331">
+              <a:path w="9652331" h="6933795">
                 <a:moveTo>
                   <a:pt x="0" y="0"/>
                 </a:moveTo>
@@ -4763,10 +5323,17 @@
           <a:blipFill>
             <a:blip r:embed="rId2"/>
             <a:stretch>
-              <a:fillRect l="0" t="0" r="0" b="0"/>
+              <a:fillRect/>
             </a:stretch>
           </a:blipFill>
         </p:spPr>
+        <p:txBody>
+          <a:bodyPr/>
+          <a:lstStyle/>
+          <a:p>
+            <a:endParaRPr lang="ko-KR" altLang="en-US"/>
+          </a:p>
+        </p:txBody>
       </p:sp>
       <p:sp>
         <p:nvSpPr>
@@ -4807,15 +5374,6 @@
               </a:rPr>
               <a:t>NavMesh 활용 ③</a:t>
             </a:r>
-            <a:endParaRPr lang="en-US" sz="3199" b="1">
-              <a:solidFill>
-                <a:srgbClr val="475570"/>
-              </a:solidFill>
-              <a:latin typeface="한컴 윤고딕 740"/>
-              <a:ea typeface="한컴 윤고딕 740"/>
-              <a:cs typeface="Source Han Sans KR Bold"/>
-              <a:sym typeface="Source Han Sans KR Bold"/>
-            </a:endParaRPr>
           </a:p>
           <a:p>
             <a:pPr lvl="0">
@@ -4839,15 +5397,6 @@
               </a:rPr>
               <a:t> : 전환</a:t>
             </a:r>
-            <a:endParaRPr lang="en-US" sz="3199">
-              <a:solidFill>
-                <a:srgbClr val="475570"/>
-              </a:solidFill>
-              <a:latin typeface="한컴 윤고딕 740"/>
-              <a:ea typeface="한컴 윤고딕 740"/>
-              <a:cs typeface="Source Han Sans KR"/>
-              <a:sym typeface="Source Han Sans KR"/>
-            </a:endParaRPr>
           </a:p>
         </p:txBody>
       </p:sp>
@@ -4893,15 +5442,6 @@
               </a:rPr>
               <a:t>맵 전환 시</a:t>
             </a:r>
-            <a:endParaRPr lang="en-US" sz="3199">
-              <a:solidFill>
-                <a:srgbClr val="475570"/>
-              </a:solidFill>
-              <a:latin typeface="한컴 윤고딕 740"/>
-              <a:ea typeface="한컴 윤고딕 740"/>
-              <a:cs typeface="Source Han Sans KR"/>
-              <a:sym typeface="Source Han Sans KR"/>
-            </a:endParaRPr>
           </a:p>
         </p:txBody>
       </p:sp>
@@ -4947,15 +5487,6 @@
               </a:rPr>
               <a:t>티유월드</a:t>
             </a:r>
-            <a:endParaRPr lang="en-US" sz="5000" b="1">
-              <a:solidFill>
-                <a:srgbClr val="475570"/>
-              </a:solidFill>
-              <a:latin typeface="한컴 윤고딕 760"/>
-              <a:ea typeface="한컴 윤고딕 760"/>
-              <a:cs typeface="Canva Sans Bold"/>
-              <a:sym typeface="Canva Sans Bold"/>
-            </a:endParaRPr>
           </a:p>
         </p:txBody>
       </p:sp>
@@ -5001,15 +5532,6 @@
               </a:rPr>
               <a:t>PROJECTS</a:t>
             </a:r>
-            <a:endParaRPr lang="en-US" sz="2000">
-              <a:solidFill>
-                <a:srgbClr val="475570"/>
-              </a:solidFill>
-              <a:latin typeface="한컴 윤고딕 760"/>
-              <a:ea typeface="한컴 윤고딕 760"/>
-              <a:cs typeface="Cabin"/>
-              <a:sym typeface="Cabin"/>
-            </a:endParaRPr>
           </a:p>
         </p:txBody>
       </p:sp>
@@ -5022,13 +5544,14 @@
 </file>
 
 <file path=ppt/slides/slide15.xml><?xml version="1.0" encoding="utf-8"?>
-<p:sld xmlns:r="http://schemas.openxmlformats.org/officeDocument/2006/relationships" xmlns:c="http://schemas.openxmlformats.org/drawingml/2006/chart" xmlns:a="http://schemas.openxmlformats.org/drawingml/2006/main" xmlns:dgm="http://schemas.openxmlformats.org/drawingml/2006/diagram" xmlns:dsp="http://schemas.microsoft.com/office/drawing/2008/diagram" xmlns:p="http://schemas.openxmlformats.org/presentationml/2006/main">
+<p:sld xmlns:a="http://schemas.openxmlformats.org/drawingml/2006/main" xmlns:r="http://schemas.openxmlformats.org/officeDocument/2006/relationships" xmlns:p="http://schemas.openxmlformats.org/presentationml/2006/main">
   <p:cSld>
     <p:bg>
-      <p:bgPr shadeToTitle="0">
+      <p:bgPr>
         <a:solidFill>
-          <a:srgbClr val="fcfdf8"/>
+          <a:srgbClr val="FCFDF8"/>
         </a:solidFill>
+        <a:effectLst/>
       </p:bgPr>
     </p:bg>
     <p:spTree>
@@ -5096,15 +5619,6 @@
               </a:rPr>
               <a:t>   하드코딩/스프레드시트 의존으로 빌드 반복·값 불일치 발생.</a:t>
             </a:r>
-            <a:endParaRPr lang="en-US" sz="3200">
-              <a:solidFill>
-                <a:srgbClr val="475570"/>
-              </a:solidFill>
-              <a:latin typeface="한컴 윤고딕 740"/>
-              <a:ea typeface="한컴 윤고딕 740"/>
-              <a:cs typeface="Source Han Sans KR"/>
-              <a:sym typeface="Source Han Sans KR"/>
-            </a:endParaRPr>
           </a:p>
           <a:p>
             <a:pPr lvl="0" algn="l">
@@ -5137,15 +5651,6 @@
               </a:rPr>
               <a:t>  CSV 스키마 표준화 + 로더(검증/인덱싱) + 읽기 전용 API로 데이터/로직 분리</a:t>
             </a:r>
-            <a:endParaRPr lang="en-US" sz="3200">
-              <a:solidFill>
-                <a:srgbClr val="475570"/>
-              </a:solidFill>
-              <a:latin typeface="한컴 윤고딕 740"/>
-              <a:ea typeface="한컴 윤고딕 740"/>
-              <a:cs typeface="Source Han Sans KR"/>
-              <a:sym typeface="Source Han Sans KR"/>
-            </a:endParaRPr>
           </a:p>
           <a:p>
             <a:pPr lvl="0" algn="l">
@@ -5178,15 +5683,6 @@
               </a:rPr>
               <a:t>  밸런스 수정 무빌드 반영, 신규 퀘스트/몬스터 추가 가능, 서버·클라 동일 데이터 유지.</a:t>
             </a:r>
-            <a:endParaRPr lang="en-US" sz="3200">
-              <a:solidFill>
-                <a:srgbClr val="475570"/>
-              </a:solidFill>
-              <a:latin typeface="한컴 윤고딕 740"/>
-              <a:ea typeface="한컴 윤고딕 740"/>
-              <a:cs typeface="Source Han Sans KR"/>
-              <a:sym typeface="Source Han Sans KR"/>
-            </a:endParaRPr>
           </a:p>
         </p:txBody>
       </p:sp>
@@ -5232,15 +5728,6 @@
               </a:rPr>
               <a:t>CSV 기반 콘텐츠 파이프라인</a:t>
             </a:r>
-            <a:endParaRPr lang="en-US" sz="5000" b="1">
-              <a:solidFill>
-                <a:srgbClr val="475570"/>
-              </a:solidFill>
-              <a:latin typeface="한컴 윤고딕 740"/>
-              <a:ea typeface="한컴 윤고딕 740"/>
-              <a:cs typeface="Canva Sans Bold"/>
-              <a:sym typeface="Canva Sans Bold"/>
-            </a:endParaRPr>
           </a:p>
         </p:txBody>
       </p:sp>
@@ -5286,15 +5773,6 @@
               </a:rPr>
               <a:t>티유월드</a:t>
             </a:r>
-            <a:endParaRPr lang="en-US" sz="5000" b="1">
-              <a:solidFill>
-                <a:srgbClr val="475570"/>
-              </a:solidFill>
-              <a:latin typeface="한컴 윤고딕 760"/>
-              <a:ea typeface="한컴 윤고딕 760"/>
-              <a:cs typeface="Canva Sans Bold"/>
-              <a:sym typeface="Canva Sans Bold"/>
-            </a:endParaRPr>
           </a:p>
         </p:txBody>
       </p:sp>
@@ -5340,15 +5818,6 @@
               </a:rPr>
               <a:t>PROJECTS</a:t>
             </a:r>
-            <a:endParaRPr lang="en-US" sz="2000">
-              <a:solidFill>
-                <a:srgbClr val="475570"/>
-              </a:solidFill>
-              <a:latin typeface="한컴 윤고딕 760"/>
-              <a:ea typeface="한컴 윤고딕 760"/>
-              <a:cs typeface="Cabin"/>
-              <a:sym typeface="Cabin"/>
-            </a:endParaRPr>
           </a:p>
         </p:txBody>
       </p:sp>
@@ -5361,13 +5830,14 @@
 </file>
 
 <file path=ppt/slides/slide16.xml><?xml version="1.0" encoding="utf-8"?>
-<p:sld xmlns:r="http://schemas.openxmlformats.org/officeDocument/2006/relationships" xmlns:c="http://schemas.openxmlformats.org/drawingml/2006/chart" xmlns:a="http://schemas.openxmlformats.org/drawingml/2006/main" xmlns:dgm="http://schemas.openxmlformats.org/drawingml/2006/diagram" xmlns:dsp="http://schemas.microsoft.com/office/drawing/2008/diagram" xmlns:p="http://schemas.openxmlformats.org/presentationml/2006/main">
+<p:sld xmlns:a="http://schemas.openxmlformats.org/drawingml/2006/main" xmlns:r="http://schemas.openxmlformats.org/officeDocument/2006/relationships" xmlns:p="http://schemas.openxmlformats.org/presentationml/2006/main">
   <p:cSld>
     <p:bg>
-      <p:bgPr shadeToTitle="0">
+      <p:bgPr>
         <a:solidFill>
-          <a:srgbClr val="fcfdf8"/>
+          <a:srgbClr val="FCFDF8"/>
         </a:solidFill>
+        <a:effectLst/>
       </p:bgPr>
     </p:bg>
     <p:spTree>
@@ -5386,12 +5856,12 @@
       </p:grpSpPr>
       <p:sp>
         <p:nvSpPr>
-          <p:cNvPr name="Freeform 2" id="2"/>
+          <p:cNvPr id="2" name="Freeform 2"/>
           <p:cNvSpPr/>
           <p:nvPr/>
         </p:nvSpPr>
         <p:spPr>
-          <a:xfrm flipH="false" flipV="false" rot="0">
+          <a:xfrm>
             <a:off x="2140831" y="2754311"/>
             <a:ext cx="6142124" cy="2932864"/>
           </a:xfrm>
@@ -5400,9 +5870,9 @@
             <a:gdLst/>
             <a:ahLst/>
             <a:cxnLst/>
-            <a:rect r="r" b="b" t="t" l="l"/>
+            <a:rect l="l" t="t" r="r" b="b"/>
             <a:pathLst>
-              <a:path h="2932864" w="6142124">
+              <a:path w="6142124" h="2932864">
                 <a:moveTo>
                   <a:pt x="0" y="0"/>
                 </a:moveTo>
@@ -5425,19 +5895,26 @@
           <a:blipFill>
             <a:blip r:embed="rId2"/>
             <a:stretch>
-              <a:fillRect l="0" t="0" r="0" b="0"/>
+              <a:fillRect/>
             </a:stretch>
           </a:blipFill>
         </p:spPr>
-      </p:sp>
-      <p:sp>
-        <p:nvSpPr>
-          <p:cNvPr name="Freeform 3" id="3"/>
+        <p:txBody>
+          <a:bodyPr/>
+          <a:lstStyle/>
+          <a:p>
+            <a:endParaRPr lang="ko-KR" altLang="en-US"/>
+          </a:p>
+        </p:txBody>
+      </p:sp>
+      <p:sp>
+        <p:nvSpPr>
+          <p:cNvPr id="3" name="Freeform 3"/>
           <p:cNvSpPr/>
           <p:nvPr/>
         </p:nvSpPr>
         <p:spPr>
-          <a:xfrm flipH="false" flipV="false" rot="0">
+          <a:xfrm>
             <a:off x="8474509" y="2754311"/>
             <a:ext cx="7299024" cy="2928734"/>
           </a:xfrm>
@@ -5446,9 +5923,9 @@
             <a:gdLst/>
             <a:ahLst/>
             <a:cxnLst/>
-            <a:rect r="r" b="b" t="t" l="l"/>
+            <a:rect l="l" t="t" r="r" b="b"/>
             <a:pathLst>
-              <a:path h="2928734" w="7299024">
+              <a:path w="7299024" h="2928734">
                 <a:moveTo>
                   <a:pt x="0" y="0"/>
                 </a:moveTo>
@@ -5471,10 +5948,17 @@
           <a:blipFill>
             <a:blip r:embed="rId3"/>
             <a:stretch>
-              <a:fillRect l="0" t="0" r="0" b="0"/>
+              <a:fillRect/>
             </a:stretch>
           </a:blipFill>
         </p:spPr>
+        <p:txBody>
+          <a:bodyPr/>
+          <a:lstStyle/>
+          <a:p>
+            <a:endParaRPr lang="ko-KR" altLang="en-US"/>
+          </a:p>
+        </p:txBody>
       </p:sp>
       <p:sp>
         <p:nvSpPr>
@@ -5518,15 +6002,6 @@
               </a:rPr>
               <a:t>컨텐츠는 CSV 스키마로 관리 (플레이어/몬스터/아이템/퀘스트)</a:t>
             </a:r>
-            <a:endParaRPr lang="en-US" sz="3199">
-              <a:solidFill>
-                <a:srgbClr val="475570"/>
-              </a:solidFill>
-              <a:latin typeface="한컴 윤고딕 740"/>
-              <a:ea typeface="한컴 윤고딕 740"/>
-              <a:cs typeface="Source Han Sans KR"/>
-              <a:sym typeface="Source Han Sans KR"/>
-            </a:endParaRPr>
           </a:p>
         </p:txBody>
       </p:sp>
@@ -5572,15 +6047,6 @@
               </a:rPr>
               <a:t>ItemTable.csv</a:t>
             </a:r>
-            <a:endParaRPr lang="en-US" sz="1900">
-              <a:solidFill>
-                <a:srgbClr val="475570"/>
-              </a:solidFill>
-              <a:latin typeface="한컴 윤고딕 740"/>
-              <a:ea typeface="한컴 윤고딕 740"/>
-              <a:cs typeface="Source Han Sans KR"/>
-              <a:sym typeface="Source Han Sans KR"/>
-            </a:endParaRPr>
           </a:p>
         </p:txBody>
       </p:sp>
@@ -5626,26 +6092,17 @@
               </a:rPr>
               <a:t>QuestTable.csv</a:t>
             </a:r>
-            <a:endParaRPr lang="en-US" sz="1900">
-              <a:solidFill>
-                <a:srgbClr val="475570"/>
-              </a:solidFill>
-              <a:latin typeface="한컴 윤고딕 740"/>
-              <a:ea typeface="한컴 윤고딕 740"/>
-              <a:cs typeface="Source Han Sans KR"/>
-              <a:sym typeface="Source Han Sans KR"/>
-            </a:endParaRPr>
-          </a:p>
-        </p:txBody>
-      </p:sp>
-      <p:sp>
-        <p:nvSpPr>
-          <p:cNvPr name="Freeform 9" id="9"/>
+          </a:p>
+        </p:txBody>
+      </p:sp>
+      <p:sp>
+        <p:nvSpPr>
+          <p:cNvPr id="9" name="Freeform 9"/>
           <p:cNvSpPr/>
           <p:nvPr/>
         </p:nvSpPr>
         <p:spPr>
-          <a:xfrm flipH="false" flipV="false" rot="0">
+          <a:xfrm>
             <a:off x="4986268" y="6358684"/>
             <a:ext cx="8315464" cy="2964425"/>
           </a:xfrm>
@@ -5654,9 +6111,9 @@
             <a:gdLst/>
             <a:ahLst/>
             <a:cxnLst/>
-            <a:rect r="r" b="b" t="t" l="l"/>
+            <a:rect l="l" t="t" r="r" b="b"/>
             <a:pathLst>
-              <a:path h="2964425" w="8315464">
+              <a:path w="8315464" h="2964425">
                 <a:moveTo>
                   <a:pt x="0" y="0"/>
                 </a:moveTo>
@@ -5679,10 +6136,17 @@
           <a:blipFill>
             <a:blip r:embed="rId4"/>
             <a:stretch>
-              <a:fillRect l="0" t="0" r="0" b="0"/>
+              <a:fillRect/>
             </a:stretch>
           </a:blipFill>
         </p:spPr>
+        <p:txBody>
+          <a:bodyPr/>
+          <a:lstStyle/>
+          <a:p>
+            <a:endParaRPr lang="ko-KR" altLang="en-US"/>
+          </a:p>
+        </p:txBody>
       </p:sp>
       <p:sp>
         <p:nvSpPr>
@@ -5726,15 +6190,6 @@
               </a:rPr>
               <a:t>부팅 시 테이블 일괄 로드</a:t>
             </a:r>
-            <a:endParaRPr lang="en-US" sz="3199">
-              <a:solidFill>
-                <a:srgbClr val="475570"/>
-              </a:solidFill>
-              <a:latin typeface="한컴 윤고딕 740"/>
-              <a:ea typeface="한컴 윤고딕 740"/>
-              <a:cs typeface="Source Han Sans KR"/>
-              <a:sym typeface="Source Han Sans KR"/>
-            </a:endParaRPr>
           </a:p>
         </p:txBody>
       </p:sp>
@@ -5780,15 +6235,6 @@
               </a:rPr>
               <a:t>티유월드</a:t>
             </a:r>
-            <a:endParaRPr lang="en-US" sz="5000" b="1">
-              <a:solidFill>
-                <a:srgbClr val="475570"/>
-              </a:solidFill>
-              <a:latin typeface="한컴 윤고딕 760"/>
-              <a:ea typeface="한컴 윤고딕 760"/>
-              <a:cs typeface="Canva Sans Bold"/>
-              <a:sym typeface="Canva Sans Bold"/>
-            </a:endParaRPr>
           </a:p>
         </p:txBody>
       </p:sp>
@@ -5834,15 +6280,6 @@
               </a:rPr>
               <a:t>PROJECTS</a:t>
             </a:r>
-            <a:endParaRPr lang="en-US" sz="2000">
-              <a:solidFill>
-                <a:srgbClr val="475570"/>
-              </a:solidFill>
-              <a:latin typeface="한컴 윤고딕 760"/>
-              <a:ea typeface="한컴 윤고딕 760"/>
-              <a:cs typeface="Cabin"/>
-              <a:sym typeface="Cabin"/>
-            </a:endParaRPr>
           </a:p>
         </p:txBody>
       </p:sp>
@@ -5855,13 +6292,14 @@
 </file>
 
 <file path=ppt/slides/slide17.xml><?xml version="1.0" encoding="utf-8"?>
-<p:sld xmlns:r="http://schemas.openxmlformats.org/officeDocument/2006/relationships" xmlns:c="http://schemas.openxmlformats.org/drawingml/2006/chart" xmlns:a="http://schemas.openxmlformats.org/drawingml/2006/main" xmlns:dgm="http://schemas.openxmlformats.org/drawingml/2006/diagram" xmlns:dsp="http://schemas.microsoft.com/office/drawing/2008/diagram" xmlns:p="http://schemas.openxmlformats.org/presentationml/2006/main">
+<p:sld xmlns:a="http://schemas.openxmlformats.org/drawingml/2006/main" xmlns:r="http://schemas.openxmlformats.org/officeDocument/2006/relationships" xmlns:p="http://schemas.openxmlformats.org/presentationml/2006/main">
   <p:cSld>
     <p:bg>
-      <p:bgPr shadeToTitle="0">
+      <p:bgPr>
         <a:solidFill>
-          <a:srgbClr val="fcfdf8"/>
+          <a:srgbClr val="FCFDF8"/>
         </a:solidFill>
+        <a:effectLst/>
       </p:bgPr>
     </p:bg>
     <p:spTree>
@@ -5880,12 +6318,12 @@
       </p:grpSpPr>
       <p:sp>
         <p:nvSpPr>
-          <p:cNvPr name="Freeform 2" id="2"/>
+          <p:cNvPr id="2" name="Freeform 2"/>
           <p:cNvSpPr/>
           <p:nvPr/>
         </p:nvSpPr>
         <p:spPr>
-          <a:xfrm flipH="false" flipV="false" rot="0">
+          <a:xfrm>
             <a:off x="654760" y="4961357"/>
             <a:ext cx="7384527" cy="2283781"/>
           </a:xfrm>
@@ -5894,9 +6332,9 @@
             <a:gdLst/>
             <a:ahLst/>
             <a:cxnLst/>
-            <a:rect r="r" b="b" t="t" l="l"/>
+            <a:rect l="l" t="t" r="r" b="b"/>
             <a:pathLst>
-              <a:path h="2283781" w="7384527">
+              <a:path w="7384527" h="2283781">
                 <a:moveTo>
                   <a:pt x="0" y="0"/>
                 </a:moveTo>
@@ -5919,10 +6357,17 @@
           <a:blipFill>
             <a:blip r:embed="rId2"/>
             <a:stretch>
-              <a:fillRect l="0" t="0" r="-9865" b="0"/>
+              <a:fillRect r="-9865"/>
             </a:stretch>
           </a:blipFill>
         </p:spPr>
+        <p:txBody>
+          <a:bodyPr/>
+          <a:lstStyle/>
+          <a:p>
+            <a:endParaRPr lang="ko-KR" altLang="en-US"/>
+          </a:p>
+        </p:txBody>
       </p:sp>
       <p:sp>
         <p:nvSpPr>
@@ -5938,6 +6383,8 @@
           <a:custGeom>
             <a:avLst/>
             <a:gdLst/>
+            <a:ahLst/>
+            <a:cxnLst/>
             <a:rect l="l" t="t" r="r" b="b"/>
             <a:pathLst>
               <a:path w="7720736" h="2292515">
@@ -5967,15 +6414,22 @@
             </a:stretch>
           </a:blipFill>
         </p:spPr>
-      </p:sp>
-      <p:sp>
-        <p:nvSpPr>
-          <p:cNvPr name="Freeform 4" id="4"/>
+        <p:txBody>
+          <a:bodyPr/>
+          <a:lstStyle/>
+          <a:p>
+            <a:endParaRPr lang="ko-KR" altLang="en-US"/>
+          </a:p>
+        </p:txBody>
+      </p:sp>
+      <p:sp>
+        <p:nvSpPr>
+          <p:cNvPr id="4" name="Freeform 4"/>
           <p:cNvSpPr/>
           <p:nvPr/>
         </p:nvSpPr>
         <p:spPr>
-          <a:xfrm flipH="false" flipV="false" rot="0">
+          <a:xfrm>
             <a:off x="8008653" y="2401155"/>
             <a:ext cx="9969307" cy="3356452"/>
           </a:xfrm>
@@ -5984,9 +6438,9 @@
             <a:gdLst/>
             <a:ahLst/>
             <a:cxnLst/>
-            <a:rect r="r" b="b" t="t" l="l"/>
+            <a:rect l="l" t="t" r="r" b="b"/>
             <a:pathLst>
-              <a:path h="3356452" w="9969307">
+              <a:path w="9969307" h="3356452">
                 <a:moveTo>
                   <a:pt x="0" y="0"/>
                 </a:moveTo>
@@ -6009,19 +6463,26 @@
           <a:blipFill>
             <a:blip r:embed="rId4"/>
             <a:stretch>
-              <a:fillRect l="0" t="0" r="-2023" b="0"/>
+              <a:fillRect r="-2023"/>
             </a:stretch>
           </a:blipFill>
         </p:spPr>
-      </p:sp>
-      <p:sp>
-        <p:nvSpPr>
-          <p:cNvPr name="Freeform 7" id="7"/>
+        <p:txBody>
+          <a:bodyPr/>
+          <a:lstStyle/>
+          <a:p>
+            <a:endParaRPr lang="ko-KR" altLang="en-US"/>
+          </a:p>
+        </p:txBody>
+      </p:sp>
+      <p:sp>
+        <p:nvSpPr>
+          <p:cNvPr id="7" name="Freeform 7"/>
           <p:cNvSpPr/>
           <p:nvPr/>
         </p:nvSpPr>
         <p:spPr>
-          <a:xfrm flipH="false" flipV="false" rot="0">
+          <a:xfrm>
             <a:off x="8039287" y="5757608"/>
             <a:ext cx="8113011" cy="2128237"/>
           </a:xfrm>
@@ -6030,9 +6491,9 @@
             <a:gdLst/>
             <a:ahLst/>
             <a:cxnLst/>
-            <a:rect r="r" b="b" t="t" l="l"/>
+            <a:rect l="l" t="t" r="r" b="b"/>
             <a:pathLst>
-              <a:path h="2128237" w="8113011">
+              <a:path w="8113011" h="2128237">
                 <a:moveTo>
                   <a:pt x="0" y="0"/>
                 </a:moveTo>
@@ -6055,10 +6516,17 @@
           <a:blipFill>
             <a:blip r:embed="rId5"/>
             <a:stretch>
-              <a:fillRect l="0" t="0" r="0" b="0"/>
+              <a:fillRect/>
             </a:stretch>
           </a:blipFill>
         </p:spPr>
+        <p:txBody>
+          <a:bodyPr/>
+          <a:lstStyle/>
+          <a:p>
+            <a:endParaRPr lang="ko-KR" altLang="en-US"/>
+          </a:p>
+        </p:txBody>
       </p:sp>
       <p:sp>
         <p:nvSpPr>
@@ -6102,15 +6570,6 @@
               </a:rPr>
               <a:t>서버에서 유효성 검사 &amp; 인덱싱을 수행</a:t>
             </a:r>
-            <a:endParaRPr lang="en-US" sz="3199">
-              <a:solidFill>
-                <a:srgbClr val="475570"/>
-              </a:solidFill>
-              <a:latin typeface="한컴 윤고딕 740"/>
-              <a:ea typeface="한컴 윤고딕 740"/>
-              <a:cs typeface="Source Han Sans KR"/>
-              <a:sym typeface="Source Han Sans KR"/>
-            </a:endParaRPr>
           </a:p>
         </p:txBody>
       </p:sp>
@@ -6156,15 +6615,6 @@
               </a:rPr>
               <a:t>티유월드</a:t>
             </a:r>
-            <a:endParaRPr lang="en-US" sz="5000" b="1">
-              <a:solidFill>
-                <a:srgbClr val="475570"/>
-              </a:solidFill>
-              <a:latin typeface="한컴 윤고딕 760"/>
-              <a:ea typeface="한컴 윤고딕 760"/>
-              <a:cs typeface="Canva Sans Bold"/>
-              <a:sym typeface="Canva Sans Bold"/>
-            </a:endParaRPr>
           </a:p>
         </p:txBody>
       </p:sp>
@@ -6210,15 +6660,6 @@
               </a:rPr>
               <a:t>PROJECTS</a:t>
             </a:r>
-            <a:endParaRPr lang="en-US" sz="2000">
-              <a:solidFill>
-                <a:srgbClr val="475570"/>
-              </a:solidFill>
-              <a:latin typeface="한컴 윤고딕 760"/>
-              <a:ea typeface="한컴 윤고딕 760"/>
-              <a:cs typeface="Cabin"/>
-              <a:sym typeface="Cabin"/>
-            </a:endParaRPr>
           </a:p>
         </p:txBody>
       </p:sp>
@@ -6231,13 +6672,14 @@
 </file>
 
 <file path=ppt/slides/slide18.xml><?xml version="1.0" encoding="utf-8"?>
-<p:sld xmlns:r="http://schemas.openxmlformats.org/officeDocument/2006/relationships" xmlns:c="http://schemas.openxmlformats.org/drawingml/2006/chart" xmlns:a="http://schemas.openxmlformats.org/drawingml/2006/main" xmlns:dgm="http://schemas.openxmlformats.org/drawingml/2006/diagram" xmlns:dsp="http://schemas.microsoft.com/office/drawing/2008/diagram" xmlns:p="http://schemas.openxmlformats.org/presentationml/2006/main">
+<p:sld xmlns:a="http://schemas.openxmlformats.org/drawingml/2006/main" xmlns:r="http://schemas.openxmlformats.org/officeDocument/2006/relationships" xmlns:p="http://schemas.openxmlformats.org/presentationml/2006/main">
   <p:cSld>
     <p:bg>
-      <p:bgPr shadeToTitle="0">
+      <p:bgPr>
         <a:solidFill>
-          <a:srgbClr val="fcfdf8"/>
+          <a:srgbClr val="FCFDF8"/>
         </a:solidFill>
+        <a:effectLst/>
       </p:bgPr>
     </p:bg>
     <p:spTree>
@@ -6282,7 +6724,7 @@
               <a:defRPr/>
             </a:pPr>
             <a:r>
-              <a:rPr lang="en-US" sz="3199" b="1">
+              <a:rPr lang="en-US" sz="3199" b="1" dirty="0" err="1">
                 <a:solidFill>
                   <a:srgbClr val="475570"/>
                 </a:solidFill>
@@ -6291,21 +6733,353 @@
                 <a:cs typeface="Source Han Sans KR Bold"/>
                 <a:sym typeface="Source Han Sans KR Bold"/>
               </a:rPr>
-              <a:t>문제   </a:t>
-            </a:r>
-            <a:r>
-              <a:rPr lang="en-US" sz="3199">
-                <a:solidFill>
-                  <a:srgbClr val="475570"/>
-                </a:solidFill>
-                <a:latin typeface="한컴 윤고딕 740"/>
-                <a:ea typeface="한컴 윤고딕 740"/>
-                <a:cs typeface="Source Han Sans KR"/>
-                <a:sym typeface="Source Han Sans KR"/>
-              </a:rPr>
-              <a:t>동시 저장/요청에서 락 경합·부분 업데이트로 데이터 꼬임 가능.</a:t>
-            </a:r>
-            <a:endParaRPr lang="en-US" sz="3199">
+              <a:t>문제</a:t>
+            </a:r>
+            <a:r>
+              <a:rPr lang="en-US" sz="3199" b="1" dirty="0">
+                <a:solidFill>
+                  <a:srgbClr val="475570"/>
+                </a:solidFill>
+                <a:latin typeface="한컴 윤고딕 740"/>
+                <a:ea typeface="한컴 윤고딕 740"/>
+                <a:cs typeface="Source Han Sans KR Bold"/>
+                <a:sym typeface="Source Han Sans KR Bold"/>
+              </a:rPr>
+              <a:t>   </a:t>
+            </a:r>
+            <a:r>
+              <a:rPr lang="en-US" sz="3199" dirty="0" err="1">
+                <a:solidFill>
+                  <a:srgbClr val="475570"/>
+                </a:solidFill>
+                <a:latin typeface="한컴 윤고딕 740"/>
+                <a:ea typeface="한컴 윤고딕 740"/>
+                <a:cs typeface="Source Han Sans KR"/>
+                <a:sym typeface="Source Han Sans KR"/>
+              </a:rPr>
+              <a:t>동시</a:t>
+            </a:r>
+            <a:r>
+              <a:rPr lang="en-US" sz="3199" dirty="0">
+                <a:solidFill>
+                  <a:srgbClr val="475570"/>
+                </a:solidFill>
+                <a:latin typeface="한컴 윤고딕 740"/>
+                <a:ea typeface="한컴 윤고딕 740"/>
+                <a:cs typeface="Source Han Sans KR"/>
+                <a:sym typeface="Source Han Sans KR"/>
+              </a:rPr>
+              <a:t> </a:t>
+            </a:r>
+            <a:r>
+              <a:rPr lang="en-US" sz="3199" dirty="0" err="1">
+                <a:solidFill>
+                  <a:srgbClr val="475570"/>
+                </a:solidFill>
+                <a:latin typeface="한컴 윤고딕 740"/>
+                <a:ea typeface="한컴 윤고딕 740"/>
+                <a:cs typeface="Source Han Sans KR"/>
+                <a:sym typeface="Source Han Sans KR"/>
+              </a:rPr>
+              <a:t>저장</a:t>
+            </a:r>
+            <a:r>
+              <a:rPr lang="en-US" sz="3199" dirty="0">
+                <a:solidFill>
+                  <a:srgbClr val="475570"/>
+                </a:solidFill>
+                <a:latin typeface="한컴 윤고딕 740"/>
+                <a:ea typeface="한컴 윤고딕 740"/>
+                <a:cs typeface="Source Han Sans KR"/>
+                <a:sym typeface="Source Han Sans KR"/>
+              </a:rPr>
+              <a:t>/</a:t>
+            </a:r>
+            <a:r>
+              <a:rPr lang="en-US" sz="3199" dirty="0" err="1">
+                <a:solidFill>
+                  <a:srgbClr val="475570"/>
+                </a:solidFill>
+                <a:latin typeface="한컴 윤고딕 740"/>
+                <a:ea typeface="한컴 윤고딕 740"/>
+                <a:cs typeface="Source Han Sans KR"/>
+                <a:sym typeface="Source Han Sans KR"/>
+              </a:rPr>
+              <a:t>요청에서</a:t>
+            </a:r>
+            <a:r>
+              <a:rPr lang="en-US" sz="3199" dirty="0">
+                <a:solidFill>
+                  <a:srgbClr val="475570"/>
+                </a:solidFill>
+                <a:latin typeface="한컴 윤고딕 740"/>
+                <a:ea typeface="한컴 윤고딕 740"/>
+                <a:cs typeface="Source Han Sans KR"/>
+                <a:sym typeface="Source Han Sans KR"/>
+              </a:rPr>
+              <a:t> 락 </a:t>
+            </a:r>
+            <a:r>
+              <a:rPr lang="en-US" sz="3199" dirty="0" err="1">
+                <a:solidFill>
+                  <a:srgbClr val="475570"/>
+                </a:solidFill>
+                <a:latin typeface="한컴 윤고딕 740"/>
+                <a:ea typeface="한컴 윤고딕 740"/>
+                <a:cs typeface="Source Han Sans KR"/>
+                <a:sym typeface="Source Han Sans KR"/>
+              </a:rPr>
+              <a:t>경합·부분</a:t>
+            </a:r>
+            <a:r>
+              <a:rPr lang="en-US" sz="3199" dirty="0">
+                <a:solidFill>
+                  <a:srgbClr val="475570"/>
+                </a:solidFill>
+                <a:latin typeface="한컴 윤고딕 740"/>
+                <a:ea typeface="한컴 윤고딕 740"/>
+                <a:cs typeface="Source Han Sans KR"/>
+                <a:sym typeface="Source Han Sans KR"/>
+              </a:rPr>
+              <a:t> </a:t>
+            </a:r>
+            <a:r>
+              <a:rPr lang="en-US" sz="3199" dirty="0" err="1">
+                <a:solidFill>
+                  <a:srgbClr val="475570"/>
+                </a:solidFill>
+                <a:latin typeface="한컴 윤고딕 740"/>
+                <a:ea typeface="한컴 윤고딕 740"/>
+                <a:cs typeface="Source Han Sans KR"/>
+                <a:sym typeface="Source Han Sans KR"/>
+              </a:rPr>
+              <a:t>업데이트로</a:t>
+            </a:r>
+            <a:r>
+              <a:rPr lang="en-US" sz="3199" dirty="0">
+                <a:solidFill>
+                  <a:srgbClr val="475570"/>
+                </a:solidFill>
+                <a:latin typeface="한컴 윤고딕 740"/>
+                <a:ea typeface="한컴 윤고딕 740"/>
+                <a:cs typeface="Source Han Sans KR"/>
+                <a:sym typeface="Source Han Sans KR"/>
+              </a:rPr>
+              <a:t> </a:t>
+            </a:r>
+            <a:r>
+              <a:rPr lang="en-US" sz="3199" dirty="0" err="1">
+                <a:solidFill>
+                  <a:srgbClr val="475570"/>
+                </a:solidFill>
+                <a:latin typeface="한컴 윤고딕 740"/>
+                <a:ea typeface="한컴 윤고딕 740"/>
+                <a:cs typeface="Source Han Sans KR"/>
+                <a:sym typeface="Source Han Sans KR"/>
+              </a:rPr>
+              <a:t>데이터</a:t>
+            </a:r>
+            <a:r>
+              <a:rPr lang="en-US" sz="3199" dirty="0">
+                <a:solidFill>
+                  <a:srgbClr val="475570"/>
+                </a:solidFill>
+                <a:latin typeface="한컴 윤고딕 740"/>
+                <a:ea typeface="한컴 윤고딕 740"/>
+                <a:cs typeface="Source Han Sans KR"/>
+                <a:sym typeface="Source Han Sans KR"/>
+              </a:rPr>
+              <a:t> </a:t>
+            </a:r>
+            <a:r>
+              <a:rPr lang="en-US" sz="3199" dirty="0" err="1">
+                <a:solidFill>
+                  <a:srgbClr val="475570"/>
+                </a:solidFill>
+                <a:latin typeface="한컴 윤고딕 740"/>
+                <a:ea typeface="한컴 윤고딕 740"/>
+                <a:cs typeface="Source Han Sans KR"/>
+                <a:sym typeface="Source Han Sans KR"/>
+              </a:rPr>
+              <a:t>꼬임</a:t>
+            </a:r>
+            <a:r>
+              <a:rPr lang="en-US" sz="3199" dirty="0">
+                <a:solidFill>
+                  <a:srgbClr val="475570"/>
+                </a:solidFill>
+                <a:latin typeface="한컴 윤고딕 740"/>
+                <a:ea typeface="한컴 윤고딕 740"/>
+                <a:cs typeface="Source Han Sans KR"/>
+                <a:sym typeface="Source Han Sans KR"/>
+              </a:rPr>
+              <a:t> </a:t>
+            </a:r>
+            <a:r>
+              <a:rPr lang="en-US" sz="3199" dirty="0" err="1">
+                <a:solidFill>
+                  <a:srgbClr val="475570"/>
+                </a:solidFill>
+                <a:latin typeface="한컴 윤고딕 740"/>
+                <a:ea typeface="한컴 윤고딕 740"/>
+                <a:cs typeface="Source Han Sans KR"/>
+                <a:sym typeface="Source Han Sans KR"/>
+              </a:rPr>
+              <a:t>가능</a:t>
+            </a:r>
+            <a:r>
+              <a:rPr lang="en-US" sz="3199" dirty="0">
+                <a:solidFill>
+                  <a:srgbClr val="475570"/>
+                </a:solidFill>
+                <a:latin typeface="한컴 윤고딕 740"/>
+                <a:ea typeface="한컴 윤고딕 740"/>
+                <a:cs typeface="Source Han Sans KR"/>
+                <a:sym typeface="Source Han Sans KR"/>
+              </a:rPr>
+              <a:t>.</a:t>
+            </a:r>
+          </a:p>
+          <a:p>
+            <a:pPr lvl="0" algn="just">
+              <a:lnSpc>
+                <a:spcPts val="7999"/>
+              </a:lnSpc>
+              <a:defRPr/>
+            </a:pPr>
+            <a:r>
+              <a:rPr lang="en-US" sz="3199" b="1" dirty="0" err="1">
+                <a:solidFill>
+                  <a:srgbClr val="475570"/>
+                </a:solidFill>
+                <a:latin typeface="한컴 윤고딕 740"/>
+                <a:ea typeface="한컴 윤고딕 740"/>
+                <a:cs typeface="Source Han Sans KR Bold"/>
+                <a:sym typeface="Source Han Sans KR Bold"/>
+              </a:rPr>
+              <a:t>해결</a:t>
+            </a:r>
+            <a:r>
+              <a:rPr lang="en-US" sz="3199" b="1" dirty="0">
+                <a:solidFill>
+                  <a:srgbClr val="475570"/>
+                </a:solidFill>
+                <a:latin typeface="한컴 윤고딕 740"/>
+                <a:ea typeface="한컴 윤고딕 740"/>
+                <a:cs typeface="Source Han Sans KR Bold"/>
+                <a:sym typeface="Source Han Sans KR Bold"/>
+              </a:rPr>
+              <a:t>   </a:t>
+            </a:r>
+            <a:r>
+              <a:rPr lang="en-US" sz="3199" dirty="0" err="1">
+                <a:solidFill>
+                  <a:srgbClr val="475570"/>
+                </a:solidFill>
+                <a:latin typeface="한컴 윤고딕 740"/>
+                <a:ea typeface="한컴 윤고딕 740"/>
+                <a:cs typeface="Source Han Sans KR"/>
+                <a:sym typeface="Source Han Sans KR"/>
+              </a:rPr>
+              <a:t>커넥션</a:t>
+            </a:r>
+            <a:r>
+              <a:rPr lang="en-US" sz="3199" dirty="0">
+                <a:solidFill>
+                  <a:srgbClr val="475570"/>
+                </a:solidFill>
+                <a:latin typeface="한컴 윤고딕 740"/>
+                <a:ea typeface="한컴 윤고딕 740"/>
+                <a:cs typeface="Source Han Sans KR"/>
+                <a:sym typeface="Source Han Sans KR"/>
+              </a:rPr>
+              <a:t> 풀 + RAII </a:t>
+            </a:r>
+            <a:r>
+              <a:rPr lang="en-US" sz="3199" dirty="0" err="1">
+                <a:solidFill>
+                  <a:srgbClr val="475570"/>
+                </a:solidFill>
+                <a:latin typeface="한컴 윤고딕 740"/>
+                <a:ea typeface="한컴 윤고딕 740"/>
+                <a:cs typeface="Source Han Sans KR"/>
+                <a:sym typeface="Source Han Sans KR"/>
+              </a:rPr>
+              <a:t>세션으로</a:t>
+            </a:r>
+            <a:r>
+              <a:rPr lang="en-US" sz="3199" dirty="0">
+                <a:solidFill>
+                  <a:srgbClr val="475570"/>
+                </a:solidFill>
+                <a:latin typeface="한컴 윤고딕 740"/>
+                <a:ea typeface="한컴 윤고딕 740"/>
+                <a:cs typeface="Source Han Sans KR"/>
+                <a:sym typeface="Source Han Sans KR"/>
+              </a:rPr>
+              <a:t> </a:t>
+            </a:r>
+            <a:r>
+              <a:rPr lang="en-US" sz="3199" dirty="0" err="1">
+                <a:solidFill>
+                  <a:srgbClr val="475570"/>
+                </a:solidFill>
+                <a:latin typeface="한컴 윤고딕 740"/>
+                <a:ea typeface="한컴 윤고딕 740"/>
+                <a:cs typeface="Source Han Sans KR"/>
+                <a:sym typeface="Source Han Sans KR"/>
+              </a:rPr>
+              <a:t>연결</a:t>
+            </a:r>
+            <a:r>
+              <a:rPr lang="en-US" sz="3199" dirty="0">
+                <a:solidFill>
+                  <a:srgbClr val="475570"/>
+                </a:solidFill>
+                <a:latin typeface="한컴 윤고딕 740"/>
+                <a:ea typeface="한컴 윤고딕 740"/>
+                <a:cs typeface="Source Han Sans KR"/>
+                <a:sym typeface="Source Han Sans KR"/>
+              </a:rPr>
+              <a:t> </a:t>
+            </a:r>
+            <a:r>
+              <a:rPr lang="en-US" sz="3199" dirty="0" err="1">
+                <a:solidFill>
+                  <a:srgbClr val="475570"/>
+                </a:solidFill>
+                <a:latin typeface="한컴 윤고딕 740"/>
+                <a:ea typeface="한컴 윤고딕 740"/>
+                <a:cs typeface="Source Han Sans KR"/>
+                <a:sym typeface="Source Han Sans KR"/>
+              </a:rPr>
+              <a:t>수명</a:t>
+            </a:r>
+            <a:r>
+              <a:rPr lang="en-US" sz="3199" dirty="0">
+                <a:solidFill>
+                  <a:srgbClr val="475570"/>
+                </a:solidFill>
+                <a:latin typeface="한컴 윤고딕 740"/>
+                <a:ea typeface="한컴 윤고딕 740"/>
+                <a:cs typeface="Source Han Sans KR"/>
+                <a:sym typeface="Source Han Sans KR"/>
+              </a:rPr>
+              <a:t> </a:t>
+            </a:r>
+            <a:r>
+              <a:rPr lang="en-US" sz="3199" dirty="0" err="1">
+                <a:solidFill>
+                  <a:srgbClr val="475570"/>
+                </a:solidFill>
+                <a:latin typeface="한컴 윤고딕 740"/>
+                <a:ea typeface="한컴 윤고딕 740"/>
+                <a:cs typeface="Source Han Sans KR"/>
+                <a:sym typeface="Source Han Sans KR"/>
+              </a:rPr>
+              <a:t>통제</a:t>
+            </a:r>
+            <a:endParaRPr lang="en-US" sz="3199" dirty="0">
               <a:solidFill>
                 <a:srgbClr val="475570"/>
               </a:solidFill>
@@ -6323,7 +7097,7 @@
               <a:defRPr/>
             </a:pPr>
             <a:r>
-              <a:rPr lang="en-US" sz="3199" b="1">
+              <a:rPr lang="en-US" sz="3199" b="1" dirty="0" err="1">
                 <a:solidFill>
                   <a:srgbClr val="475570"/>
                 </a:solidFill>
@@ -6332,39 +7106,10 @@
                 <a:cs typeface="Source Han Sans KR Bold"/>
                 <a:sym typeface="Source Han Sans KR Bold"/>
               </a:rPr>
-              <a:t>해결   </a:t>
-            </a:r>
-            <a:r>
-              <a:rPr lang="en-US" sz="3199">
-                <a:solidFill>
-                  <a:srgbClr val="475570"/>
-                </a:solidFill>
-                <a:latin typeface="한컴 윤고딕 740"/>
-                <a:ea typeface="한컴 윤고딕 740"/>
-                <a:cs typeface="Source Han Sans KR"/>
-                <a:sym typeface="Source Han Sans KR"/>
-              </a:rPr>
-              <a:t>커넥션 풀 + RAII 세션으로 연결 수명 통제</a:t>
-            </a:r>
-            <a:endParaRPr lang="en-US" sz="3199">
-              <a:solidFill>
-                <a:srgbClr val="475570"/>
-              </a:solidFill>
-              <a:latin typeface="한컴 윤고딕 740"/>
-              <a:ea typeface="한컴 윤고딕 740"/>
-              <a:cs typeface="Source Han Sans KR"/>
-              <a:sym typeface="Source Han Sans KR"/>
-            </a:endParaRPr>
-          </a:p>
-          <a:p>
-            <a:pPr lvl="0" algn="just">
-              <a:lnSpc>
-                <a:spcPts val="7999"/>
-              </a:lnSpc>
-              <a:defRPr/>
-            </a:pPr>
-            <a:r>
-              <a:rPr lang="en-US" sz="3199" b="1">
+              <a:t>결과</a:t>
+            </a:r>
+            <a:r>
+              <a:rPr lang="en-US" sz="3199" b="1" dirty="0">
                 <a:solidFill>
                   <a:srgbClr val="475570"/>
                 </a:solidFill>
@@ -6373,29 +7118,104 @@
                 <a:cs typeface="Source Han Sans KR Bold"/>
                 <a:sym typeface="Source Han Sans KR Bold"/>
               </a:rPr>
-              <a:t>결과   </a:t>
-            </a:r>
-            <a:r>
-              <a:rPr lang="en-US" sz="3199">
-                <a:solidFill>
-                  <a:srgbClr val="475570"/>
-                </a:solidFill>
-                <a:latin typeface="한컴 윤고딕 740"/>
-                <a:ea typeface="한컴 윤고딕 740"/>
-                <a:cs typeface="Source Han Sans KR"/>
-                <a:sym typeface="Source Han Sans KR"/>
-              </a:rPr>
-              <a:t>동시 처리량↑, 리소스 누수↓</a:t>
-            </a:r>
-            <a:endParaRPr lang="en-US" sz="3199">
-              <a:solidFill>
-                <a:srgbClr val="475570"/>
-              </a:solidFill>
-              <a:latin typeface="한컴 윤고딕 740"/>
-              <a:ea typeface="한컴 윤고딕 740"/>
-              <a:cs typeface="Source Han Sans KR"/>
-              <a:sym typeface="Source Han Sans KR"/>
-            </a:endParaRPr>
+              <a:t>   </a:t>
+            </a:r>
+            <a:r>
+              <a:rPr lang="en-US" sz="3199" dirty="0" err="1">
+                <a:solidFill>
+                  <a:srgbClr val="475570"/>
+                </a:solidFill>
+                <a:latin typeface="한컴 윤고딕 740"/>
+                <a:ea typeface="한컴 윤고딕 740"/>
+                <a:cs typeface="Source Han Sans KR"/>
+                <a:sym typeface="Source Han Sans KR"/>
+              </a:rPr>
+              <a:t>동시</a:t>
+            </a:r>
+            <a:r>
+              <a:rPr lang="en-US" sz="3199" dirty="0">
+                <a:solidFill>
+                  <a:srgbClr val="475570"/>
+                </a:solidFill>
+                <a:latin typeface="한컴 윤고딕 740"/>
+                <a:ea typeface="한컴 윤고딕 740"/>
+                <a:cs typeface="Source Han Sans KR"/>
+                <a:sym typeface="Source Han Sans KR"/>
+              </a:rPr>
+              <a:t> </a:t>
+            </a:r>
+            <a:r>
+              <a:rPr lang="en-US" sz="3199" dirty="0" err="1">
+                <a:solidFill>
+                  <a:srgbClr val="475570"/>
+                </a:solidFill>
+                <a:latin typeface="한컴 윤고딕 740"/>
+                <a:ea typeface="한컴 윤고딕 740"/>
+                <a:cs typeface="Source Han Sans KR"/>
+                <a:sym typeface="Source Han Sans KR"/>
+              </a:rPr>
+              <a:t>처리량</a:t>
+            </a:r>
+            <a:r>
+              <a:rPr lang="en-US" sz="3199" dirty="0">
+                <a:solidFill>
+                  <a:srgbClr val="475570"/>
+                </a:solidFill>
+                <a:latin typeface="한컴 윤고딕 740"/>
+                <a:ea typeface="한컴 윤고딕 740"/>
+                <a:cs typeface="Source Han Sans KR"/>
+                <a:sym typeface="Source Han Sans KR"/>
+              </a:rPr>
+              <a:t>↑, </a:t>
+            </a:r>
+            <a:r>
+              <a:rPr lang="en-US" sz="3199" dirty="0" err="1">
+                <a:solidFill>
+                  <a:srgbClr val="475570"/>
+                </a:solidFill>
+                <a:latin typeface="한컴 윤고딕 740"/>
+                <a:ea typeface="한컴 윤고딕 740"/>
+                <a:cs typeface="Source Han Sans KR"/>
+                <a:sym typeface="Source Han Sans KR"/>
+              </a:rPr>
+              <a:t>리소스</a:t>
+            </a:r>
+            <a:r>
+              <a:rPr lang="en-US" sz="3199" dirty="0">
+                <a:solidFill>
+                  <a:srgbClr val="475570"/>
+                </a:solidFill>
+                <a:latin typeface="한컴 윤고딕 740"/>
+                <a:ea typeface="한컴 윤고딕 740"/>
+                <a:cs typeface="Source Han Sans KR"/>
+                <a:sym typeface="Source Han Sans KR"/>
+              </a:rPr>
+              <a:t> </a:t>
+            </a:r>
+            <a:r>
+              <a:rPr lang="en-US" sz="3199" dirty="0" err="1">
+                <a:solidFill>
+                  <a:srgbClr val="475570"/>
+                </a:solidFill>
+                <a:latin typeface="한컴 윤고딕 740"/>
+                <a:ea typeface="한컴 윤고딕 740"/>
+                <a:cs typeface="Source Han Sans KR"/>
+                <a:sym typeface="Source Han Sans KR"/>
+              </a:rPr>
+              <a:t>누수</a:t>
+            </a:r>
+            <a:r>
+              <a:rPr lang="en-US" sz="3199" dirty="0">
+                <a:solidFill>
+                  <a:srgbClr val="475570"/>
+                </a:solidFill>
+                <a:latin typeface="한컴 윤고딕 740"/>
+                <a:ea typeface="한컴 윤고딕 740"/>
+                <a:cs typeface="Source Han Sans KR"/>
+                <a:sym typeface="Source Han Sans KR"/>
+              </a:rPr>
+              <a:t>↓</a:t>
+            </a:r>
           </a:p>
         </p:txBody>
       </p:sp>
@@ -6441,15 +7261,6 @@
               </a:rPr>
               <a:t>DB 세션 수명 관리 최적화</a:t>
             </a:r>
-            <a:endParaRPr lang="en-US" sz="5000" b="1">
-              <a:solidFill>
-                <a:srgbClr val="475570"/>
-              </a:solidFill>
-              <a:latin typeface="한컴 윤고딕 740"/>
-              <a:ea typeface="한컴 윤고딕 740"/>
-              <a:cs typeface="Canva Sans Bold"/>
-              <a:sym typeface="Canva Sans Bold"/>
-            </a:endParaRPr>
           </a:p>
         </p:txBody>
       </p:sp>
@@ -6495,15 +7306,6 @@
               </a:rPr>
               <a:t>티유월드</a:t>
             </a:r>
-            <a:endParaRPr lang="en-US" sz="5000" b="1">
-              <a:solidFill>
-                <a:srgbClr val="475570"/>
-              </a:solidFill>
-              <a:latin typeface="한컴 윤고딕 760"/>
-              <a:ea typeface="한컴 윤고딕 760"/>
-              <a:cs typeface="Canva Sans Bold"/>
-              <a:sym typeface="Canva Sans Bold"/>
-            </a:endParaRPr>
           </a:p>
         </p:txBody>
       </p:sp>
@@ -6549,15 +7351,6 @@
               </a:rPr>
               <a:t>PROJECTS</a:t>
             </a:r>
-            <a:endParaRPr lang="en-US" sz="2000">
-              <a:solidFill>
-                <a:srgbClr val="475570"/>
-              </a:solidFill>
-              <a:latin typeface="한컴 윤고딕 760"/>
-              <a:ea typeface="한컴 윤고딕 760"/>
-              <a:cs typeface="Cabin"/>
-              <a:sym typeface="Cabin"/>
-            </a:endParaRPr>
           </a:p>
         </p:txBody>
       </p:sp>
@@ -6570,13 +7363,14 @@
 </file>
 
 <file path=ppt/slides/slide19.xml><?xml version="1.0" encoding="utf-8"?>
-<p:sld xmlns:r="http://schemas.openxmlformats.org/officeDocument/2006/relationships" xmlns:c="http://schemas.openxmlformats.org/drawingml/2006/chart" xmlns:a="http://schemas.openxmlformats.org/drawingml/2006/main" xmlns:dgm="http://schemas.openxmlformats.org/drawingml/2006/diagram" xmlns:dsp="http://schemas.microsoft.com/office/drawing/2008/diagram" xmlns:p="http://schemas.openxmlformats.org/presentationml/2006/main">
+<p:sld xmlns:a="http://schemas.openxmlformats.org/drawingml/2006/main" xmlns:r="http://schemas.openxmlformats.org/officeDocument/2006/relationships" xmlns:p="http://schemas.openxmlformats.org/presentationml/2006/main">
   <p:cSld>
     <p:bg>
-      <p:bgPr shadeToTitle="0">
+      <p:bgPr>
         <a:solidFill>
-          <a:srgbClr val="fcfdf8"/>
+          <a:srgbClr val="FCFDF8"/>
         </a:solidFill>
+        <a:effectLst/>
       </p:bgPr>
     </p:bg>
     <p:spTree>
@@ -6595,12 +7389,12 @@
       </p:grpSpPr>
       <p:sp>
         <p:nvSpPr>
-          <p:cNvPr name="Freeform 2" id="2"/>
+          <p:cNvPr id="2" name="Freeform 2"/>
           <p:cNvSpPr/>
           <p:nvPr/>
         </p:nvSpPr>
         <p:spPr>
-          <a:xfrm flipH="false" flipV="false" rot="0">
+          <a:xfrm>
             <a:off x="1357251" y="1707597"/>
             <a:ext cx="15573497" cy="6871806"/>
           </a:xfrm>
@@ -6609,9 +7403,9 @@
             <a:gdLst/>
             <a:ahLst/>
             <a:cxnLst/>
-            <a:rect r="r" b="b" t="t" l="l"/>
+            <a:rect l="l" t="t" r="r" b="b"/>
             <a:pathLst>
-              <a:path h="6871806" w="15573497">
+              <a:path w="15573497" h="6871806">
                 <a:moveTo>
                   <a:pt x="0" y="0"/>
                 </a:moveTo>
@@ -6634,10 +7428,17 @@
           <a:blipFill>
             <a:blip r:embed="rId2"/>
             <a:stretch>
-              <a:fillRect l="0" t="0" r="0" b="0"/>
+              <a:fillRect/>
             </a:stretch>
           </a:blipFill>
         </p:spPr>
+        <p:txBody>
+          <a:bodyPr/>
+          <a:lstStyle/>
+          <a:p>
+            <a:endParaRPr lang="ko-KR" altLang="en-US"/>
+          </a:p>
+        </p:txBody>
       </p:sp>
       <p:sp>
         <p:nvSpPr>
@@ -6681,15 +7482,6 @@
               </a:rPr>
               <a:t>DBManager로 게임 데이터 관리 (친구/인벤토리/프로필)</a:t>
             </a:r>
-            <a:endParaRPr lang="en-US" sz="3199">
-              <a:solidFill>
-                <a:srgbClr val="475570"/>
-              </a:solidFill>
-              <a:latin typeface="한컴 윤고딕 740"/>
-              <a:ea typeface="한컴 윤고딕 740"/>
-              <a:cs typeface="Source Han Sans KR"/>
-              <a:sym typeface="Source Han Sans KR"/>
-            </a:endParaRPr>
           </a:p>
         </p:txBody>
       </p:sp>
@@ -6735,15 +7527,6 @@
               </a:rPr>
               <a:t>티유월드</a:t>
             </a:r>
-            <a:endParaRPr lang="en-US" sz="5000" b="1">
-              <a:solidFill>
-                <a:srgbClr val="475570"/>
-              </a:solidFill>
-              <a:latin typeface="한컴 윤고딕 760"/>
-              <a:ea typeface="한컴 윤고딕 760"/>
-              <a:cs typeface="Canva Sans Bold"/>
-              <a:sym typeface="Canva Sans Bold"/>
-            </a:endParaRPr>
           </a:p>
         </p:txBody>
       </p:sp>
@@ -6789,15 +7572,6 @@
               </a:rPr>
               <a:t>PROJECTS</a:t>
             </a:r>
-            <a:endParaRPr lang="en-US" sz="2000">
-              <a:solidFill>
-                <a:srgbClr val="475570"/>
-              </a:solidFill>
-              <a:latin typeface="한컴 윤고딕 760"/>
-              <a:ea typeface="한컴 윤고딕 760"/>
-              <a:cs typeface="Cabin"/>
-              <a:sym typeface="Cabin"/>
-            </a:endParaRPr>
           </a:p>
         </p:txBody>
       </p:sp>
@@ -6810,13 +7584,14 @@
 </file>
 
 <file path=ppt/slides/slide2.xml><?xml version="1.0" encoding="utf-8"?>
-<p:sld xmlns:r="http://schemas.openxmlformats.org/officeDocument/2006/relationships" xmlns:c="http://schemas.openxmlformats.org/drawingml/2006/chart" xmlns:a="http://schemas.openxmlformats.org/drawingml/2006/main" xmlns:dgm="http://schemas.openxmlformats.org/drawingml/2006/diagram" xmlns:dsp="http://schemas.microsoft.com/office/drawing/2008/diagram" xmlns:p="http://schemas.openxmlformats.org/presentationml/2006/main">
+<p:sld xmlns:a="http://schemas.openxmlformats.org/drawingml/2006/main" xmlns:r="http://schemas.openxmlformats.org/officeDocument/2006/relationships" xmlns:p="http://schemas.openxmlformats.org/presentationml/2006/main">
   <p:cSld>
     <p:bg>
-      <p:bgPr shadeToTitle="0">
+      <p:bgPr>
         <a:solidFill>
           <a:srgbClr val="475570"/>
         </a:solidFill>
+        <a:effectLst/>
       </p:bgPr>
     </p:bg>
     <p:spTree>
@@ -6849,7 +7624,7 @@
           </a:prstGeom>
           <a:ln w="19050" cap="flat">
             <a:solidFill>
-              <a:srgbClr val="fcfdf8">
+              <a:srgbClr val="FCFDF8">
                 <a:alpha val="19610"/>
               </a:srgbClr>
             </a:solidFill>
@@ -6860,6 +7635,7 @@
         </p:spPr>
         <p:txBody>
           <a:bodyPr wrap="square" anchor="ctr"/>
+          <a:lstStyle/>
           <a:p>
             <a:pPr lvl="0" algn="ctr">
               <a:defRPr/>
@@ -6887,7 +7663,7 @@
           </a:prstGeom>
           <a:ln w="19050" cap="flat">
             <a:solidFill>
-              <a:srgbClr val="fcfdf8">
+              <a:srgbClr val="FCFDF8">
                 <a:alpha val="19610"/>
               </a:srgbClr>
             </a:solidFill>
@@ -6898,6 +7674,7 @@
         </p:spPr>
         <p:txBody>
           <a:bodyPr wrap="square" anchor="ctr"/>
+          <a:lstStyle/>
           <a:p>
             <a:pPr lvl="0" algn="ctr">
               <a:defRPr/>
@@ -6925,7 +7702,7 @@
           </a:prstGeom>
           <a:ln w="19050" cap="flat">
             <a:solidFill>
-              <a:srgbClr val="fcfdf8">
+              <a:srgbClr val="FCFDF8">
                 <a:alpha val="19610"/>
               </a:srgbClr>
             </a:solidFill>
@@ -6936,6 +7713,7 @@
         </p:spPr>
         <p:txBody>
           <a:bodyPr wrap="square" anchor="ctr"/>
+          <a:lstStyle/>
           <a:p>
             <a:pPr lvl="0" algn="ctr">
               <a:defRPr/>
@@ -6980,7 +7758,7 @@
             <a:r>
               <a:rPr lang="en-US" sz="9443" b="1" u="none" strike="noStrike">
                 <a:solidFill>
-                  <a:srgbClr val="fcfdf8"/>
+                  <a:srgbClr val="FCFDF8"/>
                 </a:solidFill>
                 <a:latin typeface="한컴 윤고딕 760"/>
                 <a:ea typeface="한컴 윤고딕 760"/>
@@ -6989,15 +7767,6 @@
               </a:rPr>
               <a:t>PROJECTS</a:t>
             </a:r>
-            <a:endParaRPr lang="en-US" sz="9443" b="1" u="none" strike="noStrike">
-              <a:solidFill>
-                <a:srgbClr val="fcfdf8"/>
-              </a:solidFill>
-              <a:latin typeface="한컴 윤고딕 760"/>
-              <a:ea typeface="한컴 윤고딕 760"/>
-              <a:cs typeface="Cabin Bold"/>
-              <a:sym typeface="Cabin Bold"/>
-            </a:endParaRPr>
           </a:p>
         </p:txBody>
       </p:sp>
@@ -7034,7 +7803,7 @@
             <a:r>
               <a:rPr lang="en-US" sz="3399">
                 <a:solidFill>
-                  <a:srgbClr val="fcfdf8"/>
+                  <a:srgbClr val="FCFDF8"/>
                 </a:solidFill>
                 <a:latin typeface="한컴 윤고딕 760"/>
                 <a:ea typeface="한컴 윤고딕 760"/>
@@ -7043,15 +7812,6 @@
               </a:rPr>
               <a:t>티유월드</a:t>
             </a:r>
-            <a:endParaRPr lang="en-US" sz="3399">
-              <a:solidFill>
-                <a:srgbClr val="fcfdf8"/>
-              </a:solidFill>
-              <a:latin typeface="한컴 윤고딕 760"/>
-              <a:ea typeface="한컴 윤고딕 760"/>
-              <a:cs typeface="Canva Sans"/>
-              <a:sym typeface="Canva Sans"/>
-            </a:endParaRPr>
           </a:p>
         </p:txBody>
       </p:sp>
@@ -7088,7 +7848,7 @@
             <a:r>
               <a:rPr lang="en-US" sz="3399" strike="sngStrike">
                 <a:solidFill>
-                  <a:srgbClr val="fcfdf8"/>
+                  <a:srgbClr val="FCFDF8"/>
                 </a:solidFill>
                 <a:latin typeface="한컴 윤고딕 760"/>
                 <a:ea typeface="한컴 윤고딕 760"/>
@@ -7097,15 +7857,6 @@
               </a:rPr>
               <a:t>BomeGame (제작중)</a:t>
             </a:r>
-            <a:endParaRPr lang="en-US" sz="3399" strike="sngStrike">
-              <a:solidFill>
-                <a:srgbClr val="fcfdf8"/>
-              </a:solidFill>
-              <a:latin typeface="한컴 윤고딕 760"/>
-              <a:ea typeface="한컴 윤고딕 760"/>
-              <a:cs typeface="Canva Sans"/>
-              <a:sym typeface="Canva Sans"/>
-            </a:endParaRPr>
           </a:p>
         </p:txBody>
       </p:sp>
@@ -7142,7 +7893,7 @@
             <a:r>
               <a:rPr lang="en-US" sz="3399">
                 <a:solidFill>
-                  <a:srgbClr val="fcfdf8"/>
+                  <a:srgbClr val="FCFDF8"/>
                 </a:solidFill>
                 <a:latin typeface="한컴 윤고딕 760"/>
                 <a:ea typeface="한컴 윤고딕 760"/>
@@ -7151,15 +7902,6 @@
               </a:rPr>
               <a:t>기타 프로젝트들</a:t>
             </a:r>
-            <a:endParaRPr lang="en-US" sz="3399">
-              <a:solidFill>
-                <a:srgbClr val="fcfdf8"/>
-              </a:solidFill>
-              <a:latin typeface="한컴 윤고딕 760"/>
-              <a:ea typeface="한컴 윤고딕 760"/>
-              <a:cs typeface="Canva Sans"/>
-              <a:sym typeface="Canva Sans"/>
-            </a:endParaRPr>
           </a:p>
         </p:txBody>
       </p:sp>
@@ -7196,7 +7938,7 @@
             <a:r>
               <a:rPr lang="en-US" sz="2399" b="1">
                 <a:solidFill>
-                  <a:srgbClr val="fcfdf8"/>
+                  <a:srgbClr val="FCFDF8"/>
                 </a:solidFill>
                 <a:latin typeface="한컴 윤고딕 760"/>
                 <a:ea typeface="한컴 윤고딕 760"/>
@@ -7205,15 +7947,6 @@
               </a:rPr>
               <a:t>1</a:t>
             </a:r>
-            <a:endParaRPr lang="en-US" sz="2399" b="1">
-              <a:solidFill>
-                <a:srgbClr val="fcfdf8"/>
-              </a:solidFill>
-              <a:latin typeface="한컴 윤고딕 760"/>
-              <a:ea typeface="한컴 윤고딕 760"/>
-              <a:cs typeface="Canva Sans Medium"/>
-              <a:sym typeface="Canva Sans Medium"/>
-            </a:endParaRPr>
           </a:p>
         </p:txBody>
       </p:sp>
@@ -7250,7 +7983,7 @@
             <a:r>
               <a:rPr lang="en-US" sz="2399" b="1">
                 <a:solidFill>
-                  <a:srgbClr val="fcfdf8"/>
+                  <a:srgbClr val="FCFDF8"/>
                 </a:solidFill>
                 <a:latin typeface="한컴 윤고딕 760"/>
                 <a:ea typeface="한컴 윤고딕 760"/>
@@ -7259,15 +7992,6 @@
               </a:rPr>
               <a:t>2</a:t>
             </a:r>
-            <a:endParaRPr lang="en-US" sz="2399" b="1">
-              <a:solidFill>
-                <a:srgbClr val="fcfdf8"/>
-              </a:solidFill>
-              <a:latin typeface="한컴 윤고딕 760"/>
-              <a:ea typeface="한컴 윤고딕 760"/>
-              <a:cs typeface="Canva Sans Medium"/>
-              <a:sym typeface="Canva Sans Medium"/>
-            </a:endParaRPr>
           </a:p>
         </p:txBody>
       </p:sp>
@@ -7304,7 +8028,7 @@
             <a:r>
               <a:rPr lang="en-US" sz="2399" b="1">
                 <a:solidFill>
-                  <a:srgbClr val="fcfdf8"/>
+                  <a:srgbClr val="FCFDF8"/>
                 </a:solidFill>
                 <a:latin typeface="한컴 윤고딕 760"/>
                 <a:ea typeface="한컴 윤고딕 760"/>
@@ -7313,15 +8037,6 @@
               </a:rPr>
               <a:t>3</a:t>
             </a:r>
-            <a:endParaRPr lang="en-US" sz="2399" b="1">
-              <a:solidFill>
-                <a:srgbClr val="fcfdf8"/>
-              </a:solidFill>
-              <a:latin typeface="한컴 윤고딕 760"/>
-              <a:ea typeface="한컴 윤고딕 760"/>
-              <a:cs typeface="Canva Sans Medium"/>
-              <a:sym typeface="Canva Sans Medium"/>
-            </a:endParaRPr>
           </a:p>
         </p:txBody>
       </p:sp>
@@ -7358,7 +8073,7 @@
             <a:r>
               <a:rPr lang="en-US" sz="3399">
                 <a:solidFill>
-                  <a:srgbClr val="fcfdf8"/>
+                  <a:srgbClr val="FCFDF8"/>
                 </a:solidFill>
                 <a:latin typeface="한컴 윤고딕 760"/>
                 <a:ea typeface="한컴 윤고딕 760"/>
@@ -7367,15 +8082,6 @@
               </a:rPr>
               <a:t> (IOCP서버/언리얼)</a:t>
             </a:r>
-            <a:endParaRPr lang="en-US" sz="3399">
-              <a:solidFill>
-                <a:srgbClr val="fcfdf8"/>
-              </a:solidFill>
-              <a:latin typeface="한컴 윤고딕 760"/>
-              <a:ea typeface="한컴 윤고딕 760"/>
-              <a:cs typeface="Canva Sans"/>
-              <a:sym typeface="Canva Sans"/>
-            </a:endParaRPr>
           </a:p>
         </p:txBody>
       </p:sp>
@@ -7410,26 +8116,65 @@
               <a:defRPr/>
             </a:pPr>
             <a:r>
-              <a:rPr lang="en-US" sz="3399" strike="sngStrike">
-                <a:solidFill>
-                  <a:srgbClr val="fcfdf8"/>
+              <a:rPr lang="en-US" sz="3399" strike="sngStrike" dirty="0">
+                <a:solidFill>
+                  <a:srgbClr val="FCFDF8"/>
                 </a:solidFill>
                 <a:latin typeface="한컴 윤고딕 760"/>
                 <a:ea typeface="한컴 윤고딕 760"/>
                 <a:cs typeface="Canva Sans"/>
                 <a:sym typeface="Canva Sans"/>
               </a:rPr>
-              <a:t> (Epoll서버/언리얼)</a:t>
-            </a:r>
-            <a:endParaRPr lang="en-US" sz="3399" strike="sngStrike">
-              <a:solidFill>
-                <a:srgbClr val="fcfdf8"/>
-              </a:solidFill>
-              <a:latin typeface="한컴 윤고딕 760"/>
-              <a:ea typeface="한컴 윤고딕 760"/>
-              <a:cs typeface="Canva Sans"/>
-              <a:sym typeface="Canva Sans"/>
-            </a:endParaRPr>
+              <a:t> (</a:t>
+            </a:r>
+            <a:r>
+              <a:rPr lang="en-US" sz="3399" strike="sngStrike" dirty="0" err="1">
+                <a:solidFill>
+                  <a:srgbClr val="FCFDF8"/>
+                </a:solidFill>
+                <a:latin typeface="한컴 윤고딕 760"/>
+                <a:ea typeface="한컴 윤고딕 760"/>
+                <a:cs typeface="Canva Sans"/>
+                <a:sym typeface="Canva Sans"/>
+              </a:rPr>
+              <a:t>Epoll서버</a:t>
+            </a:r>
+            <a:r>
+              <a:rPr lang="en-US" sz="3399" strike="sngStrike" dirty="0">
+                <a:solidFill>
+                  <a:srgbClr val="FCFDF8"/>
+                </a:solidFill>
+                <a:latin typeface="한컴 윤고딕 760"/>
+                <a:ea typeface="한컴 윤고딕 760"/>
+                <a:cs typeface="Canva Sans"/>
+                <a:sym typeface="Canva Sans"/>
+              </a:rPr>
+              <a:t>/</a:t>
+            </a:r>
+            <a:r>
+              <a:rPr lang="en-US" sz="3399" strike="sngStrike" dirty="0" err="1">
+                <a:solidFill>
+                  <a:srgbClr val="FCFDF8"/>
+                </a:solidFill>
+                <a:latin typeface="한컴 윤고딕 760"/>
+                <a:ea typeface="한컴 윤고딕 760"/>
+                <a:cs typeface="Canva Sans"/>
+                <a:sym typeface="Canva Sans"/>
+              </a:rPr>
+              <a:t>언리얼</a:t>
+            </a:r>
+            <a:r>
+              <a:rPr lang="en-US" sz="3399" strike="sngStrike" dirty="0">
+                <a:solidFill>
+                  <a:srgbClr val="FCFDF8"/>
+                </a:solidFill>
+                <a:latin typeface="한컴 윤고딕 760"/>
+                <a:ea typeface="한컴 윤고딕 760"/>
+                <a:cs typeface="Canva Sans"/>
+                <a:sym typeface="Canva Sans"/>
+              </a:rPr>
+              <a:t>)</a:t>
+            </a:r>
           </a:p>
         </p:txBody>
       </p:sp>
@@ -7442,13 +8187,14 @@
 </file>
 
 <file path=ppt/slides/slide20.xml><?xml version="1.0" encoding="utf-8"?>
-<p:sld xmlns:r="http://schemas.openxmlformats.org/officeDocument/2006/relationships" xmlns:c="http://schemas.openxmlformats.org/drawingml/2006/chart" xmlns:a="http://schemas.openxmlformats.org/drawingml/2006/main" xmlns:dgm="http://schemas.openxmlformats.org/drawingml/2006/diagram" xmlns:dsp="http://schemas.microsoft.com/office/drawing/2008/diagram" xmlns:p="http://schemas.openxmlformats.org/presentationml/2006/main">
+<p:sld xmlns:a="http://schemas.openxmlformats.org/drawingml/2006/main" xmlns:r="http://schemas.openxmlformats.org/officeDocument/2006/relationships" xmlns:p="http://schemas.openxmlformats.org/presentationml/2006/main">
   <p:cSld>
     <p:bg>
-      <p:bgPr shadeToTitle="0">
+      <p:bgPr>
         <a:solidFill>
-          <a:srgbClr val="fcfdf8"/>
+          <a:srgbClr val="FCFDF8"/>
         </a:solidFill>
+        <a:effectLst/>
       </p:bgPr>
     </p:bg>
     <p:spTree>
@@ -7496,18 +8242,246 @@
               <a:defRPr/>
             </a:pPr>
             <a:r>
-              <a:rPr lang="en-US" sz="3199">
-                <a:solidFill>
-                  <a:srgbClr val="475570"/>
-                </a:solidFill>
-                <a:latin typeface="한컴 윤고딕 740"/>
-                <a:ea typeface="한컴 윤고딕 740"/>
-                <a:cs typeface="Source Han Sans KR"/>
-                <a:sym typeface="Source Han Sans KR"/>
-              </a:rPr>
-              <a:t>RAII 기반 세션 관리 + DBConnectionPool: 세션은 자동으로 회수, 연결은 풀에서 재사용</a:t>
-            </a:r>
-            <a:endParaRPr lang="en-US" sz="3199">
+              <a:rPr lang="en-US" sz="3199" dirty="0">
+                <a:solidFill>
+                  <a:srgbClr val="475570"/>
+                </a:solidFill>
+                <a:latin typeface="한컴 윤고딕 740"/>
+                <a:ea typeface="한컴 윤고딕 740"/>
+                <a:cs typeface="Source Han Sans KR"/>
+                <a:sym typeface="Source Han Sans KR"/>
+              </a:rPr>
+              <a:t>RAII </a:t>
+            </a:r>
+            <a:r>
+              <a:rPr lang="en-US" sz="3199" dirty="0" err="1">
+                <a:solidFill>
+                  <a:srgbClr val="475570"/>
+                </a:solidFill>
+                <a:latin typeface="한컴 윤고딕 740"/>
+                <a:ea typeface="한컴 윤고딕 740"/>
+                <a:cs typeface="Source Han Sans KR"/>
+                <a:sym typeface="Source Han Sans KR"/>
+              </a:rPr>
+              <a:t>기반</a:t>
+            </a:r>
+            <a:r>
+              <a:rPr lang="en-US" sz="3199" dirty="0">
+                <a:solidFill>
+                  <a:srgbClr val="475570"/>
+                </a:solidFill>
+                <a:latin typeface="한컴 윤고딕 740"/>
+                <a:ea typeface="한컴 윤고딕 740"/>
+                <a:cs typeface="Source Han Sans KR"/>
+                <a:sym typeface="Source Han Sans KR"/>
+              </a:rPr>
+              <a:t> </a:t>
+            </a:r>
+            <a:r>
+              <a:rPr lang="en-US" sz="3199" dirty="0" err="1">
+                <a:solidFill>
+                  <a:srgbClr val="475570"/>
+                </a:solidFill>
+                <a:latin typeface="한컴 윤고딕 740"/>
+                <a:ea typeface="한컴 윤고딕 740"/>
+                <a:cs typeface="Source Han Sans KR"/>
+                <a:sym typeface="Source Han Sans KR"/>
+              </a:rPr>
+              <a:t>세션</a:t>
+            </a:r>
+            <a:r>
+              <a:rPr lang="en-US" sz="3199" dirty="0">
+                <a:solidFill>
+                  <a:srgbClr val="475570"/>
+                </a:solidFill>
+                <a:latin typeface="한컴 윤고딕 740"/>
+                <a:ea typeface="한컴 윤고딕 740"/>
+                <a:cs typeface="Source Han Sans KR"/>
+                <a:sym typeface="Source Han Sans KR"/>
+              </a:rPr>
+              <a:t> </a:t>
+            </a:r>
+            <a:r>
+              <a:rPr lang="en-US" sz="3199" dirty="0" err="1">
+                <a:solidFill>
+                  <a:srgbClr val="475570"/>
+                </a:solidFill>
+                <a:latin typeface="한컴 윤고딕 740"/>
+                <a:ea typeface="한컴 윤고딕 740"/>
+                <a:cs typeface="Source Han Sans KR"/>
+                <a:sym typeface="Source Han Sans KR"/>
+              </a:rPr>
+              <a:t>관리</a:t>
+            </a:r>
+            <a:r>
+              <a:rPr lang="en-US" sz="3199" dirty="0">
+                <a:solidFill>
+                  <a:srgbClr val="475570"/>
+                </a:solidFill>
+                <a:latin typeface="한컴 윤고딕 740"/>
+                <a:ea typeface="한컴 윤고딕 740"/>
+                <a:cs typeface="Source Han Sans KR"/>
+                <a:sym typeface="Source Han Sans KR"/>
+              </a:rPr>
+              <a:t> + </a:t>
+            </a:r>
+            <a:r>
+              <a:rPr lang="en-US" sz="3199" dirty="0" err="1">
+                <a:solidFill>
+                  <a:srgbClr val="475570"/>
+                </a:solidFill>
+                <a:latin typeface="한컴 윤고딕 740"/>
+                <a:ea typeface="한컴 윤고딕 740"/>
+                <a:cs typeface="Source Han Sans KR"/>
+                <a:sym typeface="Source Han Sans KR"/>
+              </a:rPr>
+              <a:t>DBConnectionPool</a:t>
+            </a:r>
+            <a:r>
+              <a:rPr lang="en-US" sz="3199" dirty="0">
+                <a:solidFill>
+                  <a:srgbClr val="475570"/>
+                </a:solidFill>
+                <a:latin typeface="한컴 윤고딕 740"/>
+                <a:ea typeface="한컴 윤고딕 740"/>
+                <a:cs typeface="Source Han Sans KR"/>
+                <a:sym typeface="Source Han Sans KR"/>
+              </a:rPr>
+              <a:t>: </a:t>
+            </a:r>
+            <a:r>
+              <a:rPr lang="en-US" sz="3199" dirty="0" err="1">
+                <a:solidFill>
+                  <a:srgbClr val="475570"/>
+                </a:solidFill>
+                <a:latin typeface="한컴 윤고딕 740"/>
+                <a:ea typeface="한컴 윤고딕 740"/>
+                <a:cs typeface="Source Han Sans KR"/>
+                <a:sym typeface="Source Han Sans KR"/>
+              </a:rPr>
+              <a:t>세션은</a:t>
+            </a:r>
+            <a:r>
+              <a:rPr lang="en-US" sz="3199" dirty="0">
+                <a:solidFill>
+                  <a:srgbClr val="475570"/>
+                </a:solidFill>
+                <a:latin typeface="한컴 윤고딕 740"/>
+                <a:ea typeface="한컴 윤고딕 740"/>
+                <a:cs typeface="Source Han Sans KR"/>
+                <a:sym typeface="Source Han Sans KR"/>
+              </a:rPr>
+              <a:t> </a:t>
+            </a:r>
+            <a:r>
+              <a:rPr lang="en-US" sz="3199" dirty="0" err="1">
+                <a:solidFill>
+                  <a:srgbClr val="475570"/>
+                </a:solidFill>
+                <a:latin typeface="한컴 윤고딕 740"/>
+                <a:ea typeface="한컴 윤고딕 740"/>
+                <a:cs typeface="Source Han Sans KR"/>
+                <a:sym typeface="Source Han Sans KR"/>
+              </a:rPr>
+              <a:t>자동으로</a:t>
+            </a:r>
+            <a:r>
+              <a:rPr lang="en-US" sz="3199" dirty="0">
+                <a:solidFill>
+                  <a:srgbClr val="475570"/>
+                </a:solidFill>
+                <a:latin typeface="한컴 윤고딕 740"/>
+                <a:ea typeface="한컴 윤고딕 740"/>
+                <a:cs typeface="Source Han Sans KR"/>
+                <a:sym typeface="Source Han Sans KR"/>
+              </a:rPr>
+              <a:t> </a:t>
+            </a:r>
+            <a:r>
+              <a:rPr lang="en-US" sz="3199" dirty="0" err="1">
+                <a:solidFill>
+                  <a:srgbClr val="475570"/>
+                </a:solidFill>
+                <a:latin typeface="한컴 윤고딕 740"/>
+                <a:ea typeface="한컴 윤고딕 740"/>
+                <a:cs typeface="Source Han Sans KR"/>
+                <a:sym typeface="Source Han Sans KR"/>
+              </a:rPr>
+              <a:t>회수</a:t>
+            </a:r>
+            <a:r>
+              <a:rPr lang="en-US" sz="3199" dirty="0">
+                <a:solidFill>
+                  <a:srgbClr val="475570"/>
+                </a:solidFill>
+                <a:latin typeface="한컴 윤고딕 740"/>
+                <a:ea typeface="한컴 윤고딕 740"/>
+                <a:cs typeface="Source Han Sans KR"/>
+                <a:sym typeface="Source Han Sans KR"/>
+              </a:rPr>
+              <a:t>, </a:t>
+            </a:r>
+            <a:r>
+              <a:rPr lang="en-US" sz="3199" dirty="0" err="1">
+                <a:solidFill>
+                  <a:srgbClr val="475570"/>
+                </a:solidFill>
+                <a:latin typeface="한컴 윤고딕 740"/>
+                <a:ea typeface="한컴 윤고딕 740"/>
+                <a:cs typeface="Source Han Sans KR"/>
+                <a:sym typeface="Source Han Sans KR"/>
+              </a:rPr>
+              <a:t>연결은</a:t>
+            </a:r>
+            <a:r>
+              <a:rPr lang="en-US" sz="3199" dirty="0">
+                <a:solidFill>
+                  <a:srgbClr val="475570"/>
+                </a:solidFill>
+                <a:latin typeface="한컴 윤고딕 740"/>
+                <a:ea typeface="한컴 윤고딕 740"/>
+                <a:cs typeface="Source Han Sans KR"/>
+                <a:sym typeface="Source Han Sans KR"/>
+              </a:rPr>
+              <a:t> </a:t>
+            </a:r>
+            <a:r>
+              <a:rPr lang="en-US" sz="3199" dirty="0" err="1">
+                <a:solidFill>
+                  <a:srgbClr val="475570"/>
+                </a:solidFill>
+                <a:latin typeface="한컴 윤고딕 740"/>
+                <a:ea typeface="한컴 윤고딕 740"/>
+                <a:cs typeface="Source Han Sans KR"/>
+                <a:sym typeface="Source Han Sans KR"/>
+              </a:rPr>
+              <a:t>풀에서</a:t>
+            </a:r>
+            <a:r>
+              <a:rPr lang="en-US" sz="3199" dirty="0">
+                <a:solidFill>
+                  <a:srgbClr val="475570"/>
+                </a:solidFill>
+                <a:latin typeface="한컴 윤고딕 740"/>
+                <a:ea typeface="한컴 윤고딕 740"/>
+                <a:cs typeface="Source Han Sans KR"/>
+                <a:sym typeface="Source Han Sans KR"/>
+              </a:rPr>
+              <a:t> </a:t>
+            </a:r>
+            <a:r>
+              <a:rPr lang="en-US" sz="3199" dirty="0" err="1">
+                <a:solidFill>
+                  <a:srgbClr val="475570"/>
+                </a:solidFill>
+                <a:latin typeface="한컴 윤고딕 740"/>
+                <a:ea typeface="한컴 윤고딕 740"/>
+                <a:cs typeface="Source Han Sans KR"/>
+                <a:sym typeface="Source Han Sans KR"/>
+              </a:rPr>
+              <a:t>재사용</a:t>
+            </a:r>
+            <a:endParaRPr lang="en-US" sz="3199" dirty="0">
               <a:solidFill>
                 <a:srgbClr val="475570"/>
               </a:solidFill>
@@ -7521,12 +8495,12 @@
       </p:sp>
       <p:sp>
         <p:nvSpPr>
-          <p:cNvPr name="Freeform 5" id="5"/>
+          <p:cNvPr id="5" name="Freeform 5"/>
           <p:cNvSpPr/>
           <p:nvPr/>
         </p:nvSpPr>
         <p:spPr>
-          <a:xfrm flipH="false" flipV="false" rot="0">
+          <a:xfrm>
             <a:off x="4240762" y="839619"/>
             <a:ext cx="9300929" cy="4891467"/>
           </a:xfrm>
@@ -7535,9 +8509,9 @@
             <a:gdLst/>
             <a:ahLst/>
             <a:cxnLst/>
-            <a:rect r="r" b="b" t="t" l="l"/>
+            <a:rect l="l" t="t" r="r" b="b"/>
             <a:pathLst>
-              <a:path h="4891467" w="9300929">
+              <a:path w="9300929" h="4891467">
                 <a:moveTo>
                   <a:pt x="0" y="0"/>
                 </a:moveTo>
@@ -7560,19 +8534,26 @@
           <a:blipFill>
             <a:blip r:embed="rId2"/>
             <a:stretch>
-              <a:fillRect l="0" t="0" r="0" b="0"/>
+              <a:fillRect/>
             </a:stretch>
           </a:blipFill>
         </p:spPr>
-      </p:sp>
-      <p:sp>
-        <p:nvSpPr>
-          <p:cNvPr name="Freeform 6" id="6"/>
+        <p:txBody>
+          <a:bodyPr/>
+          <a:lstStyle/>
+          <a:p>
+            <a:endParaRPr lang="ko-KR" altLang="en-US"/>
+          </a:p>
+        </p:txBody>
+      </p:sp>
+      <p:sp>
+        <p:nvSpPr>
+          <p:cNvPr id="6" name="Freeform 6"/>
           <p:cNvSpPr/>
           <p:nvPr/>
         </p:nvSpPr>
         <p:spPr>
-          <a:xfrm flipH="false" flipV="false" rot="0">
+          <a:xfrm>
             <a:off x="3537521" y="5948035"/>
             <a:ext cx="10361561" cy="2307573"/>
           </a:xfrm>
@@ -7581,9 +8562,9 @@
             <a:gdLst/>
             <a:ahLst/>
             <a:cxnLst/>
-            <a:rect r="r" b="b" t="t" l="l"/>
+            <a:rect l="l" t="t" r="r" b="b"/>
             <a:pathLst>
-              <a:path h="2307573" w="10361561">
+              <a:path w="10361561" h="2307573">
                 <a:moveTo>
                   <a:pt x="0" y="0"/>
                 </a:moveTo>
@@ -7606,10 +8587,17 @@
           <a:blipFill>
             <a:blip r:embed="rId3"/>
             <a:stretch>
-              <a:fillRect l="0" t="0" r="-6817" b="-42092"/>
+              <a:fillRect r="-6817" b="-42092"/>
             </a:stretch>
           </a:blipFill>
         </p:spPr>
+        <p:txBody>
+          <a:bodyPr/>
+          <a:lstStyle/>
+          <a:p>
+            <a:endParaRPr lang="ko-KR" altLang="en-US"/>
+          </a:p>
+        </p:txBody>
       </p:sp>
       <p:sp>
         <p:nvSpPr>
@@ -7653,15 +8641,6 @@
               </a:rPr>
               <a:t>티유월드</a:t>
             </a:r>
-            <a:endParaRPr lang="en-US" sz="5000" b="1">
-              <a:solidFill>
-                <a:srgbClr val="475570"/>
-              </a:solidFill>
-              <a:latin typeface="한컴 윤고딕 760"/>
-              <a:ea typeface="한컴 윤고딕 760"/>
-              <a:cs typeface="Canva Sans Bold"/>
-              <a:sym typeface="Canva Sans Bold"/>
-            </a:endParaRPr>
           </a:p>
         </p:txBody>
       </p:sp>
@@ -7707,15 +8686,6 @@
               </a:rPr>
               <a:t>PROJECTS</a:t>
             </a:r>
-            <a:endParaRPr lang="en-US" sz="2000">
-              <a:solidFill>
-                <a:srgbClr val="475570"/>
-              </a:solidFill>
-              <a:latin typeface="한컴 윤고딕 760"/>
-              <a:ea typeface="한컴 윤고딕 760"/>
-              <a:cs typeface="Cabin"/>
-              <a:sym typeface="Cabin"/>
-            </a:endParaRPr>
           </a:p>
         </p:txBody>
       </p:sp>
@@ -7728,13 +8698,14 @@
 </file>
 
 <file path=ppt/slides/slide21.xml><?xml version="1.0" encoding="utf-8"?>
-<p:sld xmlns:r="http://schemas.openxmlformats.org/officeDocument/2006/relationships" xmlns:c="http://schemas.openxmlformats.org/drawingml/2006/chart" xmlns:a="http://schemas.openxmlformats.org/drawingml/2006/main" xmlns:dgm="http://schemas.openxmlformats.org/drawingml/2006/diagram" xmlns:dsp="http://schemas.microsoft.com/office/drawing/2008/diagram" xmlns:p="http://schemas.openxmlformats.org/presentationml/2006/main">
+<p:sld xmlns:a="http://schemas.openxmlformats.org/drawingml/2006/main" xmlns:r="http://schemas.openxmlformats.org/officeDocument/2006/relationships" xmlns:p="http://schemas.openxmlformats.org/presentationml/2006/main">
   <p:cSld>
     <p:bg>
-      <p:bgPr shadeToTitle="0">
+      <p:bgPr>
         <a:solidFill>
-          <a:srgbClr val="fcfdf8"/>
+          <a:srgbClr val="FCFDF8"/>
         </a:solidFill>
+        <a:effectLst/>
       </p:bgPr>
     </p:bg>
     <p:spTree>
@@ -7793,15 +8764,6 @@
               </a:rPr>
               <a:t>개발기간</a:t>
             </a:r>
-            <a:endParaRPr lang="en-US" sz="3199" b="1">
-              <a:solidFill>
-                <a:srgbClr val="475570"/>
-              </a:solidFill>
-              <a:latin typeface="한컴 윤고딕 740"/>
-              <a:ea typeface="한컴 윤고딕 740"/>
-              <a:cs typeface="Source Han Sans KR Bold"/>
-              <a:sym typeface="Source Han Sans KR Bold"/>
-            </a:endParaRPr>
           </a:p>
         </p:txBody>
       </p:sp>
@@ -7847,15 +8809,6 @@
               </a:rPr>
               <a:t>BombGame</a:t>
             </a:r>
-            <a:endParaRPr lang="en-US" sz="6000" b="1">
-              <a:solidFill>
-                <a:srgbClr val="475570"/>
-              </a:solidFill>
-              <a:latin typeface="한컴 윤고딕 760"/>
-              <a:ea typeface="한컴 윤고딕 760"/>
-              <a:cs typeface="Canva Sans Bold"/>
-              <a:sym typeface="Canva Sans Bold"/>
-            </a:endParaRPr>
           </a:p>
         </p:txBody>
       </p:sp>
@@ -7901,15 +8854,6 @@
               </a:rPr>
               <a:t>PROJECTS</a:t>
             </a:r>
-            <a:endParaRPr lang="en-US" sz="2000">
-              <a:solidFill>
-                <a:srgbClr val="475570"/>
-              </a:solidFill>
-              <a:latin typeface="한컴 윤고딕 760"/>
-              <a:ea typeface="한컴 윤고딕 760"/>
-              <a:cs typeface="Cabin"/>
-              <a:sym typeface="Cabin"/>
-            </a:endParaRPr>
           </a:p>
         </p:txBody>
       </p:sp>
@@ -7955,15 +8899,6 @@
               </a:rPr>
               <a:t>개발도구</a:t>
             </a:r>
-            <a:endParaRPr lang="en-US" sz="3199" b="1">
-              <a:solidFill>
-                <a:srgbClr val="475570"/>
-              </a:solidFill>
-              <a:latin typeface="한컴 윤고딕 740"/>
-              <a:ea typeface="한컴 윤고딕 740"/>
-              <a:cs typeface="Source Han Sans KR Bold"/>
-              <a:sym typeface="Source Han Sans KR Bold"/>
-            </a:endParaRPr>
           </a:p>
         </p:txBody>
       </p:sp>
@@ -8009,15 +8944,6 @@
               </a:rPr>
               <a:t>개발인원</a:t>
             </a:r>
-            <a:endParaRPr lang="en-US" sz="3199" b="1">
-              <a:solidFill>
-                <a:srgbClr val="475570"/>
-              </a:solidFill>
-              <a:latin typeface="한컴 윤고딕 740"/>
-              <a:ea typeface="한컴 윤고딕 740"/>
-              <a:cs typeface="Source Han Sans KR Bold"/>
-              <a:sym typeface="Source Han Sans KR Bold"/>
-            </a:endParaRPr>
           </a:p>
         </p:txBody>
       </p:sp>
@@ -8063,15 +8989,6 @@
               </a:rPr>
               <a:t>담당업무</a:t>
             </a:r>
-            <a:endParaRPr lang="en-US" sz="3199" b="1">
-              <a:solidFill>
-                <a:srgbClr val="475570"/>
-              </a:solidFill>
-              <a:latin typeface="한컴 윤고딕 740"/>
-              <a:ea typeface="한컴 윤고딕 740"/>
-              <a:cs typeface="Source Han Sans KR Bold"/>
-              <a:sym typeface="Source Han Sans KR Bold"/>
-            </a:endParaRPr>
           </a:p>
         </p:txBody>
       </p:sp>
@@ -8117,15 +9034,6 @@
               </a:rPr>
               <a:t>25.05 ~ 06</a:t>
             </a:r>
-            <a:endParaRPr lang="en-US" sz="3199">
-              <a:solidFill>
-                <a:srgbClr val="475570"/>
-              </a:solidFill>
-              <a:latin typeface="한컴 윤고딕 740"/>
-              <a:ea typeface="한컴 윤고딕 740"/>
-              <a:cs typeface="Source Han Sans KR"/>
-              <a:sym typeface="Source Han Sans KR"/>
-            </a:endParaRPr>
           </a:p>
         </p:txBody>
       </p:sp>
@@ -8171,15 +9079,6 @@
               </a:rPr>
               <a:t>Unreal5.5</a:t>
             </a:r>
-            <a:endParaRPr lang="en-US" sz="3199">
-              <a:solidFill>
-                <a:srgbClr val="475570"/>
-              </a:solidFill>
-              <a:latin typeface="한컴 윤고딕 740"/>
-              <a:ea typeface="한컴 윤고딕 740"/>
-              <a:cs typeface="Source Han Sans KR"/>
-              <a:sym typeface="Source Han Sans KR"/>
-            </a:endParaRPr>
           </a:p>
         </p:txBody>
       </p:sp>
@@ -8210,6 +9109,7 @@
         </p:spPr>
         <p:txBody>
           <a:bodyPr wrap="square" anchor="ctr"/>
+          <a:lstStyle/>
           <a:p>
             <a:pPr lvl="0" algn="ctr">
               <a:defRPr/>
@@ -8263,15 +9163,6 @@
               </a:rPr>
               <a:t>1명</a:t>
             </a:r>
-            <a:endParaRPr lang="en-US" sz="3199">
-              <a:solidFill>
-                <a:srgbClr val="475570"/>
-              </a:solidFill>
-              <a:latin typeface="한컴 윤고딕 740"/>
-              <a:ea typeface="한컴 윤고딕 740"/>
-              <a:cs typeface="Source Han Sans KR"/>
-              <a:sym typeface="Source Han Sans KR"/>
-            </a:endParaRPr>
           </a:p>
         </p:txBody>
       </p:sp>
@@ -8302,6 +9193,7 @@
         </p:spPr>
         <p:txBody>
           <a:bodyPr wrap="square" anchor="ctr"/>
+          <a:lstStyle/>
           <a:p>
             <a:pPr lvl="0" algn="ctr">
               <a:defRPr/>
@@ -8340,6 +9232,7 @@
         </p:spPr>
         <p:txBody>
           <a:bodyPr wrap="square" anchor="ctr"/>
+          <a:lstStyle/>
           <a:p>
             <a:pPr lvl="0" algn="ctr">
               <a:defRPr/>
@@ -8378,6 +9271,7 @@
         </p:spPr>
         <p:txBody>
           <a:bodyPr wrap="square" anchor="ctr"/>
+          <a:lstStyle/>
           <a:p>
             <a:pPr lvl="0" algn="ctr">
               <a:defRPr/>
@@ -8431,6 +9325,59 @@
               </a:rPr>
               <a:t>폭탄 던지기 게임</a:t>
             </a:r>
+          </a:p>
+        </p:txBody>
+      </p:sp>
+      <p:sp>
+        <p:nvSpPr>
+          <p:cNvPr id="16" name="TextBox 16"/>
+          <p:cNvSpPr txBox="1"/>
+          <p:nvPr/>
+        </p:nvSpPr>
+        <p:spPr>
+          <a:xfrm>
+            <a:off x="4177723" y="5731230"/>
+            <a:ext cx="8461328" cy="1136295"/>
+          </a:xfrm>
+          <a:prstGeom prst="rect">
+            <a:avLst/>
+          </a:prstGeom>
+        </p:spPr>
+        <p:txBody>
+          <a:bodyPr lIns="0" tIns="0" rIns="0" bIns="0" anchor="t">
+            <a:spAutoFit/>
+          </a:bodyPr>
+          <a:lstStyle/>
+          <a:p>
+            <a:pPr lvl="0" algn="l">
+              <a:lnSpc>
+                <a:spcPts val="4479"/>
+              </a:lnSpc>
+              <a:defRPr/>
+            </a:pPr>
+            <a:r>
+              <a:rPr lang="en-US" sz="3199">
+                <a:solidFill>
+                  <a:srgbClr val="475570"/>
+                </a:solidFill>
+                <a:latin typeface="한컴 윤고딕 740"/>
+                <a:ea typeface="한컴 윤고딕 740"/>
+                <a:cs typeface="Source Han Sans KR"/>
+                <a:sym typeface="Source Han Sans KR"/>
+              </a:rPr>
+              <a:t>(제작중)</a:t>
+            </a:r>
+          </a:p>
+          <a:p>
+            <a:pPr lvl="0" algn="l">
+              <a:lnSpc>
+                <a:spcPts val="4479"/>
+              </a:lnSpc>
+              <a:spcBef>
+                <a:spcPct val="0"/>
+              </a:spcBef>
+              <a:defRPr/>
+            </a:pPr>
             <a:endParaRPr lang="en-US" sz="3199">
               <a:solidFill>
                 <a:srgbClr val="475570"/>
@@ -8445,77 +9392,6 @@
       </p:sp>
       <p:sp>
         <p:nvSpPr>
-          <p:cNvPr id="16" name="TextBox 16"/>
-          <p:cNvSpPr txBox="1"/>
-          <p:nvPr/>
-        </p:nvSpPr>
-        <p:spPr>
-          <a:xfrm>
-            <a:off x="4177723" y="5731230"/>
-            <a:ext cx="8461328" cy="1136295"/>
-          </a:xfrm>
-          <a:prstGeom prst="rect">
-            <a:avLst/>
-          </a:prstGeom>
-        </p:spPr>
-        <p:txBody>
-          <a:bodyPr lIns="0" tIns="0" rIns="0" bIns="0" anchor="t">
-            <a:spAutoFit/>
-          </a:bodyPr>
-          <a:lstStyle/>
-          <a:p>
-            <a:pPr lvl="0" algn="l">
-              <a:lnSpc>
-                <a:spcPts val="4479"/>
-              </a:lnSpc>
-              <a:defRPr/>
-            </a:pPr>
-            <a:r>
-              <a:rPr lang="en-US" sz="3199">
-                <a:solidFill>
-                  <a:srgbClr val="475570"/>
-                </a:solidFill>
-                <a:latin typeface="한컴 윤고딕 740"/>
-                <a:ea typeface="한컴 윤고딕 740"/>
-                <a:cs typeface="Source Han Sans KR"/>
-                <a:sym typeface="Source Han Sans KR"/>
-              </a:rPr>
-              <a:t>(제작중)</a:t>
-            </a:r>
-            <a:endParaRPr lang="en-US" sz="3199">
-              <a:solidFill>
-                <a:srgbClr val="475570"/>
-              </a:solidFill>
-              <a:latin typeface="한컴 윤고딕 740"/>
-              <a:ea typeface="한컴 윤고딕 740"/>
-              <a:cs typeface="Source Han Sans KR"/>
-              <a:sym typeface="Source Han Sans KR"/>
-            </a:endParaRPr>
-          </a:p>
-          <a:p>
-            <a:pPr lvl="0" algn="l">
-              <a:lnSpc>
-                <a:spcPts val="4479"/>
-              </a:lnSpc>
-              <a:spcBef>
-                <a:spcPct val="0"/>
-              </a:spcBef>
-              <a:defRPr/>
-            </a:pPr>
-            <a:endParaRPr lang="en-US" sz="3199">
-              <a:solidFill>
-                <a:srgbClr val="475570"/>
-              </a:solidFill>
-              <a:latin typeface="한컴 윤고딕 740"/>
-              <a:ea typeface="한컴 윤고딕 740"/>
-              <a:cs typeface="Source Han Sans KR"/>
-              <a:sym typeface="Source Han Sans KR"/>
-            </a:endParaRPr>
-          </a:p>
-        </p:txBody>
-      </p:sp>
-      <p:sp>
-        <p:nvSpPr>
           <p:cNvPr id="17" name="TextBox 17"/>
           <p:cNvSpPr txBox="1"/>
           <p:nvPr/>
@@ -8547,7 +9423,7 @@
             <a:r>
               <a:rPr lang="en-US" sz="3199">
                 <a:solidFill>
-                  <a:srgbClr val="ff3131"/>
+                  <a:srgbClr val="FF3131"/>
                 </a:solidFill>
                 <a:latin typeface="한컴 윤고딕 740"/>
                 <a:ea typeface="한컴 윤고딕 740"/>
@@ -8556,15 +9432,6 @@
               </a:rPr>
               <a:t>엔진 수업 프로젝트</a:t>
             </a:r>
-            <a:endParaRPr lang="en-US" sz="3199">
-              <a:solidFill>
-                <a:srgbClr val="ff3131"/>
-              </a:solidFill>
-              <a:latin typeface="한컴 윤고딕 740"/>
-              <a:ea typeface="한컴 윤고딕 740"/>
-              <a:cs typeface="Source Han Sans KR"/>
-              <a:sym typeface="Source Han Sans KR"/>
-            </a:endParaRPr>
           </a:p>
           <a:p>
             <a:pPr lvl="0" algn="ctr">
@@ -8579,7 +9446,7 @@
             <a:r>
               <a:rPr lang="en-US" sz="3199">
                 <a:solidFill>
-                  <a:srgbClr val="ff3131"/>
+                  <a:srgbClr val="FF3131"/>
                 </a:solidFill>
                 <a:latin typeface="한컴 윤고딕 740"/>
                 <a:ea typeface="한컴 윤고딕 740"/>
@@ -8588,15 +9455,6 @@
               </a:rPr>
               <a:t>언리얼서버로 매칭, 채팅, 커스텀 동기화 구현 상태.</a:t>
             </a:r>
-            <a:endParaRPr lang="en-US" sz="3199">
-              <a:solidFill>
-                <a:srgbClr val="ff3131"/>
-              </a:solidFill>
-              <a:latin typeface="한컴 윤고딕 740"/>
-              <a:ea typeface="한컴 윤고딕 740"/>
-              <a:cs typeface="Source Han Sans KR"/>
-              <a:sym typeface="Source Han Sans KR"/>
-            </a:endParaRPr>
           </a:p>
           <a:p>
             <a:pPr lvl="0" algn="ctr">
@@ -8610,7 +9468,7 @@
             </a:pPr>
             <a:endParaRPr lang="en-US" sz="3199">
               <a:solidFill>
-                <a:srgbClr val="ff3131"/>
+                <a:srgbClr val="FF3131"/>
               </a:solidFill>
               <a:latin typeface="한컴 윤고딕 740"/>
               <a:ea typeface="한컴 윤고딕 740"/>
@@ -8631,7 +9489,7 @@
             <a:r>
               <a:rPr lang="en-US" sz="3199">
                 <a:solidFill>
-                  <a:srgbClr val="ff3131"/>
+                  <a:srgbClr val="FF3131"/>
                 </a:solidFill>
                 <a:latin typeface="한컴 윤고딕 740"/>
                 <a:ea typeface="한컴 윤고딕 740"/>
@@ -8640,15 +9498,6 @@
               </a:rPr>
               <a:t>→ epoll서버 학습 겸 서버 재작업하려고 함</a:t>
             </a:r>
-            <a:endParaRPr lang="en-US" sz="3199">
-              <a:solidFill>
-                <a:srgbClr val="ff3131"/>
-              </a:solidFill>
-              <a:latin typeface="한컴 윤고딕 740"/>
-              <a:ea typeface="한컴 윤고딕 740"/>
-              <a:cs typeface="Source Han Sans KR"/>
-              <a:sym typeface="Source Han Sans KR"/>
-            </a:endParaRPr>
           </a:p>
           <a:p>
             <a:pPr lvl="0" algn="ctr">
@@ -8663,7 +9512,7 @@
             <a:r>
               <a:rPr lang="en-US" sz="3199">
                 <a:solidFill>
-                  <a:srgbClr val="ff3131"/>
+                  <a:srgbClr val="FF3131"/>
                 </a:solidFill>
                 <a:latin typeface="한컴 윤고딕 740"/>
                 <a:ea typeface="한컴 윤고딕 740"/>
@@ -8672,15 +9521,6 @@
               </a:rPr>
               <a:t>포트폴리오에 넣을지 고민중</a:t>
             </a:r>
-            <a:endParaRPr lang="en-US" sz="3199">
-              <a:solidFill>
-                <a:srgbClr val="ff3131"/>
-              </a:solidFill>
-              <a:latin typeface="한컴 윤고딕 740"/>
-              <a:ea typeface="한컴 윤고딕 740"/>
-              <a:cs typeface="Source Han Sans KR"/>
-              <a:sym typeface="Source Han Sans KR"/>
-            </a:endParaRPr>
           </a:p>
         </p:txBody>
       </p:sp>
@@ -8693,7 +9533,7 @@
             <a:picLocks noRot="1" noChangeAspect="1"/>
           </p:cNvPicPr>
           <p:nvPr>
-            <a:videoFile r:link="rId2"/>
+            <a:videoFile r:link="rId1"/>
           </p:nvPr>
         </p:nvPicPr>
         <p:blipFill rotWithShape="1">
@@ -8731,6 +9571,7 @@
           <a:bodyPr wrap="square">
             <a:spAutoFit/>
           </a:bodyPr>
+          <a:lstStyle/>
           <a:p>
             <a:pPr lvl="0">
               <a:defRPr/>
@@ -8834,13 +9675,14 @@
 </file>
 
 <file path=ppt/slides/slide22.xml><?xml version="1.0" encoding="utf-8"?>
-<p:sld xmlns:r="http://schemas.openxmlformats.org/officeDocument/2006/relationships" xmlns:c="http://schemas.openxmlformats.org/drawingml/2006/chart" xmlns:a="http://schemas.openxmlformats.org/drawingml/2006/main" xmlns:dgm="http://schemas.openxmlformats.org/drawingml/2006/diagram" xmlns:dsp="http://schemas.microsoft.com/office/drawing/2008/diagram" xmlns:p="http://schemas.openxmlformats.org/presentationml/2006/main">
+<p:sld xmlns:a="http://schemas.openxmlformats.org/drawingml/2006/main" xmlns:r="http://schemas.openxmlformats.org/officeDocument/2006/relationships" xmlns:p="http://schemas.openxmlformats.org/presentationml/2006/main">
   <p:cSld>
     <p:bg>
-      <p:bgPr shadeToTitle="0">
+      <p:bgPr>
         <a:solidFill>
-          <a:srgbClr val="fcfdf8"/>
+          <a:srgbClr val="FCFDF8"/>
         </a:solidFill>
+        <a:effectLst/>
       </p:bgPr>
     </p:bg>
     <p:spTree>
@@ -8899,15 +9741,6 @@
               </a:rPr>
               <a:t>기타프로젝트</a:t>
             </a:r>
-            <a:endParaRPr lang="en-US" sz="5000" b="1">
-              <a:solidFill>
-                <a:srgbClr val="475570"/>
-              </a:solidFill>
-              <a:latin typeface="한컴 윤고딕 760"/>
-              <a:ea typeface="한컴 윤고딕 760"/>
-              <a:cs typeface="Canva Sans Bold"/>
-              <a:sym typeface="Canva Sans Bold"/>
-            </a:endParaRPr>
           </a:p>
         </p:txBody>
       </p:sp>
@@ -8953,15 +9786,6 @@
               </a:rPr>
               <a:t>PROJECTS</a:t>
             </a:r>
-            <a:endParaRPr lang="en-US" sz="2000">
-              <a:solidFill>
-                <a:srgbClr val="475570"/>
-              </a:solidFill>
-              <a:latin typeface="한컴 윤고딕 760"/>
-              <a:ea typeface="한컴 윤고딕 760"/>
-              <a:cs typeface="Cabin"/>
-              <a:sym typeface="Cabin"/>
-            </a:endParaRPr>
           </a:p>
         </p:txBody>
       </p:sp>
@@ -9007,26 +9831,17 @@
               </a:rPr>
               <a:t>/ 다크나이츠</a:t>
             </a:r>
-            <a:endParaRPr lang="en-US" sz="2499">
-              <a:solidFill>
-                <a:srgbClr val="475570"/>
-              </a:solidFill>
-              <a:latin typeface="한컴 윤고딕 760"/>
-              <a:ea typeface="한컴 윤고딕 760"/>
-              <a:cs typeface="Source Han Sans KR Bold"/>
-              <a:sym typeface="Source Han Sans KR Bold"/>
-            </a:endParaRPr>
-          </a:p>
-        </p:txBody>
-      </p:sp>
-      <p:sp>
-        <p:nvSpPr>
-          <p:cNvPr name="Freeform 5" id="5"/>
+          </a:p>
+        </p:txBody>
+      </p:sp>
+      <p:sp>
+        <p:nvSpPr>
+          <p:cNvPr id="5" name="Freeform 5"/>
           <p:cNvSpPr/>
           <p:nvPr/>
         </p:nvSpPr>
         <p:spPr>
-          <a:xfrm flipH="false" flipV="false" rot="0">
+          <a:xfrm>
             <a:off x="1133750" y="2962560"/>
             <a:ext cx="5091270" cy="3401591"/>
           </a:xfrm>
@@ -9035,9 +9850,9 @@
             <a:gdLst/>
             <a:ahLst/>
             <a:cxnLst/>
-            <a:rect r="r" b="b" t="t" l="l"/>
+            <a:rect l="l" t="t" r="r" b="b"/>
             <a:pathLst>
-              <a:path h="3401591" w="5091270">
+              <a:path w="5091270" h="3401591">
                 <a:moveTo>
                   <a:pt x="0" y="0"/>
                 </a:moveTo>
@@ -9060,19 +9875,26 @@
           <a:blipFill>
             <a:blip r:embed="rId2"/>
             <a:stretch>
-              <a:fillRect l="0" t="0" r="0" b="0"/>
+              <a:fillRect/>
             </a:stretch>
           </a:blipFill>
         </p:spPr>
-      </p:sp>
-      <p:sp>
-        <p:nvSpPr>
-          <p:cNvPr name="Freeform 6" id="6"/>
+        <p:txBody>
+          <a:bodyPr/>
+          <a:lstStyle/>
+          <a:p>
+            <a:endParaRPr lang="ko-KR" altLang="en-US"/>
+          </a:p>
+        </p:txBody>
+      </p:sp>
+      <p:sp>
+        <p:nvSpPr>
+          <p:cNvPr id="6" name="Freeform 6"/>
           <p:cNvSpPr/>
           <p:nvPr/>
         </p:nvSpPr>
         <p:spPr>
-          <a:xfrm flipH="false" flipV="false" rot="0">
+          <a:xfrm>
             <a:off x="6559004" y="2962560"/>
             <a:ext cx="4959892" cy="3345959"/>
           </a:xfrm>
@@ -9081,9 +9903,9 @@
             <a:gdLst/>
             <a:ahLst/>
             <a:cxnLst/>
-            <a:rect r="r" b="b" t="t" l="l"/>
+            <a:rect l="l" t="t" r="r" b="b"/>
             <a:pathLst>
-              <a:path h="3345959" w="4959892">
+              <a:path w="4959892" h="3345959">
                 <a:moveTo>
                   <a:pt x="0" y="0"/>
                 </a:moveTo>
@@ -9106,19 +9928,26 @@
           <a:blipFill>
             <a:blip r:embed="rId3"/>
             <a:stretch>
-              <a:fillRect l="0" t="0" r="0" b="0"/>
+              <a:fillRect/>
             </a:stretch>
           </a:blipFill>
         </p:spPr>
-      </p:sp>
-      <p:sp>
-        <p:nvSpPr>
-          <p:cNvPr name="Freeform 7" id="7"/>
+        <p:txBody>
+          <a:bodyPr/>
+          <a:lstStyle/>
+          <a:p>
+            <a:endParaRPr lang="ko-KR" altLang="en-US"/>
+          </a:p>
+        </p:txBody>
+      </p:sp>
+      <p:sp>
+        <p:nvSpPr>
+          <p:cNvPr id="7" name="Freeform 7"/>
           <p:cNvSpPr/>
           <p:nvPr/>
         </p:nvSpPr>
         <p:spPr>
-          <a:xfrm flipH="false" flipV="false" rot="0">
+          <a:xfrm>
             <a:off x="11767550" y="2962560"/>
             <a:ext cx="5386700" cy="3373775"/>
           </a:xfrm>
@@ -9127,9 +9956,9 @@
             <a:gdLst/>
             <a:ahLst/>
             <a:cxnLst/>
-            <a:rect r="r" b="b" t="t" l="l"/>
+            <a:rect l="l" t="t" r="r" b="b"/>
             <a:pathLst>
-              <a:path h="3373775" w="5386700">
+              <a:path w="5386700" h="3373775">
                 <a:moveTo>
                   <a:pt x="0" y="0"/>
                 </a:moveTo>
@@ -9152,10 +9981,17 @@
           <a:blipFill>
             <a:blip r:embed="rId4"/>
             <a:stretch>
-              <a:fillRect l="-12146" t="0" r="0" b="0"/>
+              <a:fillRect l="-12146"/>
             </a:stretch>
           </a:blipFill>
         </p:spPr>
+        <p:txBody>
+          <a:bodyPr/>
+          <a:lstStyle/>
+          <a:p>
+            <a:endParaRPr lang="ko-KR" altLang="en-US"/>
+          </a:p>
+        </p:txBody>
       </p:sp>
       <p:sp>
         <p:nvSpPr>
@@ -9199,15 +10035,6 @@
               </a:rPr>
               <a:t>개발기간</a:t>
             </a:r>
-            <a:endParaRPr lang="en-US" sz="2799" b="1">
-              <a:solidFill>
-                <a:srgbClr val="475570"/>
-              </a:solidFill>
-              <a:latin typeface="한컴 윤고딕 740"/>
-              <a:ea typeface="한컴 윤고딕 740"/>
-              <a:cs typeface="Source Han Sans KR Bold"/>
-              <a:sym typeface="Source Han Sans KR Bold"/>
-            </a:endParaRPr>
           </a:p>
         </p:txBody>
       </p:sp>
@@ -9253,15 +10080,6 @@
               </a:rPr>
               <a:t>개발도구</a:t>
             </a:r>
-            <a:endParaRPr lang="en-US" sz="2799" b="1">
-              <a:solidFill>
-                <a:srgbClr val="475570"/>
-              </a:solidFill>
-              <a:latin typeface="한컴 윤고딕 740"/>
-              <a:ea typeface="한컴 윤고딕 740"/>
-              <a:cs typeface="Source Han Sans KR Bold"/>
-              <a:sym typeface="Source Han Sans KR Bold"/>
-            </a:endParaRPr>
           </a:p>
         </p:txBody>
       </p:sp>
@@ -9307,15 +10125,6 @@
               </a:rPr>
               <a:t>개발인원</a:t>
             </a:r>
-            <a:endParaRPr lang="en-US" sz="2799" b="1">
-              <a:solidFill>
-                <a:srgbClr val="475570"/>
-              </a:solidFill>
-              <a:latin typeface="한컴 윤고딕 740"/>
-              <a:ea typeface="한컴 윤고딕 740"/>
-              <a:cs typeface="Source Han Sans KR Bold"/>
-              <a:sym typeface="Source Han Sans KR Bold"/>
-            </a:endParaRPr>
           </a:p>
         </p:txBody>
       </p:sp>
@@ -9361,15 +10170,6 @@
               </a:rPr>
               <a:t>담당업무</a:t>
             </a:r>
-            <a:endParaRPr lang="en-US" sz="2799" b="1">
-              <a:solidFill>
-                <a:srgbClr val="475570"/>
-              </a:solidFill>
-              <a:latin typeface="한컴 윤고딕 740"/>
-              <a:ea typeface="한컴 윤고딕 740"/>
-              <a:cs typeface="Source Han Sans KR Bold"/>
-              <a:sym typeface="Source Han Sans KR Bold"/>
-            </a:endParaRPr>
           </a:p>
         </p:txBody>
       </p:sp>
@@ -9415,15 +10215,6 @@
               </a:rPr>
               <a:t>24.11 (5주)</a:t>
             </a:r>
-            <a:endParaRPr lang="en-US" sz="2799">
-              <a:solidFill>
-                <a:srgbClr val="475570"/>
-              </a:solidFill>
-              <a:latin typeface="한컴 윤고딕 740"/>
-              <a:ea typeface="한컴 윤고딕 740"/>
-              <a:cs typeface="Source Han Sans KR"/>
-              <a:sym typeface="Source Han Sans KR"/>
-            </a:endParaRPr>
           </a:p>
         </p:txBody>
       </p:sp>
@@ -9469,15 +10260,6 @@
               </a:rPr>
               <a:t>C++, WinAPI</a:t>
             </a:r>
-            <a:endParaRPr lang="en-US" sz="2799">
-              <a:solidFill>
-                <a:srgbClr val="475570"/>
-              </a:solidFill>
-              <a:latin typeface="한컴 윤고딕 740"/>
-              <a:ea typeface="한컴 윤고딕 740"/>
-              <a:cs typeface="Source Han Sans KR"/>
-              <a:sym typeface="Source Han Sans KR"/>
-            </a:endParaRPr>
           </a:p>
         </p:txBody>
       </p:sp>
@@ -9508,6 +10290,7 @@
         </p:spPr>
         <p:txBody>
           <a:bodyPr wrap="square" anchor="ctr"/>
+          <a:lstStyle/>
           <a:p>
             <a:pPr lvl="0" algn="ctr">
               <a:defRPr/>
@@ -9561,15 +10344,6 @@
               </a:rPr>
               <a:t>3명 (서버1, 클라이언트 2명)</a:t>
             </a:r>
-            <a:endParaRPr lang="en-US" sz="2799">
-              <a:solidFill>
-                <a:srgbClr val="475570"/>
-              </a:solidFill>
-              <a:latin typeface="한컴 윤고딕 740"/>
-              <a:ea typeface="한컴 윤고딕 740"/>
-              <a:cs typeface="Source Han Sans KR"/>
-              <a:sym typeface="Source Han Sans KR"/>
-            </a:endParaRPr>
           </a:p>
         </p:txBody>
       </p:sp>
@@ -9600,6 +10374,7 @@
         </p:spPr>
         <p:txBody>
           <a:bodyPr wrap="square" anchor="ctr"/>
+          <a:lstStyle/>
           <a:p>
             <a:pPr lvl="0" algn="ctr">
               <a:defRPr/>
@@ -9638,6 +10413,7 @@
         </p:spPr>
         <p:txBody>
           <a:bodyPr wrap="square" anchor="ctr"/>
+          <a:lstStyle/>
           <a:p>
             <a:pPr lvl="0" algn="ctr">
               <a:defRPr/>
@@ -9676,6 +10452,7 @@
         </p:spPr>
         <p:txBody>
           <a:bodyPr wrap="square" anchor="ctr"/>
+          <a:lstStyle/>
           <a:p>
             <a:pPr lvl="0" algn="ctr">
               <a:defRPr/>
@@ -9729,15 +10506,6 @@
               </a:rPr>
               <a:t>네트워크 프레임워크 제작</a:t>
             </a:r>
-            <a:endParaRPr lang="en-US" sz="2799">
-              <a:solidFill>
-                <a:srgbClr val="475570"/>
-              </a:solidFill>
-              <a:latin typeface="한컴 윤고딕 740"/>
-              <a:ea typeface="한컴 윤고딕 740"/>
-              <a:cs typeface="Source Han Sans KR"/>
-              <a:sym typeface="Source Han Sans KR"/>
-            </a:endParaRPr>
           </a:p>
         </p:txBody>
       </p:sp>
@@ -9750,14 +10518,14 @@
         <p:spPr>
           <a:xfrm>
             <a:off x="1238801" y="2229134"/>
-            <a:ext cx="5271027" cy="533116"/>
+            <a:ext cx="7676599" cy="501804"/>
           </a:xfrm>
           <a:prstGeom prst="rect">
             <a:avLst/>
           </a:prstGeom>
         </p:spPr>
         <p:txBody>
-          <a:bodyPr lIns="0" tIns="0" rIns="0" bIns="0" anchor="t">
+          <a:bodyPr wrap="square" lIns="0" tIns="0" rIns="0" bIns="0" anchor="t">
             <a:spAutoFit/>
           </a:bodyPr>
           <a:lstStyle/>
@@ -9772,18 +10540,102 @@
               <a:defRPr/>
             </a:pPr>
             <a:r>
-              <a:rPr lang="en-US" sz="2999">
-                <a:solidFill>
-                  <a:srgbClr val="475570"/>
-                </a:solidFill>
-                <a:latin typeface="한컴 윤고딕 740"/>
-                <a:ea typeface="한컴 윤고딕 740"/>
-                <a:cs typeface="Source Han Sans KR"/>
-                <a:sym typeface="Source Han Sans KR"/>
-              </a:rPr>
-              <a:t>횡스크롤 액션 슈팅 게임</a:t>
-            </a:r>
-            <a:endParaRPr lang="en-US" sz="2999">
+              <a:rPr lang="ko-KR" altLang="en-US" sz="2999" dirty="0">
+                <a:solidFill>
+                  <a:srgbClr val="475570"/>
+                </a:solidFill>
+                <a:latin typeface="한컴 윤고딕 740"/>
+                <a:ea typeface="한컴 윤고딕 740"/>
+                <a:cs typeface="Source Han Sans KR"/>
+                <a:sym typeface="Source Han Sans KR"/>
+              </a:rPr>
+              <a:t>멀티플레이어 </a:t>
+            </a:r>
+            <a:r>
+              <a:rPr lang="en-US" sz="2999" dirty="0" err="1">
+                <a:solidFill>
+                  <a:srgbClr val="475570"/>
+                </a:solidFill>
+                <a:latin typeface="한컴 윤고딕 740"/>
+                <a:ea typeface="한컴 윤고딕 740"/>
+                <a:cs typeface="Source Han Sans KR"/>
+                <a:sym typeface="Source Han Sans KR"/>
+              </a:rPr>
+              <a:t>횡스크롤</a:t>
+            </a:r>
+            <a:r>
+              <a:rPr lang="en-US" sz="2999" dirty="0">
+                <a:solidFill>
+                  <a:srgbClr val="475570"/>
+                </a:solidFill>
+                <a:latin typeface="한컴 윤고딕 740"/>
+                <a:ea typeface="한컴 윤고딕 740"/>
+                <a:cs typeface="Source Han Sans KR"/>
+                <a:sym typeface="Source Han Sans KR"/>
+              </a:rPr>
+              <a:t> </a:t>
+            </a:r>
+            <a:r>
+              <a:rPr lang="en-US" sz="2999" dirty="0" err="1">
+                <a:solidFill>
+                  <a:srgbClr val="475570"/>
+                </a:solidFill>
+                <a:latin typeface="한컴 윤고딕 740"/>
+                <a:ea typeface="한컴 윤고딕 740"/>
+                <a:cs typeface="Source Han Sans KR"/>
+                <a:sym typeface="Source Han Sans KR"/>
+              </a:rPr>
+              <a:t>액션</a:t>
+            </a:r>
+            <a:r>
+              <a:rPr lang="en-US" sz="2999" dirty="0">
+                <a:solidFill>
+                  <a:srgbClr val="475570"/>
+                </a:solidFill>
+                <a:latin typeface="한컴 윤고딕 740"/>
+                <a:ea typeface="한컴 윤고딕 740"/>
+                <a:cs typeface="Source Han Sans KR"/>
+                <a:sym typeface="Source Han Sans KR"/>
+              </a:rPr>
+              <a:t> </a:t>
+            </a:r>
+            <a:r>
+              <a:rPr lang="en-US" sz="2999" dirty="0" err="1">
+                <a:solidFill>
+                  <a:srgbClr val="475570"/>
+                </a:solidFill>
+                <a:latin typeface="한컴 윤고딕 740"/>
+                <a:ea typeface="한컴 윤고딕 740"/>
+                <a:cs typeface="Source Han Sans KR"/>
+                <a:sym typeface="Source Han Sans KR"/>
+              </a:rPr>
+              <a:t>슈팅</a:t>
+            </a:r>
+            <a:r>
+              <a:rPr lang="en-US" sz="2999" dirty="0">
+                <a:solidFill>
+                  <a:srgbClr val="475570"/>
+                </a:solidFill>
+                <a:latin typeface="한컴 윤고딕 740"/>
+                <a:ea typeface="한컴 윤고딕 740"/>
+                <a:cs typeface="Source Han Sans KR"/>
+                <a:sym typeface="Source Han Sans KR"/>
+              </a:rPr>
+              <a:t> </a:t>
+            </a:r>
+            <a:r>
+              <a:rPr lang="en-US" sz="2999" dirty="0" err="1">
+                <a:solidFill>
+                  <a:srgbClr val="475570"/>
+                </a:solidFill>
+                <a:latin typeface="한컴 윤고딕 740"/>
+                <a:ea typeface="한컴 윤고딕 740"/>
+                <a:cs typeface="Source Han Sans KR"/>
+                <a:sym typeface="Source Han Sans KR"/>
+              </a:rPr>
+              <a:t>게임</a:t>
+            </a:r>
+            <a:endParaRPr lang="en-US" sz="2999" dirty="0">
               <a:solidFill>
                 <a:srgbClr val="475570"/>
               </a:solidFill>
@@ -9804,13 +10656,14 @@
 </file>
 
 <file path=ppt/slides/slide23.xml><?xml version="1.0" encoding="utf-8"?>
-<p:sld xmlns:r="http://schemas.openxmlformats.org/officeDocument/2006/relationships" xmlns:c="http://schemas.openxmlformats.org/drawingml/2006/chart" xmlns:a="http://schemas.openxmlformats.org/drawingml/2006/main" xmlns:dgm="http://schemas.openxmlformats.org/drawingml/2006/diagram" xmlns:dsp="http://schemas.microsoft.com/office/drawing/2008/diagram" xmlns:p="http://schemas.openxmlformats.org/presentationml/2006/main">
+<p:sld xmlns:a="http://schemas.openxmlformats.org/drawingml/2006/main" xmlns:r="http://schemas.openxmlformats.org/officeDocument/2006/relationships" xmlns:p="http://schemas.openxmlformats.org/presentationml/2006/main">
   <p:cSld>
     <p:bg>
-      <p:bgPr shadeToTitle="0">
+      <p:bgPr>
         <a:solidFill>
-          <a:srgbClr val="fcfdf8"/>
+          <a:srgbClr val="FCFDF8"/>
         </a:solidFill>
+        <a:effectLst/>
       </p:bgPr>
     </p:bg>
     <p:spTree>
@@ -9854,6 +10707,7 @@
         </p:spPr>
         <p:txBody>
           <a:bodyPr wrap="square" anchor="ctr"/>
+          <a:lstStyle/>
           <a:p>
             <a:pPr lvl="0" algn="ctr">
               <a:defRPr/>
@@ -9892,6 +10746,7 @@
         </p:spPr>
         <p:txBody>
           <a:bodyPr wrap="square" anchor="ctr"/>
+          <a:lstStyle/>
           <a:p>
             <a:pPr lvl="0" algn="ctr">
               <a:defRPr/>
@@ -9930,6 +10785,7 @@
         </p:spPr>
         <p:txBody>
           <a:bodyPr wrap="square" anchor="ctr"/>
+          <a:lstStyle/>
           <a:p>
             <a:pPr lvl="0" algn="ctr">
               <a:defRPr/>
@@ -9983,15 +10839,6 @@
               </a:rPr>
               <a:t>기타프로젝트</a:t>
             </a:r>
-            <a:endParaRPr lang="en-US" sz="5000" b="1">
-              <a:solidFill>
-                <a:srgbClr val="475570"/>
-              </a:solidFill>
-              <a:latin typeface="한컴 윤고딕 760"/>
-              <a:ea typeface="한컴 윤고딕 760"/>
-              <a:cs typeface="Canva Sans Bold"/>
-              <a:sym typeface="Canva Sans Bold"/>
-            </a:endParaRPr>
           </a:p>
         </p:txBody>
       </p:sp>
@@ -10037,15 +10884,6 @@
               </a:rPr>
               <a:t>PROJECTS</a:t>
             </a:r>
-            <a:endParaRPr lang="en-US" sz="2000">
-              <a:solidFill>
-                <a:srgbClr val="475570"/>
-              </a:solidFill>
-              <a:latin typeface="한컴 윤고딕 760"/>
-              <a:ea typeface="한컴 윤고딕 760"/>
-              <a:cs typeface="Cabin"/>
-              <a:sym typeface="Cabin"/>
-            </a:endParaRPr>
           </a:p>
         </p:txBody>
       </p:sp>
@@ -10103,15 +10941,6 @@
               </a:rPr>
               <a:t>GravityRacing</a:t>
             </a:r>
-            <a:endParaRPr lang="en-US" sz="2499">
-              <a:solidFill>
-                <a:srgbClr val="475570"/>
-              </a:solidFill>
-              <a:latin typeface="한컴 윤고딕 760"/>
-              <a:ea typeface="한컴 윤고딕 760"/>
-              <a:cs typeface="Source Han Sans KR Bold"/>
-              <a:sym typeface="Source Han Sans KR Bold"/>
-            </a:endParaRPr>
           </a:p>
         </p:txBody>
       </p:sp>
@@ -10157,15 +10986,6 @@
               </a:rPr>
               <a:t>개발도구</a:t>
             </a:r>
-            <a:endParaRPr lang="en-US" sz="2799" b="1">
-              <a:solidFill>
-                <a:srgbClr val="475570"/>
-              </a:solidFill>
-              <a:latin typeface="한컴 윤고딕 740"/>
-              <a:ea typeface="한컴 윤고딕 740"/>
-              <a:cs typeface="Source Han Sans KR Bold"/>
-              <a:sym typeface="Source Han Sans KR Bold"/>
-            </a:endParaRPr>
           </a:p>
         </p:txBody>
       </p:sp>
@@ -10211,15 +11031,6 @@
               </a:rPr>
               <a:t>개발인원</a:t>
             </a:r>
-            <a:endParaRPr lang="en-US" sz="2799" b="1">
-              <a:solidFill>
-                <a:srgbClr val="475570"/>
-              </a:solidFill>
-              <a:latin typeface="한컴 윤고딕 740"/>
-              <a:ea typeface="한컴 윤고딕 740"/>
-              <a:cs typeface="Source Han Sans KR Bold"/>
-              <a:sym typeface="Source Han Sans KR Bold"/>
-            </a:endParaRPr>
           </a:p>
         </p:txBody>
       </p:sp>
@@ -10265,15 +11076,6 @@
               </a:rPr>
               <a:t>담당업무</a:t>
             </a:r>
-            <a:endParaRPr lang="en-US" sz="2799" b="1">
-              <a:solidFill>
-                <a:srgbClr val="475570"/>
-              </a:solidFill>
-              <a:latin typeface="한컴 윤고딕 740"/>
-              <a:ea typeface="한컴 윤고딕 740"/>
-              <a:cs typeface="Source Han Sans KR Bold"/>
-              <a:sym typeface="Source Han Sans KR Bold"/>
-            </a:endParaRPr>
           </a:p>
         </p:txBody>
       </p:sp>
@@ -10304,6 +11106,7 @@
         </p:spPr>
         <p:txBody>
           <a:bodyPr wrap="square" anchor="ctr"/>
+          <a:lstStyle/>
           <a:p>
             <a:pPr lvl="0" algn="ctr">
               <a:defRPr/>
@@ -10317,12 +11120,12 @@
       </p:sp>
       <p:sp>
         <p:nvSpPr>
-          <p:cNvPr name="Freeform 12" id="12"/>
+          <p:cNvPr id="12" name="Freeform 12"/>
           <p:cNvSpPr/>
           <p:nvPr/>
         </p:nvSpPr>
         <p:spPr>
-          <a:xfrm flipH="false" flipV="false" rot="0">
+          <a:xfrm>
             <a:off x="1028700" y="3475747"/>
             <a:ext cx="5186143" cy="2534728"/>
           </a:xfrm>
@@ -10331,9 +11134,9 @@
             <a:gdLst/>
             <a:ahLst/>
             <a:cxnLst/>
-            <a:rect r="r" b="b" t="t" l="l"/>
+            <a:rect l="l" t="t" r="r" b="b"/>
             <a:pathLst>
-              <a:path h="2534728" w="5186143">
+              <a:path w="5186143" h="2534728">
                 <a:moveTo>
                   <a:pt x="0" y="0"/>
                 </a:moveTo>
@@ -10356,19 +11159,26 @@
           <a:blipFill>
             <a:blip r:embed="rId2"/>
             <a:stretch>
-              <a:fillRect l="-151" t="0" r="-151" b="0"/>
+              <a:fillRect l="-151" r="-151"/>
             </a:stretch>
           </a:blipFill>
         </p:spPr>
-      </p:sp>
-      <p:sp>
-        <p:nvSpPr>
-          <p:cNvPr name="Freeform 13" id="13"/>
+        <p:txBody>
+          <a:bodyPr/>
+          <a:lstStyle/>
+          <a:p>
+            <a:endParaRPr lang="ko-KR" altLang="en-US"/>
+          </a:p>
+        </p:txBody>
+      </p:sp>
+      <p:sp>
+        <p:nvSpPr>
+          <p:cNvPr id="13" name="Freeform 13"/>
           <p:cNvSpPr/>
           <p:nvPr/>
         </p:nvSpPr>
         <p:spPr>
-          <a:xfrm flipH="false" flipV="false" rot="0">
+          <a:xfrm>
             <a:off x="12105211" y="3514987"/>
             <a:ext cx="5410269" cy="2495487"/>
           </a:xfrm>
@@ -10377,9 +11187,9 @@
             <a:gdLst/>
             <a:ahLst/>
             <a:cxnLst/>
-            <a:rect r="r" b="b" t="t" l="l"/>
+            <a:rect l="l" t="t" r="r" b="b"/>
             <a:pathLst>
-              <a:path h="2495487" w="5410269">
+              <a:path w="5410269" h="2495487">
                 <a:moveTo>
                   <a:pt x="0" y="0"/>
                 </a:moveTo>
@@ -10402,19 +11212,26 @@
           <a:blipFill>
             <a:blip r:embed="rId3"/>
             <a:stretch>
-              <a:fillRect l="0" t="0" r="0" b="0"/>
+              <a:fillRect/>
             </a:stretch>
           </a:blipFill>
         </p:spPr>
-      </p:sp>
-      <p:sp>
-        <p:nvSpPr>
-          <p:cNvPr name="Freeform 14" id="14"/>
+        <p:txBody>
+          <a:bodyPr/>
+          <a:lstStyle/>
+          <a:p>
+            <a:endParaRPr lang="ko-KR" altLang="en-US"/>
+          </a:p>
+        </p:txBody>
+      </p:sp>
+      <p:sp>
+        <p:nvSpPr>
+          <p:cNvPr id="14" name="Freeform 14"/>
           <p:cNvSpPr/>
           <p:nvPr/>
         </p:nvSpPr>
         <p:spPr>
-          <a:xfrm flipH="false" flipV="false" rot="0">
+          <a:xfrm>
             <a:off x="6389807" y="3514987"/>
             <a:ext cx="5540440" cy="2555528"/>
           </a:xfrm>
@@ -10423,9 +11240,9 @@
             <a:gdLst/>
             <a:ahLst/>
             <a:cxnLst/>
-            <a:rect r="r" b="b" t="t" l="l"/>
+            <a:rect l="l" t="t" r="r" b="b"/>
             <a:pathLst>
-              <a:path h="2555528" w="5540440">
+              <a:path w="5540440" h="2555528">
                 <a:moveTo>
                   <a:pt x="0" y="0"/>
                 </a:moveTo>
@@ -10448,10 +11265,17 @@
           <a:blipFill>
             <a:blip r:embed="rId4"/>
             <a:stretch>
-              <a:fillRect l="0" t="0" r="0" b="0"/>
+              <a:fillRect/>
             </a:stretch>
           </a:blipFill>
         </p:spPr>
+        <p:txBody>
+          <a:bodyPr/>
+          <a:lstStyle/>
+          <a:p>
+            <a:endParaRPr lang="ko-KR" altLang="en-US"/>
+          </a:p>
+        </p:txBody>
       </p:sp>
       <p:sp>
         <p:nvSpPr>
@@ -10495,15 +11319,6 @@
               </a:rPr>
               <a:t>개발기간</a:t>
             </a:r>
-            <a:endParaRPr lang="en-US" sz="2799" b="1">
-              <a:solidFill>
-                <a:srgbClr val="475570"/>
-              </a:solidFill>
-              <a:latin typeface="한컴 윤고딕 740"/>
-              <a:ea typeface="한컴 윤고딕 740"/>
-              <a:cs typeface="Source Han Sans KR Bold"/>
-              <a:sym typeface="Source Han Sans KR Bold"/>
-            </a:endParaRPr>
           </a:p>
         </p:txBody>
       </p:sp>
@@ -10538,6 +11353,51 @@
               <a:defRPr/>
             </a:pPr>
             <a:r>
+              <a:rPr lang="en-US" sz="2799" dirty="0">
+                <a:solidFill>
+                  <a:srgbClr val="475570"/>
+                </a:solidFill>
+                <a:latin typeface="한컴 윤고딕 740"/>
+                <a:ea typeface="한컴 윤고딕 740"/>
+                <a:cs typeface="Source Han Sans KR"/>
+                <a:sym typeface="Source Han Sans KR"/>
+              </a:rPr>
+              <a:t>25.08 (2주)</a:t>
+            </a:r>
+          </a:p>
+        </p:txBody>
+      </p:sp>
+      <p:sp>
+        <p:nvSpPr>
+          <p:cNvPr id="17" name="TextBox 17"/>
+          <p:cNvSpPr txBox="1"/>
+          <p:nvPr/>
+        </p:nvSpPr>
+        <p:spPr>
+          <a:xfrm>
+            <a:off x="4160052" y="7413133"/>
+            <a:ext cx="8650548" cy="492617"/>
+          </a:xfrm>
+          <a:prstGeom prst="rect">
+            <a:avLst/>
+          </a:prstGeom>
+        </p:spPr>
+        <p:txBody>
+          <a:bodyPr lIns="0" tIns="0" rIns="0" bIns="0" anchor="t">
+            <a:spAutoFit/>
+          </a:bodyPr>
+          <a:lstStyle/>
+          <a:p>
+            <a:pPr lvl="0" algn="l">
+              <a:lnSpc>
+                <a:spcPts val="3918"/>
+              </a:lnSpc>
+              <a:spcBef>
+                <a:spcPct val="0"/>
+              </a:spcBef>
+              <a:defRPr/>
+            </a:pPr>
+            <a:r>
               <a:rPr lang="en-US" sz="2799">
                 <a:solidFill>
                   <a:srgbClr val="475570"/>
@@ -10547,9 +11407,231 @@
                 <a:cs typeface="Source Han Sans KR"/>
                 <a:sym typeface="Source Han Sans KR"/>
               </a:rPr>
-              <a:t>25.08 (2주)</a:t>
-            </a:r>
-            <a:endParaRPr lang="en-US" sz="2799">
+              <a:t>Unreal5.5</a:t>
+            </a:r>
+          </a:p>
+        </p:txBody>
+      </p:sp>
+      <p:sp>
+        <p:nvSpPr>
+          <p:cNvPr id="18" name="TextBox 18"/>
+          <p:cNvSpPr txBox="1"/>
+          <p:nvPr/>
+        </p:nvSpPr>
+        <p:spPr>
+          <a:xfrm>
+            <a:off x="4160053" y="8086459"/>
+            <a:ext cx="8327978" cy="486041"/>
+          </a:xfrm>
+          <a:prstGeom prst="rect">
+            <a:avLst/>
+          </a:prstGeom>
+        </p:spPr>
+        <p:txBody>
+          <a:bodyPr lIns="0" tIns="0" rIns="0" bIns="0" anchor="t">
+            <a:spAutoFit/>
+          </a:bodyPr>
+          <a:lstStyle/>
+          <a:p>
+            <a:pPr lvl="0" algn="l">
+              <a:lnSpc>
+                <a:spcPts val="3918"/>
+              </a:lnSpc>
+              <a:spcBef>
+                <a:spcPct val="0"/>
+              </a:spcBef>
+              <a:defRPr/>
+            </a:pPr>
+            <a:r>
+              <a:rPr lang="en-US" sz="2799" dirty="0">
+                <a:solidFill>
+                  <a:srgbClr val="475570"/>
+                </a:solidFill>
+                <a:latin typeface="한컴 윤고딕 740"/>
+                <a:ea typeface="한컴 윤고딕 740"/>
+                <a:cs typeface="Source Han Sans KR"/>
+                <a:sym typeface="Source Han Sans KR"/>
+              </a:rPr>
+              <a:t>3명 (</a:t>
+            </a:r>
+            <a:r>
+              <a:rPr lang="en-US" sz="2799" dirty="0" err="1">
+                <a:solidFill>
+                  <a:srgbClr val="475570"/>
+                </a:solidFill>
+                <a:latin typeface="한컴 윤고딕 740"/>
+                <a:ea typeface="한컴 윤고딕 740"/>
+                <a:cs typeface="Source Han Sans KR"/>
+                <a:sym typeface="Source Han Sans KR"/>
+              </a:rPr>
+              <a:t>클라이언트</a:t>
+            </a:r>
+            <a:r>
+              <a:rPr lang="en-US" sz="2799" dirty="0">
+                <a:solidFill>
+                  <a:srgbClr val="475570"/>
+                </a:solidFill>
+                <a:latin typeface="한컴 윤고딕 740"/>
+                <a:ea typeface="한컴 윤고딕 740"/>
+                <a:cs typeface="Source Han Sans KR"/>
+                <a:sym typeface="Source Han Sans KR"/>
+              </a:rPr>
+              <a:t> 2, </a:t>
+            </a:r>
+            <a:r>
+              <a:rPr lang="en-US" sz="2799" dirty="0" err="1">
+                <a:solidFill>
+                  <a:srgbClr val="475570"/>
+                </a:solidFill>
+                <a:latin typeface="한컴 윤고딕 740"/>
+                <a:ea typeface="한컴 윤고딕 740"/>
+                <a:cs typeface="Source Han Sans KR"/>
+                <a:sym typeface="Source Han Sans KR"/>
+              </a:rPr>
+              <a:t>모델링</a:t>
+            </a:r>
+            <a:r>
+              <a:rPr lang="en-US" sz="2799" dirty="0">
+                <a:solidFill>
+                  <a:srgbClr val="475570"/>
+                </a:solidFill>
+                <a:latin typeface="한컴 윤고딕 740"/>
+                <a:ea typeface="한컴 윤고딕 740"/>
+                <a:cs typeface="Source Han Sans KR"/>
+                <a:sym typeface="Source Han Sans KR"/>
+              </a:rPr>
+              <a:t> 1)</a:t>
+            </a:r>
+          </a:p>
+        </p:txBody>
+      </p:sp>
+      <p:sp>
+        <p:nvSpPr>
+          <p:cNvPr id="19" name="TextBox 19"/>
+          <p:cNvSpPr txBox="1"/>
+          <p:nvPr/>
+        </p:nvSpPr>
+        <p:spPr>
+          <a:xfrm>
+            <a:off x="4169747" y="8776961"/>
+            <a:ext cx="8461328" cy="490864"/>
+          </a:xfrm>
+          <a:prstGeom prst="rect">
+            <a:avLst/>
+          </a:prstGeom>
+        </p:spPr>
+        <p:txBody>
+          <a:bodyPr lIns="0" tIns="0" rIns="0" bIns="0" anchor="t">
+            <a:spAutoFit/>
+          </a:bodyPr>
+          <a:lstStyle/>
+          <a:p>
+            <a:pPr lvl="0" algn="l">
+              <a:lnSpc>
+                <a:spcPts val="3918"/>
+              </a:lnSpc>
+              <a:spcBef>
+                <a:spcPct val="0"/>
+              </a:spcBef>
+              <a:defRPr/>
+            </a:pPr>
+            <a:r>
+              <a:rPr lang="en-US" sz="2799" dirty="0">
+                <a:solidFill>
+                  <a:srgbClr val="475570"/>
+                </a:solidFill>
+                <a:latin typeface="한컴 윤고딕 740"/>
+                <a:ea typeface="한컴 윤고딕 740"/>
+                <a:cs typeface="Source Han Sans KR"/>
+                <a:sym typeface="Source Han Sans KR"/>
+              </a:rPr>
+              <a:t>UI/</a:t>
+            </a:r>
+            <a:r>
+              <a:rPr lang="en-US" sz="2799" dirty="0" err="1">
+                <a:solidFill>
+                  <a:srgbClr val="475570"/>
+                </a:solidFill>
+                <a:latin typeface="한컴 윤고딕 740"/>
+                <a:ea typeface="한컴 윤고딕 740"/>
+                <a:cs typeface="Source Han Sans KR"/>
+                <a:sym typeface="Source Han Sans KR"/>
+              </a:rPr>
+              <a:t>사운드</a:t>
+            </a:r>
+            <a:r>
+              <a:rPr lang="en-US" sz="2799" dirty="0">
+                <a:solidFill>
+                  <a:srgbClr val="475570"/>
+                </a:solidFill>
+                <a:latin typeface="한컴 윤고딕 740"/>
+                <a:ea typeface="한컴 윤고딕 740"/>
+                <a:cs typeface="Source Han Sans KR"/>
+                <a:sym typeface="Source Han Sans KR"/>
+              </a:rPr>
+              <a:t> </a:t>
+            </a:r>
+            <a:r>
+              <a:rPr lang="en-US" sz="2799" dirty="0" err="1">
+                <a:solidFill>
+                  <a:srgbClr val="475570"/>
+                </a:solidFill>
+                <a:latin typeface="한컴 윤고딕 740"/>
+                <a:ea typeface="한컴 윤고딕 740"/>
+                <a:cs typeface="Source Han Sans KR"/>
+                <a:sym typeface="Source Han Sans KR"/>
+              </a:rPr>
+              <a:t>처리</a:t>
+            </a:r>
+            <a:r>
+              <a:rPr lang="en-US" sz="2799" dirty="0">
+                <a:solidFill>
+                  <a:srgbClr val="475570"/>
+                </a:solidFill>
+                <a:latin typeface="한컴 윤고딕 740"/>
+                <a:ea typeface="한컴 윤고딕 740"/>
+                <a:cs typeface="Source Han Sans KR"/>
+                <a:sym typeface="Source Han Sans KR"/>
+              </a:rPr>
+              <a:t>, 앱 </a:t>
+            </a:r>
+            <a:r>
+              <a:rPr lang="en-US" sz="2799" dirty="0" err="1">
+                <a:solidFill>
+                  <a:srgbClr val="475570"/>
+                </a:solidFill>
+                <a:latin typeface="한컴 윤고딕 740"/>
+                <a:ea typeface="한컴 윤고딕 740"/>
+                <a:cs typeface="Source Han Sans KR"/>
+                <a:sym typeface="Source Han Sans KR"/>
+              </a:rPr>
+              <a:t>스토어</a:t>
+            </a:r>
+            <a:r>
+              <a:rPr lang="en-US" sz="2799" dirty="0">
+                <a:solidFill>
+                  <a:srgbClr val="475570"/>
+                </a:solidFill>
+                <a:latin typeface="한컴 윤고딕 740"/>
+                <a:ea typeface="한컴 윤고딕 740"/>
+                <a:cs typeface="Source Han Sans KR"/>
+                <a:sym typeface="Source Han Sans KR"/>
+              </a:rPr>
+              <a:t> </a:t>
+            </a:r>
+            <a:r>
+              <a:rPr lang="en-US" sz="2799" dirty="0" err="1">
+                <a:solidFill>
+                  <a:srgbClr val="475570"/>
+                </a:solidFill>
+                <a:latin typeface="한컴 윤고딕 740"/>
+                <a:ea typeface="한컴 윤고딕 740"/>
+                <a:cs typeface="Source Han Sans KR"/>
+                <a:sym typeface="Source Han Sans KR"/>
+              </a:rPr>
+              <a:t>등록</a:t>
+            </a:r>
+            <a:endParaRPr lang="en-US" sz="2799" dirty="0">
               <a:solidFill>
                 <a:srgbClr val="475570"/>
               </a:solidFill>
@@ -10563,168 +11645,6 @@
       </p:sp>
       <p:sp>
         <p:nvSpPr>
-          <p:cNvPr id="17" name="TextBox 17"/>
-          <p:cNvSpPr txBox="1"/>
-          <p:nvPr/>
-        </p:nvSpPr>
-        <p:spPr>
-          <a:xfrm>
-            <a:off x="4160052" y="7413133"/>
-            <a:ext cx="8650548" cy="492617"/>
-          </a:xfrm>
-          <a:prstGeom prst="rect">
-            <a:avLst/>
-          </a:prstGeom>
-        </p:spPr>
-        <p:txBody>
-          <a:bodyPr lIns="0" tIns="0" rIns="0" bIns="0" anchor="t">
-            <a:spAutoFit/>
-          </a:bodyPr>
-          <a:lstStyle/>
-          <a:p>
-            <a:pPr lvl="0" algn="l">
-              <a:lnSpc>
-                <a:spcPts val="3918"/>
-              </a:lnSpc>
-              <a:spcBef>
-                <a:spcPct val="0"/>
-              </a:spcBef>
-              <a:defRPr/>
-            </a:pPr>
-            <a:r>
-              <a:rPr lang="en-US" sz="2799">
-                <a:solidFill>
-                  <a:srgbClr val="475570"/>
-                </a:solidFill>
-                <a:latin typeface="한컴 윤고딕 740"/>
-                <a:ea typeface="한컴 윤고딕 740"/>
-                <a:cs typeface="Source Han Sans KR"/>
-                <a:sym typeface="Source Han Sans KR"/>
-              </a:rPr>
-              <a:t>Unreal5.5</a:t>
-            </a:r>
-            <a:endParaRPr lang="en-US" sz="2799">
-              <a:solidFill>
-                <a:srgbClr val="475570"/>
-              </a:solidFill>
-              <a:latin typeface="한컴 윤고딕 740"/>
-              <a:ea typeface="한컴 윤고딕 740"/>
-              <a:cs typeface="Source Han Sans KR"/>
-              <a:sym typeface="Source Han Sans KR"/>
-            </a:endParaRPr>
-          </a:p>
-        </p:txBody>
-      </p:sp>
-      <p:sp>
-        <p:nvSpPr>
-          <p:cNvPr id="18" name="TextBox 18"/>
-          <p:cNvSpPr txBox="1"/>
-          <p:nvPr/>
-        </p:nvSpPr>
-        <p:spPr>
-          <a:xfrm>
-            <a:off x="4160053" y="8086459"/>
-            <a:ext cx="8327978" cy="486041"/>
-          </a:xfrm>
-          <a:prstGeom prst="rect">
-            <a:avLst/>
-          </a:prstGeom>
-        </p:spPr>
-        <p:txBody>
-          <a:bodyPr lIns="0" tIns="0" rIns="0" bIns="0" anchor="t">
-            <a:spAutoFit/>
-          </a:bodyPr>
-          <a:lstStyle/>
-          <a:p>
-            <a:pPr lvl="0" algn="l">
-              <a:lnSpc>
-                <a:spcPts val="3918"/>
-              </a:lnSpc>
-              <a:spcBef>
-                <a:spcPct val="0"/>
-              </a:spcBef>
-              <a:defRPr/>
-            </a:pPr>
-            <a:r>
-              <a:rPr lang="en-US" sz="2799">
-                <a:solidFill>
-                  <a:srgbClr val="475570"/>
-                </a:solidFill>
-                <a:latin typeface="한컴 윤고딕 740"/>
-                <a:ea typeface="한컴 윤고딕 740"/>
-                <a:cs typeface="Source Han Sans KR"/>
-                <a:sym typeface="Source Han Sans KR"/>
-              </a:rPr>
-              <a:t>3명 (클라이언트 2, 모델링 1)</a:t>
-            </a:r>
-            <a:endParaRPr lang="en-US" sz="2799">
-              <a:solidFill>
-                <a:srgbClr val="475570"/>
-              </a:solidFill>
-              <a:latin typeface="한컴 윤고딕 740"/>
-              <a:ea typeface="한컴 윤고딕 740"/>
-              <a:cs typeface="Source Han Sans KR"/>
-              <a:sym typeface="Source Han Sans KR"/>
-            </a:endParaRPr>
-          </a:p>
-        </p:txBody>
-      </p:sp>
-      <p:sp>
-        <p:nvSpPr>
-          <p:cNvPr id="19" name="TextBox 19"/>
-          <p:cNvSpPr txBox="1"/>
-          <p:nvPr/>
-        </p:nvSpPr>
-        <p:spPr>
-          <a:xfrm>
-            <a:off x="4169747" y="8776961"/>
-            <a:ext cx="8461328" cy="490864"/>
-          </a:xfrm>
-          <a:prstGeom prst="rect">
-            <a:avLst/>
-          </a:prstGeom>
-        </p:spPr>
-        <p:txBody>
-          <a:bodyPr lIns="0" tIns="0" rIns="0" bIns="0" anchor="t">
-            <a:spAutoFit/>
-          </a:bodyPr>
-          <a:lstStyle/>
-          <a:p>
-            <a:pPr lvl="0" algn="l">
-              <a:lnSpc>
-                <a:spcPts val="3918"/>
-              </a:lnSpc>
-              <a:spcBef>
-                <a:spcPct val="0"/>
-              </a:spcBef>
-              <a:defRPr/>
-            </a:pPr>
-            <a:r>
-              <a:rPr lang="en-US" sz="2799">
-                <a:solidFill>
-                  <a:srgbClr val="475570"/>
-                </a:solidFill>
-                <a:latin typeface="한컴 윤고딕 740"/>
-                <a:ea typeface="한컴 윤고딕 740"/>
-                <a:cs typeface="Source Han Sans KR"/>
-                <a:sym typeface="Source Han Sans KR"/>
-              </a:rPr>
-              <a:t>UI/사운드 처리, 앱 스토어 등록</a:t>
-            </a:r>
-            <a:endParaRPr lang="en-US" sz="2799">
-              <a:solidFill>
-                <a:srgbClr val="475570"/>
-              </a:solidFill>
-              <a:latin typeface="한컴 윤고딕 740"/>
-              <a:ea typeface="한컴 윤고딕 740"/>
-              <a:cs typeface="Source Han Sans KR"/>
-              <a:sym typeface="Source Han Sans KR"/>
-            </a:endParaRPr>
-          </a:p>
-        </p:txBody>
-      </p:sp>
-      <p:sp>
-        <p:nvSpPr>
           <p:cNvPr id="20" name="TextBox 20"/>
           <p:cNvSpPr txBox="1"/>
           <p:nvPr/>
@@ -10765,15 +11685,6 @@
               </a:rPr>
               <a:t>중력반전 러너 게임</a:t>
             </a:r>
-            <a:endParaRPr lang="en-US" sz="2999">
-              <a:solidFill>
-                <a:srgbClr val="475570"/>
-              </a:solidFill>
-              <a:latin typeface="한컴 윤고딕 740"/>
-              <a:ea typeface="한컴 윤고딕 740"/>
-              <a:cs typeface="Source Han Sans KR"/>
-              <a:sym typeface="Source Han Sans KR"/>
-            </a:endParaRPr>
           </a:p>
         </p:txBody>
       </p:sp>
@@ -10786,13 +11697,14 @@
 </file>
 
 <file path=ppt/slides/slide24.xml><?xml version="1.0" encoding="utf-8"?>
-<p:sld xmlns:r="http://schemas.openxmlformats.org/officeDocument/2006/relationships" xmlns:c="http://schemas.openxmlformats.org/drawingml/2006/chart" xmlns:a="http://schemas.openxmlformats.org/drawingml/2006/main" xmlns:dgm="http://schemas.openxmlformats.org/drawingml/2006/diagram" xmlns:dsp="http://schemas.microsoft.com/office/drawing/2008/diagram" xmlns:p="http://schemas.openxmlformats.org/presentationml/2006/main">
+<p:sld xmlns:a="http://schemas.openxmlformats.org/drawingml/2006/main" xmlns:r="http://schemas.openxmlformats.org/officeDocument/2006/relationships" xmlns:p="http://schemas.openxmlformats.org/presentationml/2006/main">
   <p:cSld>
     <p:bg>
-      <p:bgPr shadeToTitle="0">
+      <p:bgPr>
         <a:solidFill>
           <a:srgbClr val="475570"/>
         </a:solidFill>
+        <a:effectLst/>
       </p:bgPr>
     </p:bg>
     <p:spTree>
@@ -10842,7 +11754,7 @@
             <a:r>
               <a:rPr lang="en-US" sz="5000" b="1">
                 <a:solidFill>
-                  <a:srgbClr val="fcfdf8"/>
+                  <a:srgbClr val="FCFDF8"/>
                 </a:solidFill>
                 <a:latin typeface="한컴 윤고딕 740"/>
                 <a:ea typeface="한컴 윤고딕 740"/>
@@ -10851,15 +11763,6 @@
               </a:rPr>
               <a:t>감사합니다</a:t>
             </a:r>
-            <a:endParaRPr lang="en-US" sz="5000" b="1">
-              <a:solidFill>
-                <a:srgbClr val="fcfdf8"/>
-              </a:solidFill>
-              <a:latin typeface="한컴 윤고딕 740"/>
-              <a:ea typeface="한컴 윤고딕 740"/>
-              <a:cs typeface="Cabin Bold"/>
-              <a:sym typeface="Cabin Bold"/>
-            </a:endParaRPr>
           </a:p>
         </p:txBody>
       </p:sp>
@@ -10879,7 +11782,7 @@
           </a:prstGeom>
           <a:ln w="19050" cap="flat">
             <a:solidFill>
-              <a:srgbClr val="fcfdf8">
+              <a:srgbClr val="FCFDF8">
                 <a:alpha val="19610"/>
               </a:srgbClr>
             </a:solidFill>
@@ -10890,6 +11793,7 @@
         </p:spPr>
         <p:txBody>
           <a:bodyPr wrap="square" anchor="ctr"/>
+          <a:lstStyle/>
           <a:p>
             <a:pPr lvl="0" algn="ctr">
               <a:defRPr/>
@@ -10934,7 +11838,7 @@
             <a:r>
               <a:rPr lang="en-US" sz="3000">
                 <a:solidFill>
-                  <a:srgbClr val="fcfdf8"/>
+                  <a:srgbClr val="FCFDF8"/>
                 </a:solidFill>
                 <a:latin typeface="한컴 윤고딕 740"/>
                 <a:ea typeface="한컴 윤고딕 740"/>
@@ -10943,15 +11847,6 @@
               </a:rPr>
               <a:t>hwangsuji329@gmail.com</a:t>
             </a:r>
-            <a:endParaRPr lang="en-US" sz="3000">
-              <a:solidFill>
-                <a:srgbClr val="fcfdf8"/>
-              </a:solidFill>
-              <a:latin typeface="한컴 윤고딕 740"/>
-              <a:ea typeface="한컴 윤고딕 740"/>
-              <a:cs typeface="Arimo"/>
-              <a:sym typeface="Arimo"/>
-            </a:endParaRPr>
           </a:p>
         </p:txBody>
       </p:sp>
@@ -10964,13 +11859,14 @@
 </file>
 
 <file path=ppt/slides/slide3.xml><?xml version="1.0" encoding="utf-8"?>
-<p:sld xmlns:r="http://schemas.openxmlformats.org/officeDocument/2006/relationships" xmlns:c="http://schemas.openxmlformats.org/drawingml/2006/chart" xmlns:a="http://schemas.openxmlformats.org/drawingml/2006/main" xmlns:dgm="http://schemas.openxmlformats.org/drawingml/2006/diagram" xmlns:dsp="http://schemas.microsoft.com/office/drawing/2008/diagram" xmlns:p="http://schemas.openxmlformats.org/presentationml/2006/main">
+<p:sld xmlns:a="http://schemas.openxmlformats.org/drawingml/2006/main" xmlns:r="http://schemas.openxmlformats.org/officeDocument/2006/relationships" xmlns:p="http://schemas.openxmlformats.org/presentationml/2006/main">
   <p:cSld>
     <p:bg>
-      <p:bgPr shadeToTitle="0">
+      <p:bgPr>
         <a:solidFill>
-          <a:srgbClr val="fcfdf8"/>
+          <a:srgbClr val="FCFDF8"/>
         </a:solidFill>
+        <a:effectLst/>
       </p:bgPr>
     </p:bg>
     <p:spTree>
@@ -11029,7 +11925,142 @@
               </a:rPr>
               <a:t>개발기간</a:t>
             </a:r>
-            <a:endParaRPr lang="en-US" sz="3199" b="1">
+          </a:p>
+        </p:txBody>
+      </p:sp>
+      <p:sp>
+        <p:nvSpPr>
+          <p:cNvPr id="3" name="TextBox 3"/>
+          <p:cNvSpPr txBox="1"/>
+          <p:nvPr/>
+        </p:nvSpPr>
+        <p:spPr>
+          <a:xfrm>
+            <a:off x="1238801" y="1065212"/>
+            <a:ext cx="4095199" cy="1058863"/>
+          </a:xfrm>
+          <a:prstGeom prst="rect">
+            <a:avLst/>
+          </a:prstGeom>
+        </p:spPr>
+        <p:txBody>
+          <a:bodyPr wrap="square" lIns="0" tIns="0" rIns="0" bIns="0" anchor="t">
+            <a:spAutoFit/>
+          </a:bodyPr>
+          <a:lstStyle/>
+          <a:p>
+            <a:pPr marL="0" lvl="0" indent="0" algn="l">
+              <a:lnSpc>
+                <a:spcPts val="8400"/>
+              </a:lnSpc>
+              <a:spcBef>
+                <a:spcPct val="0"/>
+              </a:spcBef>
+              <a:defRPr/>
+            </a:pPr>
+            <a:r>
+              <a:rPr lang="en-US" sz="6000" b="1">
+                <a:solidFill>
+                  <a:srgbClr val="475570"/>
+                </a:solidFill>
+                <a:latin typeface="한컴 윤고딕 760"/>
+                <a:ea typeface="한컴 윤고딕 760"/>
+                <a:cs typeface="Canva Sans Bold"/>
+                <a:sym typeface="Canva Sans Bold"/>
+              </a:rPr>
+              <a:t>티유월드</a:t>
+            </a:r>
+          </a:p>
+        </p:txBody>
+      </p:sp>
+      <p:sp>
+        <p:nvSpPr>
+          <p:cNvPr id="4" name="TextBox 4"/>
+          <p:cNvSpPr txBox="1"/>
+          <p:nvPr/>
+        </p:nvSpPr>
+        <p:spPr>
+          <a:xfrm>
+            <a:off x="1267450" y="830263"/>
+            <a:ext cx="2313950" cy="350837"/>
+          </a:xfrm>
+          <a:prstGeom prst="rect">
+            <a:avLst/>
+          </a:prstGeom>
+        </p:spPr>
+        <p:txBody>
+          <a:bodyPr wrap="square" lIns="0" tIns="0" rIns="0" bIns="0" anchor="t">
+            <a:spAutoFit/>
+          </a:bodyPr>
+          <a:lstStyle/>
+          <a:p>
+            <a:pPr lvl="0" algn="l">
+              <a:lnSpc>
+                <a:spcPts val="2800"/>
+              </a:lnSpc>
+              <a:spcBef>
+                <a:spcPct val="0"/>
+              </a:spcBef>
+              <a:defRPr/>
+            </a:pPr>
+            <a:r>
+              <a:rPr lang="en-US" sz="2000">
+                <a:solidFill>
+                  <a:srgbClr val="475570"/>
+                </a:solidFill>
+                <a:latin typeface="한컴 윤고딕 760"/>
+                <a:ea typeface="한컴 윤고딕 760"/>
+                <a:cs typeface="Cabin"/>
+                <a:sym typeface="Cabin"/>
+              </a:rPr>
+              <a:t>PROJECTS</a:t>
+            </a:r>
+          </a:p>
+        </p:txBody>
+      </p:sp>
+      <p:sp>
+        <p:nvSpPr>
+          <p:cNvPr id="5" name="TextBox 5"/>
+          <p:cNvSpPr txBox="1"/>
+          <p:nvPr/>
+        </p:nvSpPr>
+        <p:spPr>
+          <a:xfrm>
+            <a:off x="1267450" y="8420100"/>
+            <a:ext cx="2211148" cy="567659"/>
+          </a:xfrm>
+          <a:prstGeom prst="rect">
+            <a:avLst/>
+          </a:prstGeom>
+        </p:spPr>
+        <p:txBody>
+          <a:bodyPr wrap="square" lIns="0" tIns="0" rIns="0" bIns="0" anchor="t">
+            <a:spAutoFit/>
+          </a:bodyPr>
+          <a:lstStyle/>
+          <a:p>
+            <a:pPr lvl="0" algn="l">
+              <a:lnSpc>
+                <a:spcPts val="4479"/>
+              </a:lnSpc>
+              <a:spcBef>
+                <a:spcPct val="0"/>
+              </a:spcBef>
+              <a:defRPr/>
+            </a:pPr>
+            <a:r>
+              <a:rPr lang="en-US" sz="3199" b="1" dirty="0" err="1">
+                <a:solidFill>
+                  <a:srgbClr val="475570"/>
+                </a:solidFill>
+                <a:latin typeface="한컴 윤고딕 740"/>
+                <a:ea typeface="한컴 윤고딕 740"/>
+                <a:cs typeface="Source Han Sans KR Bold"/>
+                <a:sym typeface="Source Han Sans KR Bold"/>
+              </a:rPr>
+              <a:t>개발도구</a:t>
+            </a:r>
+            <a:endParaRPr lang="en-US" sz="3199" b="1" dirty="0">
               <a:solidFill>
                 <a:srgbClr val="475570"/>
               </a:solidFill>
@@ -11043,122 +12074,14 @@
       </p:sp>
       <p:sp>
         <p:nvSpPr>
-          <p:cNvPr id="3" name="TextBox 3"/>
+          <p:cNvPr id="6" name="TextBox 6"/>
           <p:cNvSpPr txBox="1"/>
           <p:nvPr/>
         </p:nvSpPr>
         <p:spPr>
           <a:xfrm>
-            <a:off x="1238801" y="1065212"/>
-            <a:ext cx="4095199" cy="1058863"/>
-          </a:xfrm>
-          <a:prstGeom prst="rect">
-            <a:avLst/>
-          </a:prstGeom>
-        </p:spPr>
-        <p:txBody>
-          <a:bodyPr wrap="square" lIns="0" tIns="0" rIns="0" bIns="0" anchor="t">
-            <a:spAutoFit/>
-          </a:bodyPr>
-          <a:lstStyle/>
-          <a:p>
-            <a:pPr marL="0" lvl="0" indent="0" algn="l">
-              <a:lnSpc>
-                <a:spcPts val="8400"/>
-              </a:lnSpc>
-              <a:spcBef>
-                <a:spcPct val="0"/>
-              </a:spcBef>
-              <a:defRPr/>
-            </a:pPr>
-            <a:r>
-              <a:rPr lang="en-US" sz="6000" b="1">
-                <a:solidFill>
-                  <a:srgbClr val="475570"/>
-                </a:solidFill>
-                <a:latin typeface="한컴 윤고딕 760"/>
-                <a:ea typeface="한컴 윤고딕 760"/>
-                <a:cs typeface="Canva Sans Bold"/>
-                <a:sym typeface="Canva Sans Bold"/>
-              </a:rPr>
-              <a:t>티유월드</a:t>
-            </a:r>
-            <a:endParaRPr lang="en-US" sz="6000" b="1">
-              <a:solidFill>
-                <a:srgbClr val="475570"/>
-              </a:solidFill>
-              <a:latin typeface="한컴 윤고딕 760"/>
-              <a:ea typeface="한컴 윤고딕 760"/>
-              <a:cs typeface="Canva Sans Bold"/>
-              <a:sym typeface="Canva Sans Bold"/>
-            </a:endParaRPr>
-          </a:p>
-        </p:txBody>
-      </p:sp>
-      <p:sp>
-        <p:nvSpPr>
-          <p:cNvPr id="4" name="TextBox 4"/>
-          <p:cNvSpPr txBox="1"/>
-          <p:nvPr/>
-        </p:nvSpPr>
-        <p:spPr>
-          <a:xfrm>
-            <a:off x="1267450" y="830263"/>
-            <a:ext cx="2313950" cy="350837"/>
-          </a:xfrm>
-          <a:prstGeom prst="rect">
-            <a:avLst/>
-          </a:prstGeom>
-        </p:spPr>
-        <p:txBody>
-          <a:bodyPr wrap="square" lIns="0" tIns="0" rIns="0" bIns="0" anchor="t">
-            <a:spAutoFit/>
-          </a:bodyPr>
-          <a:lstStyle/>
-          <a:p>
-            <a:pPr lvl="0" algn="l">
-              <a:lnSpc>
-                <a:spcPts val="2800"/>
-              </a:lnSpc>
-              <a:spcBef>
-                <a:spcPct val="0"/>
-              </a:spcBef>
-              <a:defRPr/>
-            </a:pPr>
-            <a:r>
-              <a:rPr lang="en-US" sz="2000">
-                <a:solidFill>
-                  <a:srgbClr val="475570"/>
-                </a:solidFill>
-                <a:latin typeface="한컴 윤고딕 760"/>
-                <a:ea typeface="한컴 윤고딕 760"/>
-                <a:cs typeface="Cabin"/>
-                <a:sym typeface="Cabin"/>
-              </a:rPr>
-              <a:t>PROJECTS</a:t>
-            </a:r>
-            <a:endParaRPr lang="en-US" sz="2000">
-              <a:solidFill>
-                <a:srgbClr val="475570"/>
-              </a:solidFill>
-              <a:latin typeface="한컴 윤고딕 760"/>
-              <a:ea typeface="한컴 윤고딕 760"/>
-              <a:cs typeface="Cabin"/>
-              <a:sym typeface="Cabin"/>
-            </a:endParaRPr>
-          </a:p>
-        </p:txBody>
-      </p:sp>
-      <p:sp>
-        <p:nvSpPr>
-          <p:cNvPr id="5" name="TextBox 5"/>
-          <p:cNvSpPr txBox="1"/>
-          <p:nvPr/>
-        </p:nvSpPr>
-        <p:spPr>
-          <a:xfrm>
-            <a:off x="1285119" y="4251991"/>
-            <a:ext cx="2211148" cy="567659"/>
+            <a:off x="1285119" y="4945863"/>
+            <a:ext cx="2211148" cy="569112"/>
           </a:xfrm>
           <a:prstGeom prst="rect">
             <a:avLst/>
@@ -11189,30 +12112,21 @@
                 <a:cs typeface="Source Han Sans KR Bold"/>
                 <a:sym typeface="Source Han Sans KR Bold"/>
               </a:rPr>
-              <a:t>개발도구</a:t>
-            </a:r>
-            <a:endParaRPr lang="en-US" sz="3199" b="1">
-              <a:solidFill>
-                <a:srgbClr val="475570"/>
-              </a:solidFill>
-              <a:latin typeface="한컴 윤고딕 740"/>
-              <a:ea typeface="한컴 윤고딕 740"/>
-              <a:cs typeface="Source Han Sans KR Bold"/>
-              <a:sym typeface="Source Han Sans KR Bold"/>
-            </a:endParaRPr>
-          </a:p>
-        </p:txBody>
-      </p:sp>
-      <p:sp>
-        <p:nvSpPr>
-          <p:cNvPr id="6" name="TextBox 6"/>
+              <a:t>개발인원</a:t>
+            </a:r>
+          </a:p>
+        </p:txBody>
+      </p:sp>
+      <p:sp>
+        <p:nvSpPr>
+          <p:cNvPr id="7" name="TextBox 7"/>
           <p:cNvSpPr txBox="1"/>
           <p:nvPr/>
         </p:nvSpPr>
         <p:spPr>
           <a:xfrm>
-            <a:off x="1285119" y="4945863"/>
-            <a:ext cx="2211148" cy="569112"/>
+            <a:off x="1304074" y="5731239"/>
+            <a:ext cx="2211148" cy="564786"/>
           </a:xfrm>
           <a:prstGeom prst="rect">
             <a:avLst/>
@@ -11243,30 +12157,21 @@
                 <a:cs typeface="Source Han Sans KR Bold"/>
                 <a:sym typeface="Source Han Sans KR Bold"/>
               </a:rPr>
-              <a:t>개발인원</a:t>
-            </a:r>
-            <a:endParaRPr lang="en-US" sz="3199" b="1">
-              <a:solidFill>
-                <a:srgbClr val="475570"/>
-              </a:solidFill>
-              <a:latin typeface="한컴 윤고딕 740"/>
-              <a:ea typeface="한컴 윤고딕 740"/>
-              <a:cs typeface="Source Han Sans KR Bold"/>
-              <a:sym typeface="Source Han Sans KR Bold"/>
-            </a:endParaRPr>
-          </a:p>
-        </p:txBody>
-      </p:sp>
-      <p:sp>
-        <p:nvSpPr>
-          <p:cNvPr id="7" name="TextBox 7"/>
+              <a:t>담당업무</a:t>
+            </a:r>
+          </a:p>
+        </p:txBody>
+      </p:sp>
+      <p:sp>
+        <p:nvSpPr>
+          <p:cNvPr id="8" name="TextBox 8"/>
           <p:cNvSpPr txBox="1"/>
           <p:nvPr/>
         </p:nvSpPr>
         <p:spPr>
           <a:xfrm>
-            <a:off x="1304074" y="5731239"/>
-            <a:ext cx="2211148" cy="564786"/>
+            <a:off x="4177723" y="3594010"/>
+            <a:ext cx="3629599" cy="568415"/>
           </a:xfrm>
           <a:prstGeom prst="rect">
             <a:avLst/>
@@ -11288,39 +12193,30 @@
               <a:defRPr/>
             </a:pPr>
             <a:r>
-              <a:rPr lang="en-US" sz="3199" b="1">
-                <a:solidFill>
-                  <a:srgbClr val="475570"/>
-                </a:solidFill>
-                <a:latin typeface="한컴 윤고딕 740"/>
-                <a:ea typeface="한컴 윤고딕 740"/>
-                <a:cs typeface="Source Han Sans KR Bold"/>
-                <a:sym typeface="Source Han Sans KR Bold"/>
-              </a:rPr>
-              <a:t>담당업무</a:t>
-            </a:r>
-            <a:endParaRPr lang="en-US" sz="3199" b="1">
-              <a:solidFill>
-                <a:srgbClr val="475570"/>
-              </a:solidFill>
-              <a:latin typeface="한컴 윤고딕 740"/>
-              <a:ea typeface="한컴 윤고딕 740"/>
-              <a:cs typeface="Source Han Sans KR Bold"/>
-              <a:sym typeface="Source Han Sans KR Bold"/>
-            </a:endParaRPr>
-          </a:p>
-        </p:txBody>
-      </p:sp>
-      <p:sp>
-        <p:nvSpPr>
-          <p:cNvPr id="8" name="TextBox 8"/>
+              <a:rPr lang="en-US" sz="3199">
+                <a:solidFill>
+                  <a:srgbClr val="475570"/>
+                </a:solidFill>
+                <a:latin typeface="한컴 윤고딕 740"/>
+                <a:ea typeface="한컴 윤고딕 740"/>
+                <a:cs typeface="Source Han Sans KR"/>
+                <a:sym typeface="Source Han Sans KR"/>
+              </a:rPr>
+              <a:t>24.11 ~ 25.07</a:t>
+            </a:r>
+          </a:p>
+        </p:txBody>
+      </p:sp>
+      <p:sp>
+        <p:nvSpPr>
+          <p:cNvPr id="9" name="TextBox 9"/>
           <p:cNvSpPr txBox="1"/>
           <p:nvPr/>
         </p:nvSpPr>
         <p:spPr>
           <a:xfrm>
-            <a:off x="4177723" y="3594010"/>
-            <a:ext cx="3629599" cy="568415"/>
+            <a:off x="4048858" y="8433374"/>
+            <a:ext cx="9377488" cy="541110"/>
           </a:xfrm>
           <a:prstGeom prst="rect">
             <a:avLst/>
@@ -11342,75 +12238,39 @@
               <a:defRPr/>
             </a:pPr>
             <a:r>
-              <a:rPr lang="en-US" sz="3199">
-                <a:solidFill>
-                  <a:srgbClr val="475570"/>
-                </a:solidFill>
-                <a:latin typeface="한컴 윤고딕 740"/>
-                <a:ea typeface="한컴 윤고딕 740"/>
-                <a:cs typeface="Source Han Sans KR"/>
-                <a:sym typeface="Source Han Sans KR"/>
-              </a:rPr>
-              <a:t>24.11 ~ 25.07</a:t>
-            </a:r>
-            <a:endParaRPr lang="en-US" sz="3199">
+              <a:rPr lang="en-US" sz="3199" dirty="0">
+                <a:solidFill>
+                  <a:srgbClr val="475570"/>
+                </a:solidFill>
+                <a:latin typeface="한컴 윤고딕 740"/>
+                <a:ea typeface="한컴 윤고딕 740"/>
+                <a:cs typeface="Source Han Sans KR"/>
+                <a:sym typeface="Source Han Sans KR"/>
+              </a:rPr>
+              <a:t>C++, MySQL, Unreal5.4, 3ds Max  </a:t>
+            </a:r>
+            <a:r>
+              <a:rPr lang="ko-KR" altLang="en-US" sz="3199" dirty="0" err="1">
+                <a:solidFill>
+                  <a:srgbClr val="475570"/>
+                </a:solidFill>
+                <a:highlight>
+                  <a:srgbClr val="FFFF00"/>
+                </a:highlight>
+                <a:latin typeface="한컴 윤고딕 740"/>
+                <a:ea typeface="한컴 윤고딕 740"/>
+                <a:cs typeface="Source Han Sans KR"/>
+                <a:sym typeface="Source Han Sans KR"/>
+              </a:rPr>
+              <a:t>본인스킬셋</a:t>
+            </a:r>
+            <a:endParaRPr lang="en-US" sz="3199" dirty="0">
               <a:solidFill>
                 <a:srgbClr val="475570"/>
               </a:solidFill>
-              <a:latin typeface="한컴 윤고딕 740"/>
-              <a:ea typeface="한컴 윤고딕 740"/>
-              <a:cs typeface="Source Han Sans KR"/>
-              <a:sym typeface="Source Han Sans KR"/>
-            </a:endParaRPr>
-          </a:p>
-        </p:txBody>
-      </p:sp>
-      <p:sp>
-        <p:nvSpPr>
-          <p:cNvPr id="9" name="TextBox 9"/>
-          <p:cNvSpPr txBox="1"/>
-          <p:nvPr/>
-        </p:nvSpPr>
-        <p:spPr>
-          <a:xfrm>
-            <a:off x="4177722" y="4251991"/>
-            <a:ext cx="9377488" cy="567659"/>
-          </a:xfrm>
-          <a:prstGeom prst="rect">
-            <a:avLst/>
-          </a:prstGeom>
-        </p:spPr>
-        <p:txBody>
-          <a:bodyPr wrap="square" lIns="0" tIns="0" rIns="0" bIns="0" anchor="t">
-            <a:spAutoFit/>
-          </a:bodyPr>
-          <a:lstStyle/>
-          <a:p>
-            <a:pPr lvl="0" algn="l">
-              <a:lnSpc>
-                <a:spcPts val="4479"/>
-              </a:lnSpc>
-              <a:spcBef>
-                <a:spcPct val="0"/>
-              </a:spcBef>
-              <a:defRPr/>
-            </a:pPr>
-            <a:r>
-              <a:rPr lang="en-US" sz="3199">
-                <a:solidFill>
-                  <a:srgbClr val="475570"/>
-                </a:solidFill>
-                <a:latin typeface="한컴 윤고딕 740"/>
-                <a:ea typeface="한컴 윤고딕 740"/>
-                <a:cs typeface="Source Han Sans KR"/>
-                <a:sym typeface="Source Han Sans KR"/>
-              </a:rPr>
-              <a:t>C++, MySQL, Unreal5.4, 3ds Max</a:t>
-            </a:r>
-            <a:endParaRPr lang="en-US" sz="3199">
-              <a:solidFill>
-                <a:srgbClr val="475570"/>
-              </a:solidFill>
+              <a:highlight>
+                <a:srgbClr val="FFFF00"/>
+              </a:highlight>
               <a:latin typeface="한컴 윤고딕 740"/>
               <a:ea typeface="한컴 윤고딕 740"/>
               <a:cs typeface="Source Han Sans KR"/>
@@ -11446,6 +12306,7 @@
         </p:spPr>
         <p:txBody>
           <a:bodyPr wrap="square" anchor="ctr"/>
+          <a:lstStyle/>
           <a:p>
             <a:pPr lvl="0" algn="ctr">
               <a:defRPr/>
@@ -11499,15 +12360,6 @@
               </a:rPr>
               <a:t>3명 (서버 1, 클라이언트1, 모델링1)</a:t>
             </a:r>
-            <a:endParaRPr lang="en-US" sz="3199">
-              <a:solidFill>
-                <a:srgbClr val="475570"/>
-              </a:solidFill>
-              <a:latin typeface="한컴 윤고딕 740"/>
-              <a:ea typeface="한컴 윤고딕 740"/>
-              <a:cs typeface="Source Han Sans KR"/>
-              <a:sym typeface="Source Han Sans KR"/>
-            </a:endParaRPr>
           </a:p>
         </p:txBody>
       </p:sp>
@@ -11538,6 +12390,7 @@
         </p:spPr>
         <p:txBody>
           <a:bodyPr wrap="square" anchor="ctr"/>
+          <a:lstStyle/>
           <a:p>
             <a:pPr lvl="0" algn="ctr">
               <a:defRPr/>
@@ -11576,6 +12429,7 @@
         </p:spPr>
         <p:txBody>
           <a:bodyPr wrap="square" anchor="ctr"/>
+          <a:lstStyle/>
           <a:p>
             <a:pPr lvl="0" algn="ctr">
               <a:defRPr/>
@@ -11614,6 +12468,7 @@
         </p:spPr>
         <p:txBody>
           <a:bodyPr wrap="square" anchor="ctr"/>
+          <a:lstStyle/>
           <a:p>
             <a:pPr lvl="0" algn="ctr">
               <a:defRPr/>
@@ -11667,7 +12522,49 @@
               </a:rPr>
               <a:t>한국공학대학교 배경으로 한  MMORPG 게임</a:t>
             </a:r>
-            <a:endParaRPr lang="en-US" sz="3199">
+          </a:p>
+        </p:txBody>
+      </p:sp>
+      <p:sp>
+        <p:nvSpPr>
+          <p:cNvPr id="16" name="TextBox 16"/>
+          <p:cNvSpPr txBox="1"/>
+          <p:nvPr/>
+        </p:nvSpPr>
+        <p:spPr>
+          <a:xfrm>
+            <a:off x="4177722" y="5731230"/>
+            <a:ext cx="11250718" cy="2268378"/>
+          </a:xfrm>
+          <a:prstGeom prst="rect">
+            <a:avLst/>
+          </a:prstGeom>
+        </p:spPr>
+        <p:txBody>
+          <a:bodyPr lIns="0" tIns="0" rIns="0" bIns="0" anchor="t">
+            <a:spAutoFit/>
+          </a:bodyPr>
+          <a:lstStyle/>
+          <a:p>
+            <a:pPr lvl="0" algn="l">
+              <a:lnSpc>
+                <a:spcPts val="4479"/>
+              </a:lnSpc>
+              <a:defRPr/>
+            </a:pPr>
+            <a:r>
+              <a:rPr lang="ko-KR" altLang="en-US" sz="3199" dirty="0">
+                <a:solidFill>
+                  <a:srgbClr val="475570"/>
+                </a:solidFill>
+                <a:latin typeface="한컴 윤고딕 740"/>
+                <a:ea typeface="한컴 윤고딕 740"/>
+                <a:cs typeface="Source Han Sans KR"/>
+                <a:sym typeface="Source Han Sans KR"/>
+              </a:rPr>
+              <a:t>서버 제작 담당</a:t>
+            </a:r>
+            <a:endParaRPr lang="en-US" altLang="ko-KR" sz="3199" dirty="0">
               <a:solidFill>
                 <a:srgbClr val="475570"/>
               </a:solidFill>
@@ -11677,28 +12574,6 @@
               <a:sym typeface="Source Han Sans KR"/>
             </a:endParaRPr>
           </a:p>
-        </p:txBody>
-      </p:sp>
-      <p:sp>
-        <p:nvSpPr>
-          <p:cNvPr id="16" name="TextBox 16"/>
-          <p:cNvSpPr txBox="1"/>
-          <p:nvPr/>
-        </p:nvSpPr>
-        <p:spPr>
-          <a:xfrm>
-            <a:off x="4177722" y="5731230"/>
-            <a:ext cx="11250718" cy="2279295"/>
-          </a:xfrm>
-          <a:prstGeom prst="rect">
-            <a:avLst/>
-          </a:prstGeom>
-        </p:spPr>
-        <p:txBody>
-          <a:bodyPr lIns="0" tIns="0" rIns="0" bIns="0" anchor="t">
-            <a:spAutoFit/>
-          </a:bodyPr>
-          <a:lstStyle/>
           <a:p>
             <a:pPr lvl="0" algn="l">
               <a:lnSpc>
@@ -11707,18 +12582,138 @@
               <a:defRPr/>
             </a:pPr>
             <a:r>
-              <a:rPr lang="en-US" sz="3199">
-                <a:solidFill>
-                  <a:srgbClr val="475570"/>
-                </a:solidFill>
-                <a:latin typeface="한컴 윤고딕 740"/>
-                <a:ea typeface="한컴 윤고딕 740"/>
-                <a:cs typeface="Source Han Sans KR"/>
-                <a:sym typeface="Source Han Sans KR"/>
-              </a:rPr>
-              <a:t>네트워크 프레임워크 제작</a:t>
-            </a:r>
-            <a:endParaRPr lang="en-US" sz="3199">
+              <a:rPr lang="en-US" sz="3199" dirty="0" err="1">
+                <a:solidFill>
+                  <a:srgbClr val="475570"/>
+                </a:solidFill>
+                <a:latin typeface="한컴 윤고딕 740"/>
+                <a:ea typeface="한컴 윤고딕 740"/>
+                <a:cs typeface="Source Han Sans KR"/>
+                <a:sym typeface="Source Han Sans KR"/>
+              </a:rPr>
+              <a:t>서버</a:t>
+            </a:r>
+            <a:r>
+              <a:rPr lang="en-US" sz="3199" dirty="0">
+                <a:solidFill>
+                  <a:srgbClr val="475570"/>
+                </a:solidFill>
+                <a:latin typeface="한컴 윤고딕 740"/>
+                <a:ea typeface="한컴 윤고딕 740"/>
+                <a:cs typeface="Source Han Sans KR"/>
+                <a:sym typeface="Source Han Sans KR"/>
+              </a:rPr>
+              <a:t> </a:t>
+            </a:r>
+            <a:r>
+              <a:rPr lang="en-US" sz="3199" dirty="0" err="1">
+                <a:solidFill>
+                  <a:srgbClr val="475570"/>
+                </a:solidFill>
+                <a:latin typeface="한컴 윤고딕 740"/>
+                <a:ea typeface="한컴 윤고딕 740"/>
+                <a:cs typeface="Source Han Sans KR"/>
+                <a:sym typeface="Source Han Sans KR"/>
+              </a:rPr>
+              <a:t>중심</a:t>
+            </a:r>
+            <a:r>
+              <a:rPr lang="en-US" sz="3199" dirty="0">
+                <a:solidFill>
+                  <a:srgbClr val="475570"/>
+                </a:solidFill>
+                <a:latin typeface="한컴 윤고딕 740"/>
+                <a:ea typeface="한컴 윤고딕 740"/>
+                <a:cs typeface="Source Han Sans KR"/>
+                <a:sym typeface="Source Han Sans KR"/>
+              </a:rPr>
+              <a:t> </a:t>
+            </a:r>
+            <a:r>
+              <a:rPr lang="en-US" sz="3199" dirty="0" err="1">
+                <a:solidFill>
+                  <a:srgbClr val="475570"/>
+                </a:solidFill>
+                <a:latin typeface="한컴 윤고딕 740"/>
+                <a:ea typeface="한컴 윤고딕 740"/>
+                <a:cs typeface="Source Han Sans KR"/>
+                <a:sym typeface="Source Han Sans KR"/>
+              </a:rPr>
+              <a:t>구조의</a:t>
+            </a:r>
+            <a:r>
+              <a:rPr lang="en-US" sz="3199" dirty="0">
+                <a:solidFill>
+                  <a:srgbClr val="475570"/>
+                </a:solidFill>
+                <a:latin typeface="한컴 윤고딕 740"/>
+                <a:ea typeface="한컴 윤고딕 740"/>
+                <a:cs typeface="Source Han Sans KR"/>
+                <a:sym typeface="Source Han Sans KR"/>
+              </a:rPr>
+              <a:t> </a:t>
+            </a:r>
+            <a:r>
+              <a:rPr lang="en-US" sz="3199" dirty="0" err="1">
+                <a:solidFill>
+                  <a:srgbClr val="475570"/>
+                </a:solidFill>
+                <a:latin typeface="한컴 윤고딕 740"/>
+                <a:ea typeface="한컴 윤고딕 740"/>
+                <a:cs typeface="Source Han Sans KR"/>
+                <a:sym typeface="Source Han Sans KR"/>
+              </a:rPr>
+              <a:t>게임</a:t>
+            </a:r>
+            <a:r>
+              <a:rPr lang="en-US" sz="3199" dirty="0">
+                <a:solidFill>
+                  <a:srgbClr val="475570"/>
+                </a:solidFill>
+                <a:latin typeface="한컴 윤고딕 740"/>
+                <a:ea typeface="한컴 윤고딕 740"/>
+                <a:cs typeface="Source Han Sans KR"/>
+                <a:sym typeface="Source Han Sans KR"/>
+              </a:rPr>
+              <a:t> </a:t>
+            </a:r>
+            <a:r>
+              <a:rPr lang="en-US" sz="3199" dirty="0" err="1">
+                <a:solidFill>
+                  <a:srgbClr val="475570"/>
+                </a:solidFill>
+                <a:latin typeface="한컴 윤고딕 740"/>
+                <a:ea typeface="한컴 윤고딕 740"/>
+                <a:cs typeface="Source Han Sans KR"/>
+                <a:sym typeface="Source Han Sans KR"/>
+              </a:rPr>
+              <a:t>로직</a:t>
+            </a:r>
+            <a:r>
+              <a:rPr lang="en-US" sz="3199" dirty="0">
+                <a:solidFill>
+                  <a:srgbClr val="475570"/>
+                </a:solidFill>
+                <a:latin typeface="한컴 윤고딕 740"/>
+                <a:ea typeface="한컴 윤고딕 740"/>
+                <a:cs typeface="Source Han Sans KR"/>
+                <a:sym typeface="Source Han Sans KR"/>
+              </a:rPr>
+              <a:t> </a:t>
+            </a:r>
+            <a:r>
+              <a:rPr lang="en-US" sz="3199" dirty="0" err="1">
+                <a:solidFill>
+                  <a:srgbClr val="475570"/>
+                </a:solidFill>
+                <a:latin typeface="한컴 윤고딕 740"/>
+                <a:ea typeface="한컴 윤고딕 740"/>
+                <a:cs typeface="Source Han Sans KR"/>
+                <a:sym typeface="Source Han Sans KR"/>
+              </a:rPr>
+              <a:t>구현</a:t>
+            </a:r>
+            <a:endParaRPr lang="en-US" sz="3199" dirty="0">
               <a:solidFill>
                 <a:srgbClr val="475570"/>
               </a:solidFill>
@@ -11736,18 +12731,102 @@
               <a:defRPr/>
             </a:pPr>
             <a:r>
-              <a:rPr lang="en-US" sz="3199">
-                <a:solidFill>
-                  <a:srgbClr val="475570"/>
-                </a:solidFill>
-                <a:latin typeface="한컴 윤고딕 740"/>
-                <a:ea typeface="한컴 윤고딕 740"/>
-                <a:cs typeface="Source Han Sans KR"/>
-                <a:sym typeface="Source Han Sans KR"/>
-              </a:rPr>
-              <a:t>서버 중심 구조의 게임 로직 구현</a:t>
-            </a:r>
-            <a:endParaRPr lang="en-US" sz="3199">
+              <a:rPr lang="en-US" sz="3199" dirty="0">
+                <a:solidFill>
+                  <a:srgbClr val="475570"/>
+                </a:solidFill>
+                <a:latin typeface="한컴 윤고딕 740"/>
+                <a:ea typeface="한컴 윤고딕 740"/>
+                <a:cs typeface="Source Han Sans KR"/>
+                <a:sym typeface="Source Han Sans KR"/>
+              </a:rPr>
+              <a:t>IOCP </a:t>
+            </a:r>
+            <a:r>
+              <a:rPr lang="en-US" sz="3199" dirty="0" err="1">
+                <a:solidFill>
+                  <a:srgbClr val="475570"/>
+                </a:solidFill>
+                <a:latin typeface="한컴 윤고딕 740"/>
+                <a:ea typeface="한컴 윤고딕 740"/>
+                <a:cs typeface="Source Han Sans KR"/>
+                <a:sym typeface="Source Han Sans KR"/>
+              </a:rPr>
+              <a:t>기반</a:t>
+            </a:r>
+            <a:r>
+              <a:rPr lang="en-US" sz="3199" dirty="0">
+                <a:solidFill>
+                  <a:srgbClr val="475570"/>
+                </a:solidFill>
+                <a:latin typeface="한컴 윤고딕 740"/>
+                <a:ea typeface="한컴 윤고딕 740"/>
+                <a:cs typeface="Source Han Sans KR"/>
+                <a:sym typeface="Source Han Sans KR"/>
+              </a:rPr>
+              <a:t> </a:t>
+            </a:r>
+            <a:r>
+              <a:rPr lang="en-US" sz="3199" dirty="0" err="1">
+                <a:solidFill>
+                  <a:srgbClr val="475570"/>
+                </a:solidFill>
+                <a:latin typeface="한컴 윤고딕 740"/>
+                <a:ea typeface="한컴 윤고딕 740"/>
+                <a:cs typeface="Source Han Sans KR"/>
+                <a:sym typeface="Source Han Sans KR"/>
+              </a:rPr>
+              <a:t>세션</a:t>
+            </a:r>
+            <a:r>
+              <a:rPr lang="en-US" sz="3199" dirty="0">
+                <a:solidFill>
+                  <a:srgbClr val="475570"/>
+                </a:solidFill>
+                <a:latin typeface="한컴 윤고딕 740"/>
+                <a:ea typeface="한컴 윤고딕 740"/>
+                <a:cs typeface="Source Han Sans KR"/>
+                <a:sym typeface="Source Han Sans KR"/>
+              </a:rPr>
+              <a:t> </a:t>
+            </a:r>
+            <a:r>
+              <a:rPr lang="en-US" sz="3199" dirty="0" err="1">
+                <a:solidFill>
+                  <a:srgbClr val="475570"/>
+                </a:solidFill>
+                <a:latin typeface="한컴 윤고딕 740"/>
+                <a:ea typeface="한컴 윤고딕 740"/>
+                <a:cs typeface="Source Han Sans KR"/>
+                <a:sym typeface="Source Han Sans KR"/>
+              </a:rPr>
+              <a:t>병렬</a:t>
+            </a:r>
+            <a:r>
+              <a:rPr lang="en-US" sz="3199" dirty="0">
+                <a:solidFill>
+                  <a:srgbClr val="475570"/>
+                </a:solidFill>
+                <a:latin typeface="한컴 윤고딕 740"/>
+                <a:ea typeface="한컴 윤고딕 740"/>
+                <a:cs typeface="Source Han Sans KR"/>
+                <a:sym typeface="Source Han Sans KR"/>
+              </a:rPr>
+              <a:t> </a:t>
+            </a:r>
+            <a:r>
+              <a:rPr lang="en-US" sz="3199" dirty="0" err="1">
+                <a:solidFill>
+                  <a:srgbClr val="475570"/>
+                </a:solidFill>
+                <a:latin typeface="한컴 윤고딕 740"/>
+                <a:ea typeface="한컴 윤고딕 740"/>
+                <a:cs typeface="Source Han Sans KR"/>
+                <a:sym typeface="Source Han Sans KR"/>
+              </a:rPr>
+              <a:t>처리</a:t>
+            </a:r>
+            <a:endParaRPr lang="en-US" sz="3199" dirty="0">
               <a:solidFill>
                 <a:srgbClr val="475570"/>
               </a:solidFill>
@@ -11762,53 +12841,84 @@
               <a:lnSpc>
                 <a:spcPts val="4479"/>
               </a:lnSpc>
-              <a:defRPr/>
-            </a:pPr>
-            <a:r>
-              <a:rPr lang="en-US" sz="3199">
-                <a:solidFill>
-                  <a:srgbClr val="475570"/>
-                </a:solidFill>
-                <a:latin typeface="한컴 윤고딕 740"/>
-                <a:ea typeface="한컴 윤고딕 740"/>
-                <a:cs typeface="Source Han Sans KR"/>
-                <a:sym typeface="Source Han Sans KR"/>
-              </a:rPr>
-              <a:t>IOCP 기반 세션 병렬 처리</a:t>
-            </a:r>
-            <a:endParaRPr lang="en-US" sz="3199">
-              <a:solidFill>
-                <a:srgbClr val="475570"/>
-              </a:solidFill>
-              <a:latin typeface="한컴 윤고딕 740"/>
-              <a:ea typeface="한컴 윤고딕 740"/>
-              <a:cs typeface="Source Han Sans KR"/>
-              <a:sym typeface="Source Han Sans KR"/>
-            </a:endParaRPr>
-          </a:p>
-          <a:p>
-            <a:pPr lvl="0" algn="l">
-              <a:lnSpc>
-                <a:spcPts val="4479"/>
-              </a:lnSpc>
               <a:spcBef>
                 <a:spcPct val="0"/>
               </a:spcBef>
               <a:defRPr/>
             </a:pPr>
             <a:r>
-              <a:rPr lang="en-US" sz="3199">
-                <a:solidFill>
-                  <a:srgbClr val="475570"/>
-                </a:solidFill>
-                <a:latin typeface="한컴 윤고딕 740"/>
-                <a:ea typeface="한컴 윤고딕 740"/>
-                <a:cs typeface="Source Han Sans KR"/>
-                <a:sym typeface="Source Han Sans KR"/>
-              </a:rPr>
-              <a:t>데이터베이스 설계 및 연동</a:t>
-            </a:r>
-            <a:endParaRPr lang="en-US" sz="3199">
+              <a:rPr lang="en-US" sz="3199" dirty="0" err="1">
+                <a:solidFill>
+                  <a:srgbClr val="475570"/>
+                </a:solidFill>
+                <a:latin typeface="한컴 윤고딕 740"/>
+                <a:ea typeface="한컴 윤고딕 740"/>
+                <a:cs typeface="Source Han Sans KR"/>
+                <a:sym typeface="Source Han Sans KR"/>
+              </a:rPr>
+              <a:t>데이터베이스</a:t>
+            </a:r>
+            <a:r>
+              <a:rPr lang="en-US" sz="3199" dirty="0">
+                <a:solidFill>
+                  <a:srgbClr val="475570"/>
+                </a:solidFill>
+                <a:latin typeface="한컴 윤고딕 740"/>
+                <a:ea typeface="한컴 윤고딕 740"/>
+                <a:cs typeface="Source Han Sans KR"/>
+                <a:sym typeface="Source Han Sans KR"/>
+              </a:rPr>
+              <a:t> </a:t>
+            </a:r>
+            <a:r>
+              <a:rPr lang="ko-KR" altLang="en-US" sz="3199" dirty="0">
+                <a:solidFill>
+                  <a:srgbClr val="475570"/>
+                </a:solidFill>
+                <a:latin typeface="한컴 윤고딕 740"/>
+                <a:ea typeface="한컴 윤고딕 740"/>
+                <a:cs typeface="Source Han Sans KR"/>
+                <a:sym typeface="Source Han Sans KR"/>
+              </a:rPr>
+              <a:t>스키마 </a:t>
+            </a:r>
+            <a:r>
+              <a:rPr lang="en-US" sz="3199" dirty="0" err="1">
+                <a:solidFill>
+                  <a:srgbClr val="475570"/>
+                </a:solidFill>
+                <a:latin typeface="한컴 윤고딕 740"/>
+                <a:ea typeface="한컴 윤고딕 740"/>
+                <a:cs typeface="Source Han Sans KR"/>
+                <a:sym typeface="Source Han Sans KR"/>
+              </a:rPr>
+              <a:t>설계</a:t>
+            </a:r>
+            <a:r>
+              <a:rPr lang="en-US" sz="3199" dirty="0">
+                <a:solidFill>
+                  <a:srgbClr val="475570"/>
+                </a:solidFill>
+                <a:latin typeface="한컴 윤고딕 740"/>
+                <a:ea typeface="한컴 윤고딕 740"/>
+                <a:cs typeface="Source Han Sans KR"/>
+                <a:sym typeface="Source Han Sans KR"/>
+              </a:rPr>
+              <a:t> 및 </a:t>
+            </a:r>
+            <a:r>
+              <a:rPr lang="en-US" sz="3199" dirty="0" err="1">
+                <a:solidFill>
+                  <a:srgbClr val="475570"/>
+                </a:solidFill>
+                <a:latin typeface="한컴 윤고딕 740"/>
+                <a:ea typeface="한컴 윤고딕 740"/>
+                <a:cs typeface="Source Han Sans KR"/>
+                <a:sym typeface="Source Han Sans KR"/>
+              </a:rPr>
+              <a:t>연동</a:t>
+            </a:r>
+            <a:endParaRPr lang="en-US" sz="3199" dirty="0">
               <a:solidFill>
                 <a:srgbClr val="475570"/>
               </a:solidFill>
@@ -11829,13 +12939,14 @@
 </file>
 
 <file path=ppt/slides/slide4.xml><?xml version="1.0" encoding="utf-8"?>
-<p:sld xmlns:r="http://schemas.openxmlformats.org/officeDocument/2006/relationships" xmlns:c="http://schemas.openxmlformats.org/drawingml/2006/chart" xmlns:a="http://schemas.openxmlformats.org/drawingml/2006/main" xmlns:dgm="http://schemas.openxmlformats.org/drawingml/2006/diagram" xmlns:dsp="http://schemas.microsoft.com/office/drawing/2008/diagram" xmlns:p="http://schemas.openxmlformats.org/presentationml/2006/main">
+<p:sld xmlns:a="http://schemas.openxmlformats.org/drawingml/2006/main" xmlns:r="http://schemas.openxmlformats.org/officeDocument/2006/relationships" xmlns:p="http://schemas.openxmlformats.org/presentationml/2006/main">
   <p:cSld>
     <p:bg>
-      <p:bgPr shadeToTitle="0">
+      <p:bgPr>
         <a:solidFill>
-          <a:srgbClr val="fcfdf8"/>
+          <a:srgbClr val="FCFDF8"/>
         </a:solidFill>
+        <a:effectLst/>
       </p:bgPr>
     </p:bg>
     <p:spTree>
@@ -11894,15 +13005,6 @@
               </a:rPr>
               <a:t>티유월드</a:t>
             </a:r>
-            <a:endParaRPr lang="en-US" sz="5000" b="1">
-              <a:solidFill>
-                <a:srgbClr val="475570"/>
-              </a:solidFill>
-              <a:latin typeface="한컴 윤고딕 760"/>
-              <a:ea typeface="한컴 윤고딕 760"/>
-              <a:cs typeface="Canva Sans Bold"/>
-              <a:sym typeface="Canva Sans Bold"/>
-            </a:endParaRPr>
           </a:p>
         </p:txBody>
       </p:sp>
@@ -11948,15 +13050,6 @@
               </a:rPr>
               <a:t>PROJECTS</a:t>
             </a:r>
-            <a:endParaRPr lang="en-US" sz="2000">
-              <a:solidFill>
-                <a:srgbClr val="475570"/>
-              </a:solidFill>
-              <a:latin typeface="한컴 윤고딕 760"/>
-              <a:ea typeface="한컴 윤고딕 760"/>
-              <a:cs typeface="Cabin"/>
-              <a:sym typeface="Cabin"/>
-            </a:endParaRPr>
           </a:p>
         </p:txBody>
       </p:sp>
@@ -11996,7 +13089,7 @@
                 <a:ea typeface="한컴 윤고딕 720"/>
                 <a:cs typeface="Arimo"/>
                 <a:sym typeface="Arimo"/>
-                <a:hlinkClick r:id="rId2" tooltip="https://www.youtube.com/watch?v=NkqPZXgjn8c"/>
+                <a:hlinkClick r:id="rId3" tooltip="https://www.youtube.com/watch?v=NkqPZXgjn8c"/>
               </a:rPr>
               <a:t>https://www.youtube.com/watch?v=NkqPZXgjn8c</a:t>
             </a:r>
@@ -12021,7 +13114,7 @@
             <a:picLocks noRot="1" noChangeAspect="1"/>
           </p:cNvPicPr>
           <p:nvPr>
-            <a:videoFile r:link="rId3"/>
+            <a:videoFile r:link="rId1"/>
           </p:nvPr>
         </p:nvPicPr>
         <p:blipFill rotWithShape="1">
@@ -12032,7 +13125,7 @@
         </p:blipFill>
         <p:spPr>
           <a:xfrm>
-            <a:off x="4819649" y="1900237"/>
+            <a:off x="1683109" y="1900237"/>
             <a:ext cx="8648701" cy="6486526"/>
           </a:xfrm>
           <a:prstGeom prst="rect">
@@ -12040,6 +13133,148 @@
           </a:prstGeom>
         </p:spPr>
       </p:pic>
+      <p:sp>
+        <p:nvSpPr>
+          <p:cNvPr id="4" name="TextBox 3">
+            <a:extLst>
+              <a:ext uri="{FF2B5EF4-FFF2-40B4-BE49-F238E27FC236}">
+                <a16:creationId xmlns:a16="http://schemas.microsoft.com/office/drawing/2014/main" id="{07DABDAD-3EA9-CC46-8C6E-999A0418B379}"/>
+              </a:ext>
+            </a:extLst>
+          </p:cNvPr>
+          <p:cNvSpPr txBox="1"/>
+          <p:nvPr/>
+        </p:nvSpPr>
+        <p:spPr>
+          <a:xfrm>
+            <a:off x="11125200" y="2095500"/>
+            <a:ext cx="4953000" cy="3693319"/>
+          </a:xfrm>
+          <a:prstGeom prst="rect">
+            <a:avLst/>
+          </a:prstGeom>
+          <a:noFill/>
+        </p:spPr>
+        <p:txBody>
+          <a:bodyPr wrap="square" rtlCol="0">
+            <a:spAutoFit/>
+          </a:bodyPr>
+          <a:lstStyle/>
+          <a:p>
+            <a:r>
+              <a:rPr lang="ko-KR" altLang="en-US" dirty="0"/>
+              <a:t>게임설명 </a:t>
+            </a:r>
+            <a:r>
+              <a:rPr lang="en-US" altLang="ko-KR" dirty="0"/>
+              <a:t>: </a:t>
+            </a:r>
+          </a:p>
+          <a:p>
+            <a:endParaRPr lang="en-US" altLang="ko-KR" dirty="0"/>
+          </a:p>
+          <a:p>
+            <a:r>
+              <a:rPr lang="en-US" altLang="ko-KR" dirty="0"/>
+              <a:t>  </a:t>
+            </a:r>
+            <a:r>
+              <a:rPr lang="ko-KR" altLang="en-US" dirty="0"/>
+              <a:t>한국공학대학교를 배경으로 몬스터를 잡고 퀘스트를 풀면서 학교의 미스터리를 해결하는 </a:t>
+            </a:r>
+            <a:r>
+              <a:rPr lang="en-US" altLang="ko-KR" dirty="0"/>
+              <a:t>MMORPG</a:t>
+            </a:r>
+          </a:p>
+          <a:p>
+            <a:endParaRPr lang="en-US" altLang="ko-KR" dirty="0"/>
+          </a:p>
+          <a:p>
+            <a:r>
+              <a:rPr lang="ko-KR" altLang="en-US" dirty="0"/>
+              <a:t>최종 보스인 </a:t>
+            </a:r>
+            <a:r>
+              <a:rPr lang="ko-KR" altLang="en-US" dirty="0" err="1"/>
+              <a:t>티노를</a:t>
+            </a:r>
+            <a:r>
+              <a:rPr lang="ko-KR" altLang="en-US" dirty="0"/>
+              <a:t> 레이드로 잡는 것이 최종목표</a:t>
+            </a:r>
+            <a:endParaRPr lang="en-US" altLang="ko-KR" dirty="0"/>
+          </a:p>
+          <a:p>
+            <a:endParaRPr lang="en-US" altLang="ko-KR" dirty="0"/>
+          </a:p>
+          <a:p>
+            <a:r>
+              <a:rPr lang="en-US" altLang="ko-KR" dirty="0"/>
+              <a:t>XX </a:t>
+            </a:r>
+            <a:r>
+              <a:rPr lang="ko-KR" altLang="en-US" dirty="0"/>
+              <a:t>개의 퀘스트로 시나리오를 표현하고</a:t>
+            </a:r>
+            <a:r>
+              <a:rPr lang="en-US" altLang="ko-KR" dirty="0"/>
+              <a:t>,  </a:t>
+            </a:r>
+            <a:r>
+              <a:rPr lang="ko-KR" altLang="en-US" dirty="0" err="1"/>
+              <a:t>ㅌㅌ</a:t>
+            </a:r>
+            <a:r>
+              <a:rPr lang="ko-KR" altLang="en-US" dirty="0"/>
+              <a:t> </a:t>
+            </a:r>
+            <a:r>
+              <a:rPr lang="en-US" altLang="ko-KR" dirty="0"/>
+              <a:t> </a:t>
+            </a:r>
+            <a:r>
+              <a:rPr lang="ko-KR" altLang="en-US" dirty="0"/>
+              <a:t>종류의 몬스터</a:t>
+            </a:r>
+            <a:r>
+              <a:rPr lang="en-US" altLang="ko-KR" dirty="0"/>
+              <a:t>,, CC </a:t>
+            </a:r>
+            <a:r>
+              <a:rPr lang="ko-KR" altLang="en-US" dirty="0"/>
+              <a:t>개의 </a:t>
+            </a:r>
+            <a:r>
+              <a:rPr lang="ko-KR" altLang="en-US" dirty="0" err="1"/>
+              <a:t>인던</a:t>
+            </a:r>
+            <a:endParaRPr lang="en-US" altLang="ko-KR" dirty="0"/>
+          </a:p>
+          <a:p>
+            <a:endParaRPr lang="en-US" altLang="ko-KR" dirty="0"/>
+          </a:p>
+          <a:p>
+            <a:r>
+              <a:rPr lang="ko-KR" altLang="en-US" dirty="0"/>
+              <a:t>다양한 아이템과</a:t>
+            </a:r>
+            <a:r>
+              <a:rPr lang="en-US" altLang="ko-KR" dirty="0"/>
+              <a:t>, </a:t>
+            </a:r>
+            <a:r>
+              <a:rPr lang="ko-KR" altLang="en-US" dirty="0"/>
+              <a:t>스킬</a:t>
+            </a:r>
+            <a:r>
+              <a:rPr lang="en-US" altLang="ko-KR" dirty="0"/>
+              <a:t>….</a:t>
+            </a:r>
+            <a:endParaRPr lang="ko-KR" altLang="en-US" dirty="0"/>
+          </a:p>
+        </p:txBody>
+      </p:sp>
     </p:spTree>
   </p:cSld>
   <p:clrMapOvr>
@@ -12129,13 +13364,14 @@
 </file>
 
 <file path=ppt/slides/slide5.xml><?xml version="1.0" encoding="utf-8"?>
-<p:sld xmlns:r="http://schemas.openxmlformats.org/officeDocument/2006/relationships" xmlns:c="http://schemas.openxmlformats.org/drawingml/2006/chart" xmlns:a="http://schemas.openxmlformats.org/drawingml/2006/main" xmlns:dgm="http://schemas.openxmlformats.org/drawingml/2006/diagram" xmlns:dsp="http://schemas.microsoft.com/office/drawing/2008/diagram" xmlns:p="http://schemas.openxmlformats.org/presentationml/2006/main">
+<p:sld xmlns:a="http://schemas.openxmlformats.org/drawingml/2006/main" xmlns:r="http://schemas.openxmlformats.org/officeDocument/2006/relationships" xmlns:p="http://schemas.openxmlformats.org/presentationml/2006/main">
   <p:cSld>
     <p:bg>
-      <p:bgPr shadeToTitle="0">
+      <p:bgPr>
         <a:solidFill>
-          <a:srgbClr val="fcfdf8"/>
+          <a:srgbClr val="FCFDF8"/>
         </a:solidFill>
+        <a:effectLst/>
       </p:bgPr>
     </p:bg>
     <p:spTree>
@@ -12194,15 +13430,6 @@
               </a:rPr>
               <a:t>티유월드</a:t>
             </a:r>
-            <a:endParaRPr lang="en-US" sz="5000" b="1">
-              <a:solidFill>
-                <a:srgbClr val="475570"/>
-              </a:solidFill>
-              <a:latin typeface="한컴 윤고딕 760"/>
-              <a:ea typeface="한컴 윤고딕 760"/>
-              <a:cs typeface="Canva Sans Bold"/>
-              <a:sym typeface="Canva Sans Bold"/>
-            </a:endParaRPr>
           </a:p>
         </p:txBody>
       </p:sp>
@@ -12248,15 +13475,6 @@
               </a:rPr>
               <a:t>PROJECTS</a:t>
             </a:r>
-            <a:endParaRPr lang="en-US" sz="2000">
-              <a:solidFill>
-                <a:srgbClr val="475570"/>
-              </a:solidFill>
-              <a:latin typeface="한컴 윤고딕 760"/>
-              <a:ea typeface="한컴 윤고딕 760"/>
-              <a:cs typeface="Cabin"/>
-              <a:sym typeface="Cabin"/>
-            </a:endParaRPr>
           </a:p>
         </p:txBody>
       </p:sp>
@@ -12269,7 +13487,7 @@
         <p:spPr>
           <a:xfrm>
             <a:off x="1794411" y="3236852"/>
-            <a:ext cx="8089229" cy="5278498"/>
+            <a:ext cx="13984620" cy="5182637"/>
           </a:xfrm>
           <a:prstGeom prst="rect">
             <a:avLst/>
@@ -12288,7 +13506,7 @@
               <a:defRPr/>
             </a:pPr>
             <a:r>
-              <a:rPr lang="en-US" sz="3199" b="1">
+              <a:rPr lang="en-US" sz="3199" b="1" dirty="0" err="1">
                 <a:solidFill>
                   <a:srgbClr val="475570"/>
                 </a:solidFill>
@@ -12300,7 +13518,7 @@
               <a:t>문제</a:t>
             </a:r>
             <a:r>
-              <a:rPr lang="en-US" sz="3199">
+              <a:rPr lang="en-US" sz="3199" dirty="0">
                 <a:solidFill>
                   <a:srgbClr val="475570"/>
                 </a:solidFill>
@@ -12312,7 +13530,7 @@
               <a:t>  </a:t>
             </a:r>
             <a:r>
-              <a:rPr lang="ko-KR" altLang="en-US" sz="3199">
+              <a:rPr lang="ko-KR" altLang="en-US" sz="3199" dirty="0">
                 <a:solidFill>
                   <a:srgbClr val="475570"/>
                 </a:solidFill>
@@ -12324,18 +13542,78 @@
               <a:t> </a:t>
             </a:r>
             <a:r>
-              <a:rPr lang="en-US" sz="3199">
-                <a:solidFill>
-                  <a:srgbClr val="475570"/>
-                </a:solidFill>
-                <a:latin typeface="한컴 윤고딕 740"/>
-                <a:ea typeface="한컴 윤고딕 740"/>
-                <a:cs typeface="Source Han Sans KR"/>
-                <a:sym typeface="Source Han Sans KR"/>
-              </a:rPr>
-              <a:t>CPU 과부하, 지연 증가</a:t>
-            </a:r>
-            <a:endParaRPr lang="en-US" sz="3199">
+              <a:rPr lang="en-US" sz="3199" dirty="0">
+                <a:solidFill>
+                  <a:srgbClr val="475570"/>
+                </a:solidFill>
+                <a:latin typeface="한컴 윤고딕 740"/>
+                <a:ea typeface="한컴 윤고딕 740"/>
+                <a:cs typeface="Source Han Sans KR"/>
+                <a:sym typeface="Source Han Sans KR"/>
+              </a:rPr>
+              <a:t>CPU </a:t>
+            </a:r>
+            <a:r>
+              <a:rPr lang="en-US" sz="3199" dirty="0" err="1">
+                <a:solidFill>
+                  <a:srgbClr val="475570"/>
+                </a:solidFill>
+                <a:latin typeface="한컴 윤고딕 740"/>
+                <a:ea typeface="한컴 윤고딕 740"/>
+                <a:cs typeface="Source Han Sans KR"/>
+                <a:sym typeface="Source Han Sans KR"/>
+              </a:rPr>
+              <a:t>과부하</a:t>
+            </a:r>
+            <a:r>
+              <a:rPr lang="en-US" sz="3199" dirty="0">
+                <a:solidFill>
+                  <a:srgbClr val="475570"/>
+                </a:solidFill>
+                <a:latin typeface="한컴 윤고딕 740"/>
+                <a:ea typeface="한컴 윤고딕 740"/>
+                <a:cs typeface="Source Han Sans KR"/>
+                <a:sym typeface="Source Han Sans KR"/>
+              </a:rPr>
+              <a:t>, </a:t>
+            </a:r>
+            <a:r>
+              <a:rPr lang="en-US" sz="3199" dirty="0" err="1">
+                <a:solidFill>
+                  <a:srgbClr val="475570"/>
+                </a:solidFill>
+                <a:latin typeface="한컴 윤고딕 740"/>
+                <a:ea typeface="한컴 윤고딕 740"/>
+                <a:cs typeface="Source Han Sans KR"/>
+                <a:sym typeface="Source Han Sans KR"/>
+              </a:rPr>
+              <a:t>지연</a:t>
+            </a:r>
+            <a:r>
+              <a:rPr lang="en-US" sz="3199" dirty="0">
+                <a:solidFill>
+                  <a:srgbClr val="475570"/>
+                </a:solidFill>
+                <a:latin typeface="한컴 윤고딕 740"/>
+                <a:ea typeface="한컴 윤고딕 740"/>
+                <a:cs typeface="Source Han Sans KR"/>
+                <a:sym typeface="Source Han Sans KR"/>
+              </a:rPr>
+              <a:t> </a:t>
+            </a:r>
+            <a:r>
+              <a:rPr lang="en-US" sz="3199" dirty="0" err="1">
+                <a:solidFill>
+                  <a:srgbClr val="475570"/>
+                </a:solidFill>
+                <a:latin typeface="한컴 윤고딕 740"/>
+                <a:ea typeface="한컴 윤고딕 740"/>
+                <a:cs typeface="Source Han Sans KR"/>
+                <a:sym typeface="Source Han Sans KR"/>
+              </a:rPr>
+              <a:t>증가</a:t>
+            </a:r>
+            <a:endParaRPr lang="en-US" sz="3199" dirty="0">
               <a:solidFill>
                 <a:srgbClr val="475570"/>
               </a:solidFill>
@@ -12353,7 +13631,7 @@
               <a:defRPr/>
             </a:pPr>
             <a:r>
-              <a:rPr lang="en-US" sz="3199" b="1">
+              <a:rPr lang="en-US" sz="3199" b="1" dirty="0" err="1">
                 <a:solidFill>
                   <a:srgbClr val="475570"/>
                 </a:solidFill>
@@ -12362,21 +13640,41 @@
                 <a:cs typeface="Source Han Sans KR Bold"/>
                 <a:sym typeface="Source Han Sans KR Bold"/>
               </a:rPr>
-              <a:t>해결 </a:t>
-            </a:r>
-            <a:r>
-              <a:rPr lang="en-US" sz="3199">
-                <a:solidFill>
-                  <a:srgbClr val="475570"/>
-                </a:solidFill>
-                <a:latin typeface="한컴 윤고딕 740"/>
-                <a:ea typeface="한컴 윤고딕 740"/>
-                <a:cs typeface="Source Han Sans KR"/>
-                <a:sym typeface="Source Han Sans KR"/>
+              <a:t>해결</a:t>
+            </a:r>
+            <a:r>
+              <a:rPr lang="en-US" sz="3199" b="1" dirty="0">
+                <a:solidFill>
+                  <a:srgbClr val="475570"/>
+                </a:solidFill>
+                <a:latin typeface="한컴 윤고딕 740"/>
+                <a:ea typeface="한컴 윤고딕 740"/>
+                <a:cs typeface="Source Han Sans KR Bold"/>
+                <a:sym typeface="Source Han Sans KR Bold"/>
               </a:rPr>
               <a:t> </a:t>
             </a:r>
-            <a:endParaRPr lang="en-US" sz="3199">
+            <a:r>
+              <a:rPr lang="en-US" sz="3199" dirty="0">
+                <a:solidFill>
+                  <a:srgbClr val="475570"/>
+                </a:solidFill>
+                <a:latin typeface="한컴 윤고딕 740"/>
+                <a:ea typeface="한컴 윤고딕 740"/>
+                <a:cs typeface="Source Han Sans KR"/>
+                <a:sym typeface="Source Han Sans KR"/>
+              </a:rPr>
+              <a:t> </a:t>
+            </a:r>
+          </a:p>
+          <a:p>
+            <a:pPr lvl="0" algn="l">
+              <a:lnSpc>
+                <a:spcPts val="4799"/>
+              </a:lnSpc>
+              <a:defRPr/>
+            </a:pPr>
+            <a:endParaRPr lang="en-US" sz="3199" dirty="0">
               <a:solidFill>
                 <a:srgbClr val="475570"/>
               </a:solidFill>
@@ -12393,7 +13691,7 @@
               </a:lnSpc>
               <a:defRPr/>
             </a:pPr>
-            <a:endParaRPr lang="en-US" sz="3199">
+            <a:endParaRPr lang="en-US" sz="3199" dirty="0">
               <a:solidFill>
                 <a:srgbClr val="475570"/>
               </a:solidFill>
@@ -12406,11 +13704,11 @@
           <a:p>
             <a:pPr lvl="0" algn="l">
               <a:lnSpc>
-                <a:spcPts val="4799"/>
+                <a:spcPts val="7999"/>
               </a:lnSpc>
               <a:defRPr/>
             </a:pPr>
-            <a:endParaRPr lang="en-US" sz="3199">
+            <a:endParaRPr lang="en-US" sz="3199" dirty="0">
               <a:solidFill>
                 <a:srgbClr val="475570"/>
               </a:solidFill>
@@ -12427,7 +13725,387 @@
               </a:lnSpc>
               <a:defRPr/>
             </a:pPr>
-            <a:endParaRPr lang="en-US" sz="3199">
+            <a:r>
+              <a:rPr lang="en-US" sz="3199" b="1" dirty="0" err="1">
+                <a:solidFill>
+                  <a:srgbClr val="475570"/>
+                </a:solidFill>
+                <a:latin typeface="한컴 윤고딕 740"/>
+                <a:ea typeface="한컴 윤고딕 740"/>
+                <a:cs typeface="Source Han Sans KR Bold"/>
+                <a:sym typeface="Source Han Sans KR Bold"/>
+              </a:rPr>
+              <a:t>결과</a:t>
+            </a:r>
+            <a:r>
+              <a:rPr lang="en-US" sz="3199" b="1" dirty="0">
+                <a:solidFill>
+                  <a:srgbClr val="475570"/>
+                </a:solidFill>
+                <a:latin typeface="한컴 윤고딕 740"/>
+                <a:ea typeface="한컴 윤고딕 740"/>
+                <a:cs typeface="Source Han Sans KR Bold"/>
+                <a:sym typeface="Source Han Sans KR Bold"/>
+              </a:rPr>
+              <a:t> </a:t>
+            </a:r>
+            <a:r>
+              <a:rPr lang="en-US" sz="3199" dirty="0">
+                <a:solidFill>
+                  <a:srgbClr val="475570"/>
+                </a:solidFill>
+                <a:latin typeface="한컴 윤고딕 740"/>
+                <a:ea typeface="한컴 윤고딕 740"/>
+                <a:cs typeface="Source Han Sans KR"/>
+                <a:sym typeface="Source Han Sans KR"/>
+              </a:rPr>
+              <a:t>  </a:t>
+            </a:r>
+            <a:r>
+              <a:rPr lang="en-US" sz="3199" dirty="0" err="1">
+                <a:solidFill>
+                  <a:srgbClr val="475570"/>
+                </a:solidFill>
+                <a:latin typeface="한컴 윤고딕 740"/>
+                <a:ea typeface="한컴 윤고딕 740"/>
+                <a:cs typeface="Source Han Sans KR"/>
+                <a:sym typeface="Source Han Sans KR"/>
+              </a:rPr>
+              <a:t>서버</a:t>
+            </a:r>
+            <a:r>
+              <a:rPr lang="en-US" sz="3199" dirty="0">
+                <a:solidFill>
+                  <a:srgbClr val="475570"/>
+                </a:solidFill>
+                <a:latin typeface="한컴 윤고딕 740"/>
+                <a:ea typeface="한컴 윤고딕 740"/>
+                <a:cs typeface="Source Han Sans KR"/>
+                <a:sym typeface="Source Han Sans KR"/>
+              </a:rPr>
+              <a:t> </a:t>
+            </a:r>
+            <a:r>
+              <a:rPr lang="en-US" sz="3199" dirty="0" err="1">
+                <a:solidFill>
+                  <a:srgbClr val="475570"/>
+                </a:solidFill>
+                <a:latin typeface="한컴 윤고딕 740"/>
+                <a:ea typeface="한컴 윤고딕 740"/>
+                <a:cs typeface="Source Han Sans KR"/>
+                <a:sym typeface="Source Han Sans KR"/>
+              </a:rPr>
+              <a:t>안정성</a:t>
+            </a:r>
+            <a:r>
+              <a:rPr lang="en-US" sz="3199" dirty="0">
+                <a:solidFill>
+                  <a:srgbClr val="475570"/>
+                </a:solidFill>
+                <a:latin typeface="한컴 윤고딕 740"/>
+                <a:ea typeface="한컴 윤고딕 740"/>
+                <a:cs typeface="Source Han Sans KR"/>
+                <a:sym typeface="Source Han Sans KR"/>
+              </a:rPr>
+              <a:t> </a:t>
+            </a:r>
+            <a:r>
+              <a:rPr lang="en-US" sz="3199" dirty="0" err="1">
+                <a:solidFill>
+                  <a:srgbClr val="475570"/>
+                </a:solidFill>
+                <a:latin typeface="한컴 윤고딕 740"/>
+                <a:ea typeface="한컴 윤고딕 740"/>
+                <a:cs typeface="Source Han Sans KR"/>
+                <a:sym typeface="Source Han Sans KR"/>
+              </a:rPr>
+              <a:t>향상</a:t>
+            </a:r>
+            <a:r>
+              <a:rPr lang="en-US" sz="3199" dirty="0">
+                <a:solidFill>
+                  <a:srgbClr val="475570"/>
+                </a:solidFill>
+                <a:latin typeface="한컴 윤고딕 740"/>
+                <a:ea typeface="한컴 윤고딕 740"/>
+                <a:cs typeface="Source Han Sans KR"/>
+                <a:sym typeface="Source Han Sans KR"/>
+              </a:rPr>
+              <a:t>, </a:t>
+            </a:r>
+            <a:r>
+              <a:rPr lang="en-US" sz="3199" dirty="0" err="1">
+                <a:solidFill>
+                  <a:srgbClr val="475570"/>
+                </a:solidFill>
+                <a:latin typeface="한컴 윤고딕 740"/>
+                <a:ea typeface="한컴 윤고딕 740"/>
+                <a:cs typeface="Source Han Sans KR"/>
+                <a:sym typeface="Source Han Sans KR"/>
+              </a:rPr>
+              <a:t>확장성</a:t>
+            </a:r>
+            <a:r>
+              <a:rPr lang="en-US" sz="3199" dirty="0">
+                <a:solidFill>
+                  <a:srgbClr val="475570"/>
+                </a:solidFill>
+                <a:latin typeface="한컴 윤고딕 740"/>
+                <a:ea typeface="한컴 윤고딕 740"/>
+                <a:cs typeface="Source Han Sans KR"/>
+                <a:sym typeface="Source Han Sans KR"/>
+              </a:rPr>
+              <a:t> </a:t>
+            </a:r>
+            <a:r>
+              <a:rPr lang="en-US" sz="3199" dirty="0" err="1">
+                <a:solidFill>
+                  <a:srgbClr val="475570"/>
+                </a:solidFill>
+                <a:latin typeface="한컴 윤고딕 740"/>
+                <a:ea typeface="한컴 윤고딕 740"/>
+                <a:cs typeface="Source Han Sans KR"/>
+                <a:sym typeface="Source Han Sans KR"/>
+              </a:rPr>
+              <a:t>확보</a:t>
+            </a:r>
+            <a:r>
+              <a:rPr lang="en-US" sz="3199" dirty="0">
+                <a:solidFill>
+                  <a:srgbClr val="475570"/>
+                </a:solidFill>
+                <a:latin typeface="한컴 윤고딕 740"/>
+                <a:ea typeface="한컴 윤고딕 740"/>
+                <a:cs typeface="Source Han Sans KR"/>
+                <a:sym typeface="Source Han Sans KR"/>
+              </a:rPr>
+              <a:t>  </a:t>
+            </a:r>
+            <a:r>
+              <a:rPr lang="en-US" sz="3199" dirty="0">
+                <a:solidFill>
+                  <a:srgbClr val="475570"/>
+                </a:solidFill>
+                <a:highlight>
+                  <a:srgbClr val="FFFF00"/>
+                </a:highlight>
+                <a:latin typeface="한컴 윤고딕 740"/>
+                <a:ea typeface="한컴 윤고딕 740"/>
+                <a:cs typeface="Source Han Sans KR"/>
+                <a:sym typeface="Source Han Sans KR"/>
+              </a:rPr>
+              <a:t>(</a:t>
+            </a:r>
+            <a:r>
+              <a:rPr lang="ko-KR" altLang="en-US" sz="3199" dirty="0">
+                <a:solidFill>
+                  <a:srgbClr val="475570"/>
+                </a:solidFill>
+                <a:highlight>
+                  <a:srgbClr val="FFFF00"/>
+                </a:highlight>
+                <a:latin typeface="한컴 윤고딕 740"/>
+                <a:ea typeface="한컴 윤고딕 740"/>
+                <a:cs typeface="Source Han Sans KR"/>
+                <a:sym typeface="Source Han Sans KR"/>
+              </a:rPr>
+              <a:t>적용전과 적용후의 </a:t>
+            </a:r>
+            <a:r>
+              <a:rPr lang="ko-KR" altLang="en-US" sz="3199" dirty="0" err="1">
+                <a:solidFill>
+                  <a:srgbClr val="475570"/>
+                </a:solidFill>
+                <a:highlight>
+                  <a:srgbClr val="FFFF00"/>
+                </a:highlight>
+                <a:latin typeface="한컴 윤고딕 740"/>
+                <a:ea typeface="한컴 윤고딕 740"/>
+                <a:cs typeface="Source Han Sans KR"/>
+                <a:sym typeface="Source Han Sans KR"/>
+              </a:rPr>
+              <a:t>동접</a:t>
+            </a:r>
+            <a:r>
+              <a:rPr lang="ko-KR" altLang="en-US" sz="3199" dirty="0">
+                <a:solidFill>
+                  <a:srgbClr val="475570"/>
+                </a:solidFill>
+                <a:highlight>
+                  <a:srgbClr val="FFFF00"/>
+                </a:highlight>
+                <a:latin typeface="한컴 윤고딕 740"/>
+                <a:ea typeface="한컴 윤고딕 740"/>
+                <a:cs typeface="Source Han Sans KR"/>
+                <a:sym typeface="Source Han Sans KR"/>
+              </a:rPr>
+              <a:t> 비교 표</a:t>
+            </a:r>
+            <a:r>
+              <a:rPr lang="en-US" altLang="ko-KR" sz="3199" dirty="0">
+                <a:solidFill>
+                  <a:srgbClr val="475570"/>
+                </a:solidFill>
+                <a:highlight>
+                  <a:srgbClr val="FFFF00"/>
+                </a:highlight>
+                <a:latin typeface="한컴 윤고딕 740"/>
+                <a:ea typeface="한컴 윤고딕 740"/>
+                <a:cs typeface="Source Han Sans KR"/>
+                <a:sym typeface="Source Han Sans KR"/>
+              </a:rPr>
+              <a:t>)</a:t>
+            </a:r>
+            <a:endParaRPr lang="en-US" sz="3199" dirty="0">
+              <a:solidFill>
+                <a:srgbClr val="475570"/>
+              </a:solidFill>
+              <a:highlight>
+                <a:srgbClr val="FFFF00"/>
+              </a:highlight>
+              <a:latin typeface="한컴 윤고딕 740"/>
+              <a:ea typeface="한컴 윤고딕 740"/>
+              <a:cs typeface="Source Han Sans KR"/>
+              <a:sym typeface="Source Han Sans KR"/>
+            </a:endParaRPr>
+          </a:p>
+        </p:txBody>
+      </p:sp>
+      <p:sp>
+        <p:nvSpPr>
+          <p:cNvPr id="5" name="TextBox 5"/>
+          <p:cNvSpPr txBox="1"/>
+          <p:nvPr/>
+        </p:nvSpPr>
+        <p:spPr>
+          <a:xfrm>
+            <a:off x="1794412" y="2263589"/>
+            <a:ext cx="5782478" cy="879661"/>
+          </a:xfrm>
+          <a:prstGeom prst="rect">
+            <a:avLst/>
+          </a:prstGeom>
+        </p:spPr>
+        <p:txBody>
+          <a:bodyPr wrap="square" lIns="0" tIns="0" rIns="0" bIns="0" anchor="t">
+            <a:spAutoFit/>
+          </a:bodyPr>
+          <a:lstStyle/>
+          <a:p>
+            <a:pPr marL="0" lvl="0" indent="0" algn="l">
+              <a:lnSpc>
+                <a:spcPts val="7000"/>
+              </a:lnSpc>
+              <a:spcBef>
+                <a:spcPct val="0"/>
+              </a:spcBef>
+              <a:defRPr/>
+            </a:pPr>
+            <a:r>
+              <a:rPr lang="en-US" sz="5000" b="1">
+                <a:solidFill>
+                  <a:srgbClr val="475570"/>
+                </a:solidFill>
+                <a:latin typeface="한컴 윤고딕 740"/>
+                <a:ea typeface="한컴 윤고딕 740"/>
+                <a:cs typeface="Canva Sans Bold"/>
+                <a:sym typeface="Canva Sans Bold"/>
+              </a:rPr>
+              <a:t>대규모 씬 최적화</a:t>
+            </a:r>
+          </a:p>
+        </p:txBody>
+      </p:sp>
+      <p:sp>
+        <p:nvSpPr>
+          <p:cNvPr id="6" name="TextBox 6"/>
+          <p:cNvSpPr txBox="1"/>
+          <p:nvPr/>
+        </p:nvSpPr>
+        <p:spPr>
+          <a:xfrm>
+            <a:off x="2626980" y="4399593"/>
+            <a:ext cx="13984620" cy="2429832"/>
+          </a:xfrm>
+          <a:prstGeom prst="rect">
+            <a:avLst/>
+          </a:prstGeom>
+        </p:spPr>
+        <p:txBody>
+          <a:bodyPr wrap="square" lIns="0" tIns="0" rIns="0" bIns="0" anchor="t">
+            <a:spAutoFit/>
+          </a:bodyPr>
+          <a:lstStyle/>
+          <a:p>
+            <a:pPr marL="690876" lvl="1" indent="-345438" algn="l">
+              <a:lnSpc>
+                <a:spcPts val="6399"/>
+              </a:lnSpc>
+              <a:buFont typeface="Arial"/>
+              <a:buChar char="•"/>
+              <a:defRPr/>
+            </a:pPr>
+            <a:r>
+              <a:rPr lang="ko-KR" altLang="en-US" sz="3199" dirty="0" err="1">
+                <a:solidFill>
+                  <a:srgbClr val="475570"/>
+                </a:solidFill>
+                <a:latin typeface="한컴 윤고딕 740"/>
+                <a:ea typeface="한컴 윤고딕 740"/>
+                <a:cs typeface="Source Han Sans KR"/>
+                <a:sym typeface="Source Han Sans KR"/>
+              </a:rPr>
+              <a:t>멀티쓰레드</a:t>
+            </a:r>
+            <a:r>
+              <a:rPr lang="en-US" sz="3199" dirty="0">
+                <a:solidFill>
+                  <a:srgbClr val="475570"/>
+                </a:solidFill>
+                <a:latin typeface="한컴 윤고딕 740"/>
+                <a:ea typeface="한컴 윤고딕 740"/>
+                <a:cs typeface="Source Han Sans KR"/>
+                <a:sym typeface="Source Han Sans KR"/>
+              </a:rPr>
+              <a:t> </a:t>
+            </a:r>
+            <a:r>
+              <a:rPr lang="en-US" sz="3199" dirty="0" err="1">
+                <a:solidFill>
+                  <a:srgbClr val="475570"/>
+                </a:solidFill>
+                <a:latin typeface="한컴 윤고딕 740"/>
+                <a:ea typeface="한컴 윤고딕 740"/>
+                <a:cs typeface="Source Han Sans KR"/>
+                <a:sym typeface="Source Han Sans KR"/>
+              </a:rPr>
+              <a:t>IOCP로</a:t>
+            </a:r>
+            <a:r>
+              <a:rPr lang="en-US" sz="3199" dirty="0">
+                <a:solidFill>
+                  <a:srgbClr val="475570"/>
+                </a:solidFill>
+                <a:latin typeface="한컴 윤고딕 740"/>
+                <a:ea typeface="한컴 윤고딕 740"/>
+                <a:cs typeface="Source Han Sans KR"/>
+                <a:sym typeface="Source Han Sans KR"/>
+              </a:rPr>
+              <a:t> I/O </a:t>
+            </a:r>
+            <a:r>
+              <a:rPr lang="en-US" sz="3199" dirty="0" err="1">
+                <a:solidFill>
+                  <a:srgbClr val="475570"/>
+                </a:solidFill>
+                <a:latin typeface="한컴 윤고딕 740"/>
+                <a:ea typeface="한컴 윤고딕 740"/>
+                <a:cs typeface="Source Han Sans KR"/>
+                <a:sym typeface="Source Han Sans KR"/>
+              </a:rPr>
+              <a:t>병렬화</a:t>
+            </a:r>
+            <a:endParaRPr lang="en-US" sz="3199" dirty="0">
               <a:solidFill>
                 <a:srgbClr val="475570"/>
               </a:solidFill>
@@ -12438,37 +14116,123 @@
             </a:endParaRPr>
           </a:p>
           <a:p>
-            <a:pPr lvl="0" algn="l">
+            <a:pPr marL="690876" lvl="1" indent="-345438" algn="l">
               <a:lnSpc>
-                <a:spcPts val="7999"/>
+                <a:spcPts val="6399"/>
               </a:lnSpc>
-              <a:defRPr/>
-            </a:pPr>
-            <a:r>
-              <a:rPr lang="en-US" sz="3199" b="1">
-                <a:solidFill>
-                  <a:srgbClr val="475570"/>
-                </a:solidFill>
-                <a:latin typeface="한컴 윤고딕 740"/>
-                <a:ea typeface="한컴 윤고딕 740"/>
-                <a:cs typeface="Source Han Sans KR Bold"/>
-                <a:sym typeface="Source Han Sans KR Bold"/>
-              </a:rPr>
-              <a:t>결과 </a:t>
-            </a:r>
-            <a:r>
-              <a:rPr lang="en-US" sz="3199">
-                <a:solidFill>
-                  <a:srgbClr val="475570"/>
-                </a:solidFill>
-                <a:latin typeface="한컴 윤고딕 740"/>
-                <a:ea typeface="한컴 윤고딕 740"/>
-                <a:cs typeface="Source Han Sans KR"/>
-                <a:sym typeface="Source Han Sans KR"/>
-              </a:rPr>
-              <a:t>  서버 안정성 향상, 확장성 확보</a:t>
-            </a:r>
-            <a:endParaRPr lang="en-US" sz="3199">
+              <a:buFont typeface="Arial"/>
+              <a:buChar char="•"/>
+              <a:defRPr/>
+            </a:pPr>
+            <a:r>
+              <a:rPr lang="en-US" sz="3199" dirty="0" err="1">
+                <a:solidFill>
+                  <a:srgbClr val="475570"/>
+                </a:solidFill>
+                <a:latin typeface="한컴 윤고딕 740"/>
+                <a:ea typeface="한컴 윤고딕 740"/>
+                <a:cs typeface="Source Han Sans KR"/>
+                <a:sym typeface="Source Han Sans KR"/>
+              </a:rPr>
+              <a:t>그리드</a:t>
+            </a:r>
+            <a:r>
+              <a:rPr lang="en-US" sz="3199" dirty="0">
+                <a:solidFill>
+                  <a:srgbClr val="475570"/>
+                </a:solidFill>
+                <a:latin typeface="한컴 윤고딕 740"/>
+                <a:ea typeface="한컴 윤고딕 740"/>
+                <a:cs typeface="Source Han Sans KR"/>
+                <a:sym typeface="Source Han Sans KR"/>
+              </a:rPr>
+              <a:t> + </a:t>
+            </a:r>
+            <a:r>
+              <a:rPr lang="en-US" sz="3199" dirty="0" err="1">
+                <a:solidFill>
+                  <a:srgbClr val="475570"/>
+                </a:solidFill>
+                <a:latin typeface="한컴 윤고딕 740"/>
+                <a:ea typeface="한컴 윤고딕 740"/>
+                <a:cs typeface="Source Han Sans KR"/>
+                <a:sym typeface="Source Han Sans KR"/>
+              </a:rPr>
+              <a:t>ViewList로</a:t>
+            </a:r>
+            <a:r>
+              <a:rPr lang="en-US" sz="3199" dirty="0">
+                <a:solidFill>
+                  <a:srgbClr val="475570"/>
+                </a:solidFill>
+                <a:latin typeface="한컴 윤고딕 740"/>
+                <a:ea typeface="한컴 윤고딕 740"/>
+                <a:cs typeface="Source Han Sans KR"/>
+                <a:sym typeface="Source Han Sans KR"/>
+              </a:rPr>
+              <a:t> </a:t>
+            </a:r>
+            <a:r>
+              <a:rPr lang="en-US" sz="3199" dirty="0" err="1">
+                <a:solidFill>
+                  <a:srgbClr val="475570"/>
+                </a:solidFill>
+                <a:latin typeface="한컴 윤고딕 740"/>
+                <a:ea typeface="한컴 윤고딕 740"/>
+                <a:cs typeface="Source Han Sans KR"/>
+                <a:sym typeface="Source Han Sans KR"/>
+              </a:rPr>
+              <a:t>전송</a:t>
+            </a:r>
+            <a:r>
+              <a:rPr lang="en-US" sz="3199" dirty="0">
+                <a:solidFill>
+                  <a:srgbClr val="475570"/>
+                </a:solidFill>
+                <a:latin typeface="한컴 윤고딕 740"/>
+                <a:ea typeface="한컴 윤고딕 740"/>
+                <a:cs typeface="Source Han Sans KR"/>
+                <a:sym typeface="Source Han Sans KR"/>
+              </a:rPr>
+              <a:t> </a:t>
+            </a:r>
+            <a:r>
+              <a:rPr lang="en-US" sz="3199" dirty="0" err="1">
+                <a:solidFill>
+                  <a:srgbClr val="475570"/>
+                </a:solidFill>
+                <a:latin typeface="한컴 윤고딕 740"/>
+                <a:ea typeface="한컴 윤고딕 740"/>
+                <a:cs typeface="Source Han Sans KR"/>
+                <a:sym typeface="Source Han Sans KR"/>
+              </a:rPr>
+              <a:t>범위</a:t>
+            </a:r>
+            <a:r>
+              <a:rPr lang="en-US" sz="3199" dirty="0">
+                <a:solidFill>
+                  <a:srgbClr val="475570"/>
+                </a:solidFill>
+                <a:latin typeface="한컴 윤고딕 740"/>
+                <a:ea typeface="한컴 윤고딕 740"/>
+                <a:cs typeface="Source Han Sans KR"/>
+                <a:sym typeface="Source Han Sans KR"/>
+              </a:rPr>
+              <a:t> </a:t>
+            </a:r>
+            <a:r>
+              <a:rPr lang="en-US" sz="3199" dirty="0" err="1">
+                <a:solidFill>
+                  <a:srgbClr val="475570"/>
+                </a:solidFill>
+                <a:latin typeface="한컴 윤고딕 740"/>
+                <a:ea typeface="한컴 윤고딕 740"/>
+                <a:cs typeface="Source Han Sans KR"/>
+                <a:sym typeface="Source Han Sans KR"/>
+              </a:rPr>
+              <a:t>축소</a:t>
+            </a:r>
+            <a:endParaRPr lang="en-US" sz="3199" dirty="0">
               <a:solidFill>
                 <a:srgbClr val="475570"/>
               </a:solidFill>
@@ -12478,82 +14242,6 @@
               <a:sym typeface="Source Han Sans KR"/>
             </a:endParaRPr>
           </a:p>
-        </p:txBody>
-      </p:sp>
-      <p:sp>
-        <p:nvSpPr>
-          <p:cNvPr id="5" name="TextBox 5"/>
-          <p:cNvSpPr txBox="1"/>
-          <p:nvPr/>
-        </p:nvSpPr>
-        <p:spPr>
-          <a:xfrm>
-            <a:off x="1794412" y="2263589"/>
-            <a:ext cx="5782478" cy="879661"/>
-          </a:xfrm>
-          <a:prstGeom prst="rect">
-            <a:avLst/>
-          </a:prstGeom>
-        </p:spPr>
-        <p:txBody>
-          <a:bodyPr wrap="square" lIns="0" tIns="0" rIns="0" bIns="0" anchor="t">
-            <a:spAutoFit/>
-          </a:bodyPr>
-          <a:lstStyle/>
-          <a:p>
-            <a:pPr marL="0" lvl="0" indent="0" algn="l">
-              <a:lnSpc>
-                <a:spcPts val="7000"/>
-              </a:lnSpc>
-              <a:spcBef>
-                <a:spcPct val="0"/>
-              </a:spcBef>
-              <a:defRPr/>
-            </a:pPr>
-            <a:r>
-              <a:rPr lang="en-US" sz="5000" b="1">
-                <a:solidFill>
-                  <a:srgbClr val="475570"/>
-                </a:solidFill>
-                <a:latin typeface="한컴 윤고딕 740"/>
-                <a:ea typeface="한컴 윤고딕 740"/>
-                <a:cs typeface="Canva Sans Bold"/>
-                <a:sym typeface="Canva Sans Bold"/>
-              </a:rPr>
-              <a:t>대규모 씬 최적화</a:t>
-            </a:r>
-            <a:endParaRPr lang="en-US" sz="5000" b="1">
-              <a:solidFill>
-                <a:srgbClr val="475570"/>
-              </a:solidFill>
-              <a:latin typeface="한컴 윤고딕 740"/>
-              <a:ea typeface="한컴 윤고딕 740"/>
-              <a:cs typeface="Canva Sans Bold"/>
-              <a:sym typeface="Canva Sans Bold"/>
-            </a:endParaRPr>
-          </a:p>
-        </p:txBody>
-      </p:sp>
-      <p:sp>
-        <p:nvSpPr>
-          <p:cNvPr id="6" name="TextBox 6"/>
-          <p:cNvSpPr txBox="1"/>
-          <p:nvPr/>
-        </p:nvSpPr>
-        <p:spPr>
-          <a:xfrm>
-            <a:off x="2626980" y="4399593"/>
-            <a:ext cx="13984620" cy="2429832"/>
-          </a:xfrm>
-          <a:prstGeom prst="rect">
-            <a:avLst/>
-          </a:prstGeom>
-        </p:spPr>
-        <p:txBody>
-          <a:bodyPr wrap="square" lIns="0" tIns="0" rIns="0" bIns="0" anchor="t">
-            <a:spAutoFit/>
-          </a:bodyPr>
-          <a:lstStyle/>
           <a:p>
             <a:pPr marL="690876" lvl="1" indent="-345438" algn="l">
               <a:lnSpc>
@@ -12564,80 +14252,186 @@
               <a:defRPr/>
             </a:pPr>
             <a:r>
-              <a:rPr lang="en-US" sz="3199">
-                <a:solidFill>
-                  <a:srgbClr val="475570"/>
-                </a:solidFill>
-                <a:latin typeface="한컴 윤고딕 740"/>
-                <a:ea typeface="한컴 윤고딕 740"/>
-                <a:cs typeface="Source Han Sans KR"/>
-                <a:sym typeface="Source Han Sans KR"/>
-              </a:rPr>
-              <a:t>비동기 IOCP로 I/O 병렬화</a:t>
-            </a:r>
-            <a:endParaRPr lang="en-US" sz="3199">
-              <a:solidFill>
-                <a:srgbClr val="475570"/>
-              </a:solidFill>
-              <a:latin typeface="한컴 윤고딕 740"/>
-              <a:ea typeface="한컴 윤고딕 740"/>
-              <a:cs typeface="Source Han Sans KR"/>
-              <a:sym typeface="Source Han Sans KR"/>
-            </a:endParaRPr>
-          </a:p>
-          <a:p>
-            <a:pPr marL="690876" lvl="1" indent="-345438" algn="l">
-              <a:lnSpc>
-                <a:spcPts val="6399"/>
-              </a:lnSpc>
-              <a:buFont typeface="Arial"/>
-              <a:buChar char="•"/>
-              <a:defRPr/>
-            </a:pPr>
-            <a:r>
-              <a:rPr lang="en-US" sz="3199">
-                <a:solidFill>
-                  <a:srgbClr val="475570"/>
-                </a:solidFill>
-                <a:latin typeface="한컴 윤고딕 740"/>
-                <a:ea typeface="한컴 윤고딕 740"/>
-                <a:cs typeface="Source Han Sans KR"/>
-                <a:sym typeface="Source Han Sans KR"/>
-              </a:rPr>
-              <a:t>그리드 + ViewList로 전송 범위 축소</a:t>
-            </a:r>
-            <a:endParaRPr lang="en-US" sz="3199">
-              <a:solidFill>
-                <a:srgbClr val="475570"/>
-              </a:solidFill>
-              <a:latin typeface="한컴 윤고딕 740"/>
-              <a:ea typeface="한컴 윤고딕 740"/>
-              <a:cs typeface="Source Han Sans KR"/>
-              <a:sym typeface="Source Han Sans KR"/>
-            </a:endParaRPr>
-          </a:p>
-          <a:p>
-            <a:pPr marL="690876" lvl="1" indent="-345438" algn="l">
-              <a:lnSpc>
-                <a:spcPts val="6399"/>
-              </a:lnSpc>
-              <a:buFont typeface="Arial"/>
-              <a:buChar char="•"/>
-              <a:defRPr/>
-            </a:pPr>
-            <a:r>
-              <a:rPr lang="en-US" sz="3199">
-                <a:solidFill>
-                  <a:srgbClr val="475570"/>
-                </a:solidFill>
-                <a:latin typeface="한컴 윤고딕 740"/>
-                <a:ea typeface="한컴 윤고딕 740"/>
-                <a:cs typeface="Source Han Sans KR"/>
-                <a:sym typeface="Source Han Sans KR"/>
-              </a:rPr>
-              <a:t>채널링으로 접속 분할, 세션/이벤트를 채널별로 스코프 제한</a:t>
-            </a:r>
-            <a:endParaRPr lang="en-US" sz="3199">
+              <a:rPr lang="en-US" sz="3199" dirty="0" err="1">
+                <a:solidFill>
+                  <a:srgbClr val="475570"/>
+                </a:solidFill>
+                <a:latin typeface="한컴 윤고딕 740"/>
+                <a:ea typeface="한컴 윤고딕 740"/>
+                <a:cs typeface="Source Han Sans KR"/>
+                <a:sym typeface="Source Han Sans KR"/>
+              </a:rPr>
+              <a:t>채널링으로</a:t>
+            </a:r>
+            <a:r>
+              <a:rPr lang="en-US" sz="3199" dirty="0">
+                <a:solidFill>
+                  <a:srgbClr val="475570"/>
+                </a:solidFill>
+                <a:latin typeface="한컴 윤고딕 740"/>
+                <a:ea typeface="한컴 윤고딕 740"/>
+                <a:cs typeface="Source Han Sans KR"/>
+                <a:sym typeface="Source Han Sans KR"/>
+              </a:rPr>
+              <a:t> </a:t>
+            </a:r>
+            <a:r>
+              <a:rPr lang="en-US" sz="3199" dirty="0" err="1">
+                <a:solidFill>
+                  <a:srgbClr val="475570"/>
+                </a:solidFill>
+                <a:latin typeface="한컴 윤고딕 740"/>
+                <a:ea typeface="한컴 윤고딕 740"/>
+                <a:cs typeface="Source Han Sans KR"/>
+                <a:sym typeface="Source Han Sans KR"/>
+              </a:rPr>
+              <a:t>접속</a:t>
+            </a:r>
+            <a:r>
+              <a:rPr lang="en-US" sz="3199" dirty="0">
+                <a:solidFill>
+                  <a:srgbClr val="475570"/>
+                </a:solidFill>
+                <a:latin typeface="한컴 윤고딕 740"/>
+                <a:ea typeface="한컴 윤고딕 740"/>
+                <a:cs typeface="Source Han Sans KR"/>
+                <a:sym typeface="Source Han Sans KR"/>
+              </a:rPr>
+              <a:t> </a:t>
+            </a:r>
+            <a:r>
+              <a:rPr lang="en-US" sz="3199" dirty="0" err="1">
+                <a:solidFill>
+                  <a:srgbClr val="475570"/>
+                </a:solidFill>
+                <a:latin typeface="한컴 윤고딕 740"/>
+                <a:ea typeface="한컴 윤고딕 740"/>
+                <a:cs typeface="Source Han Sans KR"/>
+                <a:sym typeface="Source Han Sans KR"/>
+              </a:rPr>
+              <a:t>분할</a:t>
+            </a:r>
+            <a:r>
+              <a:rPr lang="en-US" sz="3199" dirty="0">
+                <a:solidFill>
+                  <a:srgbClr val="475570"/>
+                </a:solidFill>
+                <a:latin typeface="한컴 윤고딕 740"/>
+                <a:ea typeface="한컴 윤고딕 740"/>
+                <a:cs typeface="Source Han Sans KR"/>
+                <a:sym typeface="Source Han Sans KR"/>
+              </a:rPr>
+              <a:t>, </a:t>
+            </a:r>
+            <a:r>
+              <a:rPr lang="en-US" sz="3199" dirty="0" err="1">
+                <a:solidFill>
+                  <a:srgbClr val="475570"/>
+                </a:solidFill>
+                <a:latin typeface="한컴 윤고딕 740"/>
+                <a:ea typeface="한컴 윤고딕 740"/>
+                <a:cs typeface="Source Han Sans KR"/>
+                <a:sym typeface="Source Han Sans KR"/>
+              </a:rPr>
+              <a:t>세션</a:t>
+            </a:r>
+            <a:r>
+              <a:rPr lang="en-US" sz="3199" dirty="0">
+                <a:solidFill>
+                  <a:srgbClr val="475570"/>
+                </a:solidFill>
+                <a:latin typeface="한컴 윤고딕 740"/>
+                <a:ea typeface="한컴 윤고딕 740"/>
+                <a:cs typeface="Source Han Sans KR"/>
+                <a:sym typeface="Source Han Sans KR"/>
+              </a:rPr>
+              <a:t>/</a:t>
+            </a:r>
+            <a:r>
+              <a:rPr lang="en-US" sz="3199" dirty="0" err="1">
+                <a:solidFill>
+                  <a:srgbClr val="475570"/>
+                </a:solidFill>
+                <a:latin typeface="한컴 윤고딕 740"/>
+                <a:ea typeface="한컴 윤고딕 740"/>
+                <a:cs typeface="Source Han Sans KR"/>
+                <a:sym typeface="Source Han Sans KR"/>
+              </a:rPr>
+              <a:t>이벤트를</a:t>
+            </a:r>
+            <a:r>
+              <a:rPr lang="en-US" sz="3199" dirty="0">
+                <a:solidFill>
+                  <a:srgbClr val="475570"/>
+                </a:solidFill>
+                <a:latin typeface="한컴 윤고딕 740"/>
+                <a:ea typeface="한컴 윤고딕 740"/>
+                <a:cs typeface="Source Han Sans KR"/>
+                <a:sym typeface="Source Han Sans KR"/>
+              </a:rPr>
+              <a:t> </a:t>
+            </a:r>
+            <a:r>
+              <a:rPr lang="en-US" sz="3199" dirty="0" err="1">
+                <a:solidFill>
+                  <a:srgbClr val="475570"/>
+                </a:solidFill>
+                <a:latin typeface="한컴 윤고딕 740"/>
+                <a:ea typeface="한컴 윤고딕 740"/>
+                <a:cs typeface="Source Han Sans KR"/>
+                <a:sym typeface="Source Han Sans KR"/>
+              </a:rPr>
+              <a:t>채널별로</a:t>
+            </a:r>
+            <a:r>
+              <a:rPr lang="en-US" sz="3199" dirty="0">
+                <a:solidFill>
+                  <a:srgbClr val="475570"/>
+                </a:solidFill>
+                <a:latin typeface="한컴 윤고딕 740"/>
+                <a:ea typeface="한컴 윤고딕 740"/>
+                <a:cs typeface="Source Han Sans KR"/>
+                <a:sym typeface="Source Han Sans KR"/>
+              </a:rPr>
+              <a:t> </a:t>
+            </a:r>
+            <a:r>
+              <a:rPr lang="en-US" sz="3199" dirty="0" err="1">
+                <a:solidFill>
+                  <a:srgbClr val="475570"/>
+                </a:solidFill>
+                <a:latin typeface="한컴 윤고딕 740"/>
+                <a:ea typeface="한컴 윤고딕 740"/>
+                <a:cs typeface="Source Han Sans KR"/>
+                <a:sym typeface="Source Han Sans KR"/>
+              </a:rPr>
+              <a:t>스코프</a:t>
+            </a:r>
+            <a:r>
+              <a:rPr lang="en-US" sz="3199" dirty="0">
+                <a:solidFill>
+                  <a:srgbClr val="475570"/>
+                </a:solidFill>
+                <a:latin typeface="한컴 윤고딕 740"/>
+                <a:ea typeface="한컴 윤고딕 740"/>
+                <a:cs typeface="Source Han Sans KR"/>
+                <a:sym typeface="Source Han Sans KR"/>
+              </a:rPr>
+              <a:t> </a:t>
+            </a:r>
+            <a:r>
+              <a:rPr lang="en-US" sz="3199" dirty="0" err="1">
+                <a:solidFill>
+                  <a:srgbClr val="475570"/>
+                </a:solidFill>
+                <a:latin typeface="한컴 윤고딕 740"/>
+                <a:ea typeface="한컴 윤고딕 740"/>
+                <a:cs typeface="Source Han Sans KR"/>
+                <a:sym typeface="Source Han Sans KR"/>
+              </a:rPr>
+              <a:t>제한</a:t>
+            </a:r>
+            <a:endParaRPr lang="en-US" sz="3199" dirty="0">
               <a:solidFill>
                 <a:srgbClr val="475570"/>
               </a:solidFill>
@@ -12658,13 +14452,14 @@
 </file>
 
 <file path=ppt/slides/slide6.xml><?xml version="1.0" encoding="utf-8"?>
-<p:sld xmlns:r="http://schemas.openxmlformats.org/officeDocument/2006/relationships" xmlns:c="http://schemas.openxmlformats.org/drawingml/2006/chart" xmlns:a="http://schemas.openxmlformats.org/drawingml/2006/main" xmlns:dgm="http://schemas.openxmlformats.org/drawingml/2006/diagram" xmlns:dsp="http://schemas.microsoft.com/office/drawing/2008/diagram" xmlns:p="http://schemas.openxmlformats.org/presentationml/2006/main">
+<p:sld xmlns:a="http://schemas.openxmlformats.org/drawingml/2006/main" xmlns:r="http://schemas.openxmlformats.org/officeDocument/2006/relationships" xmlns:p="http://schemas.openxmlformats.org/presentationml/2006/main">
   <p:cSld>
     <p:bg>
-      <p:bgPr shadeToTitle="0">
+      <p:bgPr>
         <a:solidFill>
-          <a:srgbClr val="fcfdf8"/>
+          <a:srgbClr val="FCFDF8"/>
         </a:solidFill>
+        <a:effectLst/>
       </p:bgPr>
     </p:bg>
     <p:spTree>
@@ -12683,12 +14478,12 @@
       </p:grpSpPr>
       <p:sp>
         <p:nvSpPr>
-          <p:cNvPr name="Freeform 2" id="2"/>
+          <p:cNvPr id="2" name="Freeform 2"/>
           <p:cNvSpPr/>
           <p:nvPr/>
         </p:nvSpPr>
         <p:spPr>
-          <a:xfrm flipH="false" flipV="false" rot="0">
+          <a:xfrm>
             <a:off x="3963011" y="1179512"/>
             <a:ext cx="10361979" cy="7068650"/>
           </a:xfrm>
@@ -12697,9 +14492,9 @@
             <a:gdLst/>
             <a:ahLst/>
             <a:cxnLst/>
-            <a:rect r="r" b="b" t="t" l="l"/>
+            <a:rect l="l" t="t" r="r" b="b"/>
             <a:pathLst>
-              <a:path h="7068650" w="10361979">
+              <a:path w="10361979" h="7068650">
                 <a:moveTo>
                   <a:pt x="0" y="0"/>
                 </a:moveTo>
@@ -12722,10 +14517,17 @@
           <a:blipFill>
             <a:blip r:embed="rId2"/>
             <a:stretch>
-              <a:fillRect l="0" t="-2290" r="0" b="-4818"/>
+              <a:fillRect t="-2290" b="-4818"/>
             </a:stretch>
           </a:blipFill>
         </p:spPr>
+        <p:txBody>
+          <a:bodyPr/>
+          <a:lstStyle/>
+          <a:p>
+            <a:endParaRPr lang="ko-KR" altLang="en-US"/>
+          </a:p>
+        </p:txBody>
       </p:sp>
       <p:sp>
         <p:nvSpPr>
@@ -12766,15 +14568,6 @@
               </a:rPr>
               <a:t>비동기적으로 발생하는 IOCP 완료 이벤트를</a:t>
             </a:r>
-            <a:endParaRPr lang="en-US" sz="3199">
-              <a:solidFill>
-                <a:srgbClr val="475570"/>
-              </a:solidFill>
-              <a:latin typeface="한컴 윤고딕 740"/>
-              <a:ea typeface="한컴 윤고딕 740"/>
-              <a:cs typeface="Source Han Sans KR"/>
-              <a:sym typeface="Source Han Sans KR"/>
-            </a:endParaRPr>
           </a:p>
           <a:p>
             <a:pPr lvl="0" algn="ctr">
@@ -12798,15 +14591,6 @@
               </a:rPr>
               <a:t>CompType(세션 연결·데이터 수신·송신)별로 워커풀에서 병렬 처리</a:t>
             </a:r>
-            <a:endParaRPr lang="en-US" sz="3199">
-              <a:solidFill>
-                <a:srgbClr val="475570"/>
-              </a:solidFill>
-              <a:latin typeface="한컴 윤고딕 740"/>
-              <a:ea typeface="한컴 윤고딕 740"/>
-              <a:cs typeface="Source Han Sans KR"/>
-              <a:sym typeface="Source Han Sans KR"/>
-            </a:endParaRPr>
           </a:p>
         </p:txBody>
       </p:sp>
@@ -12852,15 +14636,6 @@
               </a:rPr>
               <a:t>티유월드</a:t>
             </a:r>
-            <a:endParaRPr lang="en-US" sz="5000" b="1">
-              <a:solidFill>
-                <a:srgbClr val="475570"/>
-              </a:solidFill>
-              <a:latin typeface="한컴 윤고딕 760"/>
-              <a:ea typeface="한컴 윤고딕 760"/>
-              <a:cs typeface="Canva Sans Bold"/>
-              <a:sym typeface="Canva Sans Bold"/>
-            </a:endParaRPr>
           </a:p>
         </p:txBody>
       </p:sp>
@@ -12906,15 +14681,6 @@
               </a:rPr>
               <a:t>PROJECTS</a:t>
             </a:r>
-            <a:endParaRPr lang="en-US" sz="2000">
-              <a:solidFill>
-                <a:srgbClr val="475570"/>
-              </a:solidFill>
-              <a:latin typeface="한컴 윤고딕 760"/>
-              <a:ea typeface="한컴 윤고딕 760"/>
-              <a:cs typeface="Cabin"/>
-              <a:sym typeface="Cabin"/>
-            </a:endParaRPr>
           </a:p>
         </p:txBody>
       </p:sp>
@@ -12927,13 +14693,14 @@
 </file>
 
 <file path=ppt/slides/slide7.xml><?xml version="1.0" encoding="utf-8"?>
-<p:sld xmlns:r="http://schemas.openxmlformats.org/officeDocument/2006/relationships" xmlns:c="http://schemas.openxmlformats.org/drawingml/2006/chart" xmlns:a="http://schemas.openxmlformats.org/drawingml/2006/main" xmlns:dgm="http://schemas.openxmlformats.org/drawingml/2006/diagram" xmlns:dsp="http://schemas.microsoft.com/office/drawing/2008/diagram" xmlns:p="http://schemas.openxmlformats.org/presentationml/2006/main">
+<p:sld xmlns:a="http://schemas.openxmlformats.org/drawingml/2006/main" xmlns:r="http://schemas.openxmlformats.org/officeDocument/2006/relationships" xmlns:p="http://schemas.openxmlformats.org/presentationml/2006/main">
   <p:cSld>
     <p:bg>
-      <p:bgPr shadeToTitle="0">
+      <p:bgPr>
         <a:solidFill>
-          <a:srgbClr val="fcfdf8"/>
+          <a:srgbClr val="FCFDF8"/>
         </a:solidFill>
+        <a:effectLst/>
       </p:bgPr>
     </p:bg>
     <p:spTree>
@@ -12964,6 +14731,8 @@
           <a:custGeom>
             <a:avLst/>
             <a:gdLst/>
+            <a:ahLst/>
+            <a:cxnLst/>
             <a:rect l="l" t="t" r="r" b="b"/>
             <a:pathLst>
               <a:path w="9587419" h="7430250">
@@ -12995,6 +14764,7 @@
         </p:spPr>
         <p:txBody>
           <a:bodyPr anchor="ctr"/>
+          <a:lstStyle/>
           <a:p>
             <a:pPr lvl="0" algn="ctr">
               <a:defRPr/>
@@ -13048,15 +14818,6 @@
               </a:rPr>
               <a:t>섹터 기반 ViewList로 인접 객체만 전송</a:t>
             </a:r>
-            <a:endParaRPr lang="en-US" sz="3199">
-              <a:solidFill>
-                <a:srgbClr val="475570"/>
-              </a:solidFill>
-              <a:latin typeface="한컴 윤고딕 740"/>
-              <a:ea typeface="한컴 윤고딕 740"/>
-              <a:cs typeface="Source Han Sans KR"/>
-              <a:sym typeface="Source Han Sans KR"/>
-            </a:endParaRPr>
           </a:p>
         </p:txBody>
       </p:sp>
@@ -13102,15 +14863,6 @@
               </a:rPr>
               <a:t>티유월드</a:t>
             </a:r>
-            <a:endParaRPr lang="en-US" sz="5000" b="1">
-              <a:solidFill>
-                <a:srgbClr val="475570"/>
-              </a:solidFill>
-              <a:latin typeface="한컴 윤고딕 760"/>
-              <a:ea typeface="한컴 윤고딕 760"/>
-              <a:cs typeface="Canva Sans Bold"/>
-              <a:sym typeface="Canva Sans Bold"/>
-            </a:endParaRPr>
           </a:p>
         </p:txBody>
       </p:sp>
@@ -13156,15 +14908,6 @@
               </a:rPr>
               <a:t>PROJECTS</a:t>
             </a:r>
-            <a:endParaRPr lang="en-US" sz="2000">
-              <a:solidFill>
-                <a:srgbClr val="475570"/>
-              </a:solidFill>
-              <a:latin typeface="한컴 윤고딕 760"/>
-              <a:ea typeface="한컴 윤고딕 760"/>
-              <a:cs typeface="Cabin"/>
-              <a:sym typeface="Cabin"/>
-            </a:endParaRPr>
           </a:p>
         </p:txBody>
       </p:sp>
@@ -13177,13 +14920,14 @@
 </file>
 
 <file path=ppt/slides/slide8.xml><?xml version="1.0" encoding="utf-8"?>
-<p:sld xmlns:r="http://schemas.openxmlformats.org/officeDocument/2006/relationships" xmlns:c="http://schemas.openxmlformats.org/drawingml/2006/chart" xmlns:a="http://schemas.openxmlformats.org/drawingml/2006/main" xmlns:dgm="http://schemas.openxmlformats.org/drawingml/2006/diagram" xmlns:dsp="http://schemas.microsoft.com/office/drawing/2008/diagram" xmlns:p="http://schemas.openxmlformats.org/presentationml/2006/main">
+<p:sld xmlns:a="http://schemas.openxmlformats.org/drawingml/2006/main" xmlns:r="http://schemas.openxmlformats.org/officeDocument/2006/relationships" xmlns:p="http://schemas.openxmlformats.org/presentationml/2006/main">
   <p:cSld>
     <p:bg>
-      <p:bgPr shadeToTitle="0">
+      <p:bgPr>
         <a:solidFill>
-          <a:srgbClr val="fcfdf8"/>
+          <a:srgbClr val="FCFDF8"/>
         </a:solidFill>
+        <a:effectLst/>
       </p:bgPr>
     </p:bg>
     <p:spTree>
@@ -13202,12 +14946,12 @@
       </p:grpSpPr>
       <p:sp>
         <p:nvSpPr>
-          <p:cNvPr name="Freeform 2" id="2"/>
+          <p:cNvPr id="2" name="Freeform 2"/>
           <p:cNvSpPr/>
           <p:nvPr/>
         </p:nvSpPr>
         <p:spPr>
-          <a:xfrm flipH="false" flipV="false" rot="0">
+          <a:xfrm>
             <a:off x="4716356" y="1876938"/>
             <a:ext cx="8855288" cy="6533125"/>
           </a:xfrm>
@@ -13216,9 +14960,9 @@
             <a:gdLst/>
             <a:ahLst/>
             <a:cxnLst/>
-            <a:rect r="r" b="b" t="t" l="l"/>
+            <a:rect l="l" t="t" r="r" b="b"/>
             <a:pathLst>
-              <a:path h="6533125" w="8855288">
+              <a:path w="8855288" h="6533125">
                 <a:moveTo>
                   <a:pt x="0" y="0"/>
                 </a:moveTo>
@@ -13241,10 +14985,17 @@
           <a:blipFill>
             <a:blip r:embed="rId2"/>
             <a:stretch>
-              <a:fillRect l="0" t="0" r="-6927" b="0"/>
+              <a:fillRect r="-6927"/>
             </a:stretch>
           </a:blipFill>
         </p:spPr>
+        <p:txBody>
+          <a:bodyPr/>
+          <a:lstStyle/>
+          <a:p>
+            <a:endParaRPr lang="ko-KR" altLang="en-US"/>
+          </a:p>
+        </p:txBody>
       </p:sp>
       <p:sp>
         <p:nvSpPr>
@@ -13255,7 +15006,7 @@
         <p:spPr>
           <a:xfrm>
             <a:off x="1493732" y="8724900"/>
-            <a:ext cx="15300536" cy="571500"/>
+            <a:ext cx="15300536" cy="537135"/>
           </a:xfrm>
           <a:prstGeom prst="rect">
             <a:avLst/>
@@ -13277,18 +15028,162 @@
               <a:defRPr/>
             </a:pPr>
             <a:r>
-              <a:rPr lang="en-US" sz="3199">
-                <a:solidFill>
-                  <a:srgbClr val="475570"/>
-                </a:solidFill>
-                <a:latin typeface="한컴 윤고딕 740"/>
-                <a:ea typeface="한컴 윤고딕 740"/>
-                <a:cs typeface="Source Han Sans KR"/>
-                <a:sym typeface="Source Han Sans KR"/>
-              </a:rPr>
-              <a:t>GameWorldManager에서 상태 기반 채널링으로 상태를 주기적으로 갱신·공지</a:t>
-            </a:r>
-            <a:endParaRPr lang="en-US" sz="3199">
+              <a:rPr lang="en-US" sz="3199" dirty="0" err="1">
+                <a:solidFill>
+                  <a:srgbClr val="475570"/>
+                </a:solidFill>
+                <a:latin typeface="한컴 윤고딕 740"/>
+                <a:ea typeface="한컴 윤고딕 740"/>
+                <a:cs typeface="Source Han Sans KR"/>
+                <a:sym typeface="Source Han Sans KR"/>
+              </a:rPr>
+              <a:t>GameWorldManager에서</a:t>
+            </a:r>
+            <a:r>
+              <a:rPr lang="en-US" sz="3199" dirty="0">
+                <a:solidFill>
+                  <a:srgbClr val="475570"/>
+                </a:solidFill>
+                <a:latin typeface="한컴 윤고딕 740"/>
+                <a:ea typeface="한컴 윤고딕 740"/>
+                <a:cs typeface="Source Han Sans KR"/>
+                <a:sym typeface="Source Han Sans KR"/>
+              </a:rPr>
+              <a:t> </a:t>
+            </a:r>
+            <a:r>
+              <a:rPr lang="ko-KR" altLang="en-US" sz="3199" dirty="0">
+                <a:solidFill>
+                  <a:srgbClr val="475570"/>
+                </a:solidFill>
+                <a:latin typeface="한컴 윤고딕 740"/>
+                <a:ea typeface="한컴 윤고딕 740"/>
+                <a:cs typeface="Source Han Sans KR"/>
+                <a:sym typeface="Source Han Sans KR"/>
+              </a:rPr>
+              <a:t>부하</a:t>
+            </a:r>
+            <a:r>
+              <a:rPr lang="en-US" sz="3199" dirty="0">
+                <a:solidFill>
+                  <a:srgbClr val="475570"/>
+                </a:solidFill>
+                <a:latin typeface="한컴 윤고딕 740"/>
+                <a:ea typeface="한컴 윤고딕 740"/>
+                <a:cs typeface="Source Han Sans KR"/>
+                <a:sym typeface="Source Han Sans KR"/>
+              </a:rPr>
+              <a:t> </a:t>
+            </a:r>
+            <a:r>
+              <a:rPr lang="en-US" sz="3199" dirty="0" err="1">
+                <a:solidFill>
+                  <a:srgbClr val="475570"/>
+                </a:solidFill>
+                <a:latin typeface="한컴 윤고딕 740"/>
+                <a:ea typeface="한컴 윤고딕 740"/>
+                <a:cs typeface="Source Han Sans KR"/>
+                <a:sym typeface="Source Han Sans KR"/>
+              </a:rPr>
+              <a:t>기반</a:t>
+            </a:r>
+            <a:r>
+              <a:rPr lang="en-US" sz="3199" dirty="0">
+                <a:solidFill>
+                  <a:srgbClr val="475570"/>
+                </a:solidFill>
+                <a:latin typeface="한컴 윤고딕 740"/>
+                <a:ea typeface="한컴 윤고딕 740"/>
+                <a:cs typeface="Source Han Sans KR"/>
+                <a:sym typeface="Source Han Sans KR"/>
+              </a:rPr>
+              <a:t> </a:t>
+            </a:r>
+            <a:r>
+              <a:rPr lang="en-US" sz="3199" dirty="0" err="1">
+                <a:solidFill>
+                  <a:srgbClr val="475570"/>
+                </a:solidFill>
+                <a:latin typeface="한컴 윤고딕 740"/>
+                <a:ea typeface="한컴 윤고딕 740"/>
+                <a:cs typeface="Source Han Sans KR"/>
+                <a:sym typeface="Source Han Sans KR"/>
+              </a:rPr>
+              <a:t>채널링으로</a:t>
+            </a:r>
+            <a:r>
+              <a:rPr lang="en-US" sz="3199" dirty="0">
+                <a:solidFill>
+                  <a:srgbClr val="475570"/>
+                </a:solidFill>
+                <a:latin typeface="한컴 윤고딕 740"/>
+                <a:ea typeface="한컴 윤고딕 740"/>
+                <a:cs typeface="Source Han Sans KR"/>
+                <a:sym typeface="Source Han Sans KR"/>
+              </a:rPr>
+              <a:t> </a:t>
+            </a:r>
+            <a:r>
+              <a:rPr lang="ko-KR" altLang="en-US" sz="3199" dirty="0">
+                <a:solidFill>
+                  <a:srgbClr val="475570"/>
+                </a:solidFill>
+                <a:latin typeface="한컴 윤고딕 740"/>
+                <a:ea typeface="한컴 윤고딕 740"/>
+                <a:cs typeface="Source Han Sans KR"/>
+                <a:sym typeface="Source Han Sans KR"/>
+              </a:rPr>
+              <a:t>부하 상황을</a:t>
+            </a:r>
+            <a:r>
+              <a:rPr lang="en-US" sz="3199" dirty="0">
+                <a:solidFill>
+                  <a:srgbClr val="475570"/>
+                </a:solidFill>
+                <a:latin typeface="한컴 윤고딕 740"/>
+                <a:ea typeface="한컴 윤고딕 740"/>
+                <a:cs typeface="Source Han Sans KR"/>
+                <a:sym typeface="Source Han Sans KR"/>
+              </a:rPr>
+              <a:t> </a:t>
+            </a:r>
+            <a:r>
+              <a:rPr lang="en-US" sz="3199" dirty="0" err="1">
+                <a:solidFill>
+                  <a:srgbClr val="475570"/>
+                </a:solidFill>
+                <a:latin typeface="한컴 윤고딕 740"/>
+                <a:ea typeface="한컴 윤고딕 740"/>
+                <a:cs typeface="Source Han Sans KR"/>
+                <a:sym typeface="Source Han Sans KR"/>
+              </a:rPr>
+              <a:t>주기적으로</a:t>
+            </a:r>
+            <a:r>
+              <a:rPr lang="en-US" sz="3199" dirty="0">
+                <a:solidFill>
+                  <a:srgbClr val="475570"/>
+                </a:solidFill>
+                <a:latin typeface="한컴 윤고딕 740"/>
+                <a:ea typeface="한컴 윤고딕 740"/>
+                <a:cs typeface="Source Han Sans KR"/>
+                <a:sym typeface="Source Han Sans KR"/>
+              </a:rPr>
+              <a:t> </a:t>
+            </a:r>
+            <a:r>
+              <a:rPr lang="en-US" sz="3199" dirty="0" err="1">
+                <a:solidFill>
+                  <a:srgbClr val="475570"/>
+                </a:solidFill>
+                <a:latin typeface="한컴 윤고딕 740"/>
+                <a:ea typeface="한컴 윤고딕 740"/>
+                <a:cs typeface="Source Han Sans KR"/>
+                <a:sym typeface="Source Han Sans KR"/>
+              </a:rPr>
+              <a:t>갱신·공지</a:t>
+            </a:r>
+            <a:endParaRPr lang="en-US" sz="3199" dirty="0">
               <a:solidFill>
                 <a:srgbClr val="475570"/>
               </a:solidFill>
@@ -13342,15 +15237,6 @@
               </a:rPr>
               <a:t>티유월드</a:t>
             </a:r>
-            <a:endParaRPr lang="en-US" sz="5000" b="1">
-              <a:solidFill>
-                <a:srgbClr val="475570"/>
-              </a:solidFill>
-              <a:latin typeface="한컴 윤고딕 760"/>
-              <a:ea typeface="한컴 윤고딕 760"/>
-              <a:cs typeface="Canva Sans Bold"/>
-              <a:sym typeface="Canva Sans Bold"/>
-            </a:endParaRPr>
           </a:p>
         </p:txBody>
       </p:sp>
@@ -13396,15 +15282,6 @@
               </a:rPr>
               <a:t>PROJECTS</a:t>
             </a:r>
-            <a:endParaRPr lang="en-US" sz="2000">
-              <a:solidFill>
-                <a:srgbClr val="475570"/>
-              </a:solidFill>
-              <a:latin typeface="한컴 윤고딕 760"/>
-              <a:ea typeface="한컴 윤고딕 760"/>
-              <a:cs typeface="Cabin"/>
-              <a:sym typeface="Cabin"/>
-            </a:endParaRPr>
           </a:p>
         </p:txBody>
       </p:sp>
@@ -13417,13 +15294,14 @@
 </file>
 
 <file path=ppt/slides/slide9.xml><?xml version="1.0" encoding="utf-8"?>
-<p:sld xmlns:r="http://schemas.openxmlformats.org/officeDocument/2006/relationships" xmlns:c="http://schemas.openxmlformats.org/drawingml/2006/chart" xmlns:a="http://schemas.openxmlformats.org/drawingml/2006/main" xmlns:dgm="http://schemas.openxmlformats.org/drawingml/2006/diagram" xmlns:dsp="http://schemas.microsoft.com/office/drawing/2008/diagram" xmlns:p="http://schemas.openxmlformats.org/presentationml/2006/main">
+<p:sld xmlns:a="http://schemas.openxmlformats.org/drawingml/2006/main" xmlns:r="http://schemas.openxmlformats.org/officeDocument/2006/relationships" xmlns:p="http://schemas.openxmlformats.org/presentationml/2006/main">
   <p:cSld>
     <p:bg>
-      <p:bgPr shadeToTitle="0">
+      <p:bgPr>
         <a:solidFill>
-          <a:srgbClr val="fcfdf8"/>
+          <a:srgbClr val="FCFDF8"/>
         </a:solidFill>
+        <a:effectLst/>
       </p:bgPr>
     </p:bg>
     <p:spTree>
@@ -13442,12 +15320,12 @@
       </p:grpSpPr>
       <p:sp>
         <p:nvSpPr>
-          <p:cNvPr name="Freeform 2" id="2"/>
+          <p:cNvPr id="2" name="Freeform 2"/>
           <p:cNvSpPr/>
           <p:nvPr/>
         </p:nvSpPr>
         <p:spPr>
-          <a:xfrm flipH="false" flipV="false" rot="0">
+          <a:xfrm>
             <a:off x="1473588" y="2522422"/>
             <a:ext cx="7548532" cy="5201123"/>
           </a:xfrm>
@@ -13456,9 +15334,9 @@
             <a:gdLst/>
             <a:ahLst/>
             <a:cxnLst/>
-            <a:rect r="r" b="b" t="t" l="l"/>
+            <a:rect l="l" t="t" r="r" b="b"/>
             <a:pathLst>
-              <a:path h="5201123" w="7548532">
+              <a:path w="7548532" h="5201123">
                 <a:moveTo>
                   <a:pt x="0" y="0"/>
                 </a:moveTo>
@@ -13481,19 +15359,26 @@
           <a:blipFill>
             <a:blip r:embed="rId2"/>
             <a:stretch>
-              <a:fillRect l="0" t="0" r="0" b="0"/>
+              <a:fillRect/>
             </a:stretch>
           </a:blipFill>
         </p:spPr>
-      </p:sp>
-      <p:sp>
-        <p:nvSpPr>
-          <p:cNvPr name="Freeform 3" id="3"/>
+        <p:txBody>
+          <a:bodyPr/>
+          <a:lstStyle/>
+          <a:p>
+            <a:endParaRPr lang="ko-KR" altLang="en-US"/>
+          </a:p>
+        </p:txBody>
+      </p:sp>
+      <p:sp>
+        <p:nvSpPr>
+          <p:cNvPr id="3" name="Freeform 3"/>
           <p:cNvSpPr/>
           <p:nvPr/>
         </p:nvSpPr>
         <p:spPr>
-          <a:xfrm flipH="false" flipV="false" rot="0">
+          <a:xfrm>
             <a:off x="9235683" y="2522422"/>
             <a:ext cx="7578729" cy="5242156"/>
           </a:xfrm>
@@ -13502,9 +15387,9 @@
             <a:gdLst/>
             <a:ahLst/>
             <a:cxnLst/>
-            <a:rect r="r" b="b" t="t" l="l"/>
+            <a:rect l="l" t="t" r="r" b="b"/>
             <a:pathLst>
-              <a:path h="5242156" w="7578729">
+              <a:path w="7578729" h="5242156">
                 <a:moveTo>
                   <a:pt x="0" y="0"/>
                 </a:moveTo>
@@ -13527,10 +15412,17 @@
           <a:blipFill>
             <a:blip r:embed="rId3"/>
             <a:stretch>
-              <a:fillRect l="0" t="0" r="0" b="0"/>
+              <a:fillRect/>
             </a:stretch>
           </a:blipFill>
         </p:spPr>
+        <p:txBody>
+          <a:bodyPr/>
+          <a:lstStyle/>
+          <a:p>
+            <a:endParaRPr lang="ko-KR" altLang="en-US"/>
+          </a:p>
+        </p:txBody>
       </p:sp>
       <p:sp>
         <p:nvSpPr>
@@ -13574,15 +15466,6 @@
               </a:rPr>
               <a:t>게임 입장 시 선택 채널 처리 &amp; 게임 중 채널 변경 처리</a:t>
             </a:r>
-            <a:endParaRPr lang="en-US" sz="3199">
-              <a:solidFill>
-                <a:srgbClr val="475570"/>
-              </a:solidFill>
-              <a:latin typeface="한컴 윤고딕 740"/>
-              <a:ea typeface="한컴 윤고딕 740"/>
-              <a:cs typeface="Source Han Sans KR"/>
-              <a:sym typeface="Source Han Sans KR"/>
-            </a:endParaRPr>
           </a:p>
         </p:txBody>
       </p:sp>
@@ -13628,15 +15511,6 @@
               </a:rPr>
               <a:t>티유월드</a:t>
             </a:r>
-            <a:endParaRPr lang="en-US" sz="5000" b="1">
-              <a:solidFill>
-                <a:srgbClr val="475570"/>
-              </a:solidFill>
-              <a:latin typeface="한컴 윤고딕 760"/>
-              <a:ea typeface="한컴 윤고딕 760"/>
-              <a:cs typeface="Canva Sans Bold"/>
-              <a:sym typeface="Canva Sans Bold"/>
-            </a:endParaRPr>
           </a:p>
         </p:txBody>
       </p:sp>
@@ -13682,15 +15556,6 @@
               </a:rPr>
               <a:t>PROJECTS</a:t>
             </a:r>
-            <a:endParaRPr lang="en-US" sz="2000">
-              <a:solidFill>
-                <a:srgbClr val="475570"/>
-              </a:solidFill>
-              <a:latin typeface="한컴 윤고딕 760"/>
-              <a:ea typeface="한컴 윤고딕 760"/>
-              <a:cs typeface="Cabin"/>
-              <a:sym typeface="Cabin"/>
-            </a:endParaRPr>
           </a:p>
         </p:txBody>
       </p:sp>
@@ -13703,41 +15568,41 @@
 </file>
 
 <file path=ppt/theme/theme1.xml><?xml version="1.0" encoding="utf-8"?>
-<a:theme xmlns:r="http://schemas.openxmlformats.org/officeDocument/2006/relationships" xmlns:c="http://schemas.openxmlformats.org/drawingml/2006/chart" xmlns:dgm="http://schemas.openxmlformats.org/drawingml/2006/diagram" xmlns:dsp="http://schemas.microsoft.com/office/drawing/2008/diagram" xmlns:a="http://schemas.openxmlformats.org/drawingml/2006/main" xmlns:pic="http://schemas.openxmlformats.org/drawingml/2006/picture" xmlns:wp="http://schemas.openxmlformats.org/drawingml/2006/wordprocessingDrawing" xmlns:xdr="http://schemas.openxmlformats.org/drawingml/2006/spreadsheetDrawing" xmlns:lc="http://schemas.openxmlformats.org/drawingml/2006/lockedCanvas" xmlns:p="http://schemas.openxmlformats.org/presentationml/2006/main" name="Office Theme">
+<a:theme xmlns:a="http://schemas.openxmlformats.org/drawingml/2006/main" name="Office Theme">
   <a:themeElements>
     <a:clrScheme name="Office">
       <a:dk1>
         <a:sysClr val="windowText" lastClr="000000"/>
       </a:dk1>
       <a:lt1>
-        <a:sysClr val="window" lastClr="ffffff"/>
+        <a:sysClr val="window" lastClr="FFFFFF"/>
       </a:lt1>
       <a:dk2>
-        <a:srgbClr val="1f497d"/>
+        <a:srgbClr val="1F497D"/>
       </a:dk2>
       <a:lt2>
-        <a:srgbClr val="eeece1"/>
+        <a:srgbClr val="EEECE1"/>
       </a:lt2>
       <a:accent1>
-        <a:srgbClr val="4f81bd"/>
+        <a:srgbClr val="4F81BD"/>
       </a:accent1>
       <a:accent2>
-        <a:srgbClr val="c0504d"/>
+        <a:srgbClr val="C0504D"/>
       </a:accent2>
       <a:accent3>
-        <a:srgbClr val="9bbb59"/>
+        <a:srgbClr val="9BBB59"/>
       </a:accent3>
       <a:accent4>
-        <a:srgbClr val="8064a2"/>
+        <a:srgbClr val="8064A2"/>
       </a:accent4>
       <a:accent5>
-        <a:srgbClr val="4bacc6"/>
+        <a:srgbClr val="4BACC6"/>
       </a:accent5>
       <a:accent6>
-        <a:srgbClr val="f79646"/>
+        <a:srgbClr val="F79646"/>
       </a:accent6>
       <a:hlink>
-        <a:srgbClr val="0000ff"/>
+        <a:srgbClr val="0000FF"/>
       </a:hlink>
       <a:folHlink>
         <a:srgbClr val="800080"/>
@@ -13980,5 +15845,7 @@
       </a:bgFillStyleLst>
     </a:fmtScheme>
   </a:themeElements>
+  <a:objectDefaults/>
+  <a:extraClrSchemeLst/>
 </a:theme>
 </file>
--- a/문서/포트폴리오/황수지/황수지포트폴리오.pptx
+++ b/문서/포트폴리오/황수지/황수지포트폴리오.pptx
@@ -1,6 +1,6 @@
 
 <file path=ppt/presentation.xml><?xml version="1.0" encoding="utf-8"?>
-<p:presentation xmlns:a="http://schemas.openxmlformats.org/drawingml/2006/main" xmlns:r="http://schemas.openxmlformats.org/officeDocument/2006/relationships" xmlns:p="http://schemas.openxmlformats.org/presentationml/2006/main">
+<p:presentation xmlns:r="http://schemas.openxmlformats.org/officeDocument/2006/relationships" xmlns:c="http://schemas.openxmlformats.org/drawingml/2006/chart" xmlns:a="http://schemas.openxmlformats.org/drawingml/2006/main" xmlns:dgm="http://schemas.openxmlformats.org/drawingml/2006/diagram" xmlns:dsp="http://schemas.microsoft.com/office/drawing/2008/diagram" xmlns:p="http://schemas.openxmlformats.org/presentationml/2006/main">
   <p:sldMasterIdLst>
     <p:sldMasterId id="2147483648" r:id="rId1"/>
   </p:sldMasterIdLst>
@@ -22,13 +22,10 @@
     <p:sldId id="270" r:id="rId16"/>
     <p:sldId id="271" r:id="rId17"/>
     <p:sldId id="272" r:id="rId18"/>
-    <p:sldId id="273" r:id="rId19"/>
-    <p:sldId id="274" r:id="rId20"/>
-    <p:sldId id="275" r:id="rId21"/>
-    <p:sldId id="276" r:id="rId22"/>
-    <p:sldId id="278" r:id="rId23"/>
-    <p:sldId id="279" r:id="rId24"/>
-    <p:sldId id="280" r:id="rId25"/>
+    <p:sldId id="276" r:id="rId19"/>
+    <p:sldId id="278" r:id="rId20"/>
+    <p:sldId id="279" r:id="rId21"/>
+    <p:sldId id="280" r:id="rId22"/>
   </p:sldIdLst>
   <p:sldSz cx="18288000" cy="10287000"/>
   <p:notesSz cx="6858000" cy="9144000"/>
@@ -127,22 +124,6 @@
       </a:defRPr>
     </a:lvl9pPr>
   </p:defaultTextStyle>
-  <p:extLst>
-    <p:ext uri="{EFAFB233-063F-42B5-8137-9DF3F51BA10A}">
-      <p15:sldGuideLst xmlns:p15="http://schemas.microsoft.com/office/powerpoint/2012/main">
-        <p15:guide id="1" orient="horz" pos="3239">
-          <p15:clr>
-            <a:srgbClr val="A4A3A4"/>
-          </p15:clr>
-        </p15:guide>
-        <p15:guide id="2" pos="5759">
-          <p15:clr>
-            <a:srgbClr val="A4A3A4"/>
-          </p15:clr>
-        </p15:guide>
-      </p15:sldGuideLst>
-    </p:ext>
-  </p:extLst>
 </p:presentation>
 </file>
 
@@ -6672,14 +6653,13 @@
 </file>
 
 <file path=ppt/slides/slide18.xml><?xml version="1.0" encoding="utf-8"?>
-<p:sld xmlns:a="http://schemas.openxmlformats.org/drawingml/2006/main" xmlns:r="http://schemas.openxmlformats.org/officeDocument/2006/relationships" xmlns:p="http://schemas.openxmlformats.org/presentationml/2006/main">
+<p:sld xmlns:r="http://schemas.openxmlformats.org/officeDocument/2006/relationships" xmlns:c="http://schemas.openxmlformats.org/drawingml/2006/chart" xmlns:a="http://schemas.openxmlformats.org/drawingml/2006/main" xmlns:dgm="http://schemas.openxmlformats.org/drawingml/2006/diagram" xmlns:dsp="http://schemas.microsoft.com/office/drawing/2008/diagram" xmlns:p="http://schemas.openxmlformats.org/presentationml/2006/main">
   <p:cSld>
     <p:bg>
-      <p:bgPr>
+      <p:bgPr shadeToTitle="0">
         <a:solidFill>
-          <a:srgbClr val="FCFDF8"/>
+          <a:srgbClr val="fcfdf8"/>
         </a:solidFill>
-        <a:effectLst/>
       </p:bgPr>
     </p:bg>
     <p:spTree>
@@ -6698,14 +6678,104 @@
       </p:grpSpPr>
       <p:sp>
         <p:nvSpPr>
+          <p:cNvPr id="2" name="TextBox 2"/>
+          <p:cNvSpPr txBox="1"/>
+          <p:nvPr/>
+        </p:nvSpPr>
+        <p:spPr>
+          <a:xfrm>
+            <a:off x="1285120" y="3594010"/>
+            <a:ext cx="2039740" cy="568415"/>
+          </a:xfrm>
+          <a:prstGeom prst="rect">
+            <a:avLst/>
+          </a:prstGeom>
+        </p:spPr>
+        <p:txBody>
+          <a:bodyPr lIns="0" tIns="0" rIns="0" bIns="0" anchor="t">
+            <a:spAutoFit/>
+          </a:bodyPr>
+          <a:lstStyle/>
+          <a:p>
+            <a:pPr lvl="0" algn="l">
+              <a:lnSpc>
+                <a:spcPts val="4479"/>
+              </a:lnSpc>
+              <a:spcBef>
+                <a:spcPct val="0"/>
+              </a:spcBef>
+              <a:defRPr/>
+            </a:pPr>
+            <a:r>
+              <a:rPr lang="en-US" sz="3199" b="1">
+                <a:solidFill>
+                  <a:srgbClr val="475570"/>
+                </a:solidFill>
+                <a:latin typeface="한컴 윤고딕 740"/>
+                <a:ea typeface="한컴 윤고딕 740"/>
+                <a:cs typeface="Source Han Sans KR Bold"/>
+                <a:sym typeface="Source Han Sans KR Bold"/>
+              </a:rPr>
+              <a:t>개발기간</a:t>
+            </a:r>
+          </a:p>
+        </p:txBody>
+      </p:sp>
+      <p:sp>
+        <p:nvSpPr>
+          <p:cNvPr id="3" name="TextBox 3"/>
+          <p:cNvSpPr txBox="1"/>
+          <p:nvPr/>
+        </p:nvSpPr>
+        <p:spPr>
+          <a:xfrm>
+            <a:off x="1238801" y="1065212"/>
+            <a:ext cx="7001106" cy="1058863"/>
+          </a:xfrm>
+          <a:prstGeom prst="rect">
+            <a:avLst/>
+          </a:prstGeom>
+        </p:spPr>
+        <p:txBody>
+          <a:bodyPr lIns="0" tIns="0" rIns="0" bIns="0" anchor="t">
+            <a:spAutoFit/>
+          </a:bodyPr>
+          <a:lstStyle/>
+          <a:p>
+            <a:pPr marL="0" lvl="0" indent="0" algn="l">
+              <a:lnSpc>
+                <a:spcPts val="8400"/>
+              </a:lnSpc>
+              <a:spcBef>
+                <a:spcPct val="0"/>
+              </a:spcBef>
+              <a:defRPr/>
+            </a:pPr>
+            <a:r>
+              <a:rPr lang="en-US" sz="6000" b="1">
+                <a:solidFill>
+                  <a:srgbClr val="475570"/>
+                </a:solidFill>
+                <a:latin typeface="한컴 윤고딕 760"/>
+                <a:ea typeface="한컴 윤고딕 760"/>
+                <a:cs typeface="Canva Sans Bold"/>
+                <a:sym typeface="Canva Sans Bold"/>
+              </a:rPr>
+              <a:t>BombGame</a:t>
+            </a:r>
+          </a:p>
+        </p:txBody>
+      </p:sp>
+      <p:sp>
+        <p:nvSpPr>
           <p:cNvPr id="4" name="TextBox 4"/>
           <p:cNvSpPr txBox="1"/>
           <p:nvPr/>
         </p:nvSpPr>
         <p:spPr>
           <a:xfrm>
-            <a:off x="1224585" y="4285395"/>
-            <a:ext cx="14942005" cy="3039330"/>
+            <a:off x="1267450" y="830263"/>
+            <a:ext cx="1780550" cy="350837"/>
           </a:xfrm>
           <a:prstGeom prst="rect">
             <a:avLst/>
@@ -6717,14 +6787,62 @@
           </a:bodyPr>
           <a:lstStyle/>
           <a:p>
-            <a:pPr lvl="0" algn="just">
-              <a:lnSpc>
-                <a:spcPts val="7999"/>
-              </a:lnSpc>
-              <a:defRPr/>
-            </a:pPr>
-            <a:r>
-              <a:rPr lang="en-US" sz="3199" b="1" dirty="0" err="1">
+            <a:pPr lvl="0" algn="l">
+              <a:lnSpc>
+                <a:spcPts val="2800"/>
+              </a:lnSpc>
+              <a:spcBef>
+                <a:spcPct val="0"/>
+              </a:spcBef>
+              <a:defRPr/>
+            </a:pPr>
+            <a:r>
+              <a:rPr lang="en-US" sz="2000">
+                <a:solidFill>
+                  <a:srgbClr val="475570"/>
+                </a:solidFill>
+                <a:latin typeface="한컴 윤고딕 760"/>
+                <a:ea typeface="한컴 윤고딕 760"/>
+                <a:cs typeface="Cabin"/>
+                <a:sym typeface="Cabin"/>
+              </a:rPr>
+              <a:t>PROJECTS</a:t>
+            </a:r>
+          </a:p>
+        </p:txBody>
+      </p:sp>
+      <p:sp>
+        <p:nvSpPr>
+          <p:cNvPr id="5" name="TextBox 5"/>
+          <p:cNvSpPr txBox="1"/>
+          <p:nvPr/>
+        </p:nvSpPr>
+        <p:spPr>
+          <a:xfrm>
+            <a:off x="1285120" y="4251991"/>
+            <a:ext cx="2039740" cy="567659"/>
+          </a:xfrm>
+          <a:prstGeom prst="rect">
+            <a:avLst/>
+          </a:prstGeom>
+        </p:spPr>
+        <p:txBody>
+          <a:bodyPr lIns="0" tIns="0" rIns="0" bIns="0" anchor="t">
+            <a:spAutoFit/>
+          </a:bodyPr>
+          <a:lstStyle/>
+          <a:p>
+            <a:pPr lvl="0" algn="l">
+              <a:lnSpc>
+                <a:spcPts val="4479"/>
+              </a:lnSpc>
+              <a:spcBef>
+                <a:spcPct val="0"/>
+              </a:spcBef>
+              <a:defRPr/>
+            </a:pPr>
+            <a:r>
+              <a:rPr lang="en-US" sz="3199" b="1">
                 <a:solidFill>
                   <a:srgbClr val="475570"/>
                 </a:solidFill>
@@ -6733,10 +6851,43 @@
                 <a:cs typeface="Source Han Sans KR Bold"/>
                 <a:sym typeface="Source Han Sans KR Bold"/>
               </a:rPr>
-              <a:t>문제</a:t>
-            </a:r>
-            <a:r>
-              <a:rPr lang="en-US" sz="3199" b="1" dirty="0">
+              <a:t>개발도구</a:t>
+            </a:r>
+          </a:p>
+        </p:txBody>
+      </p:sp>
+      <p:sp>
+        <p:nvSpPr>
+          <p:cNvPr id="6" name="TextBox 6"/>
+          <p:cNvSpPr txBox="1"/>
+          <p:nvPr/>
+        </p:nvSpPr>
+        <p:spPr>
+          <a:xfrm>
+            <a:off x="1285120" y="4945863"/>
+            <a:ext cx="2039740" cy="569112"/>
+          </a:xfrm>
+          <a:prstGeom prst="rect">
+            <a:avLst/>
+          </a:prstGeom>
+        </p:spPr>
+        <p:txBody>
+          <a:bodyPr lIns="0" tIns="0" rIns="0" bIns="0" anchor="t">
+            <a:spAutoFit/>
+          </a:bodyPr>
+          <a:lstStyle/>
+          <a:p>
+            <a:pPr lvl="0" algn="l">
+              <a:lnSpc>
+                <a:spcPts val="4479"/>
+              </a:lnSpc>
+              <a:spcBef>
+                <a:spcPct val="0"/>
+              </a:spcBef>
+              <a:defRPr/>
+            </a:pPr>
+            <a:r>
+              <a:rPr lang="en-US" sz="3199" b="1">
                 <a:solidFill>
                   <a:srgbClr val="475570"/>
                 </a:solidFill>
@@ -6745,210 +6896,43 @@
                 <a:cs typeface="Source Han Sans KR Bold"/>
                 <a:sym typeface="Source Han Sans KR Bold"/>
               </a:rPr>
-              <a:t>   </a:t>
-            </a:r>
-            <a:r>
-              <a:rPr lang="en-US" sz="3199" dirty="0" err="1">
-                <a:solidFill>
-                  <a:srgbClr val="475570"/>
-                </a:solidFill>
-                <a:latin typeface="한컴 윤고딕 740"/>
-                <a:ea typeface="한컴 윤고딕 740"/>
-                <a:cs typeface="Source Han Sans KR"/>
-                <a:sym typeface="Source Han Sans KR"/>
-              </a:rPr>
-              <a:t>동시</a:t>
-            </a:r>
-            <a:r>
-              <a:rPr lang="en-US" sz="3199" dirty="0">
-                <a:solidFill>
-                  <a:srgbClr val="475570"/>
-                </a:solidFill>
-                <a:latin typeface="한컴 윤고딕 740"/>
-                <a:ea typeface="한컴 윤고딕 740"/>
-                <a:cs typeface="Source Han Sans KR"/>
-                <a:sym typeface="Source Han Sans KR"/>
-              </a:rPr>
-              <a:t> </a:t>
-            </a:r>
-            <a:r>
-              <a:rPr lang="en-US" sz="3199" dirty="0" err="1">
-                <a:solidFill>
-                  <a:srgbClr val="475570"/>
-                </a:solidFill>
-                <a:latin typeface="한컴 윤고딕 740"/>
-                <a:ea typeface="한컴 윤고딕 740"/>
-                <a:cs typeface="Source Han Sans KR"/>
-                <a:sym typeface="Source Han Sans KR"/>
-              </a:rPr>
-              <a:t>저장</a:t>
-            </a:r>
-            <a:r>
-              <a:rPr lang="en-US" sz="3199" dirty="0">
-                <a:solidFill>
-                  <a:srgbClr val="475570"/>
-                </a:solidFill>
-                <a:latin typeface="한컴 윤고딕 740"/>
-                <a:ea typeface="한컴 윤고딕 740"/>
-                <a:cs typeface="Source Han Sans KR"/>
-                <a:sym typeface="Source Han Sans KR"/>
-              </a:rPr>
-              <a:t>/</a:t>
-            </a:r>
-            <a:r>
-              <a:rPr lang="en-US" sz="3199" dirty="0" err="1">
-                <a:solidFill>
-                  <a:srgbClr val="475570"/>
-                </a:solidFill>
-                <a:latin typeface="한컴 윤고딕 740"/>
-                <a:ea typeface="한컴 윤고딕 740"/>
-                <a:cs typeface="Source Han Sans KR"/>
-                <a:sym typeface="Source Han Sans KR"/>
-              </a:rPr>
-              <a:t>요청에서</a:t>
-            </a:r>
-            <a:r>
-              <a:rPr lang="en-US" sz="3199" dirty="0">
-                <a:solidFill>
-                  <a:srgbClr val="475570"/>
-                </a:solidFill>
-                <a:latin typeface="한컴 윤고딕 740"/>
-                <a:ea typeface="한컴 윤고딕 740"/>
-                <a:cs typeface="Source Han Sans KR"/>
-                <a:sym typeface="Source Han Sans KR"/>
-              </a:rPr>
-              <a:t> 락 </a:t>
-            </a:r>
-            <a:r>
-              <a:rPr lang="en-US" sz="3199" dirty="0" err="1">
-                <a:solidFill>
-                  <a:srgbClr val="475570"/>
-                </a:solidFill>
-                <a:latin typeface="한컴 윤고딕 740"/>
-                <a:ea typeface="한컴 윤고딕 740"/>
-                <a:cs typeface="Source Han Sans KR"/>
-                <a:sym typeface="Source Han Sans KR"/>
-              </a:rPr>
-              <a:t>경합·부분</a:t>
-            </a:r>
-            <a:r>
-              <a:rPr lang="en-US" sz="3199" dirty="0">
-                <a:solidFill>
-                  <a:srgbClr val="475570"/>
-                </a:solidFill>
-                <a:latin typeface="한컴 윤고딕 740"/>
-                <a:ea typeface="한컴 윤고딕 740"/>
-                <a:cs typeface="Source Han Sans KR"/>
-                <a:sym typeface="Source Han Sans KR"/>
-              </a:rPr>
-              <a:t> </a:t>
-            </a:r>
-            <a:r>
-              <a:rPr lang="en-US" sz="3199" dirty="0" err="1">
-                <a:solidFill>
-                  <a:srgbClr val="475570"/>
-                </a:solidFill>
-                <a:latin typeface="한컴 윤고딕 740"/>
-                <a:ea typeface="한컴 윤고딕 740"/>
-                <a:cs typeface="Source Han Sans KR"/>
-                <a:sym typeface="Source Han Sans KR"/>
-              </a:rPr>
-              <a:t>업데이트로</a:t>
-            </a:r>
-            <a:r>
-              <a:rPr lang="en-US" sz="3199" dirty="0">
-                <a:solidFill>
-                  <a:srgbClr val="475570"/>
-                </a:solidFill>
-                <a:latin typeface="한컴 윤고딕 740"/>
-                <a:ea typeface="한컴 윤고딕 740"/>
-                <a:cs typeface="Source Han Sans KR"/>
-                <a:sym typeface="Source Han Sans KR"/>
-              </a:rPr>
-              <a:t> </a:t>
-            </a:r>
-            <a:r>
-              <a:rPr lang="en-US" sz="3199" dirty="0" err="1">
-                <a:solidFill>
-                  <a:srgbClr val="475570"/>
-                </a:solidFill>
-                <a:latin typeface="한컴 윤고딕 740"/>
-                <a:ea typeface="한컴 윤고딕 740"/>
-                <a:cs typeface="Source Han Sans KR"/>
-                <a:sym typeface="Source Han Sans KR"/>
-              </a:rPr>
-              <a:t>데이터</a:t>
-            </a:r>
-            <a:r>
-              <a:rPr lang="en-US" sz="3199" dirty="0">
-                <a:solidFill>
-                  <a:srgbClr val="475570"/>
-                </a:solidFill>
-                <a:latin typeface="한컴 윤고딕 740"/>
-                <a:ea typeface="한컴 윤고딕 740"/>
-                <a:cs typeface="Source Han Sans KR"/>
-                <a:sym typeface="Source Han Sans KR"/>
-              </a:rPr>
-              <a:t> </a:t>
-            </a:r>
-            <a:r>
-              <a:rPr lang="en-US" sz="3199" dirty="0" err="1">
-                <a:solidFill>
-                  <a:srgbClr val="475570"/>
-                </a:solidFill>
-                <a:latin typeface="한컴 윤고딕 740"/>
-                <a:ea typeface="한컴 윤고딕 740"/>
-                <a:cs typeface="Source Han Sans KR"/>
-                <a:sym typeface="Source Han Sans KR"/>
-              </a:rPr>
-              <a:t>꼬임</a:t>
-            </a:r>
-            <a:r>
-              <a:rPr lang="en-US" sz="3199" dirty="0">
-                <a:solidFill>
-                  <a:srgbClr val="475570"/>
-                </a:solidFill>
-                <a:latin typeface="한컴 윤고딕 740"/>
-                <a:ea typeface="한컴 윤고딕 740"/>
-                <a:cs typeface="Source Han Sans KR"/>
-                <a:sym typeface="Source Han Sans KR"/>
-              </a:rPr>
-              <a:t> </a:t>
-            </a:r>
-            <a:r>
-              <a:rPr lang="en-US" sz="3199" dirty="0" err="1">
-                <a:solidFill>
-                  <a:srgbClr val="475570"/>
-                </a:solidFill>
-                <a:latin typeface="한컴 윤고딕 740"/>
-                <a:ea typeface="한컴 윤고딕 740"/>
-                <a:cs typeface="Source Han Sans KR"/>
-                <a:sym typeface="Source Han Sans KR"/>
-              </a:rPr>
-              <a:t>가능</a:t>
-            </a:r>
-            <a:r>
-              <a:rPr lang="en-US" sz="3199" dirty="0">
-                <a:solidFill>
-                  <a:srgbClr val="475570"/>
-                </a:solidFill>
-                <a:latin typeface="한컴 윤고딕 740"/>
-                <a:ea typeface="한컴 윤고딕 740"/>
-                <a:cs typeface="Source Han Sans KR"/>
-                <a:sym typeface="Source Han Sans KR"/>
-              </a:rPr>
-              <a:t>.</a:t>
-            </a:r>
-          </a:p>
-          <a:p>
-            <a:pPr lvl="0" algn="just">
-              <a:lnSpc>
-                <a:spcPts val="7999"/>
-              </a:lnSpc>
-              <a:defRPr/>
-            </a:pPr>
-            <a:r>
-              <a:rPr lang="en-US" sz="3199" b="1" dirty="0" err="1">
+              <a:t>개발인원</a:t>
+            </a:r>
+          </a:p>
+        </p:txBody>
+      </p:sp>
+      <p:sp>
+        <p:nvSpPr>
+          <p:cNvPr id="7" name="TextBox 7"/>
+          <p:cNvSpPr txBox="1"/>
+          <p:nvPr/>
+        </p:nvSpPr>
+        <p:spPr>
+          <a:xfrm>
+            <a:off x="1304075" y="5731239"/>
+            <a:ext cx="2039740" cy="564786"/>
+          </a:xfrm>
+          <a:prstGeom prst="rect">
+            <a:avLst/>
+          </a:prstGeom>
+        </p:spPr>
+        <p:txBody>
+          <a:bodyPr lIns="0" tIns="0" rIns="0" bIns="0" anchor="t">
+            <a:spAutoFit/>
+          </a:bodyPr>
+          <a:lstStyle/>
+          <a:p>
+            <a:pPr lvl="0" algn="l">
+              <a:lnSpc>
+                <a:spcPts val="4479"/>
+              </a:lnSpc>
+              <a:spcBef>
+                <a:spcPct val="0"/>
+              </a:spcBef>
+              <a:defRPr/>
+            </a:pPr>
+            <a:r>
+              <a:rPr lang="en-US" sz="3199" b="1">
                 <a:solidFill>
                   <a:srgbClr val="475570"/>
                 </a:solidFill>
@@ -6957,129 +6941,111 @@
                 <a:cs typeface="Source Han Sans KR Bold"/>
                 <a:sym typeface="Source Han Sans KR Bold"/>
               </a:rPr>
-              <a:t>해결</a:t>
-            </a:r>
-            <a:r>
-              <a:rPr lang="en-US" sz="3199" b="1" dirty="0">
-                <a:solidFill>
-                  <a:srgbClr val="475570"/>
-                </a:solidFill>
-                <a:latin typeface="한컴 윤고딕 740"/>
-                <a:ea typeface="한컴 윤고딕 740"/>
-                <a:cs typeface="Source Han Sans KR Bold"/>
-                <a:sym typeface="Source Han Sans KR Bold"/>
-              </a:rPr>
-              <a:t>   </a:t>
-            </a:r>
-            <a:r>
-              <a:rPr lang="en-US" sz="3199" dirty="0" err="1">
-                <a:solidFill>
-                  <a:srgbClr val="475570"/>
-                </a:solidFill>
-                <a:latin typeface="한컴 윤고딕 740"/>
-                <a:ea typeface="한컴 윤고딕 740"/>
-                <a:cs typeface="Source Han Sans KR"/>
-                <a:sym typeface="Source Han Sans KR"/>
-              </a:rPr>
-              <a:t>커넥션</a:t>
-            </a:r>
-            <a:r>
-              <a:rPr lang="en-US" sz="3199" dirty="0">
-                <a:solidFill>
-                  <a:srgbClr val="475570"/>
-                </a:solidFill>
-                <a:latin typeface="한컴 윤고딕 740"/>
-                <a:ea typeface="한컴 윤고딕 740"/>
-                <a:cs typeface="Source Han Sans KR"/>
-                <a:sym typeface="Source Han Sans KR"/>
-              </a:rPr>
-              <a:t> 풀 + RAII </a:t>
-            </a:r>
-            <a:r>
-              <a:rPr lang="en-US" sz="3199" dirty="0" err="1">
-                <a:solidFill>
-                  <a:srgbClr val="475570"/>
-                </a:solidFill>
-                <a:latin typeface="한컴 윤고딕 740"/>
-                <a:ea typeface="한컴 윤고딕 740"/>
-                <a:cs typeface="Source Han Sans KR"/>
-                <a:sym typeface="Source Han Sans KR"/>
-              </a:rPr>
-              <a:t>세션으로</a:t>
-            </a:r>
-            <a:r>
-              <a:rPr lang="en-US" sz="3199" dirty="0">
-                <a:solidFill>
-                  <a:srgbClr val="475570"/>
-                </a:solidFill>
-                <a:latin typeface="한컴 윤고딕 740"/>
-                <a:ea typeface="한컴 윤고딕 740"/>
-                <a:cs typeface="Source Han Sans KR"/>
-                <a:sym typeface="Source Han Sans KR"/>
-              </a:rPr>
-              <a:t> </a:t>
-            </a:r>
-            <a:r>
-              <a:rPr lang="en-US" sz="3199" dirty="0" err="1">
-                <a:solidFill>
-                  <a:srgbClr val="475570"/>
-                </a:solidFill>
-                <a:latin typeface="한컴 윤고딕 740"/>
-                <a:ea typeface="한컴 윤고딕 740"/>
-                <a:cs typeface="Source Han Sans KR"/>
-                <a:sym typeface="Source Han Sans KR"/>
-              </a:rPr>
-              <a:t>연결</a:t>
-            </a:r>
-            <a:r>
-              <a:rPr lang="en-US" sz="3199" dirty="0">
-                <a:solidFill>
-                  <a:srgbClr val="475570"/>
-                </a:solidFill>
-                <a:latin typeface="한컴 윤고딕 740"/>
-                <a:ea typeface="한컴 윤고딕 740"/>
-                <a:cs typeface="Source Han Sans KR"/>
-                <a:sym typeface="Source Han Sans KR"/>
-              </a:rPr>
-              <a:t> </a:t>
-            </a:r>
-            <a:r>
-              <a:rPr lang="en-US" sz="3199" dirty="0" err="1">
-                <a:solidFill>
-                  <a:srgbClr val="475570"/>
-                </a:solidFill>
-                <a:latin typeface="한컴 윤고딕 740"/>
-                <a:ea typeface="한컴 윤고딕 740"/>
-                <a:cs typeface="Source Han Sans KR"/>
-                <a:sym typeface="Source Han Sans KR"/>
-              </a:rPr>
-              <a:t>수명</a:t>
-            </a:r>
-            <a:r>
-              <a:rPr lang="en-US" sz="3199" dirty="0">
-                <a:solidFill>
-                  <a:srgbClr val="475570"/>
-                </a:solidFill>
-                <a:latin typeface="한컴 윤고딕 740"/>
-                <a:ea typeface="한컴 윤고딕 740"/>
-                <a:cs typeface="Source Han Sans KR"/>
-                <a:sym typeface="Source Han Sans KR"/>
-              </a:rPr>
-              <a:t> </a:t>
-            </a:r>
-            <a:r>
-              <a:rPr lang="en-US" sz="3199" dirty="0" err="1">
-                <a:solidFill>
-                  <a:srgbClr val="475570"/>
-                </a:solidFill>
-                <a:latin typeface="한컴 윤고딕 740"/>
-                <a:ea typeface="한컴 윤고딕 740"/>
-                <a:cs typeface="Source Han Sans KR"/>
-                <a:sym typeface="Source Han Sans KR"/>
-              </a:rPr>
-              <a:t>통제</a:t>
-            </a:r>
-            <a:endParaRPr lang="en-US" sz="3199" dirty="0">
+              <a:t>담당업무</a:t>
+            </a:r>
+          </a:p>
+        </p:txBody>
+      </p:sp>
+      <p:sp>
+        <p:nvSpPr>
+          <p:cNvPr id="8" name="TextBox 8"/>
+          <p:cNvSpPr txBox="1"/>
+          <p:nvPr/>
+        </p:nvSpPr>
+        <p:spPr>
+          <a:xfrm>
+            <a:off x="4177723" y="3594010"/>
+            <a:ext cx="3348234" cy="568415"/>
+          </a:xfrm>
+          <a:prstGeom prst="rect">
+            <a:avLst/>
+          </a:prstGeom>
+        </p:spPr>
+        <p:txBody>
+          <a:bodyPr lIns="0" tIns="0" rIns="0" bIns="0" anchor="t">
+            <a:spAutoFit/>
+          </a:bodyPr>
+          <a:lstStyle/>
+          <a:p>
+            <a:pPr lvl="0" algn="l">
+              <a:lnSpc>
+                <a:spcPts val="4479"/>
+              </a:lnSpc>
+              <a:spcBef>
+                <a:spcPct val="0"/>
+              </a:spcBef>
+              <a:defRPr/>
+            </a:pPr>
+            <a:r>
+              <a:rPr lang="en-US" sz="3199">
+                <a:solidFill>
+                  <a:srgbClr val="475570"/>
+                </a:solidFill>
+                <a:latin typeface="한컴 윤고딕 740"/>
+                <a:ea typeface="한컴 윤고딕 740"/>
+                <a:cs typeface="Source Han Sans KR"/>
+                <a:sym typeface="Source Han Sans KR"/>
+              </a:rPr>
+              <a:t>25.05 ~ 06</a:t>
+            </a:r>
+          </a:p>
+        </p:txBody>
+      </p:sp>
+      <p:sp>
+        <p:nvSpPr>
+          <p:cNvPr id="9" name="TextBox 9"/>
+          <p:cNvSpPr txBox="1"/>
+          <p:nvPr/>
+        </p:nvSpPr>
+        <p:spPr>
+          <a:xfrm>
+            <a:off x="4177722" y="4251991"/>
+            <a:ext cx="8650548" cy="567659"/>
+          </a:xfrm>
+          <a:prstGeom prst="rect">
+            <a:avLst/>
+          </a:prstGeom>
+        </p:spPr>
+        <p:txBody>
+          <a:bodyPr lIns="0" tIns="0" rIns="0" bIns="0" anchor="t">
+            <a:spAutoFit/>
+          </a:bodyPr>
+          <a:lstStyle/>
+          <a:p>
+            <a:pPr lvl="0" algn="l">
+              <a:lnSpc>
+                <a:spcPts val="4479"/>
+              </a:lnSpc>
+              <a:spcBef>
+                <a:spcPct val="0"/>
+              </a:spcBef>
+              <a:defRPr/>
+            </a:pPr>
+            <a:r>
+              <a:rPr lang="en-US" altLang="ko-KR" sz="3199">
+                <a:solidFill>
+                  <a:srgbClr val="475570"/>
+                </a:solidFill>
+                <a:latin typeface="한컴 윤고딕 740"/>
+                <a:ea typeface="한컴 윤고딕 740"/>
+                <a:cs typeface="Source Han Sans KR"/>
+                <a:sym typeface="Source Han Sans KR"/>
+              </a:rPr>
+              <a:t>C++, </a:t>
+            </a:r>
+            <a:r>
+              <a:rPr lang="en-US" sz="3199">
+                <a:solidFill>
+                  <a:srgbClr val="475570"/>
+                </a:solidFill>
+                <a:latin typeface="한컴 윤고딕 740"/>
+                <a:ea typeface="한컴 윤고딕 740"/>
+                <a:cs typeface="Source Han Sans KR"/>
+                <a:sym typeface="Source Han Sans KR"/>
+              </a:rPr>
+              <a:t>Unreal5.5</a:t>
+            </a:r>
+            <a:endParaRPr lang="en-US" sz="3199">
               <a:solidFill>
                 <a:srgbClr val="475570"/>
               </a:solidFill>
@@ -7089,146 +7055,403 @@
               <a:sym typeface="Source Han Sans KR"/>
             </a:endParaRPr>
           </a:p>
-          <a:p>
-            <a:pPr lvl="0" algn="just">
-              <a:lnSpc>
-                <a:spcPts val="7999"/>
-              </a:lnSpc>
-              <a:defRPr/>
-            </a:pPr>
-            <a:r>
-              <a:rPr lang="en-US" sz="3199" b="1" dirty="0" err="1">
-                <a:solidFill>
-                  <a:srgbClr val="475570"/>
-                </a:solidFill>
-                <a:latin typeface="한컴 윤고딕 740"/>
-                <a:ea typeface="한컴 윤고딕 740"/>
-                <a:cs typeface="Source Han Sans KR Bold"/>
-                <a:sym typeface="Source Han Sans KR Bold"/>
-              </a:rPr>
-              <a:t>결과</a:t>
-            </a:r>
-            <a:r>
-              <a:rPr lang="en-US" sz="3199" b="1" dirty="0">
-                <a:solidFill>
-                  <a:srgbClr val="475570"/>
-                </a:solidFill>
-                <a:latin typeface="한컴 윤고딕 740"/>
-                <a:ea typeface="한컴 윤고딕 740"/>
-                <a:cs typeface="Source Han Sans KR Bold"/>
-                <a:sym typeface="Source Han Sans KR Bold"/>
-              </a:rPr>
-              <a:t>   </a:t>
-            </a:r>
-            <a:r>
-              <a:rPr lang="en-US" sz="3199" dirty="0" err="1">
-                <a:solidFill>
-                  <a:srgbClr val="475570"/>
-                </a:solidFill>
-                <a:latin typeface="한컴 윤고딕 740"/>
-                <a:ea typeface="한컴 윤고딕 740"/>
-                <a:cs typeface="Source Han Sans KR"/>
-                <a:sym typeface="Source Han Sans KR"/>
-              </a:rPr>
-              <a:t>동시</a:t>
-            </a:r>
-            <a:r>
-              <a:rPr lang="en-US" sz="3199" dirty="0">
-                <a:solidFill>
-                  <a:srgbClr val="475570"/>
-                </a:solidFill>
-                <a:latin typeface="한컴 윤고딕 740"/>
-                <a:ea typeface="한컴 윤고딕 740"/>
-                <a:cs typeface="Source Han Sans KR"/>
-                <a:sym typeface="Source Han Sans KR"/>
-              </a:rPr>
-              <a:t> </a:t>
-            </a:r>
-            <a:r>
-              <a:rPr lang="en-US" sz="3199" dirty="0" err="1">
-                <a:solidFill>
-                  <a:srgbClr val="475570"/>
-                </a:solidFill>
-                <a:latin typeface="한컴 윤고딕 740"/>
-                <a:ea typeface="한컴 윤고딕 740"/>
-                <a:cs typeface="Source Han Sans KR"/>
-                <a:sym typeface="Source Han Sans KR"/>
-              </a:rPr>
-              <a:t>처리량</a:t>
-            </a:r>
-            <a:r>
-              <a:rPr lang="en-US" sz="3199" dirty="0">
-                <a:solidFill>
-                  <a:srgbClr val="475570"/>
-                </a:solidFill>
-                <a:latin typeface="한컴 윤고딕 740"/>
-                <a:ea typeface="한컴 윤고딕 740"/>
-                <a:cs typeface="Source Han Sans KR"/>
-                <a:sym typeface="Source Han Sans KR"/>
-              </a:rPr>
-              <a:t>↑, </a:t>
-            </a:r>
-            <a:r>
-              <a:rPr lang="en-US" sz="3199" dirty="0" err="1">
-                <a:solidFill>
-                  <a:srgbClr val="475570"/>
-                </a:solidFill>
-                <a:latin typeface="한컴 윤고딕 740"/>
-                <a:ea typeface="한컴 윤고딕 740"/>
-                <a:cs typeface="Source Han Sans KR"/>
-                <a:sym typeface="Source Han Sans KR"/>
-              </a:rPr>
-              <a:t>리소스</a:t>
-            </a:r>
-            <a:r>
-              <a:rPr lang="en-US" sz="3199" dirty="0">
-                <a:solidFill>
-                  <a:srgbClr val="475570"/>
-                </a:solidFill>
-                <a:latin typeface="한컴 윤고딕 740"/>
-                <a:ea typeface="한컴 윤고딕 740"/>
-                <a:cs typeface="Source Han Sans KR"/>
-                <a:sym typeface="Source Han Sans KR"/>
-              </a:rPr>
-              <a:t> </a:t>
-            </a:r>
-            <a:r>
-              <a:rPr lang="en-US" sz="3199" dirty="0" err="1">
-                <a:solidFill>
-                  <a:srgbClr val="475570"/>
-                </a:solidFill>
-                <a:latin typeface="한컴 윤고딕 740"/>
-                <a:ea typeface="한컴 윤고딕 740"/>
-                <a:cs typeface="Source Han Sans KR"/>
-                <a:sym typeface="Source Han Sans KR"/>
-              </a:rPr>
-              <a:t>누수</a:t>
-            </a:r>
-            <a:r>
-              <a:rPr lang="en-US" sz="3199" dirty="0">
-                <a:solidFill>
-                  <a:srgbClr val="475570"/>
-                </a:solidFill>
-                <a:latin typeface="한컴 윤고딕 740"/>
-                <a:ea typeface="한컴 윤고딕 740"/>
-                <a:cs typeface="Source Han Sans KR"/>
-                <a:sym typeface="Source Han Sans KR"/>
-              </a:rPr>
-              <a:t>↓</a:t>
-            </a:r>
-          </a:p>
-        </p:txBody>
-      </p:sp>
-      <p:sp>
-        <p:nvSpPr>
-          <p:cNvPr id="5" name="TextBox 5"/>
+        </p:txBody>
+      </p:sp>
+      <p:sp>
+        <p:nvSpPr>
+          <p:cNvPr id="10" name="AutoShape 10"/>
+          <p:cNvSpPr/>
+          <p:nvPr/>
+        </p:nvSpPr>
+        <p:spPr>
+          <a:xfrm flipV="1">
+            <a:off x="3497805" y="3641635"/>
+            <a:ext cx="0" cy="393105"/>
+          </a:xfrm>
+          <a:prstGeom prst="line">
+            <a:avLst/>
+          </a:prstGeom>
+          <a:ln w="19050" cap="flat">
+            <a:solidFill>
+              <a:srgbClr val="000000">
+                <a:alpha val="19610"/>
+              </a:srgbClr>
+            </a:solidFill>
+            <a:prstDash val="solid"/>
+            <a:headEnd w="sm" len="sm"/>
+            <a:tailEnd w="sm" len="sm"/>
+          </a:ln>
+        </p:spPr>
+        <p:txBody>
+          <a:bodyPr wrap="square" anchor="ctr"/>
+          <a:lstStyle/>
+          <a:p>
+            <a:pPr lvl="0" algn="ctr">
+              <a:defRPr/>
+            </a:pPr>
+            <a:endParaRPr lang="ko-KR" altLang="en-US">
+              <a:latin typeface="한컴 윤고딕 740"/>
+              <a:ea typeface="한컴 윤고딕 740"/>
+            </a:endParaRPr>
+          </a:p>
+        </p:txBody>
+      </p:sp>
+      <p:sp>
+        <p:nvSpPr>
+          <p:cNvPr id="11" name="TextBox 11"/>
           <p:cNvSpPr txBox="1"/>
           <p:nvPr/>
         </p:nvSpPr>
         <p:spPr>
           <a:xfrm>
-            <a:off x="1224585" y="3015122"/>
-            <a:ext cx="8148015" cy="880603"/>
+            <a:off x="4177723" y="4945863"/>
+            <a:ext cx="8327978" cy="569112"/>
+          </a:xfrm>
+          <a:prstGeom prst="rect">
+            <a:avLst/>
+          </a:prstGeom>
+        </p:spPr>
+        <p:txBody>
+          <a:bodyPr lIns="0" tIns="0" rIns="0" bIns="0" anchor="t">
+            <a:spAutoFit/>
+          </a:bodyPr>
+          <a:lstStyle/>
+          <a:p>
+            <a:pPr lvl="0" algn="l">
+              <a:lnSpc>
+                <a:spcPts val="4479"/>
+              </a:lnSpc>
+              <a:spcBef>
+                <a:spcPct val="0"/>
+              </a:spcBef>
+              <a:defRPr/>
+            </a:pPr>
+            <a:r>
+              <a:rPr lang="en-US" sz="3199">
+                <a:solidFill>
+                  <a:srgbClr val="475570"/>
+                </a:solidFill>
+                <a:latin typeface="한컴 윤고딕 740"/>
+                <a:ea typeface="한컴 윤고딕 740"/>
+                <a:cs typeface="Source Han Sans KR"/>
+                <a:sym typeface="Source Han Sans KR"/>
+              </a:rPr>
+              <a:t>1명</a:t>
+            </a:r>
+          </a:p>
+        </p:txBody>
+      </p:sp>
+      <p:sp>
+        <p:nvSpPr>
+          <p:cNvPr id="12" name="AutoShape 12"/>
+          <p:cNvSpPr/>
+          <p:nvPr/>
+        </p:nvSpPr>
+        <p:spPr>
+          <a:xfrm flipV="1">
+            <a:off x="3497805" y="4328810"/>
+            <a:ext cx="0" cy="393105"/>
+          </a:xfrm>
+          <a:prstGeom prst="line">
+            <a:avLst/>
+          </a:prstGeom>
+          <a:ln w="19050" cap="flat">
+            <a:solidFill>
+              <a:srgbClr val="000000">
+                <a:alpha val="19610"/>
+              </a:srgbClr>
+            </a:solidFill>
+            <a:prstDash val="solid"/>
+            <a:headEnd w="sm" len="sm"/>
+            <a:tailEnd w="sm" len="sm"/>
+          </a:ln>
+        </p:spPr>
+        <p:txBody>
+          <a:bodyPr wrap="square" anchor="ctr"/>
+          <a:lstStyle/>
+          <a:p>
+            <a:pPr lvl="0" algn="ctr">
+              <a:defRPr/>
+            </a:pPr>
+            <a:endParaRPr lang="ko-KR" altLang="en-US">
+              <a:latin typeface="한컴 윤고딕 740"/>
+              <a:ea typeface="한컴 윤고딕 740"/>
+            </a:endParaRPr>
+          </a:p>
+        </p:txBody>
+      </p:sp>
+      <p:sp>
+        <p:nvSpPr>
+          <p:cNvPr id="13" name="AutoShape 13"/>
+          <p:cNvSpPr/>
+          <p:nvPr/>
+        </p:nvSpPr>
+        <p:spPr>
+          <a:xfrm flipV="1">
+            <a:off x="3497805" y="5051876"/>
+            <a:ext cx="0" cy="393105"/>
+          </a:xfrm>
+          <a:prstGeom prst="line">
+            <a:avLst/>
+          </a:prstGeom>
+          <a:ln w="19050" cap="flat">
+            <a:solidFill>
+              <a:srgbClr val="000000">
+                <a:alpha val="19610"/>
+              </a:srgbClr>
+            </a:solidFill>
+            <a:prstDash val="solid"/>
+            <a:headEnd w="sm" len="sm"/>
+            <a:tailEnd w="sm" len="sm"/>
+          </a:ln>
+        </p:spPr>
+        <p:txBody>
+          <a:bodyPr wrap="square" anchor="ctr"/>
+          <a:lstStyle/>
+          <a:p>
+            <a:pPr lvl="0" algn="ctr">
+              <a:defRPr/>
+            </a:pPr>
+            <a:endParaRPr lang="ko-KR" altLang="en-US">
+              <a:latin typeface="한컴 윤고딕 740"/>
+              <a:ea typeface="한컴 윤고딕 740"/>
+            </a:endParaRPr>
+          </a:p>
+        </p:txBody>
+      </p:sp>
+      <p:sp>
+        <p:nvSpPr>
+          <p:cNvPr id="14" name="AutoShape 14"/>
+          <p:cNvSpPr/>
+          <p:nvPr/>
+        </p:nvSpPr>
+        <p:spPr>
+          <a:xfrm flipV="1">
+            <a:off x="3500602" y="5866445"/>
+            <a:ext cx="0" cy="393105"/>
+          </a:xfrm>
+          <a:prstGeom prst="line">
+            <a:avLst/>
+          </a:prstGeom>
+          <a:ln w="19050" cap="flat">
+            <a:solidFill>
+              <a:srgbClr val="000000">
+                <a:alpha val="19610"/>
+              </a:srgbClr>
+            </a:solidFill>
+            <a:prstDash val="solid"/>
+            <a:headEnd w="sm" len="sm"/>
+            <a:tailEnd w="sm" len="sm"/>
+          </a:ln>
+        </p:spPr>
+        <p:txBody>
+          <a:bodyPr wrap="square" anchor="ctr"/>
+          <a:lstStyle/>
+          <a:p>
+            <a:pPr lvl="0" algn="ctr">
+              <a:defRPr/>
+            </a:pPr>
+            <a:endParaRPr lang="ko-KR" altLang="en-US">
+              <a:latin typeface="한컴 윤고딕 740"/>
+              <a:ea typeface="한컴 윤고딕 740"/>
+            </a:endParaRPr>
+          </a:p>
+        </p:txBody>
+      </p:sp>
+      <p:sp>
+        <p:nvSpPr>
+          <p:cNvPr id="15" name="TextBox 15"/>
+          <p:cNvSpPr txBox="1"/>
+          <p:nvPr/>
+        </p:nvSpPr>
+        <p:spPr>
+          <a:xfrm>
+            <a:off x="1285120" y="2122714"/>
+            <a:ext cx="11187924" cy="563336"/>
+          </a:xfrm>
+          <a:prstGeom prst="rect">
+            <a:avLst/>
+          </a:prstGeom>
+        </p:spPr>
+        <p:txBody>
+          <a:bodyPr lIns="0" tIns="0" rIns="0" bIns="0" anchor="t">
+            <a:spAutoFit/>
+          </a:bodyPr>
+          <a:lstStyle/>
+          <a:p>
+            <a:pPr lvl="0" algn="l">
+              <a:lnSpc>
+                <a:spcPts val="4479"/>
+              </a:lnSpc>
+              <a:spcBef>
+                <a:spcPct val="0"/>
+              </a:spcBef>
+              <a:defRPr/>
+            </a:pPr>
+            <a:r>
+              <a:rPr lang="en-US" sz="3199">
+                <a:solidFill>
+                  <a:srgbClr val="475570"/>
+                </a:solidFill>
+                <a:latin typeface="한컴 윤고딕 740"/>
+                <a:ea typeface="한컴 윤고딕 740"/>
+                <a:cs typeface="Source Han Sans KR"/>
+                <a:sym typeface="Source Han Sans KR"/>
+              </a:rPr>
+              <a:t>폭탄 던지기 게임</a:t>
+            </a:r>
+          </a:p>
+        </p:txBody>
+      </p:sp>
+      <p:sp>
+        <p:nvSpPr>
+          <p:cNvPr id="16" name="TextBox 16"/>
+          <p:cNvSpPr txBox="1"/>
+          <p:nvPr/>
+        </p:nvSpPr>
+        <p:spPr>
+          <a:xfrm>
+            <a:off x="4177723" y="5731230"/>
+            <a:ext cx="8461328" cy="1707795"/>
+          </a:xfrm>
+          <a:prstGeom prst="rect">
+            <a:avLst/>
+          </a:prstGeom>
+        </p:spPr>
+        <p:txBody>
+          <a:bodyPr lIns="0" tIns="0" rIns="0" bIns="0" anchor="t">
+            <a:spAutoFit/>
+          </a:bodyPr>
+          <a:lstStyle/>
+          <a:p>
+            <a:pPr lvl="0" algn="l">
+              <a:lnSpc>
+                <a:spcPts val="4479"/>
+              </a:lnSpc>
+              <a:defRPr/>
+            </a:pPr>
+            <a:r>
+              <a:rPr lang="en-US" sz="3199">
+                <a:solidFill>
+                  <a:srgbClr val="475570"/>
+                </a:solidFill>
+                <a:latin typeface="한컴 윤고딕 740"/>
+                <a:ea typeface="한컴 윤고딕 740"/>
+                <a:cs typeface="Source Han Sans KR"/>
+                <a:sym typeface="Source Han Sans KR"/>
+              </a:rPr>
+              <a:t>(제작중)</a:t>
+            </a:r>
+            <a:endParaRPr lang="ko-KR" altLang="en-US" sz="3199">
+              <a:solidFill>
+                <a:srgbClr val="475570"/>
+              </a:solidFill>
+              <a:latin typeface="한컴 윤고딕 740"/>
+              <a:ea typeface="한컴 윤고딕 740"/>
+              <a:cs typeface="Source Han Sans KR"/>
+              <a:sym typeface="Source Han Sans KR"/>
+            </a:endParaRPr>
+          </a:p>
+          <a:p>
+            <a:pPr lvl="0" algn="l">
+              <a:lnSpc>
+                <a:spcPts val="4479"/>
+              </a:lnSpc>
+              <a:spcBef>
+                <a:spcPct val="0"/>
+              </a:spcBef>
+              <a:defRPr/>
+            </a:pPr>
+            <a:r>
+              <a:rPr lang="en-US" altLang="ko-KR" sz="3199">
+                <a:solidFill>
+                  <a:srgbClr val="475570"/>
+                </a:solidFill>
+                <a:latin typeface="한컴 윤고딕 740"/>
+                <a:ea typeface="한컴 윤고딕 740"/>
+                <a:cs typeface="Source Han Sans KR"/>
+                <a:sym typeface="Source Han Sans KR"/>
+              </a:rPr>
+              <a:t>Boost.Asio </a:t>
+            </a:r>
+            <a:r>
+              <a:rPr lang="ko-KR" altLang="en-US" sz="3199">
+                <a:solidFill>
+                  <a:srgbClr val="475570"/>
+                </a:solidFill>
+                <a:latin typeface="한컴 윤고딕 740"/>
+                <a:ea typeface="한컴 윤고딕 740"/>
+                <a:cs typeface="Source Han Sans KR"/>
+                <a:sym typeface="Source Han Sans KR"/>
+              </a:rPr>
+              <a:t>기반</a:t>
+            </a:r>
+            <a:endParaRPr lang="ko-KR" altLang="en-US" sz="3199">
+              <a:solidFill>
+                <a:srgbClr val="475570"/>
+              </a:solidFill>
+              <a:latin typeface="한컴 윤고딕 740"/>
+              <a:ea typeface="한컴 윤고딕 740"/>
+              <a:cs typeface="Source Han Sans KR"/>
+              <a:sym typeface="Source Han Sans KR"/>
+            </a:endParaRPr>
+          </a:p>
+          <a:p>
+            <a:pPr lvl="0" algn="l">
+              <a:lnSpc>
+                <a:spcPts val="4479"/>
+              </a:lnSpc>
+              <a:spcBef>
+                <a:spcPct val="0"/>
+              </a:spcBef>
+              <a:defRPr/>
+            </a:pPr>
+            <a:r>
+              <a:rPr lang="en-US" altLang="ko-KR" sz="3199">
+                <a:solidFill>
+                  <a:srgbClr val="475570"/>
+                </a:solidFill>
+                <a:latin typeface="한컴 윤고딕 740"/>
+                <a:ea typeface="한컴 윤고딕 740"/>
+                <a:cs typeface="Source Han Sans KR"/>
+                <a:sym typeface="Source Han Sans KR"/>
+              </a:rPr>
+              <a:t>CMake </a:t>
+            </a:r>
+            <a:r>
+              <a:rPr lang="ko-KR" altLang="en-US" sz="3199">
+                <a:solidFill>
+                  <a:srgbClr val="475570"/>
+                </a:solidFill>
+                <a:latin typeface="한컴 윤고딕 740"/>
+                <a:ea typeface="한컴 윤고딕 740"/>
+                <a:cs typeface="Source Han Sans KR"/>
+                <a:sym typeface="Source Han Sans KR"/>
+              </a:rPr>
+              <a:t>환경 설정</a:t>
+            </a:r>
+            <a:endParaRPr lang="ko-KR" altLang="en-US" sz="3199">
+              <a:solidFill>
+                <a:srgbClr val="475570"/>
+              </a:solidFill>
+              <a:latin typeface="한컴 윤고딕 740"/>
+              <a:ea typeface="한컴 윤고딕 740"/>
+              <a:cs typeface="Source Han Sans KR"/>
+              <a:sym typeface="Source Han Sans KR"/>
+            </a:endParaRPr>
+          </a:p>
+        </p:txBody>
+      </p:sp>
+      <p:sp>
+        <p:nvSpPr>
+          <p:cNvPr id="21" name="TextBox 5"/>
+          <p:cNvSpPr txBox="1"/>
+          <p:nvPr/>
+        </p:nvSpPr>
+        <p:spPr>
+          <a:xfrm>
+            <a:off x="1267450" y="9182100"/>
+            <a:ext cx="2211148" cy="571500"/>
           </a:xfrm>
           <a:prstGeom prst="rect">
             <a:avLst/>
@@ -7240,9 +7463,9 @@
           </a:bodyPr>
           <a:lstStyle/>
           <a:p>
-            <a:pPr marL="0" lvl="0" indent="0" algn="l">
-              <a:lnSpc>
-                <a:spcPts val="7000"/>
+            <a:pPr lvl="0">
+              <a:lnSpc>
+                <a:spcPts val="4479"/>
               </a:lnSpc>
               <a:spcBef>
                 <a:spcPct val="0"/>
@@ -7250,30 +7473,39 @@
               <a:defRPr/>
             </a:pPr>
             <a:r>
-              <a:rPr lang="en-US" sz="5000" b="1">
-                <a:solidFill>
-                  <a:srgbClr val="475570"/>
-                </a:solidFill>
-                <a:latin typeface="한컴 윤고딕 740"/>
-                <a:ea typeface="한컴 윤고딕 740"/>
-                <a:cs typeface="Canva Sans Bold"/>
-                <a:sym typeface="Canva Sans Bold"/>
-              </a:rPr>
-              <a:t>DB 세션 수명 관리 최적화</a:t>
-            </a:r>
-          </a:p>
-        </p:txBody>
-      </p:sp>
-      <p:sp>
-        <p:nvSpPr>
-          <p:cNvPr id="6" name="TextBox 2"/>
+              <a:rPr lang="en-US" altLang="ko-KR" sz="3199" b="1">
+                <a:solidFill>
+                  <a:srgbClr val="475570"/>
+                </a:solidFill>
+                <a:latin typeface="한컴 윤고딕 740"/>
+                <a:ea typeface="한컴 윤고딕 740"/>
+                <a:cs typeface="Source Han Sans KR Bold"/>
+                <a:sym typeface="Source Han Sans KR Bold"/>
+              </a:rPr>
+              <a:t>Git</a:t>
+            </a:r>
+            <a:endParaRPr lang="en-US" altLang="ko-KR" sz="3199" b="1">
+              <a:solidFill>
+                <a:srgbClr val="475570"/>
+              </a:solidFill>
+              <a:latin typeface="한컴 윤고딕 740"/>
+              <a:ea typeface="한컴 윤고딕 740"/>
+              <a:cs typeface="Source Han Sans KR Bold"/>
+              <a:sym typeface="Source Han Sans KR Bold"/>
+            </a:endParaRPr>
+          </a:p>
+        </p:txBody>
+      </p:sp>
+      <p:sp>
+        <p:nvSpPr>
+          <p:cNvPr id="22" name="TextBox 9"/>
           <p:cNvSpPr txBox="1"/>
           <p:nvPr/>
         </p:nvSpPr>
         <p:spPr>
           <a:xfrm>
-            <a:off x="626111" y="695325"/>
-            <a:ext cx="4098289" cy="885825"/>
+            <a:off x="4048858" y="9195374"/>
+            <a:ext cx="9377488" cy="567751"/>
           </a:xfrm>
           <a:prstGeom prst="rect">
             <a:avLst/>
@@ -7285,9 +7517,9 @@
           </a:bodyPr>
           <a:lstStyle/>
           <a:p>
-            <a:pPr marL="0" lvl="0" indent="0" algn="l">
-              <a:lnSpc>
-                <a:spcPts val="7000"/>
+            <a:pPr lvl="0" algn="l">
+              <a:lnSpc>
+                <a:spcPts val="4479"/>
               </a:lnSpc>
               <a:spcBef>
                 <a:spcPct val="0"/>
@@ -7295,62 +7527,65 @@
               <a:defRPr/>
             </a:pPr>
             <a:r>
-              <a:rPr lang="en-US" sz="5000" b="1">
-                <a:solidFill>
-                  <a:srgbClr val="475570"/>
-                </a:solidFill>
-                <a:latin typeface="한컴 윤고딕 760"/>
-                <a:ea typeface="한컴 윤고딕 760"/>
-                <a:cs typeface="Canva Sans Bold"/>
-                <a:sym typeface="Canva Sans Bold"/>
-              </a:rPr>
-              <a:t>티유월드</a:t>
-            </a:r>
-          </a:p>
-        </p:txBody>
-      </p:sp>
-      <p:sp>
-        <p:nvSpPr>
-          <p:cNvPr id="7" name="TextBox 3"/>
-          <p:cNvSpPr txBox="1"/>
-          <p:nvPr/>
-        </p:nvSpPr>
-        <p:spPr>
-          <a:xfrm>
-            <a:off x="654760" y="450850"/>
-            <a:ext cx="1998893" cy="349250"/>
-          </a:xfrm>
-          <a:prstGeom prst="rect">
+              <a:rPr lang="en-US" altLang="ko-KR" sz="3199">
+                <a:solidFill>
+                  <a:srgbClr val="475570"/>
+                </a:solidFill>
+                <a:latin typeface="한컴 윤고딕 740"/>
+                <a:ea typeface="한컴 윤고딕 740"/>
+                <a:cs typeface="Source Han Sans KR"/>
+                <a:sym typeface="Source Han Sans KR"/>
+              </a:rPr>
+              <a:t>-</a:t>
+            </a:r>
+            <a:endParaRPr lang="en-US" altLang="ko-KR" sz="3199">
+              <a:solidFill>
+                <a:srgbClr val="475570"/>
+              </a:solidFill>
+              <a:latin typeface="한컴 윤고딕 740"/>
+              <a:ea typeface="한컴 윤고딕 740"/>
+              <a:cs typeface="Source Han Sans KR"/>
+              <a:sym typeface="Source Han Sans KR"/>
+            </a:endParaRPr>
+          </a:p>
+        </p:txBody>
+      </p:sp>
+      <p:sp>
+        <p:nvSpPr>
+          <p:cNvPr id="23" name="AutoShape 12"/>
+          <p:cNvSpPr/>
+          <p:nvPr/>
+        </p:nvSpPr>
+        <p:spPr>
+          <a:xfrm flipV="1">
+            <a:off x="3497805" y="9334500"/>
+            <a:ext cx="0" cy="393105"/>
+          </a:xfrm>
+          <a:prstGeom prst="line">
             <a:avLst/>
           </a:prstGeom>
-        </p:spPr>
-        <p:txBody>
-          <a:bodyPr wrap="square" lIns="0" tIns="0" rIns="0" bIns="0" anchor="t">
-            <a:spAutoFit/>
-          </a:bodyPr>
-          <a:lstStyle/>
-          <a:p>
-            <a:pPr lvl="0" algn="l">
-              <a:lnSpc>
-                <a:spcPts val="2800"/>
-              </a:lnSpc>
-              <a:spcBef>
-                <a:spcPct val="0"/>
-              </a:spcBef>
-              <a:defRPr/>
-            </a:pPr>
-            <a:r>
-              <a:rPr lang="en-US" sz="2000">
-                <a:solidFill>
-                  <a:srgbClr val="475570"/>
-                </a:solidFill>
-                <a:latin typeface="한컴 윤고딕 760"/>
-                <a:ea typeface="한컴 윤고딕 760"/>
-                <a:cs typeface="Cabin"/>
-                <a:sym typeface="Cabin"/>
-              </a:rPr>
-              <a:t>PROJECTS</a:t>
-            </a:r>
+          <a:ln w="19050" cap="flat">
+            <a:solidFill>
+              <a:srgbClr val="000000">
+                <a:alpha val="19610"/>
+              </a:srgbClr>
+            </a:solidFill>
+            <a:prstDash val="solid"/>
+            <a:headEnd w="sm" len="sm"/>
+            <a:tailEnd w="sm" len="sm"/>
+          </a:ln>
+        </p:spPr>
+        <p:txBody>
+          <a:bodyPr wrap="square" anchor="ctr"/>
+          <a:lstStyle/>
+          <a:p>
+            <a:pPr lvl="0" algn="ctr">
+              <a:defRPr/>
+            </a:pPr>
+            <a:endParaRPr lang="ko-KR" altLang="en-US">
+              <a:latin typeface="한컴 윤고딕 740"/>
+              <a:ea typeface="한컴 윤고딕 740"/>
+            </a:endParaRPr>
           </a:p>
         </p:txBody>
       </p:sp>
@@ -7389,14 +7624,149 @@
       </p:grpSpPr>
       <p:sp>
         <p:nvSpPr>
-          <p:cNvPr id="2" name="Freeform 2"/>
+          <p:cNvPr id="2" name="TextBox 2"/>
+          <p:cNvSpPr txBox="1"/>
+          <p:nvPr/>
+        </p:nvSpPr>
+        <p:spPr>
+          <a:xfrm>
+            <a:off x="1238801" y="1074737"/>
+            <a:ext cx="4872762" cy="877888"/>
+          </a:xfrm>
+          <a:prstGeom prst="rect">
+            <a:avLst/>
+          </a:prstGeom>
+        </p:spPr>
+        <p:txBody>
+          <a:bodyPr wrap="square" lIns="0" tIns="0" rIns="0" bIns="0" anchor="t">
+            <a:spAutoFit/>
+          </a:bodyPr>
+          <a:lstStyle/>
+          <a:p>
+            <a:pPr marL="0" lvl="0" indent="0" algn="l">
+              <a:lnSpc>
+                <a:spcPts val="7000"/>
+              </a:lnSpc>
+              <a:spcBef>
+                <a:spcPct val="0"/>
+              </a:spcBef>
+              <a:defRPr/>
+            </a:pPr>
+            <a:r>
+              <a:rPr lang="en-US" sz="5000" b="1">
+                <a:solidFill>
+                  <a:srgbClr val="475570"/>
+                </a:solidFill>
+                <a:latin typeface="한컴 윤고딕 760"/>
+                <a:ea typeface="한컴 윤고딕 760"/>
+                <a:cs typeface="Canva Sans Bold"/>
+                <a:sym typeface="Canva Sans Bold"/>
+              </a:rPr>
+              <a:t>기타프로젝트</a:t>
+            </a:r>
+          </a:p>
+        </p:txBody>
+      </p:sp>
+      <p:sp>
+        <p:nvSpPr>
+          <p:cNvPr id="3" name="TextBox 3"/>
+          <p:cNvSpPr txBox="1"/>
+          <p:nvPr/>
+        </p:nvSpPr>
+        <p:spPr>
+          <a:xfrm>
+            <a:off x="1267450" y="830263"/>
+            <a:ext cx="1584423" cy="350837"/>
+          </a:xfrm>
+          <a:prstGeom prst="rect">
+            <a:avLst/>
+          </a:prstGeom>
+        </p:spPr>
+        <p:txBody>
+          <a:bodyPr wrap="square" lIns="0" tIns="0" rIns="0" bIns="0" anchor="t">
+            <a:spAutoFit/>
+          </a:bodyPr>
+          <a:lstStyle/>
+          <a:p>
+            <a:pPr lvl="0" algn="l">
+              <a:lnSpc>
+                <a:spcPts val="2800"/>
+              </a:lnSpc>
+              <a:spcBef>
+                <a:spcPct val="0"/>
+              </a:spcBef>
+              <a:defRPr/>
+            </a:pPr>
+            <a:r>
+              <a:rPr lang="en-US" sz="2000">
+                <a:solidFill>
+                  <a:srgbClr val="475570"/>
+                </a:solidFill>
+                <a:latin typeface="한컴 윤고딕 760"/>
+                <a:ea typeface="한컴 윤고딕 760"/>
+                <a:cs typeface="Cabin"/>
+                <a:sym typeface="Cabin"/>
+              </a:rPr>
+              <a:t>PROJECTS</a:t>
+            </a:r>
+          </a:p>
+        </p:txBody>
+      </p:sp>
+      <p:sp>
+        <p:nvSpPr>
+          <p:cNvPr id="4" name="TextBox 4"/>
+          <p:cNvSpPr txBox="1"/>
+          <p:nvPr/>
+        </p:nvSpPr>
+        <p:spPr>
+          <a:xfrm>
+            <a:off x="4836702" y="1516062"/>
+            <a:ext cx="2326098" cy="446088"/>
+          </a:xfrm>
+          <a:prstGeom prst="rect">
+            <a:avLst/>
+          </a:prstGeom>
+        </p:spPr>
+        <p:txBody>
+          <a:bodyPr wrap="square" lIns="0" tIns="0" rIns="0" bIns="0" anchor="t">
+            <a:spAutoFit/>
+          </a:bodyPr>
+          <a:lstStyle/>
+          <a:p>
+            <a:pPr lvl="0" algn="ctr">
+              <a:lnSpc>
+                <a:spcPts val="3499"/>
+              </a:lnSpc>
+              <a:spcBef>
+                <a:spcPct val="0"/>
+              </a:spcBef>
+              <a:defRPr/>
+            </a:pPr>
+            <a:r>
+              <a:rPr lang="en-US" sz="2499">
+                <a:solidFill>
+                  <a:srgbClr val="475570"/>
+                </a:solidFill>
+                <a:latin typeface="한컴 윤고딕 760"/>
+                <a:ea typeface="한컴 윤고딕 760"/>
+                <a:cs typeface="Source Han Sans KR Bold"/>
+                <a:sym typeface="Source Han Sans KR Bold"/>
+              </a:rPr>
+              <a:t>/ 다크나이츠</a:t>
+            </a:r>
+          </a:p>
+        </p:txBody>
+      </p:sp>
+      <p:sp>
+        <p:nvSpPr>
+          <p:cNvPr id="5" name="Freeform 5"/>
           <p:cNvSpPr/>
           <p:nvPr/>
         </p:nvSpPr>
         <p:spPr>
           <a:xfrm>
-            <a:off x="1357251" y="1707597"/>
-            <a:ext cx="15573497" cy="6871806"/>
+            <a:off x="1133750" y="2962560"/>
+            <a:ext cx="5091270" cy="3401591"/>
           </a:xfrm>
           <a:custGeom>
             <a:avLst/>
@@ -7405,18 +7775,18 @@
             <a:cxnLst/>
             <a:rect l="l" t="t" r="r" b="b"/>
             <a:pathLst>
-              <a:path w="15573497" h="6871806">
+              <a:path w="5091270" h="3401591">
                 <a:moveTo>
                   <a:pt x="0" y="0"/>
                 </a:moveTo>
                 <a:lnTo>
-                  <a:pt x="15573498" y="0"/>
+                  <a:pt x="5091271" y="0"/>
                 </a:lnTo>
                 <a:lnTo>
-                  <a:pt x="15573498" y="6871806"/>
+                  <a:pt x="5091271" y="3401591"/>
                 </a:lnTo>
                 <a:lnTo>
-                  <a:pt x="0" y="6871806"/>
+                  <a:pt x="0" y="3401591"/>
                 </a:lnTo>
                 <a:lnTo>
                   <a:pt x="0" y="0"/>
@@ -7442,14 +7812,636 @@
       </p:sp>
       <p:sp>
         <p:nvSpPr>
-          <p:cNvPr id="5" name="TextBox 5"/>
+          <p:cNvPr id="6" name="Freeform 6"/>
+          <p:cNvSpPr/>
+          <p:nvPr/>
+        </p:nvSpPr>
+        <p:spPr>
+          <a:xfrm>
+            <a:off x="6559004" y="2962560"/>
+            <a:ext cx="4959892" cy="3345959"/>
+          </a:xfrm>
+          <a:custGeom>
+            <a:avLst/>
+            <a:gdLst/>
+            <a:ahLst/>
+            <a:cxnLst/>
+            <a:rect l="l" t="t" r="r" b="b"/>
+            <a:pathLst>
+              <a:path w="4959892" h="3345959">
+                <a:moveTo>
+                  <a:pt x="0" y="0"/>
+                </a:moveTo>
+                <a:lnTo>
+                  <a:pt x="4959892" y="0"/>
+                </a:lnTo>
+                <a:lnTo>
+                  <a:pt x="4959892" y="3345959"/>
+                </a:lnTo>
+                <a:lnTo>
+                  <a:pt x="0" y="3345959"/>
+                </a:lnTo>
+                <a:lnTo>
+                  <a:pt x="0" y="0"/>
+                </a:lnTo>
+                <a:close/>
+              </a:path>
+            </a:pathLst>
+          </a:custGeom>
+          <a:blipFill>
+            <a:blip r:embed="rId3"/>
+            <a:stretch>
+              <a:fillRect/>
+            </a:stretch>
+          </a:blipFill>
+        </p:spPr>
+        <p:txBody>
+          <a:bodyPr/>
+          <a:lstStyle/>
+          <a:p>
+            <a:endParaRPr lang="ko-KR" altLang="en-US"/>
+          </a:p>
+        </p:txBody>
+      </p:sp>
+      <p:sp>
+        <p:nvSpPr>
+          <p:cNvPr id="7" name="Freeform 7"/>
+          <p:cNvSpPr/>
+          <p:nvPr/>
+        </p:nvSpPr>
+        <p:spPr>
+          <a:xfrm>
+            <a:off x="11767550" y="2962560"/>
+            <a:ext cx="5386700" cy="3373775"/>
+          </a:xfrm>
+          <a:custGeom>
+            <a:avLst/>
+            <a:gdLst/>
+            <a:ahLst/>
+            <a:cxnLst/>
+            <a:rect l="l" t="t" r="r" b="b"/>
+            <a:pathLst>
+              <a:path w="5386700" h="3373775">
+                <a:moveTo>
+                  <a:pt x="0" y="0"/>
+                </a:moveTo>
+                <a:lnTo>
+                  <a:pt x="5386700" y="0"/>
+                </a:lnTo>
+                <a:lnTo>
+                  <a:pt x="5386700" y="3373775"/>
+                </a:lnTo>
+                <a:lnTo>
+                  <a:pt x="0" y="3373775"/>
+                </a:lnTo>
+                <a:lnTo>
+                  <a:pt x="0" y="0"/>
+                </a:lnTo>
+                <a:close/>
+              </a:path>
+            </a:pathLst>
+          </a:custGeom>
+          <a:blipFill>
+            <a:blip r:embed="rId4"/>
+            <a:stretch>
+              <a:fillRect l="-12146"/>
+            </a:stretch>
+          </a:blipFill>
+        </p:spPr>
+        <p:txBody>
+          <a:bodyPr/>
+          <a:lstStyle/>
+          <a:p>
+            <a:endParaRPr lang="ko-KR" altLang="en-US"/>
+          </a:p>
+        </p:txBody>
+      </p:sp>
+      <p:sp>
+        <p:nvSpPr>
+          <p:cNvPr id="8" name="TextBox 8"/>
           <p:cNvSpPr txBox="1"/>
           <p:nvPr/>
         </p:nvSpPr>
         <p:spPr>
           <a:xfrm>
-            <a:off x="3285697" y="8953500"/>
-            <a:ext cx="11716606" cy="571500"/>
+            <a:off x="1267450" y="6755152"/>
+            <a:ext cx="2039740" cy="493373"/>
+          </a:xfrm>
+          <a:prstGeom prst="rect">
+            <a:avLst/>
+          </a:prstGeom>
+        </p:spPr>
+        <p:txBody>
+          <a:bodyPr lIns="0" tIns="0" rIns="0" bIns="0" anchor="t">
+            <a:spAutoFit/>
+          </a:bodyPr>
+          <a:lstStyle/>
+          <a:p>
+            <a:pPr lvl="0" algn="l">
+              <a:lnSpc>
+                <a:spcPts val="3918"/>
+              </a:lnSpc>
+              <a:spcBef>
+                <a:spcPct val="0"/>
+              </a:spcBef>
+              <a:defRPr/>
+            </a:pPr>
+            <a:r>
+              <a:rPr lang="en-US" sz="2799" b="1">
+                <a:solidFill>
+                  <a:srgbClr val="475570"/>
+                </a:solidFill>
+                <a:latin typeface="한컴 윤고딕 740"/>
+                <a:ea typeface="한컴 윤고딕 740"/>
+                <a:cs typeface="Source Han Sans KR Bold"/>
+                <a:sym typeface="Source Han Sans KR Bold"/>
+              </a:rPr>
+              <a:t>개발기간</a:t>
+            </a:r>
+          </a:p>
+        </p:txBody>
+      </p:sp>
+      <p:sp>
+        <p:nvSpPr>
+          <p:cNvPr id="9" name="TextBox 9"/>
+          <p:cNvSpPr txBox="1"/>
+          <p:nvPr/>
+        </p:nvSpPr>
+        <p:spPr>
+          <a:xfrm>
+            <a:off x="1267450" y="7413133"/>
+            <a:ext cx="2039740" cy="492617"/>
+          </a:xfrm>
+          <a:prstGeom prst="rect">
+            <a:avLst/>
+          </a:prstGeom>
+        </p:spPr>
+        <p:txBody>
+          <a:bodyPr lIns="0" tIns="0" rIns="0" bIns="0" anchor="t">
+            <a:spAutoFit/>
+          </a:bodyPr>
+          <a:lstStyle/>
+          <a:p>
+            <a:pPr lvl="0" algn="l">
+              <a:lnSpc>
+                <a:spcPts val="3918"/>
+              </a:lnSpc>
+              <a:spcBef>
+                <a:spcPct val="0"/>
+              </a:spcBef>
+              <a:defRPr/>
+            </a:pPr>
+            <a:r>
+              <a:rPr lang="en-US" sz="2799" b="1">
+                <a:solidFill>
+                  <a:srgbClr val="475570"/>
+                </a:solidFill>
+                <a:latin typeface="한컴 윤고딕 740"/>
+                <a:ea typeface="한컴 윤고딕 740"/>
+                <a:cs typeface="Source Han Sans KR Bold"/>
+                <a:sym typeface="Source Han Sans KR Bold"/>
+              </a:rPr>
+              <a:t>개발도구</a:t>
+            </a:r>
+          </a:p>
+        </p:txBody>
+      </p:sp>
+      <p:sp>
+        <p:nvSpPr>
+          <p:cNvPr id="10" name="TextBox 10"/>
+          <p:cNvSpPr txBox="1"/>
+          <p:nvPr/>
+        </p:nvSpPr>
+        <p:spPr>
+          <a:xfrm>
+            <a:off x="1267450" y="8086459"/>
+            <a:ext cx="2039740" cy="486041"/>
+          </a:xfrm>
+          <a:prstGeom prst="rect">
+            <a:avLst/>
+          </a:prstGeom>
+        </p:spPr>
+        <p:txBody>
+          <a:bodyPr lIns="0" tIns="0" rIns="0" bIns="0" anchor="t">
+            <a:spAutoFit/>
+          </a:bodyPr>
+          <a:lstStyle/>
+          <a:p>
+            <a:pPr lvl="0" algn="l">
+              <a:lnSpc>
+                <a:spcPts val="3918"/>
+              </a:lnSpc>
+              <a:spcBef>
+                <a:spcPct val="0"/>
+              </a:spcBef>
+              <a:defRPr/>
+            </a:pPr>
+            <a:r>
+              <a:rPr lang="en-US" sz="2799" b="1">
+                <a:solidFill>
+                  <a:srgbClr val="475570"/>
+                </a:solidFill>
+                <a:latin typeface="한컴 윤고딕 740"/>
+                <a:ea typeface="한컴 윤고딕 740"/>
+                <a:cs typeface="Source Han Sans KR Bold"/>
+                <a:sym typeface="Source Han Sans KR Bold"/>
+              </a:rPr>
+              <a:t>개발인원</a:t>
+            </a:r>
+          </a:p>
+        </p:txBody>
+      </p:sp>
+      <p:sp>
+        <p:nvSpPr>
+          <p:cNvPr id="11" name="TextBox 11"/>
+          <p:cNvSpPr txBox="1"/>
+          <p:nvPr/>
+        </p:nvSpPr>
+        <p:spPr>
+          <a:xfrm>
+            <a:off x="1296099" y="8776970"/>
+            <a:ext cx="2039740" cy="490855"/>
+          </a:xfrm>
+          <a:prstGeom prst="rect">
+            <a:avLst/>
+          </a:prstGeom>
+        </p:spPr>
+        <p:txBody>
+          <a:bodyPr lIns="0" tIns="0" rIns="0" bIns="0" anchor="t">
+            <a:spAutoFit/>
+          </a:bodyPr>
+          <a:lstStyle/>
+          <a:p>
+            <a:pPr lvl="0" algn="l">
+              <a:lnSpc>
+                <a:spcPts val="3918"/>
+              </a:lnSpc>
+              <a:spcBef>
+                <a:spcPct val="0"/>
+              </a:spcBef>
+              <a:defRPr/>
+            </a:pPr>
+            <a:r>
+              <a:rPr lang="en-US" sz="2799" b="1">
+                <a:solidFill>
+                  <a:srgbClr val="475570"/>
+                </a:solidFill>
+                <a:latin typeface="한컴 윤고딕 740"/>
+                <a:ea typeface="한컴 윤고딕 740"/>
+                <a:cs typeface="Source Han Sans KR Bold"/>
+                <a:sym typeface="Source Han Sans KR Bold"/>
+              </a:rPr>
+              <a:t>담당업무</a:t>
+            </a:r>
+          </a:p>
+        </p:txBody>
+      </p:sp>
+      <p:sp>
+        <p:nvSpPr>
+          <p:cNvPr id="12" name="TextBox 12"/>
+          <p:cNvSpPr txBox="1"/>
+          <p:nvPr/>
+        </p:nvSpPr>
+        <p:spPr>
+          <a:xfrm>
+            <a:off x="4160053" y="6755152"/>
+            <a:ext cx="3348234" cy="493373"/>
+          </a:xfrm>
+          <a:prstGeom prst="rect">
+            <a:avLst/>
+          </a:prstGeom>
+        </p:spPr>
+        <p:txBody>
+          <a:bodyPr lIns="0" tIns="0" rIns="0" bIns="0" anchor="t">
+            <a:spAutoFit/>
+          </a:bodyPr>
+          <a:lstStyle/>
+          <a:p>
+            <a:pPr lvl="0" algn="l">
+              <a:lnSpc>
+                <a:spcPts val="3918"/>
+              </a:lnSpc>
+              <a:spcBef>
+                <a:spcPct val="0"/>
+              </a:spcBef>
+              <a:defRPr/>
+            </a:pPr>
+            <a:r>
+              <a:rPr lang="en-US" sz="2799">
+                <a:solidFill>
+                  <a:srgbClr val="475570"/>
+                </a:solidFill>
+                <a:latin typeface="한컴 윤고딕 740"/>
+                <a:ea typeface="한컴 윤고딕 740"/>
+                <a:cs typeface="Source Han Sans KR"/>
+                <a:sym typeface="Source Han Sans KR"/>
+              </a:rPr>
+              <a:t>24.11 (5주)</a:t>
+            </a:r>
+          </a:p>
+        </p:txBody>
+      </p:sp>
+      <p:sp>
+        <p:nvSpPr>
+          <p:cNvPr id="13" name="TextBox 13"/>
+          <p:cNvSpPr txBox="1"/>
+          <p:nvPr/>
+        </p:nvSpPr>
+        <p:spPr>
+          <a:xfrm>
+            <a:off x="4160052" y="7413133"/>
+            <a:ext cx="8650548" cy="492617"/>
+          </a:xfrm>
+          <a:prstGeom prst="rect">
+            <a:avLst/>
+          </a:prstGeom>
+        </p:spPr>
+        <p:txBody>
+          <a:bodyPr lIns="0" tIns="0" rIns="0" bIns="0" anchor="t">
+            <a:spAutoFit/>
+          </a:bodyPr>
+          <a:lstStyle/>
+          <a:p>
+            <a:pPr lvl="0" algn="l">
+              <a:lnSpc>
+                <a:spcPts val="3918"/>
+              </a:lnSpc>
+              <a:spcBef>
+                <a:spcPct val="0"/>
+              </a:spcBef>
+              <a:defRPr/>
+            </a:pPr>
+            <a:r>
+              <a:rPr lang="en-US" sz="2799">
+                <a:solidFill>
+                  <a:srgbClr val="475570"/>
+                </a:solidFill>
+                <a:latin typeface="한컴 윤고딕 740"/>
+                <a:ea typeface="한컴 윤고딕 740"/>
+                <a:cs typeface="Source Han Sans KR"/>
+                <a:sym typeface="Source Han Sans KR"/>
+              </a:rPr>
+              <a:t>C++, WinAPI</a:t>
+            </a:r>
+          </a:p>
+        </p:txBody>
+      </p:sp>
+      <p:sp>
+        <p:nvSpPr>
+          <p:cNvPr id="14" name="AutoShape 14"/>
+          <p:cNvSpPr/>
+          <p:nvPr/>
+        </p:nvSpPr>
+        <p:spPr>
+          <a:xfrm flipV="1">
+            <a:off x="3480135" y="6812302"/>
+            <a:ext cx="0" cy="393105"/>
+          </a:xfrm>
+          <a:prstGeom prst="line">
+            <a:avLst/>
+          </a:prstGeom>
+          <a:ln w="19050" cap="flat">
+            <a:solidFill>
+              <a:srgbClr val="000000">
+                <a:alpha val="19610"/>
+              </a:srgbClr>
+            </a:solidFill>
+            <a:prstDash val="solid"/>
+            <a:headEnd w="sm" len="sm"/>
+            <a:tailEnd w="sm" len="sm"/>
+          </a:ln>
+        </p:spPr>
+        <p:txBody>
+          <a:bodyPr wrap="square" anchor="ctr"/>
+          <a:lstStyle/>
+          <a:p>
+            <a:pPr lvl="0" algn="ctr">
+              <a:defRPr/>
+            </a:pPr>
+            <a:endParaRPr lang="ko-KR" altLang="en-US">
+              <a:latin typeface="한컴 윤고딕 740"/>
+              <a:ea typeface="한컴 윤고딕 740"/>
+            </a:endParaRPr>
+          </a:p>
+        </p:txBody>
+      </p:sp>
+      <p:sp>
+        <p:nvSpPr>
+          <p:cNvPr id="15" name="TextBox 15"/>
+          <p:cNvSpPr txBox="1"/>
+          <p:nvPr/>
+        </p:nvSpPr>
+        <p:spPr>
+          <a:xfrm>
+            <a:off x="4160053" y="8086459"/>
+            <a:ext cx="8327978" cy="486041"/>
+          </a:xfrm>
+          <a:prstGeom prst="rect">
+            <a:avLst/>
+          </a:prstGeom>
+        </p:spPr>
+        <p:txBody>
+          <a:bodyPr lIns="0" tIns="0" rIns="0" bIns="0" anchor="t">
+            <a:spAutoFit/>
+          </a:bodyPr>
+          <a:lstStyle/>
+          <a:p>
+            <a:pPr lvl="0" algn="l">
+              <a:lnSpc>
+                <a:spcPts val="3918"/>
+              </a:lnSpc>
+              <a:spcBef>
+                <a:spcPct val="0"/>
+              </a:spcBef>
+              <a:defRPr/>
+            </a:pPr>
+            <a:r>
+              <a:rPr lang="en-US" sz="2799">
+                <a:solidFill>
+                  <a:srgbClr val="475570"/>
+                </a:solidFill>
+                <a:latin typeface="한컴 윤고딕 740"/>
+                <a:ea typeface="한컴 윤고딕 740"/>
+                <a:cs typeface="Source Han Sans KR"/>
+                <a:sym typeface="Source Han Sans KR"/>
+              </a:rPr>
+              <a:t>3명 (서버1, 클라이언트 2명)</a:t>
+            </a:r>
+          </a:p>
+        </p:txBody>
+      </p:sp>
+      <p:sp>
+        <p:nvSpPr>
+          <p:cNvPr id="16" name="AutoShape 16"/>
+          <p:cNvSpPr/>
+          <p:nvPr/>
+        </p:nvSpPr>
+        <p:spPr>
+          <a:xfrm flipV="1">
+            <a:off x="3480135" y="7499477"/>
+            <a:ext cx="0" cy="393105"/>
+          </a:xfrm>
+          <a:prstGeom prst="line">
+            <a:avLst/>
+          </a:prstGeom>
+          <a:ln w="19050" cap="flat">
+            <a:solidFill>
+              <a:srgbClr val="000000">
+                <a:alpha val="19610"/>
+              </a:srgbClr>
+            </a:solidFill>
+            <a:prstDash val="solid"/>
+            <a:headEnd w="sm" len="sm"/>
+            <a:tailEnd w="sm" len="sm"/>
+          </a:ln>
+        </p:spPr>
+        <p:txBody>
+          <a:bodyPr wrap="square" anchor="ctr"/>
+          <a:lstStyle/>
+          <a:p>
+            <a:pPr lvl="0" algn="ctr">
+              <a:defRPr/>
+            </a:pPr>
+            <a:endParaRPr lang="ko-KR" altLang="en-US">
+              <a:latin typeface="한컴 윤고딕 740"/>
+              <a:ea typeface="한컴 윤고딕 740"/>
+            </a:endParaRPr>
+          </a:p>
+        </p:txBody>
+      </p:sp>
+      <p:sp>
+        <p:nvSpPr>
+          <p:cNvPr id="17" name="AutoShape 17"/>
+          <p:cNvSpPr/>
+          <p:nvPr/>
+        </p:nvSpPr>
+        <p:spPr>
+          <a:xfrm flipV="1">
+            <a:off x="3489660" y="8143609"/>
+            <a:ext cx="0" cy="393105"/>
+          </a:xfrm>
+          <a:prstGeom prst="line">
+            <a:avLst/>
+          </a:prstGeom>
+          <a:ln w="19050" cap="flat">
+            <a:solidFill>
+              <a:srgbClr val="000000">
+                <a:alpha val="19610"/>
+              </a:srgbClr>
+            </a:solidFill>
+            <a:prstDash val="solid"/>
+            <a:headEnd w="sm" len="sm"/>
+            <a:tailEnd w="sm" len="sm"/>
+          </a:ln>
+        </p:spPr>
+        <p:txBody>
+          <a:bodyPr wrap="square" anchor="ctr"/>
+          <a:lstStyle/>
+          <a:p>
+            <a:pPr lvl="0" algn="ctr">
+              <a:defRPr/>
+            </a:pPr>
+            <a:endParaRPr lang="ko-KR" altLang="en-US">
+              <a:latin typeface="한컴 윤고딕 740"/>
+              <a:ea typeface="한컴 윤고딕 740"/>
+            </a:endParaRPr>
+          </a:p>
+        </p:txBody>
+      </p:sp>
+      <p:sp>
+        <p:nvSpPr>
+          <p:cNvPr id="18" name="AutoShape 18"/>
+          <p:cNvSpPr/>
+          <p:nvPr/>
+        </p:nvSpPr>
+        <p:spPr>
+          <a:xfrm flipV="1">
+            <a:off x="3489830" y="8816935"/>
+            <a:ext cx="0" cy="393105"/>
+          </a:xfrm>
+          <a:prstGeom prst="line">
+            <a:avLst/>
+          </a:prstGeom>
+          <a:ln w="19050" cap="flat">
+            <a:solidFill>
+              <a:srgbClr val="000000">
+                <a:alpha val="19610"/>
+              </a:srgbClr>
+            </a:solidFill>
+            <a:prstDash val="solid"/>
+            <a:headEnd w="sm" len="sm"/>
+            <a:tailEnd w="sm" len="sm"/>
+          </a:ln>
+        </p:spPr>
+        <p:txBody>
+          <a:bodyPr wrap="square" anchor="ctr"/>
+          <a:lstStyle/>
+          <a:p>
+            <a:pPr lvl="0" algn="ctr">
+              <a:defRPr/>
+            </a:pPr>
+            <a:endParaRPr lang="ko-KR" altLang="en-US">
+              <a:latin typeface="한컴 윤고딕 740"/>
+              <a:ea typeface="한컴 윤고딕 740"/>
+            </a:endParaRPr>
+          </a:p>
+        </p:txBody>
+      </p:sp>
+      <p:sp>
+        <p:nvSpPr>
+          <p:cNvPr id="19" name="TextBox 19"/>
+          <p:cNvSpPr txBox="1"/>
+          <p:nvPr/>
+        </p:nvSpPr>
+        <p:spPr>
+          <a:xfrm>
+            <a:off x="4169747" y="8776961"/>
+            <a:ext cx="8461328" cy="490864"/>
+          </a:xfrm>
+          <a:prstGeom prst="rect">
+            <a:avLst/>
+          </a:prstGeom>
+        </p:spPr>
+        <p:txBody>
+          <a:bodyPr lIns="0" tIns="0" rIns="0" bIns="0" anchor="t">
+            <a:spAutoFit/>
+          </a:bodyPr>
+          <a:lstStyle/>
+          <a:p>
+            <a:pPr lvl="0" algn="l">
+              <a:lnSpc>
+                <a:spcPts val="3918"/>
+              </a:lnSpc>
+              <a:spcBef>
+                <a:spcPct val="0"/>
+              </a:spcBef>
+              <a:defRPr/>
+            </a:pPr>
+            <a:r>
+              <a:rPr lang="en-US" sz="2799">
+                <a:solidFill>
+                  <a:srgbClr val="475570"/>
+                </a:solidFill>
+                <a:latin typeface="한컴 윤고딕 740"/>
+                <a:ea typeface="한컴 윤고딕 740"/>
+                <a:cs typeface="Source Han Sans KR"/>
+                <a:sym typeface="Source Han Sans KR"/>
+              </a:rPr>
+              <a:t>네트워크 프레임워크 제작</a:t>
+            </a:r>
+          </a:p>
+        </p:txBody>
+      </p:sp>
+      <p:sp>
+        <p:nvSpPr>
+          <p:cNvPr id="20" name="TextBox 20"/>
+          <p:cNvSpPr txBox="1"/>
+          <p:nvPr/>
+        </p:nvSpPr>
+        <p:spPr>
+          <a:xfrm>
+            <a:off x="1238801" y="2229134"/>
+            <a:ext cx="7676599" cy="501804"/>
           </a:xfrm>
           <a:prstGeom prst="rect">
             <a:avLst/>
@@ -7461,9 +8453,9 @@
           </a:bodyPr>
           <a:lstStyle/>
           <a:p>
-            <a:pPr lvl="0" algn="ctr">
-              <a:lnSpc>
-                <a:spcPts val="4479"/>
+            <a:pPr lvl="0" algn="l">
+              <a:lnSpc>
+                <a:spcPts val="4199"/>
               </a:lnSpc>
               <a:spcBef>
                 <a:spcPct val="0"/>
@@ -7471,107 +8463,110 @@
               <a:defRPr/>
             </a:pPr>
             <a:r>
-              <a:rPr lang="en-US" sz="3199">
-                <a:solidFill>
-                  <a:srgbClr val="475570"/>
-                </a:solidFill>
-                <a:latin typeface="한컴 윤고딕 740"/>
-                <a:ea typeface="한컴 윤고딕 740"/>
-                <a:cs typeface="Source Han Sans KR"/>
-                <a:sym typeface="Source Han Sans KR"/>
-              </a:rPr>
-              <a:t>DBManager로 게임 데이터 관리 (친구/인벤토리/프로필)</a:t>
-            </a:r>
-          </a:p>
-        </p:txBody>
-      </p:sp>
-      <p:sp>
-        <p:nvSpPr>
-          <p:cNvPr id="6" name="TextBox 2"/>
-          <p:cNvSpPr txBox="1"/>
-          <p:nvPr/>
-        </p:nvSpPr>
-        <p:spPr>
-          <a:xfrm>
-            <a:off x="626111" y="695325"/>
-            <a:ext cx="4098289" cy="885825"/>
-          </a:xfrm>
-          <a:prstGeom prst="rect">
-            <a:avLst/>
-          </a:prstGeom>
-        </p:spPr>
-        <p:txBody>
-          <a:bodyPr wrap="square" lIns="0" tIns="0" rIns="0" bIns="0" anchor="t">
-            <a:spAutoFit/>
-          </a:bodyPr>
-          <a:lstStyle/>
-          <a:p>
-            <a:pPr marL="0" lvl="0" indent="0" algn="l">
-              <a:lnSpc>
-                <a:spcPts val="7000"/>
-              </a:lnSpc>
-              <a:spcBef>
-                <a:spcPct val="0"/>
-              </a:spcBef>
-              <a:defRPr/>
-            </a:pPr>
-            <a:r>
-              <a:rPr lang="en-US" sz="5000" b="1">
-                <a:solidFill>
-                  <a:srgbClr val="475570"/>
-                </a:solidFill>
-                <a:latin typeface="한컴 윤고딕 760"/>
-                <a:ea typeface="한컴 윤고딕 760"/>
-                <a:cs typeface="Canva Sans Bold"/>
-                <a:sym typeface="Canva Sans Bold"/>
-              </a:rPr>
-              <a:t>티유월드</a:t>
-            </a:r>
-          </a:p>
-        </p:txBody>
-      </p:sp>
-      <p:sp>
-        <p:nvSpPr>
-          <p:cNvPr id="7" name="TextBox 3"/>
-          <p:cNvSpPr txBox="1"/>
-          <p:nvPr/>
-        </p:nvSpPr>
-        <p:spPr>
-          <a:xfrm>
-            <a:off x="654760" y="450850"/>
-            <a:ext cx="1998893" cy="349250"/>
-          </a:xfrm>
-          <a:prstGeom prst="rect">
-            <a:avLst/>
-          </a:prstGeom>
-        </p:spPr>
-        <p:txBody>
-          <a:bodyPr wrap="square" lIns="0" tIns="0" rIns="0" bIns="0" anchor="t">
-            <a:spAutoFit/>
-          </a:bodyPr>
-          <a:lstStyle/>
-          <a:p>
-            <a:pPr lvl="0" algn="l">
-              <a:lnSpc>
-                <a:spcPts val="2800"/>
-              </a:lnSpc>
-              <a:spcBef>
-                <a:spcPct val="0"/>
-              </a:spcBef>
-              <a:defRPr/>
-            </a:pPr>
-            <a:r>
-              <a:rPr lang="en-US" sz="2000">
-                <a:solidFill>
-                  <a:srgbClr val="475570"/>
-                </a:solidFill>
-                <a:latin typeface="한컴 윤고딕 760"/>
-                <a:ea typeface="한컴 윤고딕 760"/>
-                <a:cs typeface="Cabin"/>
-                <a:sym typeface="Cabin"/>
-              </a:rPr>
-              <a:t>PROJECTS</a:t>
-            </a:r>
+              <a:rPr lang="ko-KR" altLang="en-US" sz="2999" dirty="0">
+                <a:solidFill>
+                  <a:srgbClr val="475570"/>
+                </a:solidFill>
+                <a:latin typeface="한컴 윤고딕 740"/>
+                <a:ea typeface="한컴 윤고딕 740"/>
+                <a:cs typeface="Source Han Sans KR"/>
+                <a:sym typeface="Source Han Sans KR"/>
+              </a:rPr>
+              <a:t>멀티플레이어 </a:t>
+            </a:r>
+            <a:r>
+              <a:rPr lang="en-US" sz="2999" dirty="0" err="1">
+                <a:solidFill>
+                  <a:srgbClr val="475570"/>
+                </a:solidFill>
+                <a:latin typeface="한컴 윤고딕 740"/>
+                <a:ea typeface="한컴 윤고딕 740"/>
+                <a:cs typeface="Source Han Sans KR"/>
+                <a:sym typeface="Source Han Sans KR"/>
+              </a:rPr>
+              <a:t>횡스크롤</a:t>
+            </a:r>
+            <a:r>
+              <a:rPr lang="en-US" sz="2999" dirty="0">
+                <a:solidFill>
+                  <a:srgbClr val="475570"/>
+                </a:solidFill>
+                <a:latin typeface="한컴 윤고딕 740"/>
+                <a:ea typeface="한컴 윤고딕 740"/>
+                <a:cs typeface="Source Han Sans KR"/>
+                <a:sym typeface="Source Han Sans KR"/>
+              </a:rPr>
+              <a:t> </a:t>
+            </a:r>
+            <a:r>
+              <a:rPr lang="en-US" sz="2999" dirty="0" err="1">
+                <a:solidFill>
+                  <a:srgbClr val="475570"/>
+                </a:solidFill>
+                <a:latin typeface="한컴 윤고딕 740"/>
+                <a:ea typeface="한컴 윤고딕 740"/>
+                <a:cs typeface="Source Han Sans KR"/>
+                <a:sym typeface="Source Han Sans KR"/>
+              </a:rPr>
+              <a:t>액션</a:t>
+            </a:r>
+            <a:r>
+              <a:rPr lang="en-US" sz="2999" dirty="0">
+                <a:solidFill>
+                  <a:srgbClr val="475570"/>
+                </a:solidFill>
+                <a:latin typeface="한컴 윤고딕 740"/>
+                <a:ea typeface="한컴 윤고딕 740"/>
+                <a:cs typeface="Source Han Sans KR"/>
+                <a:sym typeface="Source Han Sans KR"/>
+              </a:rPr>
+              <a:t> </a:t>
+            </a:r>
+            <a:r>
+              <a:rPr lang="en-US" sz="2999" dirty="0" err="1">
+                <a:solidFill>
+                  <a:srgbClr val="475570"/>
+                </a:solidFill>
+                <a:latin typeface="한컴 윤고딕 740"/>
+                <a:ea typeface="한컴 윤고딕 740"/>
+                <a:cs typeface="Source Han Sans KR"/>
+                <a:sym typeface="Source Han Sans KR"/>
+              </a:rPr>
+              <a:t>슈팅</a:t>
+            </a:r>
+            <a:r>
+              <a:rPr lang="en-US" sz="2999" dirty="0">
+                <a:solidFill>
+                  <a:srgbClr val="475570"/>
+                </a:solidFill>
+                <a:latin typeface="한컴 윤고딕 740"/>
+                <a:ea typeface="한컴 윤고딕 740"/>
+                <a:cs typeface="Source Han Sans KR"/>
+                <a:sym typeface="Source Han Sans KR"/>
+              </a:rPr>
+              <a:t> </a:t>
+            </a:r>
+            <a:r>
+              <a:rPr lang="en-US" sz="2999" dirty="0" err="1">
+                <a:solidFill>
+                  <a:srgbClr val="475570"/>
+                </a:solidFill>
+                <a:latin typeface="한컴 윤고딕 740"/>
+                <a:ea typeface="한컴 윤고딕 740"/>
+                <a:cs typeface="Source Han Sans KR"/>
+                <a:sym typeface="Source Han Sans KR"/>
+              </a:rPr>
+              <a:t>게임</a:t>
+            </a:r>
+            <a:endParaRPr lang="en-US" sz="2999" dirty="0">
+              <a:solidFill>
+                <a:srgbClr val="475570"/>
+              </a:solidFill>
+              <a:latin typeface="한컴 윤고딕 740"/>
+              <a:ea typeface="한컴 윤고딕 740"/>
+              <a:cs typeface="Source Han Sans KR"/>
+              <a:sym typeface="Source Han Sans KR"/>
+            </a:endParaRPr>
           </a:p>
         </p:txBody>
       </p:sp>
@@ -7584,14 +8579,13 @@
 </file>
 
 <file path=ppt/slides/slide2.xml><?xml version="1.0" encoding="utf-8"?>
-<p:sld xmlns:a="http://schemas.openxmlformats.org/drawingml/2006/main" xmlns:r="http://schemas.openxmlformats.org/officeDocument/2006/relationships" xmlns:p="http://schemas.openxmlformats.org/presentationml/2006/main">
+<p:sld xmlns:r="http://schemas.openxmlformats.org/officeDocument/2006/relationships" xmlns:c="http://schemas.openxmlformats.org/drawingml/2006/chart" xmlns:a="http://schemas.openxmlformats.org/drawingml/2006/main" xmlns:dgm="http://schemas.openxmlformats.org/drawingml/2006/diagram" xmlns:dsp="http://schemas.microsoft.com/office/drawing/2008/diagram" xmlns:p="http://schemas.openxmlformats.org/presentationml/2006/main">
   <p:cSld>
     <p:bg>
-      <p:bgPr>
+      <p:bgPr shadeToTitle="0">
         <a:solidFill>
           <a:srgbClr val="475570"/>
         </a:solidFill>
-        <a:effectLst/>
       </p:bgPr>
     </p:bg>
     <p:spTree>
@@ -7846,9 +8840,9 @@
               <a:defRPr/>
             </a:pPr>
             <a:r>
-              <a:rPr lang="en-US" sz="3399" strike="sngStrike">
-                <a:solidFill>
-                  <a:srgbClr val="FCFDF8"/>
+              <a:rPr lang="en-US" sz="3399">
+                <a:solidFill>
+                  <a:srgbClr val="fcfdf8"/>
                 </a:solidFill>
                 <a:latin typeface="한컴 윤고딕 760"/>
                 <a:ea typeface="한컴 윤고딕 760"/>
@@ -7857,6 +8851,15 @@
               </a:rPr>
               <a:t>BomeGame (제작중)</a:t>
             </a:r>
+            <a:endParaRPr lang="en-US" sz="3399">
+              <a:solidFill>
+                <a:srgbClr val="fcfdf8"/>
+              </a:solidFill>
+              <a:latin typeface="한컴 윤고딕 760"/>
+              <a:ea typeface="한컴 윤고딕 760"/>
+              <a:cs typeface="Canva Sans"/>
+              <a:sym typeface="Canva Sans"/>
+            </a:endParaRPr>
           </a:p>
         </p:txBody>
       </p:sp>
@@ -8036,144 +9039,6 @@
                 <a:sym typeface="Canva Sans Medium"/>
               </a:rPr>
               <a:t>3</a:t>
-            </a:r>
-          </a:p>
-        </p:txBody>
-      </p:sp>
-      <p:sp>
-        <p:nvSpPr>
-          <p:cNvPr id="12" name="TextBox 12"/>
-          <p:cNvSpPr txBox="1"/>
-          <p:nvPr/>
-        </p:nvSpPr>
-        <p:spPr>
-          <a:xfrm>
-            <a:off x="8153686" y="5383213"/>
-            <a:ext cx="4897940" cy="608012"/>
-          </a:xfrm>
-          <a:prstGeom prst="rect">
-            <a:avLst/>
-          </a:prstGeom>
-        </p:spPr>
-        <p:txBody>
-          <a:bodyPr wrap="square" lIns="0" tIns="0" rIns="0" bIns="0" anchor="t">
-            <a:spAutoFit/>
-          </a:bodyPr>
-          <a:lstStyle/>
-          <a:p>
-            <a:pPr marL="0" lvl="0" indent="0" algn="r">
-              <a:lnSpc>
-                <a:spcPts val="4759"/>
-              </a:lnSpc>
-              <a:spcBef>
-                <a:spcPct val="0"/>
-              </a:spcBef>
-              <a:defRPr/>
-            </a:pPr>
-            <a:r>
-              <a:rPr lang="en-US" sz="3399">
-                <a:solidFill>
-                  <a:srgbClr val="FCFDF8"/>
-                </a:solidFill>
-                <a:latin typeface="한컴 윤고딕 760"/>
-                <a:ea typeface="한컴 윤고딕 760"/>
-                <a:cs typeface="Canva Sans"/>
-                <a:sym typeface="Canva Sans"/>
-              </a:rPr>
-              <a:t> (IOCP서버/언리얼)</a:t>
-            </a:r>
-          </a:p>
-        </p:txBody>
-      </p:sp>
-      <p:sp>
-        <p:nvSpPr>
-          <p:cNvPr id="13" name="TextBox 13"/>
-          <p:cNvSpPr txBox="1"/>
-          <p:nvPr/>
-        </p:nvSpPr>
-        <p:spPr>
-          <a:xfrm>
-            <a:off x="8153686" y="6410795"/>
-            <a:ext cx="4897940" cy="609130"/>
-          </a:xfrm>
-          <a:prstGeom prst="rect">
-            <a:avLst/>
-          </a:prstGeom>
-        </p:spPr>
-        <p:txBody>
-          <a:bodyPr wrap="square" lIns="0" tIns="0" rIns="0" bIns="0" anchor="t">
-            <a:spAutoFit/>
-          </a:bodyPr>
-          <a:lstStyle/>
-          <a:p>
-            <a:pPr marL="0" lvl="0" indent="0" algn="r">
-              <a:lnSpc>
-                <a:spcPts val="4759"/>
-              </a:lnSpc>
-              <a:spcBef>
-                <a:spcPct val="0"/>
-              </a:spcBef>
-              <a:defRPr/>
-            </a:pPr>
-            <a:r>
-              <a:rPr lang="en-US" sz="3399" strike="sngStrike" dirty="0">
-                <a:solidFill>
-                  <a:srgbClr val="FCFDF8"/>
-                </a:solidFill>
-                <a:latin typeface="한컴 윤고딕 760"/>
-                <a:ea typeface="한컴 윤고딕 760"/>
-                <a:cs typeface="Canva Sans"/>
-                <a:sym typeface="Canva Sans"/>
-              </a:rPr>
-              <a:t> (</a:t>
-            </a:r>
-            <a:r>
-              <a:rPr lang="en-US" sz="3399" strike="sngStrike" dirty="0" err="1">
-                <a:solidFill>
-                  <a:srgbClr val="FCFDF8"/>
-                </a:solidFill>
-                <a:latin typeface="한컴 윤고딕 760"/>
-                <a:ea typeface="한컴 윤고딕 760"/>
-                <a:cs typeface="Canva Sans"/>
-                <a:sym typeface="Canva Sans"/>
-              </a:rPr>
-              <a:t>Epoll서버</a:t>
-            </a:r>
-            <a:r>
-              <a:rPr lang="en-US" sz="3399" strike="sngStrike" dirty="0">
-                <a:solidFill>
-                  <a:srgbClr val="FCFDF8"/>
-                </a:solidFill>
-                <a:latin typeface="한컴 윤고딕 760"/>
-                <a:ea typeface="한컴 윤고딕 760"/>
-                <a:cs typeface="Canva Sans"/>
-                <a:sym typeface="Canva Sans"/>
-              </a:rPr>
-              <a:t>/</a:t>
-            </a:r>
-            <a:r>
-              <a:rPr lang="en-US" sz="3399" strike="sngStrike" dirty="0" err="1">
-                <a:solidFill>
-                  <a:srgbClr val="FCFDF8"/>
-                </a:solidFill>
-                <a:latin typeface="한컴 윤고딕 760"/>
-                <a:ea typeface="한컴 윤고딕 760"/>
-                <a:cs typeface="Canva Sans"/>
-                <a:sym typeface="Canva Sans"/>
-              </a:rPr>
-              <a:t>언리얼</a:t>
-            </a:r>
-            <a:r>
-              <a:rPr lang="en-US" sz="3399" strike="sngStrike" dirty="0">
-                <a:solidFill>
-                  <a:srgbClr val="FCFDF8"/>
-                </a:solidFill>
-                <a:latin typeface="한컴 윤고딕 760"/>
-                <a:ea typeface="한컴 윤고딕 760"/>
-                <a:cs typeface="Canva Sans"/>
-                <a:sym typeface="Canva Sans"/>
-              </a:rPr>
-              <a:t>)</a:t>
             </a:r>
           </a:p>
         </p:txBody>
@@ -8213,2475 +9078,6 @@
       </p:grpSpPr>
       <p:sp>
         <p:nvSpPr>
-          <p:cNvPr id="4" name="TextBox 4"/>
-          <p:cNvSpPr txBox="1"/>
-          <p:nvPr/>
-        </p:nvSpPr>
-        <p:spPr>
-          <a:xfrm>
-            <a:off x="643434" y="8724900"/>
-            <a:ext cx="17001132" cy="571500"/>
-          </a:xfrm>
-          <a:prstGeom prst="rect">
-            <a:avLst/>
-          </a:prstGeom>
-        </p:spPr>
-        <p:txBody>
-          <a:bodyPr wrap="square" lIns="0" tIns="0" rIns="0" bIns="0" anchor="t">
-            <a:spAutoFit/>
-          </a:bodyPr>
-          <a:lstStyle/>
-          <a:p>
-            <a:pPr lvl="0" algn="ctr">
-              <a:lnSpc>
-                <a:spcPts val="4479"/>
-              </a:lnSpc>
-              <a:spcBef>
-                <a:spcPct val="0"/>
-              </a:spcBef>
-              <a:defRPr/>
-            </a:pPr>
-            <a:r>
-              <a:rPr lang="en-US" sz="3199" dirty="0">
-                <a:solidFill>
-                  <a:srgbClr val="475570"/>
-                </a:solidFill>
-                <a:latin typeface="한컴 윤고딕 740"/>
-                <a:ea typeface="한컴 윤고딕 740"/>
-                <a:cs typeface="Source Han Sans KR"/>
-                <a:sym typeface="Source Han Sans KR"/>
-              </a:rPr>
-              <a:t>RAII </a:t>
-            </a:r>
-            <a:r>
-              <a:rPr lang="en-US" sz="3199" dirty="0" err="1">
-                <a:solidFill>
-                  <a:srgbClr val="475570"/>
-                </a:solidFill>
-                <a:latin typeface="한컴 윤고딕 740"/>
-                <a:ea typeface="한컴 윤고딕 740"/>
-                <a:cs typeface="Source Han Sans KR"/>
-                <a:sym typeface="Source Han Sans KR"/>
-              </a:rPr>
-              <a:t>기반</a:t>
-            </a:r>
-            <a:r>
-              <a:rPr lang="en-US" sz="3199" dirty="0">
-                <a:solidFill>
-                  <a:srgbClr val="475570"/>
-                </a:solidFill>
-                <a:latin typeface="한컴 윤고딕 740"/>
-                <a:ea typeface="한컴 윤고딕 740"/>
-                <a:cs typeface="Source Han Sans KR"/>
-                <a:sym typeface="Source Han Sans KR"/>
-              </a:rPr>
-              <a:t> </a:t>
-            </a:r>
-            <a:r>
-              <a:rPr lang="en-US" sz="3199" dirty="0" err="1">
-                <a:solidFill>
-                  <a:srgbClr val="475570"/>
-                </a:solidFill>
-                <a:latin typeface="한컴 윤고딕 740"/>
-                <a:ea typeface="한컴 윤고딕 740"/>
-                <a:cs typeface="Source Han Sans KR"/>
-                <a:sym typeface="Source Han Sans KR"/>
-              </a:rPr>
-              <a:t>세션</a:t>
-            </a:r>
-            <a:r>
-              <a:rPr lang="en-US" sz="3199" dirty="0">
-                <a:solidFill>
-                  <a:srgbClr val="475570"/>
-                </a:solidFill>
-                <a:latin typeface="한컴 윤고딕 740"/>
-                <a:ea typeface="한컴 윤고딕 740"/>
-                <a:cs typeface="Source Han Sans KR"/>
-                <a:sym typeface="Source Han Sans KR"/>
-              </a:rPr>
-              <a:t> </a:t>
-            </a:r>
-            <a:r>
-              <a:rPr lang="en-US" sz="3199" dirty="0" err="1">
-                <a:solidFill>
-                  <a:srgbClr val="475570"/>
-                </a:solidFill>
-                <a:latin typeface="한컴 윤고딕 740"/>
-                <a:ea typeface="한컴 윤고딕 740"/>
-                <a:cs typeface="Source Han Sans KR"/>
-                <a:sym typeface="Source Han Sans KR"/>
-              </a:rPr>
-              <a:t>관리</a:t>
-            </a:r>
-            <a:r>
-              <a:rPr lang="en-US" sz="3199" dirty="0">
-                <a:solidFill>
-                  <a:srgbClr val="475570"/>
-                </a:solidFill>
-                <a:latin typeface="한컴 윤고딕 740"/>
-                <a:ea typeface="한컴 윤고딕 740"/>
-                <a:cs typeface="Source Han Sans KR"/>
-                <a:sym typeface="Source Han Sans KR"/>
-              </a:rPr>
-              <a:t> + </a:t>
-            </a:r>
-            <a:r>
-              <a:rPr lang="en-US" sz="3199" dirty="0" err="1">
-                <a:solidFill>
-                  <a:srgbClr val="475570"/>
-                </a:solidFill>
-                <a:latin typeface="한컴 윤고딕 740"/>
-                <a:ea typeface="한컴 윤고딕 740"/>
-                <a:cs typeface="Source Han Sans KR"/>
-                <a:sym typeface="Source Han Sans KR"/>
-              </a:rPr>
-              <a:t>DBConnectionPool</a:t>
-            </a:r>
-            <a:r>
-              <a:rPr lang="en-US" sz="3199" dirty="0">
-                <a:solidFill>
-                  <a:srgbClr val="475570"/>
-                </a:solidFill>
-                <a:latin typeface="한컴 윤고딕 740"/>
-                <a:ea typeface="한컴 윤고딕 740"/>
-                <a:cs typeface="Source Han Sans KR"/>
-                <a:sym typeface="Source Han Sans KR"/>
-              </a:rPr>
-              <a:t>: </a:t>
-            </a:r>
-            <a:r>
-              <a:rPr lang="en-US" sz="3199" dirty="0" err="1">
-                <a:solidFill>
-                  <a:srgbClr val="475570"/>
-                </a:solidFill>
-                <a:latin typeface="한컴 윤고딕 740"/>
-                <a:ea typeface="한컴 윤고딕 740"/>
-                <a:cs typeface="Source Han Sans KR"/>
-                <a:sym typeface="Source Han Sans KR"/>
-              </a:rPr>
-              <a:t>세션은</a:t>
-            </a:r>
-            <a:r>
-              <a:rPr lang="en-US" sz="3199" dirty="0">
-                <a:solidFill>
-                  <a:srgbClr val="475570"/>
-                </a:solidFill>
-                <a:latin typeface="한컴 윤고딕 740"/>
-                <a:ea typeface="한컴 윤고딕 740"/>
-                <a:cs typeface="Source Han Sans KR"/>
-                <a:sym typeface="Source Han Sans KR"/>
-              </a:rPr>
-              <a:t> </a:t>
-            </a:r>
-            <a:r>
-              <a:rPr lang="en-US" sz="3199" dirty="0" err="1">
-                <a:solidFill>
-                  <a:srgbClr val="475570"/>
-                </a:solidFill>
-                <a:latin typeface="한컴 윤고딕 740"/>
-                <a:ea typeface="한컴 윤고딕 740"/>
-                <a:cs typeface="Source Han Sans KR"/>
-                <a:sym typeface="Source Han Sans KR"/>
-              </a:rPr>
-              <a:t>자동으로</a:t>
-            </a:r>
-            <a:r>
-              <a:rPr lang="en-US" sz="3199" dirty="0">
-                <a:solidFill>
-                  <a:srgbClr val="475570"/>
-                </a:solidFill>
-                <a:latin typeface="한컴 윤고딕 740"/>
-                <a:ea typeface="한컴 윤고딕 740"/>
-                <a:cs typeface="Source Han Sans KR"/>
-                <a:sym typeface="Source Han Sans KR"/>
-              </a:rPr>
-              <a:t> </a:t>
-            </a:r>
-            <a:r>
-              <a:rPr lang="en-US" sz="3199" dirty="0" err="1">
-                <a:solidFill>
-                  <a:srgbClr val="475570"/>
-                </a:solidFill>
-                <a:latin typeface="한컴 윤고딕 740"/>
-                <a:ea typeface="한컴 윤고딕 740"/>
-                <a:cs typeface="Source Han Sans KR"/>
-                <a:sym typeface="Source Han Sans KR"/>
-              </a:rPr>
-              <a:t>회수</a:t>
-            </a:r>
-            <a:r>
-              <a:rPr lang="en-US" sz="3199" dirty="0">
-                <a:solidFill>
-                  <a:srgbClr val="475570"/>
-                </a:solidFill>
-                <a:latin typeface="한컴 윤고딕 740"/>
-                <a:ea typeface="한컴 윤고딕 740"/>
-                <a:cs typeface="Source Han Sans KR"/>
-                <a:sym typeface="Source Han Sans KR"/>
-              </a:rPr>
-              <a:t>, </a:t>
-            </a:r>
-            <a:r>
-              <a:rPr lang="en-US" sz="3199" dirty="0" err="1">
-                <a:solidFill>
-                  <a:srgbClr val="475570"/>
-                </a:solidFill>
-                <a:latin typeface="한컴 윤고딕 740"/>
-                <a:ea typeface="한컴 윤고딕 740"/>
-                <a:cs typeface="Source Han Sans KR"/>
-                <a:sym typeface="Source Han Sans KR"/>
-              </a:rPr>
-              <a:t>연결은</a:t>
-            </a:r>
-            <a:r>
-              <a:rPr lang="en-US" sz="3199" dirty="0">
-                <a:solidFill>
-                  <a:srgbClr val="475570"/>
-                </a:solidFill>
-                <a:latin typeface="한컴 윤고딕 740"/>
-                <a:ea typeface="한컴 윤고딕 740"/>
-                <a:cs typeface="Source Han Sans KR"/>
-                <a:sym typeface="Source Han Sans KR"/>
-              </a:rPr>
-              <a:t> </a:t>
-            </a:r>
-            <a:r>
-              <a:rPr lang="en-US" sz="3199" dirty="0" err="1">
-                <a:solidFill>
-                  <a:srgbClr val="475570"/>
-                </a:solidFill>
-                <a:latin typeface="한컴 윤고딕 740"/>
-                <a:ea typeface="한컴 윤고딕 740"/>
-                <a:cs typeface="Source Han Sans KR"/>
-                <a:sym typeface="Source Han Sans KR"/>
-              </a:rPr>
-              <a:t>풀에서</a:t>
-            </a:r>
-            <a:r>
-              <a:rPr lang="en-US" sz="3199" dirty="0">
-                <a:solidFill>
-                  <a:srgbClr val="475570"/>
-                </a:solidFill>
-                <a:latin typeface="한컴 윤고딕 740"/>
-                <a:ea typeface="한컴 윤고딕 740"/>
-                <a:cs typeface="Source Han Sans KR"/>
-                <a:sym typeface="Source Han Sans KR"/>
-              </a:rPr>
-              <a:t> </a:t>
-            </a:r>
-            <a:r>
-              <a:rPr lang="en-US" sz="3199" dirty="0" err="1">
-                <a:solidFill>
-                  <a:srgbClr val="475570"/>
-                </a:solidFill>
-                <a:latin typeface="한컴 윤고딕 740"/>
-                <a:ea typeface="한컴 윤고딕 740"/>
-                <a:cs typeface="Source Han Sans KR"/>
-                <a:sym typeface="Source Han Sans KR"/>
-              </a:rPr>
-              <a:t>재사용</a:t>
-            </a:r>
-            <a:endParaRPr lang="en-US" sz="3199" dirty="0">
-              <a:solidFill>
-                <a:srgbClr val="475570"/>
-              </a:solidFill>
-              <a:latin typeface="한컴 윤고딕 740"/>
-              <a:ea typeface="한컴 윤고딕 740"/>
-              <a:cs typeface="Source Han Sans KR"/>
-              <a:sym typeface="Source Han Sans KR"/>
-            </a:endParaRPr>
-          </a:p>
-        </p:txBody>
-      </p:sp>
-      <p:sp>
-        <p:nvSpPr>
-          <p:cNvPr id="5" name="Freeform 5"/>
-          <p:cNvSpPr/>
-          <p:nvPr/>
-        </p:nvSpPr>
-        <p:spPr>
-          <a:xfrm>
-            <a:off x="4240762" y="839619"/>
-            <a:ext cx="9300929" cy="4891467"/>
-          </a:xfrm>
-          <a:custGeom>
-            <a:avLst/>
-            <a:gdLst/>
-            <a:ahLst/>
-            <a:cxnLst/>
-            <a:rect l="l" t="t" r="r" b="b"/>
-            <a:pathLst>
-              <a:path w="9300929" h="4891467">
-                <a:moveTo>
-                  <a:pt x="0" y="0"/>
-                </a:moveTo>
-                <a:lnTo>
-                  <a:pt x="9300929" y="0"/>
-                </a:lnTo>
-                <a:lnTo>
-                  <a:pt x="9300929" y="4891468"/>
-                </a:lnTo>
-                <a:lnTo>
-                  <a:pt x="0" y="4891468"/>
-                </a:lnTo>
-                <a:lnTo>
-                  <a:pt x="0" y="0"/>
-                </a:lnTo>
-                <a:close/>
-              </a:path>
-            </a:pathLst>
-          </a:custGeom>
-          <a:blipFill>
-            <a:blip r:embed="rId2"/>
-            <a:stretch>
-              <a:fillRect/>
-            </a:stretch>
-          </a:blipFill>
-        </p:spPr>
-        <p:txBody>
-          <a:bodyPr/>
-          <a:lstStyle/>
-          <a:p>
-            <a:endParaRPr lang="ko-KR" altLang="en-US"/>
-          </a:p>
-        </p:txBody>
-      </p:sp>
-      <p:sp>
-        <p:nvSpPr>
-          <p:cNvPr id="6" name="Freeform 6"/>
-          <p:cNvSpPr/>
-          <p:nvPr/>
-        </p:nvSpPr>
-        <p:spPr>
-          <a:xfrm>
-            <a:off x="3537521" y="5948035"/>
-            <a:ext cx="10361561" cy="2307573"/>
-          </a:xfrm>
-          <a:custGeom>
-            <a:avLst/>
-            <a:gdLst/>
-            <a:ahLst/>
-            <a:cxnLst/>
-            <a:rect l="l" t="t" r="r" b="b"/>
-            <a:pathLst>
-              <a:path w="10361561" h="2307573">
-                <a:moveTo>
-                  <a:pt x="0" y="0"/>
-                </a:moveTo>
-                <a:lnTo>
-                  <a:pt x="10361561" y="0"/>
-                </a:lnTo>
-                <a:lnTo>
-                  <a:pt x="10361561" y="2307573"/>
-                </a:lnTo>
-                <a:lnTo>
-                  <a:pt x="0" y="2307573"/>
-                </a:lnTo>
-                <a:lnTo>
-                  <a:pt x="0" y="0"/>
-                </a:lnTo>
-                <a:close/>
-              </a:path>
-            </a:pathLst>
-          </a:custGeom>
-          <a:blipFill>
-            <a:blip r:embed="rId3"/>
-            <a:stretch>
-              <a:fillRect r="-6817" b="-42092"/>
-            </a:stretch>
-          </a:blipFill>
-        </p:spPr>
-        <p:txBody>
-          <a:bodyPr/>
-          <a:lstStyle/>
-          <a:p>
-            <a:endParaRPr lang="ko-KR" altLang="en-US"/>
-          </a:p>
-        </p:txBody>
-      </p:sp>
-      <p:sp>
-        <p:nvSpPr>
-          <p:cNvPr id="7" name="TextBox 2"/>
-          <p:cNvSpPr txBox="1"/>
-          <p:nvPr/>
-        </p:nvSpPr>
-        <p:spPr>
-          <a:xfrm>
-            <a:off x="626111" y="695325"/>
-            <a:ext cx="4098289" cy="885825"/>
-          </a:xfrm>
-          <a:prstGeom prst="rect">
-            <a:avLst/>
-          </a:prstGeom>
-        </p:spPr>
-        <p:txBody>
-          <a:bodyPr wrap="square" lIns="0" tIns="0" rIns="0" bIns="0" anchor="t">
-            <a:spAutoFit/>
-          </a:bodyPr>
-          <a:lstStyle/>
-          <a:p>
-            <a:pPr marL="0" lvl="0" indent="0" algn="l">
-              <a:lnSpc>
-                <a:spcPts val="7000"/>
-              </a:lnSpc>
-              <a:spcBef>
-                <a:spcPct val="0"/>
-              </a:spcBef>
-              <a:defRPr/>
-            </a:pPr>
-            <a:r>
-              <a:rPr lang="en-US" sz="5000" b="1">
-                <a:solidFill>
-                  <a:srgbClr val="475570"/>
-                </a:solidFill>
-                <a:latin typeface="한컴 윤고딕 760"/>
-                <a:ea typeface="한컴 윤고딕 760"/>
-                <a:cs typeface="Canva Sans Bold"/>
-                <a:sym typeface="Canva Sans Bold"/>
-              </a:rPr>
-              <a:t>티유월드</a:t>
-            </a:r>
-          </a:p>
-        </p:txBody>
-      </p:sp>
-      <p:sp>
-        <p:nvSpPr>
-          <p:cNvPr id="8" name="TextBox 3"/>
-          <p:cNvSpPr txBox="1"/>
-          <p:nvPr/>
-        </p:nvSpPr>
-        <p:spPr>
-          <a:xfrm>
-            <a:off x="654760" y="450850"/>
-            <a:ext cx="1998893" cy="349250"/>
-          </a:xfrm>
-          <a:prstGeom prst="rect">
-            <a:avLst/>
-          </a:prstGeom>
-        </p:spPr>
-        <p:txBody>
-          <a:bodyPr wrap="square" lIns="0" tIns="0" rIns="0" bIns="0" anchor="t">
-            <a:spAutoFit/>
-          </a:bodyPr>
-          <a:lstStyle/>
-          <a:p>
-            <a:pPr lvl="0" algn="l">
-              <a:lnSpc>
-                <a:spcPts val="2800"/>
-              </a:lnSpc>
-              <a:spcBef>
-                <a:spcPct val="0"/>
-              </a:spcBef>
-              <a:defRPr/>
-            </a:pPr>
-            <a:r>
-              <a:rPr lang="en-US" sz="2000">
-                <a:solidFill>
-                  <a:srgbClr val="475570"/>
-                </a:solidFill>
-                <a:latin typeface="한컴 윤고딕 760"/>
-                <a:ea typeface="한컴 윤고딕 760"/>
-                <a:cs typeface="Cabin"/>
-                <a:sym typeface="Cabin"/>
-              </a:rPr>
-              <a:t>PROJECTS</a:t>
-            </a:r>
-          </a:p>
-        </p:txBody>
-      </p:sp>
-    </p:spTree>
-  </p:cSld>
-  <p:clrMapOvr>
-    <a:masterClrMapping/>
-  </p:clrMapOvr>
-</p:sld>
-</file>
-
-<file path=ppt/slides/slide21.xml><?xml version="1.0" encoding="utf-8"?>
-<p:sld xmlns:a="http://schemas.openxmlformats.org/drawingml/2006/main" xmlns:r="http://schemas.openxmlformats.org/officeDocument/2006/relationships" xmlns:p="http://schemas.openxmlformats.org/presentationml/2006/main">
-  <p:cSld>
-    <p:bg>
-      <p:bgPr>
-        <a:solidFill>
-          <a:srgbClr val="FCFDF8"/>
-        </a:solidFill>
-        <a:effectLst/>
-      </p:bgPr>
-    </p:bg>
-    <p:spTree>
-      <p:nvGrpSpPr>
-        <p:cNvPr id="1" name=""/>
-        <p:cNvGrpSpPr/>
-        <p:nvPr/>
-      </p:nvGrpSpPr>
-      <p:grpSpPr>
-        <a:xfrm>
-          <a:off x="0" y="0"/>
-          <a:ext cx="0" cy="0"/>
-          <a:chOff x="0" y="0"/>
-          <a:chExt cx="0" cy="0"/>
-        </a:xfrm>
-      </p:grpSpPr>
-      <p:sp>
-        <p:nvSpPr>
-          <p:cNvPr id="2" name="TextBox 2"/>
-          <p:cNvSpPr txBox="1"/>
-          <p:nvPr/>
-        </p:nvSpPr>
-        <p:spPr>
-          <a:xfrm>
-            <a:off x="1285120" y="3594010"/>
-            <a:ext cx="2039740" cy="568415"/>
-          </a:xfrm>
-          <a:prstGeom prst="rect">
-            <a:avLst/>
-          </a:prstGeom>
-        </p:spPr>
-        <p:txBody>
-          <a:bodyPr lIns="0" tIns="0" rIns="0" bIns="0" anchor="t">
-            <a:spAutoFit/>
-          </a:bodyPr>
-          <a:lstStyle/>
-          <a:p>
-            <a:pPr lvl="0" algn="l">
-              <a:lnSpc>
-                <a:spcPts val="4479"/>
-              </a:lnSpc>
-              <a:spcBef>
-                <a:spcPct val="0"/>
-              </a:spcBef>
-              <a:defRPr/>
-            </a:pPr>
-            <a:r>
-              <a:rPr lang="en-US" sz="3199" b="1">
-                <a:solidFill>
-                  <a:srgbClr val="475570"/>
-                </a:solidFill>
-                <a:latin typeface="한컴 윤고딕 740"/>
-                <a:ea typeface="한컴 윤고딕 740"/>
-                <a:cs typeface="Source Han Sans KR Bold"/>
-                <a:sym typeface="Source Han Sans KR Bold"/>
-              </a:rPr>
-              <a:t>개발기간</a:t>
-            </a:r>
-          </a:p>
-        </p:txBody>
-      </p:sp>
-      <p:sp>
-        <p:nvSpPr>
-          <p:cNvPr id="3" name="TextBox 3"/>
-          <p:cNvSpPr txBox="1"/>
-          <p:nvPr/>
-        </p:nvSpPr>
-        <p:spPr>
-          <a:xfrm>
-            <a:off x="1238801" y="1065212"/>
-            <a:ext cx="7001106" cy="1058863"/>
-          </a:xfrm>
-          <a:prstGeom prst="rect">
-            <a:avLst/>
-          </a:prstGeom>
-        </p:spPr>
-        <p:txBody>
-          <a:bodyPr lIns="0" tIns="0" rIns="0" bIns="0" anchor="t">
-            <a:spAutoFit/>
-          </a:bodyPr>
-          <a:lstStyle/>
-          <a:p>
-            <a:pPr marL="0" lvl="0" indent="0" algn="l">
-              <a:lnSpc>
-                <a:spcPts val="8400"/>
-              </a:lnSpc>
-              <a:spcBef>
-                <a:spcPct val="0"/>
-              </a:spcBef>
-              <a:defRPr/>
-            </a:pPr>
-            <a:r>
-              <a:rPr lang="en-US" sz="6000" b="1">
-                <a:solidFill>
-                  <a:srgbClr val="475570"/>
-                </a:solidFill>
-                <a:latin typeface="한컴 윤고딕 760"/>
-                <a:ea typeface="한컴 윤고딕 760"/>
-                <a:cs typeface="Canva Sans Bold"/>
-                <a:sym typeface="Canva Sans Bold"/>
-              </a:rPr>
-              <a:t>BombGame</a:t>
-            </a:r>
-          </a:p>
-        </p:txBody>
-      </p:sp>
-      <p:sp>
-        <p:nvSpPr>
-          <p:cNvPr id="4" name="TextBox 4"/>
-          <p:cNvSpPr txBox="1"/>
-          <p:nvPr/>
-        </p:nvSpPr>
-        <p:spPr>
-          <a:xfrm>
-            <a:off x="1267450" y="830263"/>
-            <a:ext cx="1780550" cy="350837"/>
-          </a:xfrm>
-          <a:prstGeom prst="rect">
-            <a:avLst/>
-          </a:prstGeom>
-        </p:spPr>
-        <p:txBody>
-          <a:bodyPr wrap="square" lIns="0" tIns="0" rIns="0" bIns="0" anchor="t">
-            <a:spAutoFit/>
-          </a:bodyPr>
-          <a:lstStyle/>
-          <a:p>
-            <a:pPr lvl="0" algn="l">
-              <a:lnSpc>
-                <a:spcPts val="2800"/>
-              </a:lnSpc>
-              <a:spcBef>
-                <a:spcPct val="0"/>
-              </a:spcBef>
-              <a:defRPr/>
-            </a:pPr>
-            <a:r>
-              <a:rPr lang="en-US" sz="2000">
-                <a:solidFill>
-                  <a:srgbClr val="475570"/>
-                </a:solidFill>
-                <a:latin typeface="한컴 윤고딕 760"/>
-                <a:ea typeface="한컴 윤고딕 760"/>
-                <a:cs typeface="Cabin"/>
-                <a:sym typeface="Cabin"/>
-              </a:rPr>
-              <a:t>PROJECTS</a:t>
-            </a:r>
-          </a:p>
-        </p:txBody>
-      </p:sp>
-      <p:sp>
-        <p:nvSpPr>
-          <p:cNvPr id="5" name="TextBox 5"/>
-          <p:cNvSpPr txBox="1"/>
-          <p:nvPr/>
-        </p:nvSpPr>
-        <p:spPr>
-          <a:xfrm>
-            <a:off x="1285120" y="4251991"/>
-            <a:ext cx="2039740" cy="567659"/>
-          </a:xfrm>
-          <a:prstGeom prst="rect">
-            <a:avLst/>
-          </a:prstGeom>
-        </p:spPr>
-        <p:txBody>
-          <a:bodyPr lIns="0" tIns="0" rIns="0" bIns="0" anchor="t">
-            <a:spAutoFit/>
-          </a:bodyPr>
-          <a:lstStyle/>
-          <a:p>
-            <a:pPr lvl="0" algn="l">
-              <a:lnSpc>
-                <a:spcPts val="4479"/>
-              </a:lnSpc>
-              <a:spcBef>
-                <a:spcPct val="0"/>
-              </a:spcBef>
-              <a:defRPr/>
-            </a:pPr>
-            <a:r>
-              <a:rPr lang="en-US" sz="3199" b="1">
-                <a:solidFill>
-                  <a:srgbClr val="475570"/>
-                </a:solidFill>
-                <a:latin typeface="한컴 윤고딕 740"/>
-                <a:ea typeface="한컴 윤고딕 740"/>
-                <a:cs typeface="Source Han Sans KR Bold"/>
-                <a:sym typeface="Source Han Sans KR Bold"/>
-              </a:rPr>
-              <a:t>개발도구</a:t>
-            </a:r>
-          </a:p>
-        </p:txBody>
-      </p:sp>
-      <p:sp>
-        <p:nvSpPr>
-          <p:cNvPr id="6" name="TextBox 6"/>
-          <p:cNvSpPr txBox="1"/>
-          <p:nvPr/>
-        </p:nvSpPr>
-        <p:spPr>
-          <a:xfrm>
-            <a:off x="1285120" y="4945863"/>
-            <a:ext cx="2039740" cy="569112"/>
-          </a:xfrm>
-          <a:prstGeom prst="rect">
-            <a:avLst/>
-          </a:prstGeom>
-        </p:spPr>
-        <p:txBody>
-          <a:bodyPr lIns="0" tIns="0" rIns="0" bIns="0" anchor="t">
-            <a:spAutoFit/>
-          </a:bodyPr>
-          <a:lstStyle/>
-          <a:p>
-            <a:pPr lvl="0" algn="l">
-              <a:lnSpc>
-                <a:spcPts val="4479"/>
-              </a:lnSpc>
-              <a:spcBef>
-                <a:spcPct val="0"/>
-              </a:spcBef>
-              <a:defRPr/>
-            </a:pPr>
-            <a:r>
-              <a:rPr lang="en-US" sz="3199" b="1">
-                <a:solidFill>
-                  <a:srgbClr val="475570"/>
-                </a:solidFill>
-                <a:latin typeface="한컴 윤고딕 740"/>
-                <a:ea typeface="한컴 윤고딕 740"/>
-                <a:cs typeface="Source Han Sans KR Bold"/>
-                <a:sym typeface="Source Han Sans KR Bold"/>
-              </a:rPr>
-              <a:t>개발인원</a:t>
-            </a:r>
-          </a:p>
-        </p:txBody>
-      </p:sp>
-      <p:sp>
-        <p:nvSpPr>
-          <p:cNvPr id="7" name="TextBox 7"/>
-          <p:cNvSpPr txBox="1"/>
-          <p:nvPr/>
-        </p:nvSpPr>
-        <p:spPr>
-          <a:xfrm>
-            <a:off x="1304075" y="5731239"/>
-            <a:ext cx="2039740" cy="564786"/>
-          </a:xfrm>
-          <a:prstGeom prst="rect">
-            <a:avLst/>
-          </a:prstGeom>
-        </p:spPr>
-        <p:txBody>
-          <a:bodyPr lIns="0" tIns="0" rIns="0" bIns="0" anchor="t">
-            <a:spAutoFit/>
-          </a:bodyPr>
-          <a:lstStyle/>
-          <a:p>
-            <a:pPr lvl="0" algn="l">
-              <a:lnSpc>
-                <a:spcPts val="4479"/>
-              </a:lnSpc>
-              <a:spcBef>
-                <a:spcPct val="0"/>
-              </a:spcBef>
-              <a:defRPr/>
-            </a:pPr>
-            <a:r>
-              <a:rPr lang="en-US" sz="3199" b="1">
-                <a:solidFill>
-                  <a:srgbClr val="475570"/>
-                </a:solidFill>
-                <a:latin typeface="한컴 윤고딕 740"/>
-                <a:ea typeface="한컴 윤고딕 740"/>
-                <a:cs typeface="Source Han Sans KR Bold"/>
-                <a:sym typeface="Source Han Sans KR Bold"/>
-              </a:rPr>
-              <a:t>담당업무</a:t>
-            </a:r>
-          </a:p>
-        </p:txBody>
-      </p:sp>
-      <p:sp>
-        <p:nvSpPr>
-          <p:cNvPr id="8" name="TextBox 8"/>
-          <p:cNvSpPr txBox="1"/>
-          <p:nvPr/>
-        </p:nvSpPr>
-        <p:spPr>
-          <a:xfrm>
-            <a:off x="4177723" y="3594010"/>
-            <a:ext cx="3348234" cy="568415"/>
-          </a:xfrm>
-          <a:prstGeom prst="rect">
-            <a:avLst/>
-          </a:prstGeom>
-        </p:spPr>
-        <p:txBody>
-          <a:bodyPr lIns="0" tIns="0" rIns="0" bIns="0" anchor="t">
-            <a:spAutoFit/>
-          </a:bodyPr>
-          <a:lstStyle/>
-          <a:p>
-            <a:pPr lvl="0" algn="l">
-              <a:lnSpc>
-                <a:spcPts val="4479"/>
-              </a:lnSpc>
-              <a:spcBef>
-                <a:spcPct val="0"/>
-              </a:spcBef>
-              <a:defRPr/>
-            </a:pPr>
-            <a:r>
-              <a:rPr lang="en-US" sz="3199">
-                <a:solidFill>
-                  <a:srgbClr val="475570"/>
-                </a:solidFill>
-                <a:latin typeface="한컴 윤고딕 740"/>
-                <a:ea typeface="한컴 윤고딕 740"/>
-                <a:cs typeface="Source Han Sans KR"/>
-                <a:sym typeface="Source Han Sans KR"/>
-              </a:rPr>
-              <a:t>25.05 ~ 06</a:t>
-            </a:r>
-          </a:p>
-        </p:txBody>
-      </p:sp>
-      <p:sp>
-        <p:nvSpPr>
-          <p:cNvPr id="9" name="TextBox 9"/>
-          <p:cNvSpPr txBox="1"/>
-          <p:nvPr/>
-        </p:nvSpPr>
-        <p:spPr>
-          <a:xfrm>
-            <a:off x="4177722" y="4251991"/>
-            <a:ext cx="8650548" cy="567659"/>
-          </a:xfrm>
-          <a:prstGeom prst="rect">
-            <a:avLst/>
-          </a:prstGeom>
-        </p:spPr>
-        <p:txBody>
-          <a:bodyPr lIns="0" tIns="0" rIns="0" bIns="0" anchor="t">
-            <a:spAutoFit/>
-          </a:bodyPr>
-          <a:lstStyle/>
-          <a:p>
-            <a:pPr lvl="0" algn="l">
-              <a:lnSpc>
-                <a:spcPts val="4479"/>
-              </a:lnSpc>
-              <a:spcBef>
-                <a:spcPct val="0"/>
-              </a:spcBef>
-              <a:defRPr/>
-            </a:pPr>
-            <a:r>
-              <a:rPr lang="en-US" sz="3199">
-                <a:solidFill>
-                  <a:srgbClr val="475570"/>
-                </a:solidFill>
-                <a:latin typeface="한컴 윤고딕 740"/>
-                <a:ea typeface="한컴 윤고딕 740"/>
-                <a:cs typeface="Source Han Sans KR"/>
-                <a:sym typeface="Source Han Sans KR"/>
-              </a:rPr>
-              <a:t>Unreal5.5</a:t>
-            </a:r>
-          </a:p>
-        </p:txBody>
-      </p:sp>
-      <p:sp>
-        <p:nvSpPr>
-          <p:cNvPr id="10" name="AutoShape 10"/>
-          <p:cNvSpPr/>
-          <p:nvPr/>
-        </p:nvSpPr>
-        <p:spPr>
-          <a:xfrm flipV="1">
-            <a:off x="3497805" y="3641635"/>
-            <a:ext cx="0" cy="393105"/>
-          </a:xfrm>
-          <a:prstGeom prst="line">
-            <a:avLst/>
-          </a:prstGeom>
-          <a:ln w="19050" cap="flat">
-            <a:solidFill>
-              <a:srgbClr val="000000">
-                <a:alpha val="19610"/>
-              </a:srgbClr>
-            </a:solidFill>
-            <a:prstDash val="solid"/>
-            <a:headEnd w="sm" len="sm"/>
-            <a:tailEnd w="sm" len="sm"/>
-          </a:ln>
-        </p:spPr>
-        <p:txBody>
-          <a:bodyPr wrap="square" anchor="ctr"/>
-          <a:lstStyle/>
-          <a:p>
-            <a:pPr lvl="0" algn="ctr">
-              <a:defRPr/>
-            </a:pPr>
-            <a:endParaRPr lang="ko-KR" altLang="en-US">
-              <a:latin typeface="한컴 윤고딕 740"/>
-              <a:ea typeface="한컴 윤고딕 740"/>
-            </a:endParaRPr>
-          </a:p>
-        </p:txBody>
-      </p:sp>
-      <p:sp>
-        <p:nvSpPr>
-          <p:cNvPr id="11" name="TextBox 11"/>
-          <p:cNvSpPr txBox="1"/>
-          <p:nvPr/>
-        </p:nvSpPr>
-        <p:spPr>
-          <a:xfrm>
-            <a:off x="4177723" y="4945863"/>
-            <a:ext cx="8327978" cy="569112"/>
-          </a:xfrm>
-          <a:prstGeom prst="rect">
-            <a:avLst/>
-          </a:prstGeom>
-        </p:spPr>
-        <p:txBody>
-          <a:bodyPr lIns="0" tIns="0" rIns="0" bIns="0" anchor="t">
-            <a:spAutoFit/>
-          </a:bodyPr>
-          <a:lstStyle/>
-          <a:p>
-            <a:pPr lvl="0" algn="l">
-              <a:lnSpc>
-                <a:spcPts val="4479"/>
-              </a:lnSpc>
-              <a:spcBef>
-                <a:spcPct val="0"/>
-              </a:spcBef>
-              <a:defRPr/>
-            </a:pPr>
-            <a:r>
-              <a:rPr lang="en-US" sz="3199">
-                <a:solidFill>
-                  <a:srgbClr val="475570"/>
-                </a:solidFill>
-                <a:latin typeface="한컴 윤고딕 740"/>
-                <a:ea typeface="한컴 윤고딕 740"/>
-                <a:cs typeface="Source Han Sans KR"/>
-                <a:sym typeface="Source Han Sans KR"/>
-              </a:rPr>
-              <a:t>1명</a:t>
-            </a:r>
-          </a:p>
-        </p:txBody>
-      </p:sp>
-      <p:sp>
-        <p:nvSpPr>
-          <p:cNvPr id="12" name="AutoShape 12"/>
-          <p:cNvSpPr/>
-          <p:nvPr/>
-        </p:nvSpPr>
-        <p:spPr>
-          <a:xfrm flipV="1">
-            <a:off x="3497805" y="4328810"/>
-            <a:ext cx="0" cy="393105"/>
-          </a:xfrm>
-          <a:prstGeom prst="line">
-            <a:avLst/>
-          </a:prstGeom>
-          <a:ln w="19050" cap="flat">
-            <a:solidFill>
-              <a:srgbClr val="000000">
-                <a:alpha val="19610"/>
-              </a:srgbClr>
-            </a:solidFill>
-            <a:prstDash val="solid"/>
-            <a:headEnd w="sm" len="sm"/>
-            <a:tailEnd w="sm" len="sm"/>
-          </a:ln>
-        </p:spPr>
-        <p:txBody>
-          <a:bodyPr wrap="square" anchor="ctr"/>
-          <a:lstStyle/>
-          <a:p>
-            <a:pPr lvl="0" algn="ctr">
-              <a:defRPr/>
-            </a:pPr>
-            <a:endParaRPr lang="ko-KR" altLang="en-US">
-              <a:latin typeface="한컴 윤고딕 740"/>
-              <a:ea typeface="한컴 윤고딕 740"/>
-            </a:endParaRPr>
-          </a:p>
-        </p:txBody>
-      </p:sp>
-      <p:sp>
-        <p:nvSpPr>
-          <p:cNvPr id="13" name="AutoShape 13"/>
-          <p:cNvSpPr/>
-          <p:nvPr/>
-        </p:nvSpPr>
-        <p:spPr>
-          <a:xfrm flipV="1">
-            <a:off x="3497805" y="5051876"/>
-            <a:ext cx="0" cy="393105"/>
-          </a:xfrm>
-          <a:prstGeom prst="line">
-            <a:avLst/>
-          </a:prstGeom>
-          <a:ln w="19050" cap="flat">
-            <a:solidFill>
-              <a:srgbClr val="000000">
-                <a:alpha val="19610"/>
-              </a:srgbClr>
-            </a:solidFill>
-            <a:prstDash val="solid"/>
-            <a:headEnd w="sm" len="sm"/>
-            <a:tailEnd w="sm" len="sm"/>
-          </a:ln>
-        </p:spPr>
-        <p:txBody>
-          <a:bodyPr wrap="square" anchor="ctr"/>
-          <a:lstStyle/>
-          <a:p>
-            <a:pPr lvl="0" algn="ctr">
-              <a:defRPr/>
-            </a:pPr>
-            <a:endParaRPr lang="ko-KR" altLang="en-US">
-              <a:latin typeface="한컴 윤고딕 740"/>
-              <a:ea typeface="한컴 윤고딕 740"/>
-            </a:endParaRPr>
-          </a:p>
-        </p:txBody>
-      </p:sp>
-      <p:sp>
-        <p:nvSpPr>
-          <p:cNvPr id="14" name="AutoShape 14"/>
-          <p:cNvSpPr/>
-          <p:nvPr/>
-        </p:nvSpPr>
-        <p:spPr>
-          <a:xfrm flipV="1">
-            <a:off x="3500602" y="5866445"/>
-            <a:ext cx="0" cy="393105"/>
-          </a:xfrm>
-          <a:prstGeom prst="line">
-            <a:avLst/>
-          </a:prstGeom>
-          <a:ln w="19050" cap="flat">
-            <a:solidFill>
-              <a:srgbClr val="000000">
-                <a:alpha val="19610"/>
-              </a:srgbClr>
-            </a:solidFill>
-            <a:prstDash val="solid"/>
-            <a:headEnd w="sm" len="sm"/>
-            <a:tailEnd w="sm" len="sm"/>
-          </a:ln>
-        </p:spPr>
-        <p:txBody>
-          <a:bodyPr wrap="square" anchor="ctr"/>
-          <a:lstStyle/>
-          <a:p>
-            <a:pPr lvl="0" algn="ctr">
-              <a:defRPr/>
-            </a:pPr>
-            <a:endParaRPr lang="ko-KR" altLang="en-US">
-              <a:latin typeface="한컴 윤고딕 740"/>
-              <a:ea typeface="한컴 윤고딕 740"/>
-            </a:endParaRPr>
-          </a:p>
-        </p:txBody>
-      </p:sp>
-      <p:sp>
-        <p:nvSpPr>
-          <p:cNvPr id="15" name="TextBox 15"/>
-          <p:cNvSpPr txBox="1"/>
-          <p:nvPr/>
-        </p:nvSpPr>
-        <p:spPr>
-          <a:xfrm>
-            <a:off x="1285120" y="2122714"/>
-            <a:ext cx="11187924" cy="563336"/>
-          </a:xfrm>
-          <a:prstGeom prst="rect">
-            <a:avLst/>
-          </a:prstGeom>
-        </p:spPr>
-        <p:txBody>
-          <a:bodyPr lIns="0" tIns="0" rIns="0" bIns="0" anchor="t">
-            <a:spAutoFit/>
-          </a:bodyPr>
-          <a:lstStyle/>
-          <a:p>
-            <a:pPr lvl="0" algn="l">
-              <a:lnSpc>
-                <a:spcPts val="4479"/>
-              </a:lnSpc>
-              <a:spcBef>
-                <a:spcPct val="0"/>
-              </a:spcBef>
-              <a:defRPr/>
-            </a:pPr>
-            <a:r>
-              <a:rPr lang="en-US" sz="3199">
-                <a:solidFill>
-                  <a:srgbClr val="475570"/>
-                </a:solidFill>
-                <a:latin typeface="한컴 윤고딕 740"/>
-                <a:ea typeface="한컴 윤고딕 740"/>
-                <a:cs typeface="Source Han Sans KR"/>
-                <a:sym typeface="Source Han Sans KR"/>
-              </a:rPr>
-              <a:t>폭탄 던지기 게임</a:t>
-            </a:r>
-          </a:p>
-        </p:txBody>
-      </p:sp>
-      <p:sp>
-        <p:nvSpPr>
-          <p:cNvPr id="16" name="TextBox 16"/>
-          <p:cNvSpPr txBox="1"/>
-          <p:nvPr/>
-        </p:nvSpPr>
-        <p:spPr>
-          <a:xfrm>
-            <a:off x="4177723" y="5731230"/>
-            <a:ext cx="8461328" cy="1136295"/>
-          </a:xfrm>
-          <a:prstGeom prst="rect">
-            <a:avLst/>
-          </a:prstGeom>
-        </p:spPr>
-        <p:txBody>
-          <a:bodyPr lIns="0" tIns="0" rIns="0" bIns="0" anchor="t">
-            <a:spAutoFit/>
-          </a:bodyPr>
-          <a:lstStyle/>
-          <a:p>
-            <a:pPr lvl="0" algn="l">
-              <a:lnSpc>
-                <a:spcPts val="4479"/>
-              </a:lnSpc>
-              <a:defRPr/>
-            </a:pPr>
-            <a:r>
-              <a:rPr lang="en-US" sz="3199">
-                <a:solidFill>
-                  <a:srgbClr val="475570"/>
-                </a:solidFill>
-                <a:latin typeface="한컴 윤고딕 740"/>
-                <a:ea typeface="한컴 윤고딕 740"/>
-                <a:cs typeface="Source Han Sans KR"/>
-                <a:sym typeface="Source Han Sans KR"/>
-              </a:rPr>
-              <a:t>(제작중)</a:t>
-            </a:r>
-          </a:p>
-          <a:p>
-            <a:pPr lvl="0" algn="l">
-              <a:lnSpc>
-                <a:spcPts val="4479"/>
-              </a:lnSpc>
-              <a:spcBef>
-                <a:spcPct val="0"/>
-              </a:spcBef>
-              <a:defRPr/>
-            </a:pPr>
-            <a:endParaRPr lang="en-US" sz="3199">
-              <a:solidFill>
-                <a:srgbClr val="475570"/>
-              </a:solidFill>
-              <a:latin typeface="한컴 윤고딕 740"/>
-              <a:ea typeface="한컴 윤고딕 740"/>
-              <a:cs typeface="Source Han Sans KR"/>
-              <a:sym typeface="Source Han Sans KR"/>
-            </a:endParaRPr>
-          </a:p>
-        </p:txBody>
-      </p:sp>
-      <p:sp>
-        <p:nvSpPr>
-          <p:cNvPr id="17" name="TextBox 17"/>
-          <p:cNvSpPr txBox="1"/>
-          <p:nvPr/>
-        </p:nvSpPr>
-        <p:spPr>
-          <a:xfrm>
-            <a:off x="7525957" y="5397356"/>
-            <a:ext cx="8488040" cy="2851294"/>
-          </a:xfrm>
-          <a:prstGeom prst="rect">
-            <a:avLst/>
-          </a:prstGeom>
-        </p:spPr>
-        <p:txBody>
-          <a:bodyPr lIns="0" tIns="0" rIns="0" bIns="0" anchor="t">
-            <a:spAutoFit/>
-          </a:bodyPr>
-          <a:lstStyle/>
-          <a:p>
-            <a:pPr lvl="0" algn="ctr">
-              <a:lnSpc>
-                <a:spcPts val="4479"/>
-              </a:lnSpc>
-              <a:spcBef>
-                <a:spcPct val="0"/>
-              </a:spcBef>
-              <a:defRPr/>
-            </a:pPr>
-            <a:r>
-              <a:rPr lang="en-US" sz="3199">
-                <a:solidFill>
-                  <a:srgbClr val="FF3131"/>
-                </a:solidFill>
-                <a:latin typeface="한컴 윤고딕 740"/>
-                <a:ea typeface="한컴 윤고딕 740"/>
-                <a:cs typeface="Source Han Sans KR"/>
-                <a:sym typeface="Source Han Sans KR"/>
-              </a:rPr>
-              <a:t>엔진 수업 프로젝트</a:t>
-            </a:r>
-          </a:p>
-          <a:p>
-            <a:pPr lvl="0" algn="ctr">
-              <a:lnSpc>
-                <a:spcPts val="4479"/>
-              </a:lnSpc>
-              <a:spcBef>
-                <a:spcPct val="0"/>
-              </a:spcBef>
-              <a:defRPr/>
-            </a:pPr>
-            <a:r>
-              <a:rPr lang="en-US" sz="3199">
-                <a:solidFill>
-                  <a:srgbClr val="FF3131"/>
-                </a:solidFill>
-                <a:latin typeface="한컴 윤고딕 740"/>
-                <a:ea typeface="한컴 윤고딕 740"/>
-                <a:cs typeface="Source Han Sans KR"/>
-                <a:sym typeface="Source Han Sans KR"/>
-              </a:rPr>
-              <a:t>언리얼서버로 매칭, 채팅, 커스텀 동기화 구현 상태.</a:t>
-            </a:r>
-          </a:p>
-          <a:p>
-            <a:pPr lvl="0" algn="ctr">
-              <a:lnSpc>
-                <a:spcPts val="4479"/>
-              </a:lnSpc>
-              <a:spcBef>
-                <a:spcPct val="0"/>
-              </a:spcBef>
-              <a:defRPr/>
-            </a:pPr>
-            <a:endParaRPr lang="en-US" sz="3199">
-              <a:solidFill>
-                <a:srgbClr val="FF3131"/>
-              </a:solidFill>
-              <a:latin typeface="한컴 윤고딕 740"/>
-              <a:ea typeface="한컴 윤고딕 740"/>
-              <a:cs typeface="Source Han Sans KR"/>
-              <a:sym typeface="Source Han Sans KR"/>
-            </a:endParaRPr>
-          </a:p>
-          <a:p>
-            <a:pPr lvl="0" algn="ctr">
-              <a:lnSpc>
-                <a:spcPts val="4479"/>
-              </a:lnSpc>
-              <a:spcBef>
-                <a:spcPct val="0"/>
-              </a:spcBef>
-              <a:defRPr/>
-            </a:pPr>
-            <a:r>
-              <a:rPr lang="en-US" sz="3199">
-                <a:solidFill>
-                  <a:srgbClr val="FF3131"/>
-                </a:solidFill>
-                <a:latin typeface="한컴 윤고딕 740"/>
-                <a:ea typeface="한컴 윤고딕 740"/>
-                <a:cs typeface="Source Han Sans KR"/>
-                <a:sym typeface="Source Han Sans KR"/>
-              </a:rPr>
-              <a:t>→ epoll서버 학습 겸 서버 재작업하려고 함</a:t>
-            </a:r>
-          </a:p>
-          <a:p>
-            <a:pPr lvl="0" algn="ctr">
-              <a:lnSpc>
-                <a:spcPts val="4479"/>
-              </a:lnSpc>
-              <a:spcBef>
-                <a:spcPct val="0"/>
-              </a:spcBef>
-              <a:defRPr/>
-            </a:pPr>
-            <a:r>
-              <a:rPr lang="en-US" sz="3199">
-                <a:solidFill>
-                  <a:srgbClr val="FF3131"/>
-                </a:solidFill>
-                <a:latin typeface="한컴 윤고딕 740"/>
-                <a:ea typeface="한컴 윤고딕 740"/>
-                <a:cs typeface="Source Han Sans KR"/>
-                <a:sym typeface="Source Han Sans KR"/>
-              </a:rPr>
-              <a:t>포트폴리오에 넣을지 고민중</a:t>
-            </a:r>
-          </a:p>
-        </p:txBody>
-      </p:sp>
-      <p:pic>
-        <p:nvPicPr>
-          <p:cNvPr id="19" name="WOgtC9ySq3c">
-            <a:hlinkClick r:id="" action="ppaction://media"/>
-          </p:cNvPr>
-          <p:cNvPicPr>
-            <a:picLocks noRot="1" noChangeAspect="1"/>
-          </p:cNvPicPr>
-          <p:nvPr>
-            <a:videoFile r:link="rId1"/>
-          </p:nvPr>
-        </p:nvPicPr>
-        <p:blipFill rotWithShape="1">
-          <a:blip r:embed="rId3"/>
-          <a:stretch>
-            <a:fillRect/>
-          </a:stretch>
-        </p:blipFill>
-        <p:spPr>
-          <a:xfrm>
-            <a:off x="9601200" y="1333500"/>
-            <a:ext cx="4572000" cy="3429000"/>
-          </a:xfrm>
-          <a:prstGeom prst="rect">
-            <a:avLst/>
-          </a:prstGeom>
-        </p:spPr>
-      </p:pic>
-      <p:sp>
-        <p:nvSpPr>
-          <p:cNvPr id="20" name="가로 글상자 19"/>
-          <p:cNvSpPr txBox="1"/>
-          <p:nvPr/>
-        </p:nvSpPr>
-        <p:spPr>
-          <a:xfrm>
-            <a:off x="11925300" y="4779645"/>
-            <a:ext cx="5829300" cy="363855"/>
-          </a:xfrm>
-          <a:prstGeom prst="rect">
-            <a:avLst/>
-          </a:prstGeom>
-        </p:spPr>
-        <p:txBody>
-          <a:bodyPr wrap="square">
-            <a:spAutoFit/>
-          </a:bodyPr>
-          <a:lstStyle/>
-          <a:p>
-            <a:pPr lvl="0">
-              <a:defRPr/>
-            </a:pPr>
-            <a:r>
-              <a:rPr lang="en-US" altLang="en-US">
-                <a:hlinkClick r:id="rId4"/>
-              </a:rPr>
-              <a:t>https://youtu.be/WOgtC9ySq3c</a:t>
-            </a:r>
-            <a:endParaRPr lang="en-US" altLang="en-US"/>
-          </a:p>
-        </p:txBody>
-      </p:sp>
-    </p:spTree>
-  </p:cSld>
-  <p:clrMapOvr>
-    <a:masterClrMapping/>
-  </p:clrMapOvr>
-  <p:timing>
-    <p:tnLst>
-      <p:par>
-        <p:cTn id="1" dur="indefinite" restart="never" nodeType="tmRoot">
-          <p:childTnLst>
-            <p:seq concurrent="1" nextAc="seek">
-              <p:cTn id="2" restart="whenNotActive" fill="hold" evtFilter="cancelBubble" nodeType="interactiveSeq">
-                <p:stCondLst>
-                  <p:cond evt="onClick" delay="0">
-                    <p:tgtEl>
-                      <p:spTgt spid="19"/>
-                    </p:tgtEl>
-                  </p:cond>
-                </p:stCondLst>
-                <p:endSync evt="end" delay="0">
-                  <p:rtn val="all"/>
-                </p:endSync>
-                <p:childTnLst>
-                  <p:par>
-                    <p:cTn id="3" fill="hold">
-                      <p:stCondLst>
-                        <p:cond delay="0"/>
-                      </p:stCondLst>
-                      <p:childTnLst>
-                        <p:par>
-                          <p:cTn id="4" fill="hold">
-                            <p:stCondLst>
-                              <p:cond delay="0"/>
-                            </p:stCondLst>
-                            <p:childTnLst>
-                              <p:par>
-                                <p:cTn id="5" presetID="2" presetClass="mediacall" presetSubtype="0" fill="hold" nodeType="clickEffect">
-                                  <p:stCondLst>
-                                    <p:cond delay="0"/>
-                                  </p:stCondLst>
-                                  <p:childTnLst>
-                                    <p:cmd type="call" cmd="togglePause">
-                                      <p:cBhvr>
-                                        <p:cTn id="6" dur="1" fill="hold"/>
-                                        <p:tgtEl>
-                                          <p:spTgt spid="19"/>
-                                        </p:tgtEl>
-                                      </p:cBhvr>
-                                    </p:cmd>
-                                  </p:childTnLst>
-                                </p:cTn>
-                              </p:par>
-                            </p:childTnLst>
-                          </p:cTn>
-                        </p:par>
-                      </p:childTnLst>
-                    </p:cTn>
-                  </p:par>
-                </p:childTnLst>
-              </p:cTn>
-              <p:nextCondLst>
-                <p:cond evt="onClick" delay="0">
-                  <p:tgtEl>
-                    <p:spTgt spid="19"/>
-                  </p:tgtEl>
-                </p:cond>
-              </p:nextCondLst>
-            </p:seq>
-            <p:video>
-              <p:cMediaNode vol="80000">
-                <p:cTn id="7" fill="hold" display="0">
-                  <p:stCondLst>
-                    <p:cond delay="indefinite"/>
-                  </p:stCondLst>
-                </p:cTn>
-                <p:tgtEl>
-                  <p:spTgt spid="19"/>
-                </p:tgtEl>
-              </p:cMediaNode>
-            </p:video>
-          </p:childTnLst>
-        </p:cTn>
-      </p:par>
-    </p:tnLst>
-  </p:timing>
-</p:sld>
-</file>
-
-<file path=ppt/slides/slide22.xml><?xml version="1.0" encoding="utf-8"?>
-<p:sld xmlns:a="http://schemas.openxmlformats.org/drawingml/2006/main" xmlns:r="http://schemas.openxmlformats.org/officeDocument/2006/relationships" xmlns:p="http://schemas.openxmlformats.org/presentationml/2006/main">
-  <p:cSld>
-    <p:bg>
-      <p:bgPr>
-        <a:solidFill>
-          <a:srgbClr val="FCFDF8"/>
-        </a:solidFill>
-        <a:effectLst/>
-      </p:bgPr>
-    </p:bg>
-    <p:spTree>
-      <p:nvGrpSpPr>
-        <p:cNvPr id="1" name=""/>
-        <p:cNvGrpSpPr/>
-        <p:nvPr/>
-      </p:nvGrpSpPr>
-      <p:grpSpPr>
-        <a:xfrm>
-          <a:off x="0" y="0"/>
-          <a:ext cx="0" cy="0"/>
-          <a:chOff x="0" y="0"/>
-          <a:chExt cx="0" cy="0"/>
-        </a:xfrm>
-      </p:grpSpPr>
-      <p:sp>
-        <p:nvSpPr>
-          <p:cNvPr id="2" name="TextBox 2"/>
-          <p:cNvSpPr txBox="1"/>
-          <p:nvPr/>
-        </p:nvSpPr>
-        <p:spPr>
-          <a:xfrm>
-            <a:off x="1238801" y="1074737"/>
-            <a:ext cx="4872762" cy="877888"/>
-          </a:xfrm>
-          <a:prstGeom prst="rect">
-            <a:avLst/>
-          </a:prstGeom>
-        </p:spPr>
-        <p:txBody>
-          <a:bodyPr wrap="square" lIns="0" tIns="0" rIns="0" bIns="0" anchor="t">
-            <a:spAutoFit/>
-          </a:bodyPr>
-          <a:lstStyle/>
-          <a:p>
-            <a:pPr marL="0" lvl="0" indent="0" algn="l">
-              <a:lnSpc>
-                <a:spcPts val="7000"/>
-              </a:lnSpc>
-              <a:spcBef>
-                <a:spcPct val="0"/>
-              </a:spcBef>
-              <a:defRPr/>
-            </a:pPr>
-            <a:r>
-              <a:rPr lang="en-US" sz="5000" b="1">
-                <a:solidFill>
-                  <a:srgbClr val="475570"/>
-                </a:solidFill>
-                <a:latin typeface="한컴 윤고딕 760"/>
-                <a:ea typeface="한컴 윤고딕 760"/>
-                <a:cs typeface="Canva Sans Bold"/>
-                <a:sym typeface="Canva Sans Bold"/>
-              </a:rPr>
-              <a:t>기타프로젝트</a:t>
-            </a:r>
-          </a:p>
-        </p:txBody>
-      </p:sp>
-      <p:sp>
-        <p:nvSpPr>
-          <p:cNvPr id="3" name="TextBox 3"/>
-          <p:cNvSpPr txBox="1"/>
-          <p:nvPr/>
-        </p:nvSpPr>
-        <p:spPr>
-          <a:xfrm>
-            <a:off x="1267450" y="830263"/>
-            <a:ext cx="1584423" cy="350837"/>
-          </a:xfrm>
-          <a:prstGeom prst="rect">
-            <a:avLst/>
-          </a:prstGeom>
-        </p:spPr>
-        <p:txBody>
-          <a:bodyPr wrap="square" lIns="0" tIns="0" rIns="0" bIns="0" anchor="t">
-            <a:spAutoFit/>
-          </a:bodyPr>
-          <a:lstStyle/>
-          <a:p>
-            <a:pPr lvl="0" algn="l">
-              <a:lnSpc>
-                <a:spcPts val="2800"/>
-              </a:lnSpc>
-              <a:spcBef>
-                <a:spcPct val="0"/>
-              </a:spcBef>
-              <a:defRPr/>
-            </a:pPr>
-            <a:r>
-              <a:rPr lang="en-US" sz="2000">
-                <a:solidFill>
-                  <a:srgbClr val="475570"/>
-                </a:solidFill>
-                <a:latin typeface="한컴 윤고딕 760"/>
-                <a:ea typeface="한컴 윤고딕 760"/>
-                <a:cs typeface="Cabin"/>
-                <a:sym typeface="Cabin"/>
-              </a:rPr>
-              <a:t>PROJECTS</a:t>
-            </a:r>
-          </a:p>
-        </p:txBody>
-      </p:sp>
-      <p:sp>
-        <p:nvSpPr>
-          <p:cNvPr id="4" name="TextBox 4"/>
-          <p:cNvSpPr txBox="1"/>
-          <p:nvPr/>
-        </p:nvSpPr>
-        <p:spPr>
-          <a:xfrm>
-            <a:off x="4836702" y="1516062"/>
-            <a:ext cx="2326098" cy="446088"/>
-          </a:xfrm>
-          <a:prstGeom prst="rect">
-            <a:avLst/>
-          </a:prstGeom>
-        </p:spPr>
-        <p:txBody>
-          <a:bodyPr wrap="square" lIns="0" tIns="0" rIns="0" bIns="0" anchor="t">
-            <a:spAutoFit/>
-          </a:bodyPr>
-          <a:lstStyle/>
-          <a:p>
-            <a:pPr lvl="0" algn="ctr">
-              <a:lnSpc>
-                <a:spcPts val="3499"/>
-              </a:lnSpc>
-              <a:spcBef>
-                <a:spcPct val="0"/>
-              </a:spcBef>
-              <a:defRPr/>
-            </a:pPr>
-            <a:r>
-              <a:rPr lang="en-US" sz="2499">
-                <a:solidFill>
-                  <a:srgbClr val="475570"/>
-                </a:solidFill>
-                <a:latin typeface="한컴 윤고딕 760"/>
-                <a:ea typeface="한컴 윤고딕 760"/>
-                <a:cs typeface="Source Han Sans KR Bold"/>
-                <a:sym typeface="Source Han Sans KR Bold"/>
-              </a:rPr>
-              <a:t>/ 다크나이츠</a:t>
-            </a:r>
-          </a:p>
-        </p:txBody>
-      </p:sp>
-      <p:sp>
-        <p:nvSpPr>
-          <p:cNvPr id="5" name="Freeform 5"/>
-          <p:cNvSpPr/>
-          <p:nvPr/>
-        </p:nvSpPr>
-        <p:spPr>
-          <a:xfrm>
-            <a:off x="1133750" y="2962560"/>
-            <a:ext cx="5091270" cy="3401591"/>
-          </a:xfrm>
-          <a:custGeom>
-            <a:avLst/>
-            <a:gdLst/>
-            <a:ahLst/>
-            <a:cxnLst/>
-            <a:rect l="l" t="t" r="r" b="b"/>
-            <a:pathLst>
-              <a:path w="5091270" h="3401591">
-                <a:moveTo>
-                  <a:pt x="0" y="0"/>
-                </a:moveTo>
-                <a:lnTo>
-                  <a:pt x="5091271" y="0"/>
-                </a:lnTo>
-                <a:lnTo>
-                  <a:pt x="5091271" y="3401591"/>
-                </a:lnTo>
-                <a:lnTo>
-                  <a:pt x="0" y="3401591"/>
-                </a:lnTo>
-                <a:lnTo>
-                  <a:pt x="0" y="0"/>
-                </a:lnTo>
-                <a:close/>
-              </a:path>
-            </a:pathLst>
-          </a:custGeom>
-          <a:blipFill>
-            <a:blip r:embed="rId2"/>
-            <a:stretch>
-              <a:fillRect/>
-            </a:stretch>
-          </a:blipFill>
-        </p:spPr>
-        <p:txBody>
-          <a:bodyPr/>
-          <a:lstStyle/>
-          <a:p>
-            <a:endParaRPr lang="ko-KR" altLang="en-US"/>
-          </a:p>
-        </p:txBody>
-      </p:sp>
-      <p:sp>
-        <p:nvSpPr>
-          <p:cNvPr id="6" name="Freeform 6"/>
-          <p:cNvSpPr/>
-          <p:nvPr/>
-        </p:nvSpPr>
-        <p:spPr>
-          <a:xfrm>
-            <a:off x="6559004" y="2962560"/>
-            <a:ext cx="4959892" cy="3345959"/>
-          </a:xfrm>
-          <a:custGeom>
-            <a:avLst/>
-            <a:gdLst/>
-            <a:ahLst/>
-            <a:cxnLst/>
-            <a:rect l="l" t="t" r="r" b="b"/>
-            <a:pathLst>
-              <a:path w="4959892" h="3345959">
-                <a:moveTo>
-                  <a:pt x="0" y="0"/>
-                </a:moveTo>
-                <a:lnTo>
-                  <a:pt x="4959892" y="0"/>
-                </a:lnTo>
-                <a:lnTo>
-                  <a:pt x="4959892" y="3345959"/>
-                </a:lnTo>
-                <a:lnTo>
-                  <a:pt x="0" y="3345959"/>
-                </a:lnTo>
-                <a:lnTo>
-                  <a:pt x="0" y="0"/>
-                </a:lnTo>
-                <a:close/>
-              </a:path>
-            </a:pathLst>
-          </a:custGeom>
-          <a:blipFill>
-            <a:blip r:embed="rId3"/>
-            <a:stretch>
-              <a:fillRect/>
-            </a:stretch>
-          </a:blipFill>
-        </p:spPr>
-        <p:txBody>
-          <a:bodyPr/>
-          <a:lstStyle/>
-          <a:p>
-            <a:endParaRPr lang="ko-KR" altLang="en-US"/>
-          </a:p>
-        </p:txBody>
-      </p:sp>
-      <p:sp>
-        <p:nvSpPr>
-          <p:cNvPr id="7" name="Freeform 7"/>
-          <p:cNvSpPr/>
-          <p:nvPr/>
-        </p:nvSpPr>
-        <p:spPr>
-          <a:xfrm>
-            <a:off x="11767550" y="2962560"/>
-            <a:ext cx="5386700" cy="3373775"/>
-          </a:xfrm>
-          <a:custGeom>
-            <a:avLst/>
-            <a:gdLst/>
-            <a:ahLst/>
-            <a:cxnLst/>
-            <a:rect l="l" t="t" r="r" b="b"/>
-            <a:pathLst>
-              <a:path w="5386700" h="3373775">
-                <a:moveTo>
-                  <a:pt x="0" y="0"/>
-                </a:moveTo>
-                <a:lnTo>
-                  <a:pt x="5386700" y="0"/>
-                </a:lnTo>
-                <a:lnTo>
-                  <a:pt x="5386700" y="3373775"/>
-                </a:lnTo>
-                <a:lnTo>
-                  <a:pt x="0" y="3373775"/>
-                </a:lnTo>
-                <a:lnTo>
-                  <a:pt x="0" y="0"/>
-                </a:lnTo>
-                <a:close/>
-              </a:path>
-            </a:pathLst>
-          </a:custGeom>
-          <a:blipFill>
-            <a:blip r:embed="rId4"/>
-            <a:stretch>
-              <a:fillRect l="-12146"/>
-            </a:stretch>
-          </a:blipFill>
-        </p:spPr>
-        <p:txBody>
-          <a:bodyPr/>
-          <a:lstStyle/>
-          <a:p>
-            <a:endParaRPr lang="ko-KR" altLang="en-US"/>
-          </a:p>
-        </p:txBody>
-      </p:sp>
-      <p:sp>
-        <p:nvSpPr>
-          <p:cNvPr id="8" name="TextBox 8"/>
-          <p:cNvSpPr txBox="1"/>
-          <p:nvPr/>
-        </p:nvSpPr>
-        <p:spPr>
-          <a:xfrm>
-            <a:off x="1267450" y="6755152"/>
-            <a:ext cx="2039740" cy="493373"/>
-          </a:xfrm>
-          <a:prstGeom prst="rect">
-            <a:avLst/>
-          </a:prstGeom>
-        </p:spPr>
-        <p:txBody>
-          <a:bodyPr lIns="0" tIns="0" rIns="0" bIns="0" anchor="t">
-            <a:spAutoFit/>
-          </a:bodyPr>
-          <a:lstStyle/>
-          <a:p>
-            <a:pPr lvl="0" algn="l">
-              <a:lnSpc>
-                <a:spcPts val="3918"/>
-              </a:lnSpc>
-              <a:spcBef>
-                <a:spcPct val="0"/>
-              </a:spcBef>
-              <a:defRPr/>
-            </a:pPr>
-            <a:r>
-              <a:rPr lang="en-US" sz="2799" b="1">
-                <a:solidFill>
-                  <a:srgbClr val="475570"/>
-                </a:solidFill>
-                <a:latin typeface="한컴 윤고딕 740"/>
-                <a:ea typeface="한컴 윤고딕 740"/>
-                <a:cs typeface="Source Han Sans KR Bold"/>
-                <a:sym typeface="Source Han Sans KR Bold"/>
-              </a:rPr>
-              <a:t>개발기간</a:t>
-            </a:r>
-          </a:p>
-        </p:txBody>
-      </p:sp>
-      <p:sp>
-        <p:nvSpPr>
-          <p:cNvPr id="9" name="TextBox 9"/>
-          <p:cNvSpPr txBox="1"/>
-          <p:nvPr/>
-        </p:nvSpPr>
-        <p:spPr>
-          <a:xfrm>
-            <a:off x="1267450" y="7413133"/>
-            <a:ext cx="2039740" cy="492617"/>
-          </a:xfrm>
-          <a:prstGeom prst="rect">
-            <a:avLst/>
-          </a:prstGeom>
-        </p:spPr>
-        <p:txBody>
-          <a:bodyPr lIns="0" tIns="0" rIns="0" bIns="0" anchor="t">
-            <a:spAutoFit/>
-          </a:bodyPr>
-          <a:lstStyle/>
-          <a:p>
-            <a:pPr lvl="0" algn="l">
-              <a:lnSpc>
-                <a:spcPts val="3918"/>
-              </a:lnSpc>
-              <a:spcBef>
-                <a:spcPct val="0"/>
-              </a:spcBef>
-              <a:defRPr/>
-            </a:pPr>
-            <a:r>
-              <a:rPr lang="en-US" sz="2799" b="1">
-                <a:solidFill>
-                  <a:srgbClr val="475570"/>
-                </a:solidFill>
-                <a:latin typeface="한컴 윤고딕 740"/>
-                <a:ea typeface="한컴 윤고딕 740"/>
-                <a:cs typeface="Source Han Sans KR Bold"/>
-                <a:sym typeface="Source Han Sans KR Bold"/>
-              </a:rPr>
-              <a:t>개발도구</a:t>
-            </a:r>
-          </a:p>
-        </p:txBody>
-      </p:sp>
-      <p:sp>
-        <p:nvSpPr>
-          <p:cNvPr id="10" name="TextBox 10"/>
-          <p:cNvSpPr txBox="1"/>
-          <p:nvPr/>
-        </p:nvSpPr>
-        <p:spPr>
-          <a:xfrm>
-            <a:off x="1267450" y="8086459"/>
-            <a:ext cx="2039740" cy="486041"/>
-          </a:xfrm>
-          <a:prstGeom prst="rect">
-            <a:avLst/>
-          </a:prstGeom>
-        </p:spPr>
-        <p:txBody>
-          <a:bodyPr lIns="0" tIns="0" rIns="0" bIns="0" anchor="t">
-            <a:spAutoFit/>
-          </a:bodyPr>
-          <a:lstStyle/>
-          <a:p>
-            <a:pPr lvl="0" algn="l">
-              <a:lnSpc>
-                <a:spcPts val="3918"/>
-              </a:lnSpc>
-              <a:spcBef>
-                <a:spcPct val="0"/>
-              </a:spcBef>
-              <a:defRPr/>
-            </a:pPr>
-            <a:r>
-              <a:rPr lang="en-US" sz="2799" b="1">
-                <a:solidFill>
-                  <a:srgbClr val="475570"/>
-                </a:solidFill>
-                <a:latin typeface="한컴 윤고딕 740"/>
-                <a:ea typeface="한컴 윤고딕 740"/>
-                <a:cs typeface="Source Han Sans KR Bold"/>
-                <a:sym typeface="Source Han Sans KR Bold"/>
-              </a:rPr>
-              <a:t>개발인원</a:t>
-            </a:r>
-          </a:p>
-        </p:txBody>
-      </p:sp>
-      <p:sp>
-        <p:nvSpPr>
-          <p:cNvPr id="11" name="TextBox 11"/>
-          <p:cNvSpPr txBox="1"/>
-          <p:nvPr/>
-        </p:nvSpPr>
-        <p:spPr>
-          <a:xfrm>
-            <a:off x="1296099" y="8776970"/>
-            <a:ext cx="2039740" cy="490855"/>
-          </a:xfrm>
-          <a:prstGeom prst="rect">
-            <a:avLst/>
-          </a:prstGeom>
-        </p:spPr>
-        <p:txBody>
-          <a:bodyPr lIns="0" tIns="0" rIns="0" bIns="0" anchor="t">
-            <a:spAutoFit/>
-          </a:bodyPr>
-          <a:lstStyle/>
-          <a:p>
-            <a:pPr lvl="0" algn="l">
-              <a:lnSpc>
-                <a:spcPts val="3918"/>
-              </a:lnSpc>
-              <a:spcBef>
-                <a:spcPct val="0"/>
-              </a:spcBef>
-              <a:defRPr/>
-            </a:pPr>
-            <a:r>
-              <a:rPr lang="en-US" sz="2799" b="1">
-                <a:solidFill>
-                  <a:srgbClr val="475570"/>
-                </a:solidFill>
-                <a:latin typeface="한컴 윤고딕 740"/>
-                <a:ea typeface="한컴 윤고딕 740"/>
-                <a:cs typeface="Source Han Sans KR Bold"/>
-                <a:sym typeface="Source Han Sans KR Bold"/>
-              </a:rPr>
-              <a:t>담당업무</a:t>
-            </a:r>
-          </a:p>
-        </p:txBody>
-      </p:sp>
-      <p:sp>
-        <p:nvSpPr>
-          <p:cNvPr id="12" name="TextBox 12"/>
-          <p:cNvSpPr txBox="1"/>
-          <p:nvPr/>
-        </p:nvSpPr>
-        <p:spPr>
-          <a:xfrm>
-            <a:off x="4160053" y="6755152"/>
-            <a:ext cx="3348234" cy="493373"/>
-          </a:xfrm>
-          <a:prstGeom prst="rect">
-            <a:avLst/>
-          </a:prstGeom>
-        </p:spPr>
-        <p:txBody>
-          <a:bodyPr lIns="0" tIns="0" rIns="0" bIns="0" anchor="t">
-            <a:spAutoFit/>
-          </a:bodyPr>
-          <a:lstStyle/>
-          <a:p>
-            <a:pPr lvl="0" algn="l">
-              <a:lnSpc>
-                <a:spcPts val="3918"/>
-              </a:lnSpc>
-              <a:spcBef>
-                <a:spcPct val="0"/>
-              </a:spcBef>
-              <a:defRPr/>
-            </a:pPr>
-            <a:r>
-              <a:rPr lang="en-US" sz="2799">
-                <a:solidFill>
-                  <a:srgbClr val="475570"/>
-                </a:solidFill>
-                <a:latin typeface="한컴 윤고딕 740"/>
-                <a:ea typeface="한컴 윤고딕 740"/>
-                <a:cs typeface="Source Han Sans KR"/>
-                <a:sym typeface="Source Han Sans KR"/>
-              </a:rPr>
-              <a:t>24.11 (5주)</a:t>
-            </a:r>
-          </a:p>
-        </p:txBody>
-      </p:sp>
-      <p:sp>
-        <p:nvSpPr>
-          <p:cNvPr id="13" name="TextBox 13"/>
-          <p:cNvSpPr txBox="1"/>
-          <p:nvPr/>
-        </p:nvSpPr>
-        <p:spPr>
-          <a:xfrm>
-            <a:off x="4160052" y="7413133"/>
-            <a:ext cx="8650548" cy="492617"/>
-          </a:xfrm>
-          <a:prstGeom prst="rect">
-            <a:avLst/>
-          </a:prstGeom>
-        </p:spPr>
-        <p:txBody>
-          <a:bodyPr lIns="0" tIns="0" rIns="0" bIns="0" anchor="t">
-            <a:spAutoFit/>
-          </a:bodyPr>
-          <a:lstStyle/>
-          <a:p>
-            <a:pPr lvl="0" algn="l">
-              <a:lnSpc>
-                <a:spcPts val="3918"/>
-              </a:lnSpc>
-              <a:spcBef>
-                <a:spcPct val="0"/>
-              </a:spcBef>
-              <a:defRPr/>
-            </a:pPr>
-            <a:r>
-              <a:rPr lang="en-US" sz="2799">
-                <a:solidFill>
-                  <a:srgbClr val="475570"/>
-                </a:solidFill>
-                <a:latin typeface="한컴 윤고딕 740"/>
-                <a:ea typeface="한컴 윤고딕 740"/>
-                <a:cs typeface="Source Han Sans KR"/>
-                <a:sym typeface="Source Han Sans KR"/>
-              </a:rPr>
-              <a:t>C++, WinAPI</a:t>
-            </a:r>
-          </a:p>
-        </p:txBody>
-      </p:sp>
-      <p:sp>
-        <p:nvSpPr>
-          <p:cNvPr id="14" name="AutoShape 14"/>
-          <p:cNvSpPr/>
-          <p:nvPr/>
-        </p:nvSpPr>
-        <p:spPr>
-          <a:xfrm flipV="1">
-            <a:off x="3480135" y="6812302"/>
-            <a:ext cx="0" cy="393105"/>
-          </a:xfrm>
-          <a:prstGeom prst="line">
-            <a:avLst/>
-          </a:prstGeom>
-          <a:ln w="19050" cap="flat">
-            <a:solidFill>
-              <a:srgbClr val="000000">
-                <a:alpha val="19610"/>
-              </a:srgbClr>
-            </a:solidFill>
-            <a:prstDash val="solid"/>
-            <a:headEnd w="sm" len="sm"/>
-            <a:tailEnd w="sm" len="sm"/>
-          </a:ln>
-        </p:spPr>
-        <p:txBody>
-          <a:bodyPr wrap="square" anchor="ctr"/>
-          <a:lstStyle/>
-          <a:p>
-            <a:pPr lvl="0" algn="ctr">
-              <a:defRPr/>
-            </a:pPr>
-            <a:endParaRPr lang="ko-KR" altLang="en-US">
-              <a:latin typeface="한컴 윤고딕 740"/>
-              <a:ea typeface="한컴 윤고딕 740"/>
-            </a:endParaRPr>
-          </a:p>
-        </p:txBody>
-      </p:sp>
-      <p:sp>
-        <p:nvSpPr>
-          <p:cNvPr id="15" name="TextBox 15"/>
-          <p:cNvSpPr txBox="1"/>
-          <p:nvPr/>
-        </p:nvSpPr>
-        <p:spPr>
-          <a:xfrm>
-            <a:off x="4160053" y="8086459"/>
-            <a:ext cx="8327978" cy="486041"/>
-          </a:xfrm>
-          <a:prstGeom prst="rect">
-            <a:avLst/>
-          </a:prstGeom>
-        </p:spPr>
-        <p:txBody>
-          <a:bodyPr lIns="0" tIns="0" rIns="0" bIns="0" anchor="t">
-            <a:spAutoFit/>
-          </a:bodyPr>
-          <a:lstStyle/>
-          <a:p>
-            <a:pPr lvl="0" algn="l">
-              <a:lnSpc>
-                <a:spcPts val="3918"/>
-              </a:lnSpc>
-              <a:spcBef>
-                <a:spcPct val="0"/>
-              </a:spcBef>
-              <a:defRPr/>
-            </a:pPr>
-            <a:r>
-              <a:rPr lang="en-US" sz="2799">
-                <a:solidFill>
-                  <a:srgbClr val="475570"/>
-                </a:solidFill>
-                <a:latin typeface="한컴 윤고딕 740"/>
-                <a:ea typeface="한컴 윤고딕 740"/>
-                <a:cs typeface="Source Han Sans KR"/>
-                <a:sym typeface="Source Han Sans KR"/>
-              </a:rPr>
-              <a:t>3명 (서버1, 클라이언트 2명)</a:t>
-            </a:r>
-          </a:p>
-        </p:txBody>
-      </p:sp>
-      <p:sp>
-        <p:nvSpPr>
-          <p:cNvPr id="16" name="AutoShape 16"/>
-          <p:cNvSpPr/>
-          <p:nvPr/>
-        </p:nvSpPr>
-        <p:spPr>
-          <a:xfrm flipV="1">
-            <a:off x="3480135" y="7499477"/>
-            <a:ext cx="0" cy="393105"/>
-          </a:xfrm>
-          <a:prstGeom prst="line">
-            <a:avLst/>
-          </a:prstGeom>
-          <a:ln w="19050" cap="flat">
-            <a:solidFill>
-              <a:srgbClr val="000000">
-                <a:alpha val="19610"/>
-              </a:srgbClr>
-            </a:solidFill>
-            <a:prstDash val="solid"/>
-            <a:headEnd w="sm" len="sm"/>
-            <a:tailEnd w="sm" len="sm"/>
-          </a:ln>
-        </p:spPr>
-        <p:txBody>
-          <a:bodyPr wrap="square" anchor="ctr"/>
-          <a:lstStyle/>
-          <a:p>
-            <a:pPr lvl="0" algn="ctr">
-              <a:defRPr/>
-            </a:pPr>
-            <a:endParaRPr lang="ko-KR" altLang="en-US">
-              <a:latin typeface="한컴 윤고딕 740"/>
-              <a:ea typeface="한컴 윤고딕 740"/>
-            </a:endParaRPr>
-          </a:p>
-        </p:txBody>
-      </p:sp>
-      <p:sp>
-        <p:nvSpPr>
-          <p:cNvPr id="17" name="AutoShape 17"/>
-          <p:cNvSpPr/>
-          <p:nvPr/>
-        </p:nvSpPr>
-        <p:spPr>
-          <a:xfrm flipV="1">
-            <a:off x="3489660" y="8143609"/>
-            <a:ext cx="0" cy="393105"/>
-          </a:xfrm>
-          <a:prstGeom prst="line">
-            <a:avLst/>
-          </a:prstGeom>
-          <a:ln w="19050" cap="flat">
-            <a:solidFill>
-              <a:srgbClr val="000000">
-                <a:alpha val="19610"/>
-              </a:srgbClr>
-            </a:solidFill>
-            <a:prstDash val="solid"/>
-            <a:headEnd w="sm" len="sm"/>
-            <a:tailEnd w="sm" len="sm"/>
-          </a:ln>
-        </p:spPr>
-        <p:txBody>
-          <a:bodyPr wrap="square" anchor="ctr"/>
-          <a:lstStyle/>
-          <a:p>
-            <a:pPr lvl="0" algn="ctr">
-              <a:defRPr/>
-            </a:pPr>
-            <a:endParaRPr lang="ko-KR" altLang="en-US">
-              <a:latin typeface="한컴 윤고딕 740"/>
-              <a:ea typeface="한컴 윤고딕 740"/>
-            </a:endParaRPr>
-          </a:p>
-        </p:txBody>
-      </p:sp>
-      <p:sp>
-        <p:nvSpPr>
-          <p:cNvPr id="18" name="AutoShape 18"/>
-          <p:cNvSpPr/>
-          <p:nvPr/>
-        </p:nvSpPr>
-        <p:spPr>
-          <a:xfrm flipV="1">
-            <a:off x="3489830" y="8816935"/>
-            <a:ext cx="0" cy="393105"/>
-          </a:xfrm>
-          <a:prstGeom prst="line">
-            <a:avLst/>
-          </a:prstGeom>
-          <a:ln w="19050" cap="flat">
-            <a:solidFill>
-              <a:srgbClr val="000000">
-                <a:alpha val="19610"/>
-              </a:srgbClr>
-            </a:solidFill>
-            <a:prstDash val="solid"/>
-            <a:headEnd w="sm" len="sm"/>
-            <a:tailEnd w="sm" len="sm"/>
-          </a:ln>
-        </p:spPr>
-        <p:txBody>
-          <a:bodyPr wrap="square" anchor="ctr"/>
-          <a:lstStyle/>
-          <a:p>
-            <a:pPr lvl="0" algn="ctr">
-              <a:defRPr/>
-            </a:pPr>
-            <a:endParaRPr lang="ko-KR" altLang="en-US">
-              <a:latin typeface="한컴 윤고딕 740"/>
-              <a:ea typeface="한컴 윤고딕 740"/>
-            </a:endParaRPr>
-          </a:p>
-        </p:txBody>
-      </p:sp>
-      <p:sp>
-        <p:nvSpPr>
-          <p:cNvPr id="19" name="TextBox 19"/>
-          <p:cNvSpPr txBox="1"/>
-          <p:nvPr/>
-        </p:nvSpPr>
-        <p:spPr>
-          <a:xfrm>
-            <a:off x="4169747" y="8776961"/>
-            <a:ext cx="8461328" cy="490864"/>
-          </a:xfrm>
-          <a:prstGeom prst="rect">
-            <a:avLst/>
-          </a:prstGeom>
-        </p:spPr>
-        <p:txBody>
-          <a:bodyPr lIns="0" tIns="0" rIns="0" bIns="0" anchor="t">
-            <a:spAutoFit/>
-          </a:bodyPr>
-          <a:lstStyle/>
-          <a:p>
-            <a:pPr lvl="0" algn="l">
-              <a:lnSpc>
-                <a:spcPts val="3918"/>
-              </a:lnSpc>
-              <a:spcBef>
-                <a:spcPct val="0"/>
-              </a:spcBef>
-              <a:defRPr/>
-            </a:pPr>
-            <a:r>
-              <a:rPr lang="en-US" sz="2799">
-                <a:solidFill>
-                  <a:srgbClr val="475570"/>
-                </a:solidFill>
-                <a:latin typeface="한컴 윤고딕 740"/>
-                <a:ea typeface="한컴 윤고딕 740"/>
-                <a:cs typeface="Source Han Sans KR"/>
-                <a:sym typeface="Source Han Sans KR"/>
-              </a:rPr>
-              <a:t>네트워크 프레임워크 제작</a:t>
-            </a:r>
-          </a:p>
-        </p:txBody>
-      </p:sp>
-      <p:sp>
-        <p:nvSpPr>
-          <p:cNvPr id="20" name="TextBox 20"/>
-          <p:cNvSpPr txBox="1"/>
-          <p:nvPr/>
-        </p:nvSpPr>
-        <p:spPr>
-          <a:xfrm>
-            <a:off x="1238801" y="2229134"/>
-            <a:ext cx="7676599" cy="501804"/>
-          </a:xfrm>
-          <a:prstGeom prst="rect">
-            <a:avLst/>
-          </a:prstGeom>
-        </p:spPr>
-        <p:txBody>
-          <a:bodyPr wrap="square" lIns="0" tIns="0" rIns="0" bIns="0" anchor="t">
-            <a:spAutoFit/>
-          </a:bodyPr>
-          <a:lstStyle/>
-          <a:p>
-            <a:pPr lvl="0" algn="l">
-              <a:lnSpc>
-                <a:spcPts val="4199"/>
-              </a:lnSpc>
-              <a:spcBef>
-                <a:spcPct val="0"/>
-              </a:spcBef>
-              <a:defRPr/>
-            </a:pPr>
-            <a:r>
-              <a:rPr lang="ko-KR" altLang="en-US" sz="2999" dirty="0">
-                <a:solidFill>
-                  <a:srgbClr val="475570"/>
-                </a:solidFill>
-                <a:latin typeface="한컴 윤고딕 740"/>
-                <a:ea typeface="한컴 윤고딕 740"/>
-                <a:cs typeface="Source Han Sans KR"/>
-                <a:sym typeface="Source Han Sans KR"/>
-              </a:rPr>
-              <a:t>멀티플레이어 </a:t>
-            </a:r>
-            <a:r>
-              <a:rPr lang="en-US" sz="2999" dirty="0" err="1">
-                <a:solidFill>
-                  <a:srgbClr val="475570"/>
-                </a:solidFill>
-                <a:latin typeface="한컴 윤고딕 740"/>
-                <a:ea typeface="한컴 윤고딕 740"/>
-                <a:cs typeface="Source Han Sans KR"/>
-                <a:sym typeface="Source Han Sans KR"/>
-              </a:rPr>
-              <a:t>횡스크롤</a:t>
-            </a:r>
-            <a:r>
-              <a:rPr lang="en-US" sz="2999" dirty="0">
-                <a:solidFill>
-                  <a:srgbClr val="475570"/>
-                </a:solidFill>
-                <a:latin typeface="한컴 윤고딕 740"/>
-                <a:ea typeface="한컴 윤고딕 740"/>
-                <a:cs typeface="Source Han Sans KR"/>
-                <a:sym typeface="Source Han Sans KR"/>
-              </a:rPr>
-              <a:t> </a:t>
-            </a:r>
-            <a:r>
-              <a:rPr lang="en-US" sz="2999" dirty="0" err="1">
-                <a:solidFill>
-                  <a:srgbClr val="475570"/>
-                </a:solidFill>
-                <a:latin typeface="한컴 윤고딕 740"/>
-                <a:ea typeface="한컴 윤고딕 740"/>
-                <a:cs typeface="Source Han Sans KR"/>
-                <a:sym typeface="Source Han Sans KR"/>
-              </a:rPr>
-              <a:t>액션</a:t>
-            </a:r>
-            <a:r>
-              <a:rPr lang="en-US" sz="2999" dirty="0">
-                <a:solidFill>
-                  <a:srgbClr val="475570"/>
-                </a:solidFill>
-                <a:latin typeface="한컴 윤고딕 740"/>
-                <a:ea typeface="한컴 윤고딕 740"/>
-                <a:cs typeface="Source Han Sans KR"/>
-                <a:sym typeface="Source Han Sans KR"/>
-              </a:rPr>
-              <a:t> </a:t>
-            </a:r>
-            <a:r>
-              <a:rPr lang="en-US" sz="2999" dirty="0" err="1">
-                <a:solidFill>
-                  <a:srgbClr val="475570"/>
-                </a:solidFill>
-                <a:latin typeface="한컴 윤고딕 740"/>
-                <a:ea typeface="한컴 윤고딕 740"/>
-                <a:cs typeface="Source Han Sans KR"/>
-                <a:sym typeface="Source Han Sans KR"/>
-              </a:rPr>
-              <a:t>슈팅</a:t>
-            </a:r>
-            <a:r>
-              <a:rPr lang="en-US" sz="2999" dirty="0">
-                <a:solidFill>
-                  <a:srgbClr val="475570"/>
-                </a:solidFill>
-                <a:latin typeface="한컴 윤고딕 740"/>
-                <a:ea typeface="한컴 윤고딕 740"/>
-                <a:cs typeface="Source Han Sans KR"/>
-                <a:sym typeface="Source Han Sans KR"/>
-              </a:rPr>
-              <a:t> </a:t>
-            </a:r>
-            <a:r>
-              <a:rPr lang="en-US" sz="2999" dirty="0" err="1">
-                <a:solidFill>
-                  <a:srgbClr val="475570"/>
-                </a:solidFill>
-                <a:latin typeface="한컴 윤고딕 740"/>
-                <a:ea typeface="한컴 윤고딕 740"/>
-                <a:cs typeface="Source Han Sans KR"/>
-                <a:sym typeface="Source Han Sans KR"/>
-              </a:rPr>
-              <a:t>게임</a:t>
-            </a:r>
-            <a:endParaRPr lang="en-US" sz="2999" dirty="0">
-              <a:solidFill>
-                <a:srgbClr val="475570"/>
-              </a:solidFill>
-              <a:latin typeface="한컴 윤고딕 740"/>
-              <a:ea typeface="한컴 윤고딕 740"/>
-              <a:cs typeface="Source Han Sans KR"/>
-              <a:sym typeface="Source Han Sans KR"/>
-            </a:endParaRPr>
-          </a:p>
-        </p:txBody>
-      </p:sp>
-    </p:spTree>
-  </p:cSld>
-  <p:clrMapOvr>
-    <a:masterClrMapping/>
-  </p:clrMapOvr>
-</p:sld>
-</file>
-
-<file path=ppt/slides/slide23.xml><?xml version="1.0" encoding="utf-8"?>
-<p:sld xmlns:a="http://schemas.openxmlformats.org/drawingml/2006/main" xmlns:r="http://schemas.openxmlformats.org/officeDocument/2006/relationships" xmlns:p="http://schemas.openxmlformats.org/presentationml/2006/main">
-  <p:cSld>
-    <p:bg>
-      <p:bgPr>
-        <a:solidFill>
-          <a:srgbClr val="FCFDF8"/>
-        </a:solidFill>
-        <a:effectLst/>
-      </p:bgPr>
-    </p:bg>
-    <p:spTree>
-      <p:nvGrpSpPr>
-        <p:cNvPr id="1" name=""/>
-        <p:cNvGrpSpPr/>
-        <p:nvPr/>
-      </p:nvGrpSpPr>
-      <p:grpSpPr>
-        <a:xfrm>
-          <a:off x="0" y="0"/>
-          <a:ext cx="0" cy="0"/>
-          <a:chOff x="0" y="0"/>
-          <a:chExt cx="0" cy="0"/>
-        </a:xfrm>
-      </p:grpSpPr>
-      <p:sp>
-        <p:nvSpPr>
           <p:cNvPr id="2" name="AutoShape 2"/>
           <p:cNvSpPr/>
           <p:nvPr/>
@@ -11696,7 +10092,7 @@
 </p:sld>
 </file>
 
-<file path=ppt/slides/slide24.xml><?xml version="1.0" encoding="utf-8"?>
+<file path=ppt/slides/slide21.xml><?xml version="1.0" encoding="utf-8"?>
 <p:sld xmlns:a="http://schemas.openxmlformats.org/drawingml/2006/main" xmlns:r="http://schemas.openxmlformats.org/officeDocument/2006/relationships" xmlns:p="http://schemas.openxmlformats.org/presentationml/2006/main">
   <p:cSld>
     <p:bg>
@@ -11859,14 +10255,13 @@
 </file>
 
 <file path=ppt/slides/slide3.xml><?xml version="1.0" encoding="utf-8"?>
-<p:sld xmlns:a="http://schemas.openxmlformats.org/drawingml/2006/main" xmlns:r="http://schemas.openxmlformats.org/officeDocument/2006/relationships" xmlns:p="http://schemas.openxmlformats.org/presentationml/2006/main">
+<p:sld xmlns:r="http://schemas.openxmlformats.org/officeDocument/2006/relationships" xmlns:c="http://schemas.openxmlformats.org/drawingml/2006/chart" xmlns:a="http://schemas.openxmlformats.org/drawingml/2006/main" xmlns:dgm="http://schemas.openxmlformats.org/drawingml/2006/diagram" xmlns:dsp="http://schemas.microsoft.com/office/drawing/2008/diagram" xmlns:p="http://schemas.openxmlformats.org/presentationml/2006/main">
   <p:cSld>
     <p:bg>
-      <p:bgPr>
+      <p:bgPr shadeToTitle="0">
         <a:solidFill>
-          <a:srgbClr val="FCFDF8"/>
+          <a:srgbClr val="fcfdf8"/>
         </a:solidFill>
-        <a:effectLst/>
       </p:bgPr>
     </p:bg>
     <p:spTree>
@@ -11891,7 +10286,7 @@
         </p:nvSpPr>
         <p:spPr>
           <a:xfrm>
-            <a:off x="1285119" y="3594010"/>
+            <a:off x="1285762" y="3594010"/>
             <a:ext cx="2211148" cy="568415"/>
           </a:xfrm>
           <a:prstGeom prst="rect">
@@ -11904,7 +10299,7 @@
           </a:bodyPr>
           <a:lstStyle/>
           <a:p>
-            <a:pPr lvl="0" algn="l">
+            <a:pPr lvl="0">
               <a:lnSpc>
                 <a:spcPts val="4479"/>
               </a:lnSpc>
@@ -11925,142 +10320,7 @@
               </a:rPr>
               <a:t>개발기간</a:t>
             </a:r>
-          </a:p>
-        </p:txBody>
-      </p:sp>
-      <p:sp>
-        <p:nvSpPr>
-          <p:cNvPr id="3" name="TextBox 3"/>
-          <p:cNvSpPr txBox="1"/>
-          <p:nvPr/>
-        </p:nvSpPr>
-        <p:spPr>
-          <a:xfrm>
-            <a:off x="1238801" y="1065212"/>
-            <a:ext cx="4095199" cy="1058863"/>
-          </a:xfrm>
-          <a:prstGeom prst="rect">
-            <a:avLst/>
-          </a:prstGeom>
-        </p:spPr>
-        <p:txBody>
-          <a:bodyPr wrap="square" lIns="0" tIns="0" rIns="0" bIns="0" anchor="t">
-            <a:spAutoFit/>
-          </a:bodyPr>
-          <a:lstStyle/>
-          <a:p>
-            <a:pPr marL="0" lvl="0" indent="0" algn="l">
-              <a:lnSpc>
-                <a:spcPts val="8400"/>
-              </a:lnSpc>
-              <a:spcBef>
-                <a:spcPct val="0"/>
-              </a:spcBef>
-              <a:defRPr/>
-            </a:pPr>
-            <a:r>
-              <a:rPr lang="en-US" sz="6000" b="1">
-                <a:solidFill>
-                  <a:srgbClr val="475570"/>
-                </a:solidFill>
-                <a:latin typeface="한컴 윤고딕 760"/>
-                <a:ea typeface="한컴 윤고딕 760"/>
-                <a:cs typeface="Canva Sans Bold"/>
-                <a:sym typeface="Canva Sans Bold"/>
-              </a:rPr>
-              <a:t>티유월드</a:t>
-            </a:r>
-          </a:p>
-        </p:txBody>
-      </p:sp>
-      <p:sp>
-        <p:nvSpPr>
-          <p:cNvPr id="4" name="TextBox 4"/>
-          <p:cNvSpPr txBox="1"/>
-          <p:nvPr/>
-        </p:nvSpPr>
-        <p:spPr>
-          <a:xfrm>
-            <a:off x="1267450" y="830263"/>
-            <a:ext cx="2313950" cy="350837"/>
-          </a:xfrm>
-          <a:prstGeom prst="rect">
-            <a:avLst/>
-          </a:prstGeom>
-        </p:spPr>
-        <p:txBody>
-          <a:bodyPr wrap="square" lIns="0" tIns="0" rIns="0" bIns="0" anchor="t">
-            <a:spAutoFit/>
-          </a:bodyPr>
-          <a:lstStyle/>
-          <a:p>
-            <a:pPr lvl="0" algn="l">
-              <a:lnSpc>
-                <a:spcPts val="2800"/>
-              </a:lnSpc>
-              <a:spcBef>
-                <a:spcPct val="0"/>
-              </a:spcBef>
-              <a:defRPr/>
-            </a:pPr>
-            <a:r>
-              <a:rPr lang="en-US" sz="2000">
-                <a:solidFill>
-                  <a:srgbClr val="475570"/>
-                </a:solidFill>
-                <a:latin typeface="한컴 윤고딕 760"/>
-                <a:ea typeface="한컴 윤고딕 760"/>
-                <a:cs typeface="Cabin"/>
-                <a:sym typeface="Cabin"/>
-              </a:rPr>
-              <a:t>PROJECTS</a:t>
-            </a:r>
-          </a:p>
-        </p:txBody>
-      </p:sp>
-      <p:sp>
-        <p:nvSpPr>
-          <p:cNvPr id="5" name="TextBox 5"/>
-          <p:cNvSpPr txBox="1"/>
-          <p:nvPr/>
-        </p:nvSpPr>
-        <p:spPr>
-          <a:xfrm>
-            <a:off x="1267450" y="8420100"/>
-            <a:ext cx="2211148" cy="567659"/>
-          </a:xfrm>
-          <a:prstGeom prst="rect">
-            <a:avLst/>
-          </a:prstGeom>
-        </p:spPr>
-        <p:txBody>
-          <a:bodyPr wrap="square" lIns="0" tIns="0" rIns="0" bIns="0" anchor="t">
-            <a:spAutoFit/>
-          </a:bodyPr>
-          <a:lstStyle/>
-          <a:p>
-            <a:pPr lvl="0" algn="l">
-              <a:lnSpc>
-                <a:spcPts val="4479"/>
-              </a:lnSpc>
-              <a:spcBef>
-                <a:spcPct val="0"/>
-              </a:spcBef>
-              <a:defRPr/>
-            </a:pPr>
-            <a:r>
-              <a:rPr lang="en-US" sz="3199" b="1" dirty="0" err="1">
-                <a:solidFill>
-                  <a:srgbClr val="475570"/>
-                </a:solidFill>
-                <a:latin typeface="한컴 윤고딕 740"/>
-                <a:ea typeface="한컴 윤고딕 740"/>
-                <a:cs typeface="Source Han Sans KR Bold"/>
-                <a:sym typeface="Source Han Sans KR Bold"/>
-              </a:rPr>
-              <a:t>개발도구</a:t>
-            </a:r>
-            <a:endParaRPr lang="en-US" sz="3199" b="1" dirty="0">
+            <a:endParaRPr lang="en-US" sz="3199" b="1">
               <a:solidFill>
                 <a:srgbClr val="475570"/>
               </a:solidFill>
@@ -12074,14 +10334,14 @@
       </p:sp>
       <p:sp>
         <p:nvSpPr>
-          <p:cNvPr id="6" name="TextBox 6"/>
+          <p:cNvPr id="3" name="TextBox 3"/>
           <p:cNvSpPr txBox="1"/>
           <p:nvPr/>
         </p:nvSpPr>
         <p:spPr>
           <a:xfrm>
-            <a:off x="1285119" y="4945863"/>
-            <a:ext cx="2211148" cy="569112"/>
+            <a:off x="1238801" y="1065212"/>
+            <a:ext cx="4095199" cy="1058863"/>
           </a:xfrm>
           <a:prstGeom prst="rect">
             <a:avLst/>
@@ -12093,9 +10353,9 @@
           </a:bodyPr>
           <a:lstStyle/>
           <a:p>
-            <a:pPr lvl="0" algn="l">
-              <a:lnSpc>
-                <a:spcPts val="4479"/>
+            <a:pPr marL="0" lvl="0" indent="0" algn="l">
+              <a:lnSpc>
+                <a:spcPts val="8400"/>
               </a:lnSpc>
               <a:spcBef>
                 <a:spcPct val="0"/>
@@ -12103,30 +10363,30 @@
               <a:defRPr/>
             </a:pPr>
             <a:r>
-              <a:rPr lang="en-US" sz="3199" b="1">
-                <a:solidFill>
-                  <a:srgbClr val="475570"/>
-                </a:solidFill>
-                <a:latin typeface="한컴 윤고딕 740"/>
-                <a:ea typeface="한컴 윤고딕 740"/>
-                <a:cs typeface="Source Han Sans KR Bold"/>
-                <a:sym typeface="Source Han Sans KR Bold"/>
-              </a:rPr>
-              <a:t>개발인원</a:t>
-            </a:r>
-          </a:p>
-        </p:txBody>
-      </p:sp>
-      <p:sp>
-        <p:nvSpPr>
-          <p:cNvPr id="7" name="TextBox 7"/>
+              <a:rPr lang="en-US" sz="6000" b="1">
+                <a:solidFill>
+                  <a:srgbClr val="475570"/>
+                </a:solidFill>
+                <a:latin typeface="한컴 윤고딕 760"/>
+                <a:ea typeface="한컴 윤고딕 760"/>
+                <a:cs typeface="Canva Sans Bold"/>
+                <a:sym typeface="Canva Sans Bold"/>
+              </a:rPr>
+              <a:t>티유월드</a:t>
+            </a:r>
+          </a:p>
+        </p:txBody>
+      </p:sp>
+      <p:sp>
+        <p:nvSpPr>
+          <p:cNvPr id="4" name="TextBox 4"/>
           <p:cNvSpPr txBox="1"/>
           <p:nvPr/>
         </p:nvSpPr>
         <p:spPr>
           <a:xfrm>
-            <a:off x="1304074" y="5731239"/>
-            <a:ext cx="2211148" cy="564786"/>
+            <a:off x="1267450" y="830263"/>
+            <a:ext cx="2313950" cy="350837"/>
           </a:xfrm>
           <a:prstGeom prst="rect">
             <a:avLst/>
@@ -12140,7 +10400,7 @@
           <a:p>
             <a:pPr lvl="0" algn="l">
               <a:lnSpc>
-                <a:spcPts val="4479"/>
+                <a:spcPts val="2800"/>
               </a:lnSpc>
               <a:spcBef>
                 <a:spcPct val="0"/>
@@ -12148,30 +10408,30 @@
               <a:defRPr/>
             </a:pPr>
             <a:r>
-              <a:rPr lang="en-US" sz="3199" b="1">
-                <a:solidFill>
-                  <a:srgbClr val="475570"/>
-                </a:solidFill>
-                <a:latin typeface="한컴 윤고딕 740"/>
-                <a:ea typeface="한컴 윤고딕 740"/>
-                <a:cs typeface="Source Han Sans KR Bold"/>
-                <a:sym typeface="Source Han Sans KR Bold"/>
-              </a:rPr>
-              <a:t>담당업무</a:t>
-            </a:r>
-          </a:p>
-        </p:txBody>
-      </p:sp>
-      <p:sp>
-        <p:nvSpPr>
-          <p:cNvPr id="8" name="TextBox 8"/>
+              <a:rPr lang="en-US" sz="2000">
+                <a:solidFill>
+                  <a:srgbClr val="475570"/>
+                </a:solidFill>
+                <a:latin typeface="한컴 윤고딕 760"/>
+                <a:ea typeface="한컴 윤고딕 760"/>
+                <a:cs typeface="Cabin"/>
+                <a:sym typeface="Cabin"/>
+              </a:rPr>
+              <a:t>PROJECTS</a:t>
+            </a:r>
+          </a:p>
+        </p:txBody>
+      </p:sp>
+      <p:sp>
+        <p:nvSpPr>
+          <p:cNvPr id="5" name="TextBox 5"/>
           <p:cNvSpPr txBox="1"/>
           <p:nvPr/>
         </p:nvSpPr>
         <p:spPr>
           <a:xfrm>
-            <a:off x="4177723" y="3594010"/>
-            <a:ext cx="3629599" cy="568415"/>
+            <a:off x="1285762" y="8039100"/>
+            <a:ext cx="2211148" cy="571500"/>
           </a:xfrm>
           <a:prstGeom prst="rect">
             <a:avLst/>
@@ -12183,7 +10443,7 @@
           </a:bodyPr>
           <a:lstStyle/>
           <a:p>
-            <a:pPr lvl="0" algn="l">
+            <a:pPr lvl="0">
               <a:lnSpc>
                 <a:spcPts val="4479"/>
               </a:lnSpc>
@@ -12193,30 +10453,39 @@
               <a:defRPr/>
             </a:pPr>
             <a:r>
-              <a:rPr lang="en-US" sz="3199">
-                <a:solidFill>
-                  <a:srgbClr val="475570"/>
-                </a:solidFill>
-                <a:latin typeface="한컴 윤고딕 740"/>
-                <a:ea typeface="한컴 윤고딕 740"/>
-                <a:cs typeface="Source Han Sans KR"/>
-                <a:sym typeface="Source Han Sans KR"/>
-              </a:rPr>
-              <a:t>24.11 ~ 25.07</a:t>
-            </a:r>
-          </a:p>
-        </p:txBody>
-      </p:sp>
-      <p:sp>
-        <p:nvSpPr>
-          <p:cNvPr id="9" name="TextBox 9"/>
+              <a:rPr lang="en-US" sz="3199" b="1">
+                <a:solidFill>
+                  <a:srgbClr val="475570"/>
+                </a:solidFill>
+                <a:latin typeface="한컴 윤고딕 740"/>
+                <a:ea typeface="한컴 윤고딕 740"/>
+                <a:cs typeface="Source Han Sans KR Bold"/>
+                <a:sym typeface="Source Han Sans KR Bold"/>
+              </a:rPr>
+              <a:t>개발도구</a:t>
+            </a:r>
+            <a:endParaRPr lang="en-US" sz="3199" b="1">
+              <a:solidFill>
+                <a:srgbClr val="475570"/>
+              </a:solidFill>
+              <a:latin typeface="한컴 윤고딕 740"/>
+              <a:ea typeface="한컴 윤고딕 740"/>
+              <a:cs typeface="Source Han Sans KR Bold"/>
+              <a:sym typeface="Source Han Sans KR Bold"/>
+            </a:endParaRPr>
+          </a:p>
+        </p:txBody>
+      </p:sp>
+      <p:sp>
+        <p:nvSpPr>
+          <p:cNvPr id="6" name="TextBox 6"/>
           <p:cNvSpPr txBox="1"/>
           <p:nvPr/>
         </p:nvSpPr>
         <p:spPr>
           <a:xfrm>
-            <a:off x="4048858" y="8433374"/>
-            <a:ext cx="9377488" cy="541110"/>
+            <a:off x="1285762" y="4421988"/>
+            <a:ext cx="2211148" cy="569112"/>
           </a:xfrm>
           <a:prstGeom prst="rect">
             <a:avLst/>
@@ -12228,7 +10497,7 @@
           </a:bodyPr>
           <a:lstStyle/>
           <a:p>
-            <a:pPr lvl="0" algn="l">
+            <a:pPr lvl="0">
               <a:lnSpc>
                 <a:spcPts val="4479"/>
               </a:lnSpc>
@@ -12238,38 +10507,185 @@
               <a:defRPr/>
             </a:pPr>
             <a:r>
-              <a:rPr lang="en-US" sz="3199" dirty="0">
-                <a:solidFill>
-                  <a:srgbClr val="475570"/>
-                </a:solidFill>
-                <a:latin typeface="한컴 윤고딕 740"/>
-                <a:ea typeface="한컴 윤고딕 740"/>
-                <a:cs typeface="Source Han Sans KR"/>
-                <a:sym typeface="Source Han Sans KR"/>
-              </a:rPr>
-              <a:t>C++, MySQL, Unreal5.4, 3ds Max  </a:t>
-            </a:r>
-            <a:r>
-              <a:rPr lang="ko-KR" altLang="en-US" sz="3199" dirty="0" err="1">
-                <a:solidFill>
-                  <a:srgbClr val="475570"/>
-                </a:solidFill>
-                <a:highlight>
-                  <a:srgbClr val="FFFF00"/>
-                </a:highlight>
-                <a:latin typeface="한컴 윤고딕 740"/>
-                <a:ea typeface="한컴 윤고딕 740"/>
-                <a:cs typeface="Source Han Sans KR"/>
-                <a:sym typeface="Source Han Sans KR"/>
-              </a:rPr>
-              <a:t>본인스킬셋</a:t>
-            </a:r>
-            <a:endParaRPr lang="en-US" sz="3199" dirty="0">
+              <a:rPr lang="en-US" sz="3199" b="1">
+                <a:solidFill>
+                  <a:srgbClr val="475570"/>
+                </a:solidFill>
+                <a:latin typeface="한컴 윤고딕 740"/>
+                <a:ea typeface="한컴 윤고딕 740"/>
+                <a:cs typeface="Source Han Sans KR Bold"/>
+                <a:sym typeface="Source Han Sans KR Bold"/>
+              </a:rPr>
+              <a:t>개발인원</a:t>
+            </a:r>
+            <a:endParaRPr lang="en-US" sz="3199" b="1">
+              <a:solidFill>
+                <a:srgbClr val="475570"/>
+              </a:solidFill>
+              <a:latin typeface="한컴 윤고딕 740"/>
+              <a:ea typeface="한컴 윤고딕 740"/>
+              <a:cs typeface="Source Han Sans KR Bold"/>
+              <a:sym typeface="Source Han Sans KR Bold"/>
+            </a:endParaRPr>
+          </a:p>
+        </p:txBody>
+      </p:sp>
+      <p:sp>
+        <p:nvSpPr>
+          <p:cNvPr id="7" name="TextBox 7"/>
+          <p:cNvSpPr txBox="1"/>
+          <p:nvPr/>
+        </p:nvSpPr>
+        <p:spPr>
+          <a:xfrm>
+            <a:off x="1285762" y="5372109"/>
+            <a:ext cx="2211148" cy="571491"/>
+          </a:xfrm>
+          <a:prstGeom prst="rect">
+            <a:avLst/>
+          </a:prstGeom>
+        </p:spPr>
+        <p:txBody>
+          <a:bodyPr wrap="square" lIns="0" tIns="0" rIns="0" bIns="0" anchor="t">
+            <a:spAutoFit/>
+          </a:bodyPr>
+          <a:lstStyle/>
+          <a:p>
+            <a:pPr lvl="0">
+              <a:lnSpc>
+                <a:spcPts val="4479"/>
+              </a:lnSpc>
+              <a:spcBef>
+                <a:spcPct val="0"/>
+              </a:spcBef>
+              <a:defRPr/>
+            </a:pPr>
+            <a:r>
+              <a:rPr lang="en-US" sz="3199" b="1">
+                <a:solidFill>
+                  <a:srgbClr val="475570"/>
+                </a:solidFill>
+                <a:latin typeface="한컴 윤고딕 740"/>
+                <a:ea typeface="한컴 윤고딕 740"/>
+                <a:cs typeface="Source Han Sans KR Bold"/>
+                <a:sym typeface="Source Han Sans KR Bold"/>
+              </a:rPr>
+              <a:t>담당업무</a:t>
+            </a:r>
+            <a:endParaRPr lang="en-US" sz="3199" b="1">
+              <a:solidFill>
+                <a:srgbClr val="475570"/>
+              </a:solidFill>
+              <a:latin typeface="한컴 윤고딕 740"/>
+              <a:ea typeface="한컴 윤고딕 740"/>
+              <a:cs typeface="Source Han Sans KR Bold"/>
+              <a:sym typeface="Source Han Sans KR Bold"/>
+            </a:endParaRPr>
+          </a:p>
+        </p:txBody>
+      </p:sp>
+      <p:sp>
+        <p:nvSpPr>
+          <p:cNvPr id="8" name="TextBox 8"/>
+          <p:cNvSpPr txBox="1"/>
+          <p:nvPr/>
+        </p:nvSpPr>
+        <p:spPr>
+          <a:xfrm>
+            <a:off x="4048858" y="3594010"/>
+            <a:ext cx="3629599" cy="568415"/>
+          </a:xfrm>
+          <a:prstGeom prst="rect">
+            <a:avLst/>
+          </a:prstGeom>
+        </p:spPr>
+        <p:txBody>
+          <a:bodyPr wrap="square" lIns="0" tIns="0" rIns="0" bIns="0" anchor="t">
+            <a:spAutoFit/>
+          </a:bodyPr>
+          <a:lstStyle/>
+          <a:p>
+            <a:pPr lvl="0" algn="l">
+              <a:lnSpc>
+                <a:spcPts val="4479"/>
+              </a:lnSpc>
+              <a:spcBef>
+                <a:spcPct val="0"/>
+              </a:spcBef>
+              <a:defRPr/>
+            </a:pPr>
+            <a:r>
+              <a:rPr lang="en-US" sz="3199">
+                <a:solidFill>
+                  <a:srgbClr val="475570"/>
+                </a:solidFill>
+                <a:latin typeface="한컴 윤고딕 740"/>
+                <a:ea typeface="한컴 윤고딕 740"/>
+                <a:cs typeface="Source Han Sans KR"/>
+                <a:sym typeface="Source Han Sans KR"/>
+              </a:rPr>
+              <a:t>24.11 ~ 25.07</a:t>
+            </a:r>
+            <a:endParaRPr lang="en-US" sz="3199">
+              <a:solidFill>
+                <a:srgbClr val="475570"/>
+              </a:solidFill>
+              <a:latin typeface="한컴 윤고딕 740"/>
+              <a:ea typeface="한컴 윤고딕 740"/>
+              <a:cs typeface="Source Han Sans KR"/>
+              <a:sym typeface="Source Han Sans KR"/>
+            </a:endParaRPr>
+          </a:p>
+        </p:txBody>
+      </p:sp>
+      <p:sp>
+        <p:nvSpPr>
+          <p:cNvPr id="9" name="TextBox 9"/>
+          <p:cNvSpPr txBox="1"/>
+          <p:nvPr/>
+        </p:nvSpPr>
+        <p:spPr>
+          <a:xfrm>
+            <a:off x="4048858" y="8052374"/>
+            <a:ext cx="9377488" cy="567751"/>
+          </a:xfrm>
+          <a:prstGeom prst="rect">
+            <a:avLst/>
+          </a:prstGeom>
+        </p:spPr>
+        <p:txBody>
+          <a:bodyPr wrap="square" lIns="0" tIns="0" rIns="0" bIns="0" anchor="t">
+            <a:spAutoFit/>
+          </a:bodyPr>
+          <a:lstStyle/>
+          <a:p>
+            <a:pPr lvl="0" algn="l">
+              <a:lnSpc>
+                <a:spcPts val="4479"/>
+              </a:lnSpc>
+              <a:spcBef>
+                <a:spcPct val="0"/>
+              </a:spcBef>
+              <a:defRPr/>
+            </a:pPr>
+            <a:r>
+              <a:rPr lang="en-US" sz="3199">
+                <a:solidFill>
+                  <a:srgbClr val="475570"/>
+                </a:solidFill>
+                <a:latin typeface="한컴 윤고딕 740"/>
+                <a:ea typeface="한컴 윤고딕 740"/>
+                <a:cs typeface="Source Han Sans KR"/>
+                <a:sym typeface="Source Han Sans KR"/>
+              </a:rPr>
+              <a:t>C++, MySQL, Unreal5.4</a:t>
+            </a:r>
+            <a:endParaRPr lang="en-US" sz="3199">
               <a:solidFill>
                 <a:srgbClr val="475570"/>
               </a:solidFill>
               <a:highlight>
-                <a:srgbClr val="FFFF00"/>
+                <a:srgbClr val="ffff00"/>
               </a:highlight>
               <a:latin typeface="한컴 윤고딕 740"/>
               <a:ea typeface="한컴 윤고딕 740"/>
@@ -12326,7 +10742,7 @@
         </p:nvSpPr>
         <p:spPr>
           <a:xfrm>
-            <a:off x="4177723" y="4945863"/>
+            <a:off x="4048858" y="4421988"/>
             <a:ext cx="9027810" cy="569112"/>
           </a:xfrm>
           <a:prstGeom prst="rect">
@@ -12360,6 +10776,15 @@
               </a:rPr>
               <a:t>3명 (서버 1, 클라이언트1, 모델링1)</a:t>
             </a:r>
+            <a:endParaRPr lang="en-US" sz="3199">
+              <a:solidFill>
+                <a:srgbClr val="475570"/>
+              </a:solidFill>
+              <a:latin typeface="한컴 윤고딕 740"/>
+              <a:ea typeface="한컴 윤고딕 740"/>
+              <a:cs typeface="Source Han Sans KR"/>
+              <a:sym typeface="Source Han Sans KR"/>
+            </a:endParaRPr>
           </a:p>
         </p:txBody>
       </p:sp>
@@ -12371,7 +10796,7 @@
         </p:nvSpPr>
         <p:spPr>
           <a:xfrm flipV="1">
-            <a:off x="3497805" y="4328810"/>
+            <a:off x="3497805" y="8191500"/>
             <a:ext cx="0" cy="393105"/>
           </a:xfrm>
           <a:prstGeom prst="line">
@@ -12410,7 +10835,7 @@
         </p:nvSpPr>
         <p:spPr>
           <a:xfrm flipV="1">
-            <a:off x="3497805" y="5051876"/>
+            <a:off x="3497805" y="4528001"/>
             <a:ext cx="0" cy="393105"/>
           </a:xfrm>
           <a:prstGeom prst="line">
@@ -12449,7 +10874,7 @@
         </p:nvSpPr>
         <p:spPr>
           <a:xfrm flipV="1">
-            <a:off x="3500602" y="5866445"/>
+            <a:off x="3497805" y="5507315"/>
             <a:ext cx="0" cy="393105"/>
           </a:xfrm>
           <a:prstGeom prst="line">
@@ -12533,8 +10958,8 @@
         </p:nvSpPr>
         <p:spPr>
           <a:xfrm>
-            <a:off x="4177722" y="5731230"/>
-            <a:ext cx="11250718" cy="2268378"/>
+            <a:off x="4048858" y="5372100"/>
+            <a:ext cx="11250718" cy="2286000"/>
           </a:xfrm>
           <a:prstGeom prst="rect">
             <a:avLst/>
@@ -12553,18 +10978,102 @@
               <a:defRPr/>
             </a:pPr>
             <a:r>
-              <a:rPr lang="ko-KR" altLang="en-US" sz="3199" dirty="0">
-                <a:solidFill>
-                  <a:srgbClr val="475570"/>
-                </a:solidFill>
-                <a:latin typeface="한컴 윤고딕 740"/>
-                <a:ea typeface="한컴 윤고딕 740"/>
-                <a:cs typeface="Source Han Sans KR"/>
-                <a:sym typeface="Source Han Sans KR"/>
-              </a:rPr>
-              <a:t>서버 제작 담당</a:t>
-            </a:r>
-            <a:endParaRPr lang="en-US" altLang="ko-KR" sz="3199" dirty="0">
+              <a:rPr lang="ko-KR" altLang="en-US" sz="3199">
+                <a:solidFill>
+                  <a:srgbClr val="475570"/>
+                </a:solidFill>
+                <a:latin typeface="한컴 윤고딕 740"/>
+                <a:ea typeface="한컴 윤고딕 740"/>
+                <a:cs typeface="Source Han Sans KR"/>
+                <a:sym typeface="Source Han Sans KR"/>
+              </a:rPr>
+              <a:t>서버 제작 담당 </a:t>
+            </a:r>
+            <a:r>
+              <a:rPr lang="en-US" altLang="ko-KR" sz="3199">
+                <a:solidFill>
+                  <a:srgbClr val="475570"/>
+                </a:solidFill>
+                <a:latin typeface="한컴 윤고딕 740"/>
+                <a:ea typeface="한컴 윤고딕 740"/>
+                <a:cs typeface="Source Han Sans KR"/>
+                <a:sym typeface="Source Han Sans KR"/>
+              </a:rPr>
+              <a:t>(</a:t>
+            </a:r>
+            <a:r>
+              <a:rPr lang="ko-KR" altLang="en-US" sz="3199">
+                <a:solidFill>
+                  <a:srgbClr val="475570"/>
+                </a:solidFill>
+                <a:latin typeface="한컴 윤고딕 740"/>
+                <a:ea typeface="한컴 윤고딕 740"/>
+                <a:cs typeface="Source Han Sans KR"/>
+                <a:sym typeface="Source Han Sans KR"/>
+              </a:rPr>
+              <a:t>기여 </a:t>
+            </a:r>
+            <a:r>
+              <a:rPr lang="en-US" altLang="ko-KR" sz="3199">
+                <a:solidFill>
+                  <a:srgbClr val="475570"/>
+                </a:solidFill>
+                <a:latin typeface="한컴 윤고딕 740"/>
+                <a:ea typeface="한컴 윤고딕 740"/>
+                <a:cs typeface="Source Han Sans KR"/>
+                <a:sym typeface="Source Han Sans KR"/>
+              </a:rPr>
+              <a:t>: </a:t>
+            </a:r>
+            <a:r>
+              <a:rPr lang="ko-KR" altLang="en-US" sz="3199">
+                <a:solidFill>
+                  <a:srgbClr val="475570"/>
+                </a:solidFill>
+                <a:latin typeface="한컴 윤고딕 740"/>
+                <a:ea typeface="한컴 윤고딕 740"/>
+                <a:cs typeface="Source Han Sans KR"/>
+                <a:sym typeface="Source Han Sans KR"/>
+              </a:rPr>
+              <a:t>서버 </a:t>
+            </a:r>
+            <a:r>
+              <a:rPr lang="en-US" altLang="ko-KR" sz="3199">
+                <a:solidFill>
+                  <a:srgbClr val="475570"/>
+                </a:solidFill>
+                <a:latin typeface="한컴 윤고딕 740"/>
+                <a:ea typeface="한컴 윤고딕 740"/>
+                <a:cs typeface="Source Han Sans KR"/>
+                <a:sym typeface="Source Han Sans KR"/>
+              </a:rPr>
+              <a:t>100%,</a:t>
+            </a:r>
+            <a:r>
+              <a:rPr lang="ko-KR" altLang="en-US" sz="3199">
+                <a:solidFill>
+                  <a:srgbClr val="475570"/>
+                </a:solidFill>
+                <a:latin typeface="한컴 윤고딕 740"/>
+                <a:ea typeface="한컴 윤고딕 740"/>
+                <a:cs typeface="Source Han Sans KR"/>
+                <a:sym typeface="Source Han Sans KR"/>
+              </a:rPr>
+              <a:t> 클라</a:t>
+            </a:r>
+            <a:r>
+              <a:rPr lang="en-US" altLang="ko-KR" sz="3199">
+                <a:solidFill>
+                  <a:srgbClr val="475570"/>
+                </a:solidFill>
+                <a:latin typeface="한컴 윤고딕 740"/>
+                <a:ea typeface="한컴 윤고딕 740"/>
+                <a:cs typeface="Source Han Sans KR"/>
+                <a:sym typeface="Source Han Sans KR"/>
+              </a:rPr>
+              <a:t> 20%)</a:t>
+            </a:r>
+            <a:endParaRPr lang="en-US" altLang="ko-KR" sz="3199">
               <a:solidFill>
                 <a:srgbClr val="475570"/>
               </a:solidFill>
@@ -12582,138 +11091,18 @@
               <a:defRPr/>
             </a:pPr>
             <a:r>
-              <a:rPr lang="en-US" sz="3199" dirty="0" err="1">
-                <a:solidFill>
-                  <a:srgbClr val="475570"/>
-                </a:solidFill>
-                <a:latin typeface="한컴 윤고딕 740"/>
-                <a:ea typeface="한컴 윤고딕 740"/>
-                <a:cs typeface="Source Han Sans KR"/>
-                <a:sym typeface="Source Han Sans KR"/>
-              </a:rPr>
-              <a:t>서버</a:t>
-            </a:r>
-            <a:r>
-              <a:rPr lang="en-US" sz="3199" dirty="0">
-                <a:solidFill>
-                  <a:srgbClr val="475570"/>
-                </a:solidFill>
-                <a:latin typeface="한컴 윤고딕 740"/>
-                <a:ea typeface="한컴 윤고딕 740"/>
-                <a:cs typeface="Source Han Sans KR"/>
-                <a:sym typeface="Source Han Sans KR"/>
-              </a:rPr>
-              <a:t> </a:t>
-            </a:r>
-            <a:r>
-              <a:rPr lang="en-US" sz="3199" dirty="0" err="1">
-                <a:solidFill>
-                  <a:srgbClr val="475570"/>
-                </a:solidFill>
-                <a:latin typeface="한컴 윤고딕 740"/>
-                <a:ea typeface="한컴 윤고딕 740"/>
-                <a:cs typeface="Source Han Sans KR"/>
-                <a:sym typeface="Source Han Sans KR"/>
-              </a:rPr>
-              <a:t>중심</a:t>
-            </a:r>
-            <a:r>
-              <a:rPr lang="en-US" sz="3199" dirty="0">
-                <a:solidFill>
-                  <a:srgbClr val="475570"/>
-                </a:solidFill>
-                <a:latin typeface="한컴 윤고딕 740"/>
-                <a:ea typeface="한컴 윤고딕 740"/>
-                <a:cs typeface="Source Han Sans KR"/>
-                <a:sym typeface="Source Han Sans KR"/>
-              </a:rPr>
-              <a:t> </a:t>
-            </a:r>
-            <a:r>
-              <a:rPr lang="en-US" sz="3199" dirty="0" err="1">
-                <a:solidFill>
-                  <a:srgbClr val="475570"/>
-                </a:solidFill>
-                <a:latin typeface="한컴 윤고딕 740"/>
-                <a:ea typeface="한컴 윤고딕 740"/>
-                <a:cs typeface="Source Han Sans KR"/>
-                <a:sym typeface="Source Han Sans KR"/>
-              </a:rPr>
-              <a:t>구조의</a:t>
-            </a:r>
-            <a:r>
-              <a:rPr lang="en-US" sz="3199" dirty="0">
-                <a:solidFill>
-                  <a:srgbClr val="475570"/>
-                </a:solidFill>
-                <a:latin typeface="한컴 윤고딕 740"/>
-                <a:ea typeface="한컴 윤고딕 740"/>
-                <a:cs typeface="Source Han Sans KR"/>
-                <a:sym typeface="Source Han Sans KR"/>
-              </a:rPr>
-              <a:t> </a:t>
-            </a:r>
-            <a:r>
-              <a:rPr lang="en-US" sz="3199" dirty="0" err="1">
-                <a:solidFill>
-                  <a:srgbClr val="475570"/>
-                </a:solidFill>
-                <a:latin typeface="한컴 윤고딕 740"/>
-                <a:ea typeface="한컴 윤고딕 740"/>
-                <a:cs typeface="Source Han Sans KR"/>
-                <a:sym typeface="Source Han Sans KR"/>
-              </a:rPr>
-              <a:t>게임</a:t>
-            </a:r>
-            <a:r>
-              <a:rPr lang="en-US" sz="3199" dirty="0">
-                <a:solidFill>
-                  <a:srgbClr val="475570"/>
-                </a:solidFill>
-                <a:latin typeface="한컴 윤고딕 740"/>
-                <a:ea typeface="한컴 윤고딕 740"/>
-                <a:cs typeface="Source Han Sans KR"/>
-                <a:sym typeface="Source Han Sans KR"/>
-              </a:rPr>
-              <a:t> </a:t>
-            </a:r>
-            <a:r>
-              <a:rPr lang="en-US" sz="3199" dirty="0" err="1">
-                <a:solidFill>
-                  <a:srgbClr val="475570"/>
-                </a:solidFill>
-                <a:latin typeface="한컴 윤고딕 740"/>
-                <a:ea typeface="한컴 윤고딕 740"/>
-                <a:cs typeface="Source Han Sans KR"/>
-                <a:sym typeface="Source Han Sans KR"/>
-              </a:rPr>
-              <a:t>로직</a:t>
-            </a:r>
-            <a:r>
-              <a:rPr lang="en-US" sz="3199" dirty="0">
-                <a:solidFill>
-                  <a:srgbClr val="475570"/>
-                </a:solidFill>
-                <a:latin typeface="한컴 윤고딕 740"/>
-                <a:ea typeface="한컴 윤고딕 740"/>
-                <a:cs typeface="Source Han Sans KR"/>
-                <a:sym typeface="Source Han Sans KR"/>
-              </a:rPr>
-              <a:t> </a:t>
-            </a:r>
-            <a:r>
-              <a:rPr lang="en-US" sz="3199" dirty="0" err="1">
-                <a:solidFill>
-                  <a:srgbClr val="475570"/>
-                </a:solidFill>
-                <a:latin typeface="한컴 윤고딕 740"/>
-                <a:ea typeface="한컴 윤고딕 740"/>
-                <a:cs typeface="Source Han Sans KR"/>
-                <a:sym typeface="Source Han Sans KR"/>
-              </a:rPr>
-              <a:t>구현</a:t>
-            </a:r>
-            <a:endParaRPr lang="en-US" sz="3199" dirty="0">
+              <a:rPr lang="en-US" sz="3199">
+                <a:solidFill>
+                  <a:srgbClr val="475570"/>
+                </a:solidFill>
+                <a:latin typeface="한컴 윤고딕 740"/>
+                <a:ea typeface="한컴 윤고딕 740"/>
+                <a:cs typeface="Source Han Sans KR"/>
+                <a:sym typeface="Source Han Sans KR"/>
+              </a:rPr>
+              <a:t>서버 중심 구조의 게임 로직 구현</a:t>
+            </a:r>
+            <a:endParaRPr lang="en-US" sz="3199">
               <a:solidFill>
                 <a:srgbClr val="475570"/>
               </a:solidFill>
@@ -12731,102 +11120,18 @@
               <a:defRPr/>
             </a:pPr>
             <a:r>
-              <a:rPr lang="en-US" sz="3199" dirty="0">
-                <a:solidFill>
-                  <a:srgbClr val="475570"/>
-                </a:solidFill>
-                <a:latin typeface="한컴 윤고딕 740"/>
-                <a:ea typeface="한컴 윤고딕 740"/>
-                <a:cs typeface="Source Han Sans KR"/>
-                <a:sym typeface="Source Han Sans KR"/>
-              </a:rPr>
-              <a:t>IOCP </a:t>
-            </a:r>
-            <a:r>
-              <a:rPr lang="en-US" sz="3199" dirty="0" err="1">
-                <a:solidFill>
-                  <a:srgbClr val="475570"/>
-                </a:solidFill>
-                <a:latin typeface="한컴 윤고딕 740"/>
-                <a:ea typeface="한컴 윤고딕 740"/>
-                <a:cs typeface="Source Han Sans KR"/>
-                <a:sym typeface="Source Han Sans KR"/>
-              </a:rPr>
-              <a:t>기반</a:t>
-            </a:r>
-            <a:r>
-              <a:rPr lang="en-US" sz="3199" dirty="0">
-                <a:solidFill>
-                  <a:srgbClr val="475570"/>
-                </a:solidFill>
-                <a:latin typeface="한컴 윤고딕 740"/>
-                <a:ea typeface="한컴 윤고딕 740"/>
-                <a:cs typeface="Source Han Sans KR"/>
-                <a:sym typeface="Source Han Sans KR"/>
-              </a:rPr>
-              <a:t> </a:t>
-            </a:r>
-            <a:r>
-              <a:rPr lang="en-US" sz="3199" dirty="0" err="1">
-                <a:solidFill>
-                  <a:srgbClr val="475570"/>
-                </a:solidFill>
-                <a:latin typeface="한컴 윤고딕 740"/>
-                <a:ea typeface="한컴 윤고딕 740"/>
-                <a:cs typeface="Source Han Sans KR"/>
-                <a:sym typeface="Source Han Sans KR"/>
-              </a:rPr>
-              <a:t>세션</a:t>
-            </a:r>
-            <a:r>
-              <a:rPr lang="en-US" sz="3199" dirty="0">
-                <a:solidFill>
-                  <a:srgbClr val="475570"/>
-                </a:solidFill>
-                <a:latin typeface="한컴 윤고딕 740"/>
-                <a:ea typeface="한컴 윤고딕 740"/>
-                <a:cs typeface="Source Han Sans KR"/>
-                <a:sym typeface="Source Han Sans KR"/>
-              </a:rPr>
-              <a:t> </a:t>
-            </a:r>
-            <a:r>
-              <a:rPr lang="en-US" sz="3199" dirty="0" err="1">
-                <a:solidFill>
-                  <a:srgbClr val="475570"/>
-                </a:solidFill>
-                <a:latin typeface="한컴 윤고딕 740"/>
-                <a:ea typeface="한컴 윤고딕 740"/>
-                <a:cs typeface="Source Han Sans KR"/>
-                <a:sym typeface="Source Han Sans KR"/>
-              </a:rPr>
-              <a:t>병렬</a:t>
-            </a:r>
-            <a:r>
-              <a:rPr lang="en-US" sz="3199" dirty="0">
-                <a:solidFill>
-                  <a:srgbClr val="475570"/>
-                </a:solidFill>
-                <a:latin typeface="한컴 윤고딕 740"/>
-                <a:ea typeface="한컴 윤고딕 740"/>
-                <a:cs typeface="Source Han Sans KR"/>
-                <a:sym typeface="Source Han Sans KR"/>
-              </a:rPr>
-              <a:t> </a:t>
-            </a:r>
-            <a:r>
-              <a:rPr lang="en-US" sz="3199" dirty="0" err="1">
-                <a:solidFill>
-                  <a:srgbClr val="475570"/>
-                </a:solidFill>
-                <a:latin typeface="한컴 윤고딕 740"/>
-                <a:ea typeface="한컴 윤고딕 740"/>
-                <a:cs typeface="Source Han Sans KR"/>
-                <a:sym typeface="Source Han Sans KR"/>
-              </a:rPr>
-              <a:t>처리</a:t>
-            </a:r>
-            <a:endParaRPr lang="en-US" sz="3199" dirty="0">
+              <a:rPr lang="en-US" sz="3199">
+                <a:solidFill>
+                  <a:srgbClr val="475570"/>
+                </a:solidFill>
+                <a:latin typeface="한컴 윤고딕 740"/>
+                <a:ea typeface="한컴 윤고딕 740"/>
+                <a:cs typeface="Source Han Sans KR"/>
+                <a:sym typeface="Source Han Sans KR"/>
+              </a:rPr>
+              <a:t>IOCP 기반 세션 병렬 처리</a:t>
+            </a:r>
+            <a:endParaRPr lang="en-US" sz="3199">
               <a:solidFill>
                 <a:srgbClr val="475570"/>
               </a:solidFill>
@@ -12847,31 +11152,19 @@
               <a:defRPr/>
             </a:pPr>
             <a:r>
-              <a:rPr lang="en-US" sz="3199" dirty="0" err="1">
-                <a:solidFill>
-                  <a:srgbClr val="475570"/>
-                </a:solidFill>
-                <a:latin typeface="한컴 윤고딕 740"/>
-                <a:ea typeface="한컴 윤고딕 740"/>
-                <a:cs typeface="Source Han Sans KR"/>
-                <a:sym typeface="Source Han Sans KR"/>
-              </a:rPr>
-              <a:t>데이터베이스</a:t>
-            </a:r>
-            <a:r>
-              <a:rPr lang="en-US" sz="3199" dirty="0">
-                <a:solidFill>
-                  <a:srgbClr val="475570"/>
-                </a:solidFill>
-                <a:latin typeface="한컴 윤고딕 740"/>
-                <a:ea typeface="한컴 윤고딕 740"/>
-                <a:cs typeface="Source Han Sans KR"/>
-                <a:sym typeface="Source Han Sans KR"/>
-              </a:rPr>
-              <a:t> </a:t>
-            </a:r>
-            <a:r>
-              <a:rPr lang="ko-KR" altLang="en-US" sz="3199" dirty="0">
+              <a:rPr lang="en-US" sz="3199">
+                <a:solidFill>
+                  <a:srgbClr val="475570"/>
+                </a:solidFill>
+                <a:latin typeface="한컴 윤고딕 740"/>
+                <a:ea typeface="한컴 윤고딕 740"/>
+                <a:cs typeface="Source Han Sans KR"/>
+                <a:sym typeface="Source Han Sans KR"/>
+              </a:rPr>
+              <a:t>데이터베이스 </a:t>
+            </a:r>
+            <a:r>
+              <a:rPr lang="ko-KR" altLang="en-US" sz="3199">
                 <a:solidFill>
                   <a:srgbClr val="475570"/>
                 </a:solidFill>
@@ -12883,42 +11176,18 @@
               <a:t>스키마 </a:t>
             </a:r>
             <a:r>
-              <a:rPr lang="en-US" sz="3199" dirty="0" err="1">
-                <a:solidFill>
-                  <a:srgbClr val="475570"/>
-                </a:solidFill>
-                <a:latin typeface="한컴 윤고딕 740"/>
-                <a:ea typeface="한컴 윤고딕 740"/>
-                <a:cs typeface="Source Han Sans KR"/>
-                <a:sym typeface="Source Han Sans KR"/>
-              </a:rPr>
-              <a:t>설계</a:t>
-            </a:r>
-            <a:r>
-              <a:rPr lang="en-US" sz="3199" dirty="0">
-                <a:solidFill>
-                  <a:srgbClr val="475570"/>
-                </a:solidFill>
-                <a:latin typeface="한컴 윤고딕 740"/>
-                <a:ea typeface="한컴 윤고딕 740"/>
-                <a:cs typeface="Source Han Sans KR"/>
-                <a:sym typeface="Source Han Sans KR"/>
-              </a:rPr>
-              <a:t> 및 </a:t>
-            </a:r>
-            <a:r>
-              <a:rPr lang="en-US" sz="3199" dirty="0" err="1">
-                <a:solidFill>
-                  <a:srgbClr val="475570"/>
-                </a:solidFill>
-                <a:latin typeface="한컴 윤고딕 740"/>
-                <a:ea typeface="한컴 윤고딕 740"/>
-                <a:cs typeface="Source Han Sans KR"/>
-                <a:sym typeface="Source Han Sans KR"/>
-              </a:rPr>
-              <a:t>연동</a:t>
-            </a:r>
-            <a:endParaRPr lang="en-US" sz="3199" dirty="0">
+              <a:rPr lang="en-US" sz="3199">
+                <a:solidFill>
+                  <a:srgbClr val="475570"/>
+                </a:solidFill>
+                <a:latin typeface="한컴 윤고딕 740"/>
+                <a:ea typeface="한컴 윤고딕 740"/>
+                <a:cs typeface="Source Han Sans KR"/>
+                <a:sym typeface="Source Han Sans KR"/>
+              </a:rPr>
+              <a:t>설계 및 연동</a:t>
+            </a:r>
+            <a:endParaRPr lang="en-US" sz="3199">
               <a:solidFill>
                 <a:srgbClr val="475570"/>
               </a:solidFill>
@@ -12926,6 +11195,155 @@
               <a:ea typeface="한컴 윤고딕 740"/>
               <a:cs typeface="Source Han Sans KR"/>
               <a:sym typeface="Source Han Sans KR"/>
+            </a:endParaRPr>
+          </a:p>
+        </p:txBody>
+      </p:sp>
+      <p:sp>
+        <p:nvSpPr>
+          <p:cNvPr id="23" name="TextBox 5"/>
+          <p:cNvSpPr txBox="1"/>
+          <p:nvPr/>
+        </p:nvSpPr>
+        <p:spPr>
+          <a:xfrm>
+            <a:off x="1285762" y="8801100"/>
+            <a:ext cx="2211148" cy="571500"/>
+          </a:xfrm>
+          <a:prstGeom prst="rect">
+            <a:avLst/>
+          </a:prstGeom>
+        </p:spPr>
+        <p:txBody>
+          <a:bodyPr wrap="square" lIns="0" tIns="0" rIns="0" bIns="0" anchor="t">
+            <a:spAutoFit/>
+          </a:bodyPr>
+          <a:lstStyle/>
+          <a:p>
+            <a:pPr lvl="0">
+              <a:lnSpc>
+                <a:spcPts val="4479"/>
+              </a:lnSpc>
+              <a:spcBef>
+                <a:spcPct val="0"/>
+              </a:spcBef>
+              <a:defRPr/>
+            </a:pPr>
+            <a:r>
+              <a:rPr lang="en-US" altLang="ko-KR" sz="3199" b="1">
+                <a:solidFill>
+                  <a:srgbClr val="475570"/>
+                </a:solidFill>
+                <a:latin typeface="한컴 윤고딕 740"/>
+                <a:ea typeface="한컴 윤고딕 740"/>
+                <a:cs typeface="Source Han Sans KR Bold"/>
+                <a:sym typeface="Source Han Sans KR Bold"/>
+              </a:rPr>
+              <a:t>Git</a:t>
+            </a:r>
+            <a:endParaRPr lang="en-US" altLang="ko-KR" sz="3199" b="1">
+              <a:solidFill>
+                <a:srgbClr val="475570"/>
+              </a:solidFill>
+              <a:latin typeface="한컴 윤고딕 740"/>
+              <a:ea typeface="한컴 윤고딕 740"/>
+              <a:cs typeface="Source Han Sans KR Bold"/>
+              <a:sym typeface="Source Han Sans KR Bold"/>
+            </a:endParaRPr>
+          </a:p>
+        </p:txBody>
+      </p:sp>
+      <p:sp>
+        <p:nvSpPr>
+          <p:cNvPr id="24" name="TextBox 9">
+            <a:hlinkClick r:id="rId2"/>
+          </p:cNvPr>
+          <p:cNvSpPr txBox="1"/>
+          <p:nvPr/>
+        </p:nvSpPr>
+        <p:spPr>
+          <a:xfrm>
+            <a:off x="4048858" y="8814374"/>
+            <a:ext cx="9377488" cy="567751"/>
+          </a:xfrm>
+          <a:prstGeom prst="rect">
+            <a:avLst/>
+          </a:prstGeom>
+        </p:spPr>
+        <p:txBody>
+          <a:bodyPr wrap="square" lIns="0" tIns="0" rIns="0" bIns="0" anchor="t">
+            <a:spAutoFit/>
+          </a:bodyPr>
+          <a:lstStyle/>
+          <a:p>
+            <a:pPr lvl="0" algn="l">
+              <a:lnSpc>
+                <a:spcPts val="4479"/>
+              </a:lnSpc>
+              <a:spcBef>
+                <a:spcPct val="0"/>
+              </a:spcBef>
+              <a:defRPr/>
+            </a:pPr>
+            <a:r>
+              <a:rPr lang="en-US" altLang="ko-KR" sz="3199">
+                <a:solidFill>
+                  <a:srgbClr val="475570"/>
+                </a:solidFill>
+                <a:latin typeface="한컴 윤고딕 740"/>
+                <a:ea typeface="한컴 윤고딕 740"/>
+                <a:cs typeface="Source Han Sans KR"/>
+                <a:sym typeface="Source Han Sans KR"/>
+              </a:rPr>
+              <a:t>https://github.com/sungone/GP2025.git</a:t>
+            </a:r>
+            <a:endParaRPr lang="en-US" altLang="ko-KR" sz="3199">
+              <a:solidFill>
+                <a:srgbClr val="475570"/>
+              </a:solidFill>
+              <a:latin typeface="한컴 윤고딕 740"/>
+              <a:ea typeface="한컴 윤고딕 740"/>
+              <a:cs typeface="Source Han Sans KR"/>
+              <a:sym typeface="Source Han Sans KR"/>
+            </a:endParaRPr>
+          </a:p>
+        </p:txBody>
+      </p:sp>
+      <p:sp>
+        <p:nvSpPr>
+          <p:cNvPr id="25" name="AutoShape 12"/>
+          <p:cNvSpPr/>
+          <p:nvPr/>
+        </p:nvSpPr>
+        <p:spPr>
+          <a:xfrm flipV="1">
+            <a:off x="3497805" y="8953500"/>
+            <a:ext cx="0" cy="393105"/>
+          </a:xfrm>
+          <a:prstGeom prst="line">
+            <a:avLst/>
+          </a:prstGeom>
+          <a:ln w="19050" cap="flat">
+            <a:solidFill>
+              <a:srgbClr val="000000">
+                <a:alpha val="19610"/>
+              </a:srgbClr>
+            </a:solidFill>
+            <a:prstDash val="solid"/>
+            <a:headEnd w="sm" len="sm"/>
+            <a:tailEnd w="sm" len="sm"/>
+          </a:ln>
+        </p:spPr>
+        <p:txBody>
+          <a:bodyPr wrap="square" anchor="ctr"/>
+          <a:lstStyle/>
+          <a:p>
+            <a:pPr lvl="0" algn="ctr">
+              <a:defRPr/>
+            </a:pPr>
+            <a:endParaRPr lang="ko-KR" altLang="en-US">
+              <a:latin typeface="한컴 윤고딕 740"/>
+              <a:ea typeface="한컴 윤고딕 740"/>
             </a:endParaRPr>
           </a:p>
         </p:txBody>
@@ -12939,14 +11357,13 @@
 </file>
 
 <file path=ppt/slides/slide4.xml><?xml version="1.0" encoding="utf-8"?>
-<p:sld xmlns:a="http://schemas.openxmlformats.org/drawingml/2006/main" xmlns:r="http://schemas.openxmlformats.org/officeDocument/2006/relationships" xmlns:p="http://schemas.openxmlformats.org/presentationml/2006/main">
+<p:sld xmlns:r="http://schemas.openxmlformats.org/officeDocument/2006/relationships" xmlns:c="http://schemas.openxmlformats.org/drawingml/2006/chart" xmlns:a="http://schemas.openxmlformats.org/drawingml/2006/main" xmlns:dgm="http://schemas.openxmlformats.org/drawingml/2006/diagram" xmlns:dsp="http://schemas.microsoft.com/office/drawing/2008/diagram" xmlns:p="http://schemas.openxmlformats.org/presentationml/2006/main">
   <p:cSld>
     <p:bg>
-      <p:bgPr>
+      <p:bgPr shadeToTitle="0">
         <a:solidFill>
-          <a:srgbClr val="FCFDF8"/>
+          <a:srgbClr val="fcfdf8"/>
         </a:solidFill>
-        <a:effectLst/>
       </p:bgPr>
     </p:bg>
     <p:spTree>
@@ -13061,7 +11478,7 @@
         </p:nvSpPr>
         <p:spPr>
           <a:xfrm>
-            <a:off x="4368756" y="8801100"/>
+            <a:off x="1676400" y="8877300"/>
             <a:ext cx="9550488" cy="447675"/>
           </a:xfrm>
           <a:prstGeom prst="rect">
@@ -13074,7 +11491,7 @@
           </a:bodyPr>
           <a:lstStyle/>
           <a:p>
-            <a:pPr lvl="0" algn="ctr">
+            <a:pPr lvl="0">
               <a:lnSpc>
                 <a:spcPts val="3500"/>
               </a:lnSpc>
@@ -13089,7 +11506,7 @@
                 <a:ea typeface="한컴 윤고딕 720"/>
                 <a:cs typeface="Arimo"/>
                 <a:sym typeface="Arimo"/>
-                <a:hlinkClick r:id="rId3" tooltip="https://www.youtube.com/watch?v=NkqPZXgjn8c"/>
+                <a:hlinkClick r:id="rId2" tooltip="https://www.youtube.com/watch?v=NkqPZXgjn8c"/>
               </a:rPr>
               <a:t>https://www.youtube.com/watch?v=NkqPZXgjn8c</a:t>
             </a:r>
@@ -13114,7 +11531,7 @@
             <a:picLocks noRot="1" noChangeAspect="1"/>
           </p:cNvPicPr>
           <p:nvPr>
-            <a:videoFile r:link="rId1"/>
+            <a:videoFile r:link="rId3"/>
           </p:nvPr>
         </p:nvPicPr>
         <p:blipFill rotWithShape="1">
@@ -13125,7 +11542,7 @@
         </p:blipFill>
         <p:spPr>
           <a:xfrm>
-            <a:off x="1683109" y="1900237"/>
+            <a:off x="1143000" y="2238374"/>
             <a:ext cx="8648701" cy="6486526"/>
           </a:xfrm>
           <a:prstGeom prst="rect">
@@ -13135,143 +11552,462 @@
       </p:pic>
       <p:sp>
         <p:nvSpPr>
-          <p:cNvPr id="4" name="TextBox 3">
-            <a:extLst>
-              <a:ext uri="{FF2B5EF4-FFF2-40B4-BE49-F238E27FC236}">
-                <a16:creationId xmlns:a16="http://schemas.microsoft.com/office/drawing/2014/main" id="{07DABDAD-3EA9-CC46-8C6E-999A0418B379}"/>
-              </a:ext>
-            </a:extLst>
-          </p:cNvPr>
+          <p:cNvPr id="9" name="TextBox 16"/>
           <p:cNvSpPr txBox="1"/>
           <p:nvPr/>
         </p:nvSpPr>
         <p:spPr>
           <a:xfrm>
-            <a:off x="11125200" y="2095500"/>
-            <a:ext cx="4953000" cy="3693319"/>
+            <a:off x="10197524" y="2324099"/>
+            <a:ext cx="7328476" cy="6276976"/>
           </a:xfrm>
           <a:prstGeom prst="rect">
             <a:avLst/>
           </a:prstGeom>
-          <a:noFill/>
-        </p:spPr>
-        <p:txBody>
-          <a:bodyPr wrap="square" rtlCol="0">
+        </p:spPr>
+        <p:txBody>
+          <a:bodyPr wrap="square" lIns="0" tIns="0" rIns="0" bIns="0" anchor="t">
             <a:spAutoFit/>
           </a:bodyPr>
           <a:lstStyle/>
           <a:p>
-            <a:r>
-              <a:rPr lang="ko-KR" altLang="en-US" dirty="0"/>
-              <a:t>게임설명 </a:t>
-            </a:r>
-            <a:r>
-              <a:rPr lang="en-US" altLang="ko-KR" dirty="0"/>
-              <a:t>: </a:t>
-            </a:r>
-          </a:p>
-          <a:p>
-            <a:endParaRPr lang="en-US" altLang="ko-KR" dirty="0"/>
-          </a:p>
-          <a:p>
-            <a:r>
-              <a:rPr lang="en-US" altLang="ko-KR" dirty="0"/>
-              <a:t>  </a:t>
-            </a:r>
-            <a:r>
-              <a:rPr lang="ko-KR" altLang="en-US" dirty="0"/>
-              <a:t>한국공학대학교를 배경으로 몬스터를 잡고 퀘스트를 풀면서 학교의 미스터리를 해결하는 </a:t>
-            </a:r>
-            <a:r>
-              <a:rPr lang="en-US" altLang="ko-KR" dirty="0"/>
-              <a:t>MMORPG</a:t>
-            </a:r>
-          </a:p>
-          <a:p>
-            <a:endParaRPr lang="en-US" altLang="ko-KR" dirty="0"/>
-          </a:p>
-          <a:p>
-            <a:r>
-              <a:rPr lang="ko-KR" altLang="en-US" dirty="0"/>
-              <a:t>최종 보스인 </a:t>
-            </a:r>
-            <a:r>
-              <a:rPr lang="ko-KR" altLang="en-US" dirty="0" err="1"/>
-              <a:t>티노를</a:t>
-            </a:r>
-            <a:r>
-              <a:rPr lang="ko-KR" altLang="en-US" dirty="0"/>
-              <a:t> 레이드로 잡는 것이 최종목표</a:t>
-            </a:r>
-            <a:endParaRPr lang="en-US" altLang="ko-KR" dirty="0"/>
-          </a:p>
-          <a:p>
-            <a:endParaRPr lang="en-US" altLang="ko-KR" dirty="0"/>
-          </a:p>
-          <a:p>
-            <a:r>
-              <a:rPr lang="en-US" altLang="ko-KR" dirty="0"/>
-              <a:t>XX </a:t>
-            </a:r>
-            <a:r>
-              <a:rPr lang="ko-KR" altLang="en-US" dirty="0"/>
-              <a:t>개의 퀘스트로 시나리오를 표현하고</a:t>
-            </a:r>
-            <a:r>
-              <a:rPr lang="en-US" altLang="ko-KR" dirty="0"/>
-              <a:t>,  </a:t>
-            </a:r>
-            <a:r>
-              <a:rPr lang="ko-KR" altLang="en-US" dirty="0" err="1"/>
-              <a:t>ㅌㅌ</a:t>
-            </a:r>
-            <a:r>
-              <a:rPr lang="ko-KR" altLang="en-US" dirty="0"/>
+            <a:pPr lvl="0" algn="l">
+              <a:lnSpc>
+                <a:spcPts val="4479"/>
+              </a:lnSpc>
+              <a:defRPr/>
+            </a:pPr>
+            <a:r>
+              <a:rPr lang="ko-KR" altLang="en-US" sz="2400">
+                <a:solidFill>
+                  <a:srgbClr val="475570"/>
+                </a:solidFill>
+                <a:latin typeface="한컴 윤고딕 740"/>
+                <a:ea typeface="한컴 윤고딕 740"/>
+                <a:cs typeface="Source Han Sans KR"/>
+                <a:sym typeface="Source Han Sans KR"/>
+              </a:rPr>
+              <a:t>한국공학대학교를 배경으로 몬스터를 잡고</a:t>
+            </a:r>
+            <a:endParaRPr lang="ko-KR" altLang="en-US" sz="2400">
+              <a:solidFill>
+                <a:srgbClr val="475570"/>
+              </a:solidFill>
+              <a:latin typeface="한컴 윤고딕 740"/>
+              <a:ea typeface="한컴 윤고딕 740"/>
+              <a:cs typeface="Source Han Sans KR"/>
+              <a:sym typeface="Source Han Sans KR"/>
+            </a:endParaRPr>
+          </a:p>
+          <a:p>
+            <a:pPr lvl="0" algn="l">
+              <a:lnSpc>
+                <a:spcPts val="4479"/>
+              </a:lnSpc>
+              <a:defRPr/>
+            </a:pPr>
+            <a:r>
+              <a:rPr lang="ko-KR" altLang="en-US" sz="2400">
+                <a:solidFill>
+                  <a:srgbClr val="475570"/>
+                </a:solidFill>
+                <a:latin typeface="한컴 윤고딕 740"/>
+                <a:ea typeface="한컴 윤고딕 740"/>
+                <a:cs typeface="Source Han Sans KR"/>
+                <a:sym typeface="Source Han Sans KR"/>
+              </a:rPr>
+              <a:t>퀘스트를 풀면서 학교의 미스터리를 해결하는 MMORPG</a:t>
+            </a:r>
+            <a:endParaRPr lang="ko-KR" altLang="en-US" sz="2400">
+              <a:solidFill>
+                <a:srgbClr val="475570"/>
+              </a:solidFill>
+              <a:latin typeface="한컴 윤고딕 740"/>
+              <a:ea typeface="한컴 윤고딕 740"/>
+              <a:cs typeface="Source Han Sans KR"/>
+              <a:sym typeface="Source Han Sans KR"/>
+            </a:endParaRPr>
+          </a:p>
+          <a:p>
+            <a:pPr lvl="0" algn="l">
+              <a:lnSpc>
+                <a:spcPts val="4479"/>
+              </a:lnSpc>
+              <a:defRPr/>
+            </a:pPr>
+            <a:endParaRPr lang="ko-KR" altLang="en-US" sz="2400">
+              <a:solidFill>
+                <a:srgbClr val="475570"/>
+              </a:solidFill>
+              <a:latin typeface="한컴 윤고딕 740"/>
+              <a:ea typeface="한컴 윤고딕 740"/>
+              <a:cs typeface="Source Han Sans KR"/>
+              <a:sym typeface="Source Han Sans KR"/>
+            </a:endParaRPr>
+          </a:p>
+          <a:p>
+            <a:pPr lvl="0" algn="l">
+              <a:lnSpc>
+                <a:spcPts val="4479"/>
+              </a:lnSpc>
+              <a:defRPr/>
+            </a:pPr>
+            <a:r>
+              <a:rPr lang="ko-KR" altLang="en-US" sz="2400">
+                <a:solidFill>
+                  <a:srgbClr val="475570"/>
+                </a:solidFill>
+                <a:latin typeface="한컴 윤고딕 740"/>
+                <a:ea typeface="한컴 윤고딕 740"/>
+                <a:cs typeface="Source Han Sans KR"/>
+                <a:sym typeface="Source Han Sans KR"/>
+              </a:rPr>
+              <a:t>퀘스트: 총 </a:t>
+            </a:r>
+            <a:r>
+              <a:rPr lang="en-US" altLang="ko-KR" sz="2400">
+                <a:solidFill>
+                  <a:srgbClr val="475570"/>
+                </a:solidFill>
+                <a:latin typeface="한컴 윤고딕 740"/>
+                <a:ea typeface="한컴 윤고딕 740"/>
+                <a:cs typeface="Source Han Sans KR"/>
+                <a:sym typeface="Source Han Sans KR"/>
+              </a:rPr>
+              <a:t>18</a:t>
+            </a:r>
+            <a:r>
+              <a:rPr lang="ko-KR" altLang="en-US" sz="2400">
+                <a:solidFill>
+                  <a:srgbClr val="475570"/>
+                </a:solidFill>
+                <a:latin typeface="한컴 윤고딕 740"/>
+                <a:ea typeface="한컴 윤고딕 740"/>
+                <a:cs typeface="Source Han Sans KR"/>
+                <a:sym typeface="Source Han Sans KR"/>
+              </a:rPr>
+              <a:t>개</a:t>
+            </a:r>
+            <a:endParaRPr lang="en-US" altLang="ko-KR" sz="2400">
+              <a:solidFill>
+                <a:srgbClr val="475570"/>
+              </a:solidFill>
+              <a:latin typeface="한컴 윤고딕 740"/>
+              <a:ea typeface="한컴 윤고딕 740"/>
+              <a:cs typeface="Source Han Sans KR"/>
+              <a:sym typeface="Source Han Sans KR"/>
+            </a:endParaRPr>
+          </a:p>
+          <a:p>
+            <a:pPr lvl="0" algn="l">
+              <a:lnSpc>
+                <a:spcPts val="4479"/>
+              </a:lnSpc>
+              <a:defRPr/>
+            </a:pPr>
+            <a:r>
+              <a:rPr lang="en-US" altLang="ko-KR" sz="2400">
+                <a:solidFill>
+                  <a:srgbClr val="475570"/>
+                </a:solidFill>
+                <a:latin typeface="한컴 윤고딕 740"/>
+                <a:ea typeface="한컴 윤고딕 740"/>
+                <a:cs typeface="Source Han Sans KR"/>
+                <a:sym typeface="Source Han Sans KR"/>
+              </a:rPr>
+              <a:t>(</a:t>
+            </a:r>
+            <a:r>
+              <a:rPr lang="ko-KR" altLang="en-US" sz="2400">
+                <a:solidFill>
+                  <a:srgbClr val="475570"/>
+                </a:solidFill>
+                <a:latin typeface="한컴 윤고딕 740"/>
+                <a:ea typeface="한컴 윤고딕 740"/>
+                <a:cs typeface="Source Han Sans KR"/>
+                <a:sym typeface="Source Han Sans KR"/>
+              </a:rPr>
+              <a:t>튜토리얼 퀘스트 4개</a:t>
+            </a:r>
+            <a:r>
+              <a:rPr lang="en-US" altLang="ko-KR" sz="2400">
+                <a:solidFill>
+                  <a:srgbClr val="475570"/>
+                </a:solidFill>
+                <a:latin typeface="한컴 윤고딕 740"/>
+                <a:ea typeface="한컴 윤고딕 740"/>
+                <a:cs typeface="Source Han Sans KR"/>
+                <a:sym typeface="Source Han Sans KR"/>
+              </a:rPr>
+              <a:t> + </a:t>
+            </a:r>
+            <a:r>
+              <a:rPr lang="ko-KR" altLang="en-US" sz="2400">
+                <a:solidFill>
+                  <a:srgbClr val="475570"/>
+                </a:solidFill>
+                <a:latin typeface="한컴 윤고딕 740"/>
+                <a:ea typeface="한컴 윤고딕 740"/>
+                <a:cs typeface="Source Han Sans KR"/>
+                <a:sym typeface="Source Han Sans KR"/>
+              </a:rPr>
+              <a:t>메인 퀘스트 14개</a:t>
+            </a:r>
+            <a:r>
+              <a:rPr lang="en-US" altLang="ko-KR" sz="2400">
+                <a:solidFill>
+                  <a:srgbClr val="475570"/>
+                </a:solidFill>
+                <a:latin typeface="한컴 윤고딕 740"/>
+                <a:ea typeface="한컴 윤고딕 740"/>
+                <a:cs typeface="Source Han Sans KR"/>
+                <a:sym typeface="Source Han Sans KR"/>
+              </a:rPr>
+              <a:t>)</a:t>
+            </a:r>
+            <a:endParaRPr lang="en-US" altLang="ko-KR" sz="2400">
+              <a:solidFill>
+                <a:srgbClr val="475570"/>
+              </a:solidFill>
+              <a:latin typeface="한컴 윤고딕 740"/>
+              <a:ea typeface="한컴 윤고딕 740"/>
+              <a:cs typeface="Source Han Sans KR"/>
+              <a:sym typeface="Source Han Sans KR"/>
+            </a:endParaRPr>
+          </a:p>
+          <a:p>
+            <a:pPr lvl="0" algn="l">
+              <a:lnSpc>
+                <a:spcPts val="4479"/>
+              </a:lnSpc>
+              <a:defRPr/>
+            </a:pPr>
+            <a:endParaRPr lang="ko-KR" altLang="en-US" sz="2400">
+              <a:solidFill>
+                <a:srgbClr val="475570"/>
+              </a:solidFill>
+              <a:latin typeface="한컴 윤고딕 740"/>
+              <a:ea typeface="한컴 윤고딕 740"/>
+              <a:cs typeface="Source Han Sans KR"/>
+              <a:sym typeface="Source Han Sans KR"/>
+            </a:endParaRPr>
+          </a:p>
+          <a:p>
+            <a:pPr lvl="0" algn="l">
+              <a:lnSpc>
+                <a:spcPts val="4479"/>
+              </a:lnSpc>
+              <a:defRPr/>
+            </a:pPr>
+            <a:r>
+              <a:rPr lang="ko-KR" altLang="en-US" sz="2400">
+                <a:solidFill>
+                  <a:srgbClr val="475570"/>
+                </a:solidFill>
+                <a:latin typeface="한컴 윤고딕 740"/>
+                <a:ea typeface="한컴 윤고딕 740"/>
+                <a:cs typeface="Source Han Sans KR"/>
+                <a:sym typeface="Source Han Sans KR"/>
+              </a:rPr>
+              <a:t>몬스터: 10종 (보스 몬스터 포함)</a:t>
+            </a:r>
+            <a:endParaRPr lang="ko-KR" altLang="en-US" sz="2400">
+              <a:solidFill>
+                <a:srgbClr val="475570"/>
+              </a:solidFill>
+              <a:latin typeface="한컴 윤고딕 740"/>
+              <a:ea typeface="한컴 윤고딕 740"/>
+              <a:cs typeface="Source Han Sans KR"/>
+              <a:sym typeface="Source Han Sans KR"/>
+            </a:endParaRPr>
+          </a:p>
+          <a:p>
+            <a:pPr lvl="0" algn="l">
+              <a:lnSpc>
+                <a:spcPts val="4479"/>
+              </a:lnSpc>
+              <a:defRPr/>
+            </a:pPr>
+            <a:r>
+              <a:rPr lang="ko-KR" altLang="en-US" sz="2400">
+                <a:solidFill>
+                  <a:srgbClr val="475570"/>
+                </a:solidFill>
+                <a:latin typeface="한컴 윤고딕 740"/>
+                <a:ea typeface="한컴 윤고딕 740"/>
+                <a:cs typeface="Source Han Sans KR"/>
+                <a:sym typeface="Source Han Sans KR"/>
+              </a:rPr>
+              <a:t>인던: 3곳 (학교 건물 4개 중 3곳이 전투 던전, 1곳은 상점)</a:t>
+            </a:r>
+            <a:endParaRPr lang="ko-KR" altLang="en-US" sz="2400">
+              <a:solidFill>
+                <a:srgbClr val="475570"/>
+              </a:solidFill>
+              <a:latin typeface="한컴 윤고딕 740"/>
+              <a:ea typeface="한컴 윤고딕 740"/>
+              <a:cs typeface="Source Han Sans KR"/>
+              <a:sym typeface="Source Han Sans KR"/>
+            </a:endParaRPr>
+          </a:p>
+          <a:p>
+            <a:pPr lvl="0" algn="l">
+              <a:lnSpc>
+                <a:spcPts val="4479"/>
+              </a:lnSpc>
+              <a:defRPr/>
+            </a:pPr>
+            <a:r>
+              <a:rPr lang="ko-KR" altLang="en-US" sz="2400">
+                <a:solidFill>
+                  <a:srgbClr val="475570"/>
+                </a:solidFill>
+                <a:latin typeface="한컴 윤고딕 740"/>
+                <a:ea typeface="한컴 윤고딕 740"/>
+                <a:cs typeface="Source Han Sans KR"/>
+                <a:sym typeface="Source Han Sans KR"/>
+              </a:rPr>
+              <a:t>아이템: 23종 (무기/방어구/소모품 등)</a:t>
+            </a:r>
+            <a:endParaRPr lang="ko-KR" altLang="en-US" sz="2400">
+              <a:solidFill>
+                <a:srgbClr val="475570"/>
+              </a:solidFill>
+              <a:latin typeface="한컴 윤고딕 740"/>
+              <a:ea typeface="한컴 윤고딕 740"/>
+              <a:cs typeface="Source Han Sans KR"/>
+              <a:sym typeface="Source Han Sans KR"/>
+            </a:endParaRPr>
+          </a:p>
+          <a:p>
+            <a:pPr lvl="0" algn="l">
+              <a:lnSpc>
+                <a:spcPts val="4479"/>
+              </a:lnSpc>
+              <a:defRPr/>
+            </a:pPr>
+            <a:r>
+              <a:rPr lang="ko-KR" altLang="en-US" sz="2400">
+                <a:solidFill>
+                  <a:srgbClr val="475570"/>
+                </a:solidFill>
+                <a:latin typeface="한컴 윤고딕 740"/>
+                <a:ea typeface="한컴 윤고딕 740"/>
+                <a:cs typeface="Source Han Sans KR"/>
+                <a:sym typeface="Source Han Sans KR"/>
+              </a:rPr>
+              <a:t>캐릭터</a:t>
+            </a:r>
+            <a:r>
+              <a:rPr lang="en-US" altLang="ko-KR" sz="2400">
+                <a:solidFill>
+                  <a:srgbClr val="475570"/>
+                </a:solidFill>
+                <a:latin typeface="한컴 윤고딕 740"/>
+                <a:ea typeface="한컴 윤고딕 740"/>
+                <a:cs typeface="Source Han Sans KR"/>
+                <a:sym typeface="Source Han Sans KR"/>
+              </a:rPr>
+              <a:t>:</a:t>
+            </a:r>
+            <a:r>
+              <a:rPr lang="ko-KR" altLang="en-US" sz="2400">
+                <a:solidFill>
+                  <a:srgbClr val="475570"/>
+                </a:solidFill>
+                <a:latin typeface="한컴 윤고딕 740"/>
+                <a:ea typeface="한컴 윤고딕 740"/>
+                <a:cs typeface="Source Han Sans KR"/>
+                <a:sym typeface="Source Han Sans KR"/>
+              </a:rPr>
               <a:t> </a:t>
             </a:r>
             <a:r>
-              <a:rPr lang="en-US" altLang="ko-KR" dirty="0"/>
-              <a:t> </a:t>
-            </a:r>
-            <a:r>
-              <a:rPr lang="ko-KR" altLang="en-US" dirty="0"/>
-              <a:t>종류의 몬스터</a:t>
-            </a:r>
-            <a:r>
-              <a:rPr lang="en-US" altLang="ko-KR" dirty="0"/>
-              <a:t>,, CC </a:t>
-            </a:r>
-            <a:r>
-              <a:rPr lang="ko-KR" altLang="en-US" dirty="0"/>
-              <a:t>개의 </a:t>
-            </a:r>
-            <a:r>
-              <a:rPr lang="ko-KR" altLang="en-US" dirty="0" err="1"/>
-              <a:t>인던</a:t>
-            </a:r>
-            <a:endParaRPr lang="en-US" altLang="ko-KR" dirty="0"/>
-          </a:p>
-          <a:p>
-            <a:endParaRPr lang="en-US" altLang="ko-KR" dirty="0"/>
-          </a:p>
-          <a:p>
-            <a:r>
-              <a:rPr lang="ko-KR" altLang="en-US" dirty="0"/>
-              <a:t>다양한 아이템과</a:t>
-            </a:r>
-            <a:r>
-              <a:rPr lang="en-US" altLang="ko-KR" dirty="0"/>
-              <a:t>, </a:t>
-            </a:r>
-            <a:r>
-              <a:rPr lang="ko-KR" altLang="en-US" dirty="0"/>
-              <a:t>스킬</a:t>
-            </a:r>
-            <a:r>
-              <a:rPr lang="en-US" altLang="ko-KR" dirty="0"/>
-              <a:t>….</a:t>
-            </a:r>
-            <a:endParaRPr lang="ko-KR" altLang="en-US" dirty="0"/>
+              <a:rPr lang="en-US" altLang="ko-KR" sz="2400">
+                <a:solidFill>
+                  <a:srgbClr val="475570"/>
+                </a:solidFill>
+                <a:latin typeface="한컴 윤고딕 740"/>
+                <a:ea typeface="한컴 윤고딕 740"/>
+                <a:cs typeface="Source Han Sans KR"/>
+                <a:sym typeface="Source Han Sans KR"/>
+              </a:rPr>
+              <a:t>2</a:t>
+            </a:r>
+            <a:r>
+              <a:rPr lang="ko-KR" altLang="en-US" sz="2400">
+                <a:solidFill>
+                  <a:srgbClr val="475570"/>
+                </a:solidFill>
+                <a:latin typeface="한컴 윤고딕 740"/>
+                <a:ea typeface="한컴 윤고딕 740"/>
+                <a:cs typeface="Source Han Sans KR"/>
+                <a:sym typeface="Source Han Sans KR"/>
+              </a:rPr>
+              <a:t>종</a:t>
+            </a:r>
+            <a:endParaRPr lang="ko-KR" altLang="en-US" sz="2400">
+              <a:solidFill>
+                <a:srgbClr val="475570"/>
+              </a:solidFill>
+              <a:latin typeface="한컴 윤고딕 740"/>
+              <a:ea typeface="한컴 윤고딕 740"/>
+              <a:cs typeface="Source Han Sans KR"/>
+              <a:sym typeface="Source Han Sans KR"/>
+            </a:endParaRPr>
+          </a:p>
+          <a:p>
+            <a:pPr lvl="0" algn="l">
+              <a:lnSpc>
+                <a:spcPts val="4479"/>
+              </a:lnSpc>
+              <a:defRPr/>
+            </a:pPr>
+            <a:r>
+              <a:rPr lang="ko-KR" altLang="en-US" sz="2400">
+                <a:solidFill>
+                  <a:srgbClr val="475570"/>
+                </a:solidFill>
+                <a:latin typeface="한컴 윤고딕 740"/>
+                <a:ea typeface="한컴 윤고딕 740"/>
+                <a:cs typeface="Source Han Sans KR"/>
+                <a:sym typeface="Source Han Sans KR"/>
+              </a:rPr>
+              <a:t>스킬: </a:t>
+            </a:r>
+            <a:r>
+              <a:rPr lang="en-US" altLang="ko-KR" sz="2400">
+                <a:solidFill>
+                  <a:srgbClr val="475570"/>
+                </a:solidFill>
+                <a:latin typeface="한컴 윤고딕 740"/>
+                <a:ea typeface="한컴 윤고딕 740"/>
+                <a:cs typeface="Source Han Sans KR"/>
+                <a:sym typeface="Source Han Sans KR"/>
+              </a:rPr>
+              <a:t>6</a:t>
+            </a:r>
+            <a:r>
+              <a:rPr lang="ko-KR" altLang="en-US" sz="2400">
+                <a:solidFill>
+                  <a:srgbClr val="475570"/>
+                </a:solidFill>
+                <a:latin typeface="한컴 윤고딕 740"/>
+                <a:ea typeface="한컴 윤고딕 740"/>
+                <a:cs typeface="Source Han Sans KR"/>
+                <a:sym typeface="Source Han Sans KR"/>
+              </a:rPr>
+              <a:t>종</a:t>
+            </a:r>
+            <a:endParaRPr lang="ko-KR" altLang="en-US" sz="2400">
+              <a:solidFill>
+                <a:srgbClr val="475570"/>
+              </a:solidFill>
+              <a:latin typeface="한컴 윤고딕 740"/>
+              <a:ea typeface="한컴 윤고딕 740"/>
+              <a:cs typeface="Source Han Sans KR"/>
+              <a:sym typeface="Source Han Sans KR"/>
+            </a:endParaRPr>
           </a:p>
         </p:txBody>
       </p:sp>
@@ -15568,41 +14304,41 @@
 </file>
 
 <file path=ppt/theme/theme1.xml><?xml version="1.0" encoding="utf-8"?>
-<a:theme xmlns:a="http://schemas.openxmlformats.org/drawingml/2006/main" name="Office Theme">
+<a:theme xmlns:r="http://schemas.openxmlformats.org/officeDocument/2006/relationships" xmlns:c="http://schemas.openxmlformats.org/drawingml/2006/chart" xmlns:dgm="http://schemas.openxmlformats.org/drawingml/2006/diagram" xmlns:dsp="http://schemas.microsoft.com/office/drawing/2008/diagram" xmlns:a="http://schemas.openxmlformats.org/drawingml/2006/main" xmlns:pic="http://schemas.openxmlformats.org/drawingml/2006/picture" xmlns:wp="http://schemas.openxmlformats.org/drawingml/2006/wordprocessingDrawing" xmlns:xdr="http://schemas.openxmlformats.org/drawingml/2006/spreadsheetDrawing" xmlns:lc="http://schemas.openxmlformats.org/drawingml/2006/lockedCanvas" xmlns:p="http://schemas.openxmlformats.org/presentationml/2006/main" name="Office Theme">
   <a:themeElements>
     <a:clrScheme name="Office">
       <a:dk1>
         <a:sysClr val="windowText" lastClr="000000"/>
       </a:dk1>
       <a:lt1>
-        <a:sysClr val="window" lastClr="FFFFFF"/>
+        <a:sysClr val="window" lastClr="ffffff"/>
       </a:lt1>
       <a:dk2>
-        <a:srgbClr val="1F497D"/>
+        <a:srgbClr val="1f497d"/>
       </a:dk2>
       <a:lt2>
-        <a:srgbClr val="EEECE1"/>
+        <a:srgbClr val="eeece1"/>
       </a:lt2>
       <a:accent1>
-        <a:srgbClr val="4F81BD"/>
+        <a:srgbClr val="4f81bd"/>
       </a:accent1>
       <a:accent2>
-        <a:srgbClr val="C0504D"/>
+        <a:srgbClr val="c0504d"/>
       </a:accent2>
       <a:accent3>
-        <a:srgbClr val="9BBB59"/>
+        <a:srgbClr val="9bbb59"/>
       </a:accent3>
       <a:accent4>
-        <a:srgbClr val="8064A2"/>
+        <a:srgbClr val="8064a2"/>
       </a:accent4>
       <a:accent5>
-        <a:srgbClr val="4BACC6"/>
+        <a:srgbClr val="4bacc6"/>
       </a:accent5>
       <a:accent6>
-        <a:srgbClr val="F79646"/>
+        <a:srgbClr val="f79646"/>
       </a:accent6>
       <a:hlink>
-        <a:srgbClr val="0000FF"/>
+        <a:srgbClr val="0000ff"/>
       </a:hlink>
       <a:folHlink>
         <a:srgbClr val="800080"/>
@@ -15845,7 +14581,5 @@
       </a:bgFillStyleLst>
     </a:fmtScheme>
   </a:themeElements>
-  <a:objectDefaults/>
-  <a:extraClrSchemeLst/>
 </a:theme>
 </file>
--- a/문서/포트폴리오/황수지/황수지포트폴리오.pptx
+++ b/문서/포트폴리오/황수지/황수지포트폴리오.pptx
@@ -1,6 +1,6 @@
 
 <file path=ppt/presentation.xml><?xml version="1.0" encoding="utf-8"?>
-<p:presentation xmlns:r="http://schemas.openxmlformats.org/officeDocument/2006/relationships" xmlns:c="http://schemas.openxmlformats.org/drawingml/2006/chart" xmlns:a="http://schemas.openxmlformats.org/drawingml/2006/main" xmlns:dgm="http://schemas.openxmlformats.org/drawingml/2006/diagram" xmlns:dsp="http://schemas.microsoft.com/office/drawing/2008/diagram" xmlns:p="http://schemas.openxmlformats.org/presentationml/2006/main">
+<p:presentation xmlns:a="http://schemas.openxmlformats.org/drawingml/2006/main" xmlns:r="http://schemas.openxmlformats.org/officeDocument/2006/relationships" xmlns:p="http://schemas.openxmlformats.org/presentationml/2006/main">
   <p:sldMasterIdLst>
     <p:sldMasterId id="2147483648" r:id="rId1"/>
   </p:sldMasterIdLst>
@@ -124,6 +124,22 @@
       </a:defRPr>
     </a:lvl9pPr>
   </p:defaultTextStyle>
+  <p:extLst>
+    <p:ext uri="{EFAFB233-063F-42B5-8137-9DF3F51BA10A}">
+      <p15:sldGuideLst xmlns:p15="http://schemas.microsoft.com/office/powerpoint/2012/main">
+        <p15:guide id="1" orient="horz" pos="3239">
+          <p15:clr>
+            <a:srgbClr val="A4A3A4"/>
+          </p15:clr>
+        </p15:guide>
+        <p15:guide id="2" pos="5759">
+          <p15:clr>
+            <a:srgbClr val="A4A3A4"/>
+          </p15:clr>
+        </p15:guide>
+      </p15:sldGuideLst>
+    </p:ext>
+  </p:extLst>
 </p:presentation>
 </file>
 
@@ -307,7 +323,7 @@
             <a:fld id="{1D8BD707-D9CF-40AE-B4C6-C98DA3205C09}" type="datetimeFigureOut">
               <a:rPr lang="en-US" smtClean="0"/>
               <a:pPr/>
-              <a:t>9/4/2025</a:t>
+              <a:t>9/18/2025</a:t>
             </a:fld>
             <a:endParaRPr lang="en-US"/>
           </a:p>
@@ -472,7 +488,7 @@
             <a:fld id="{1D8BD707-D9CF-40AE-B4C6-C98DA3205C09}" type="datetimeFigureOut">
               <a:rPr lang="en-US" smtClean="0"/>
               <a:pPr/>
-              <a:t>9/4/2025</a:t>
+              <a:t>9/18/2025</a:t>
             </a:fld>
             <a:endParaRPr lang="en-US"/>
           </a:p>
@@ -647,7 +663,7 @@
             <a:fld id="{1D8BD707-D9CF-40AE-B4C6-C98DA3205C09}" type="datetimeFigureOut">
               <a:rPr lang="en-US" smtClean="0"/>
               <a:pPr/>
-              <a:t>9/4/2025</a:t>
+              <a:t>9/18/2025</a:t>
             </a:fld>
             <a:endParaRPr lang="en-US"/>
           </a:p>
@@ -812,7 +828,7 @@
             <a:fld id="{1D8BD707-D9CF-40AE-B4C6-C98DA3205C09}" type="datetimeFigureOut">
               <a:rPr lang="en-US" smtClean="0"/>
               <a:pPr/>
-              <a:t>9/4/2025</a:t>
+              <a:t>9/18/2025</a:t>
             </a:fld>
             <a:endParaRPr lang="en-US"/>
           </a:p>
@@ -1054,7 +1070,7 @@
             <a:fld id="{1D8BD707-D9CF-40AE-B4C6-C98DA3205C09}" type="datetimeFigureOut">
               <a:rPr lang="en-US" smtClean="0"/>
               <a:pPr/>
-              <a:t>9/4/2025</a:t>
+              <a:t>9/18/2025</a:t>
             </a:fld>
             <a:endParaRPr lang="en-US"/>
           </a:p>
@@ -1336,7 +1352,7 @@
             <a:fld id="{1D8BD707-D9CF-40AE-B4C6-C98DA3205C09}" type="datetimeFigureOut">
               <a:rPr lang="en-US" smtClean="0"/>
               <a:pPr/>
-              <a:t>9/4/2025</a:t>
+              <a:t>9/18/2025</a:t>
             </a:fld>
             <a:endParaRPr lang="en-US"/>
           </a:p>
@@ -1752,7 +1768,7 @@
             <a:fld id="{1D8BD707-D9CF-40AE-B4C6-C98DA3205C09}" type="datetimeFigureOut">
               <a:rPr lang="en-US" smtClean="0"/>
               <a:pPr/>
-              <a:t>9/4/2025</a:t>
+              <a:t>9/18/2025</a:t>
             </a:fld>
             <a:endParaRPr lang="en-US"/>
           </a:p>
@@ -1866,7 +1882,7 @@
             <a:fld id="{1D8BD707-D9CF-40AE-B4C6-C98DA3205C09}" type="datetimeFigureOut">
               <a:rPr lang="en-US" smtClean="0"/>
               <a:pPr/>
-              <a:t>9/4/2025</a:t>
+              <a:t>9/18/2025</a:t>
             </a:fld>
             <a:endParaRPr lang="en-US"/>
           </a:p>
@@ -1958,7 +1974,7 @@
             <a:fld id="{1D8BD707-D9CF-40AE-B4C6-C98DA3205C09}" type="datetimeFigureOut">
               <a:rPr lang="en-US" smtClean="0"/>
               <a:pPr/>
-              <a:t>9/4/2025</a:t>
+              <a:t>9/18/2025</a:t>
             </a:fld>
             <a:endParaRPr lang="en-US"/>
           </a:p>
@@ -2230,7 +2246,7 @@
             <a:fld id="{1D8BD707-D9CF-40AE-B4C6-C98DA3205C09}" type="datetimeFigureOut">
               <a:rPr lang="en-US" smtClean="0"/>
               <a:pPr/>
-              <a:t>9/4/2025</a:t>
+              <a:t>9/18/2025</a:t>
             </a:fld>
             <a:endParaRPr lang="en-US"/>
           </a:p>
@@ -2479,7 +2495,7 @@
             <a:fld id="{1D8BD707-D9CF-40AE-B4C6-C98DA3205C09}" type="datetimeFigureOut">
               <a:rPr lang="en-US" smtClean="0"/>
               <a:pPr/>
-              <a:t>9/4/2025</a:t>
+              <a:t>9/18/2025</a:t>
             </a:fld>
             <a:endParaRPr lang="en-US"/>
           </a:p>
@@ -2687,7 +2703,7 @@
             <a:fld id="{1D8BD707-D9CF-40AE-B4C6-C98DA3205C09}" type="datetimeFigureOut">
               <a:rPr lang="en-US" smtClean="0"/>
               <a:pPr/>
-              <a:t>9/4/2025</a:t>
+              <a:t>9/18/2025</a:t>
             </a:fld>
             <a:endParaRPr lang="en-US"/>
           </a:p>
@@ -6653,13 +6669,14 @@
 </file>
 
 <file path=ppt/slides/slide18.xml><?xml version="1.0" encoding="utf-8"?>
-<p:sld xmlns:r="http://schemas.openxmlformats.org/officeDocument/2006/relationships" xmlns:c="http://schemas.openxmlformats.org/drawingml/2006/chart" xmlns:a="http://schemas.openxmlformats.org/drawingml/2006/main" xmlns:dgm="http://schemas.openxmlformats.org/drawingml/2006/diagram" xmlns:dsp="http://schemas.microsoft.com/office/drawing/2008/diagram" xmlns:p="http://schemas.openxmlformats.org/presentationml/2006/main">
+<p:sld xmlns:a="http://schemas.openxmlformats.org/drawingml/2006/main" xmlns:r="http://schemas.openxmlformats.org/officeDocument/2006/relationships" xmlns:p="http://schemas.openxmlformats.org/presentationml/2006/main">
   <p:cSld>
     <p:bg>
-      <p:bgPr shadeToTitle="0">
+      <p:bgPr>
         <a:solidFill>
-          <a:srgbClr val="fcfdf8"/>
+          <a:srgbClr val="FCFDF8"/>
         </a:solidFill>
+        <a:effectLst/>
       </p:bgPr>
     </p:bg>
     <p:spTree>
@@ -7045,15 +7062,6 @@
               </a:rPr>
               <a:t>Unreal5.5</a:t>
             </a:r>
-            <a:endParaRPr lang="en-US" sz="3199">
-              <a:solidFill>
-                <a:srgbClr val="475570"/>
-              </a:solidFill>
-              <a:latin typeface="한컴 윤고딕 740"/>
-              <a:ea typeface="한컴 윤고딕 740"/>
-              <a:cs typeface="Source Han Sans KR"/>
-              <a:sym typeface="Source Han Sans KR"/>
-            </a:endParaRPr>
           </a:p>
         </p:txBody>
       </p:sp>
@@ -7386,15 +7394,6 @@
               </a:rPr>
               <a:t>기반</a:t>
             </a:r>
-            <a:endParaRPr lang="ko-KR" altLang="en-US" sz="3199">
-              <a:solidFill>
-                <a:srgbClr val="475570"/>
-              </a:solidFill>
-              <a:latin typeface="한컴 윤고딕 740"/>
-              <a:ea typeface="한컴 윤고딕 740"/>
-              <a:cs typeface="Source Han Sans KR"/>
-              <a:sym typeface="Source Han Sans KR"/>
-            </a:endParaRPr>
           </a:p>
           <a:p>
             <a:pPr lvl="0" algn="l">
@@ -7430,15 +7429,6 @@
               </a:rPr>
               <a:t>환경 설정</a:t>
             </a:r>
-            <a:endParaRPr lang="ko-KR" altLang="en-US" sz="3199">
-              <a:solidFill>
-                <a:srgbClr val="475570"/>
-              </a:solidFill>
-              <a:latin typeface="한컴 윤고딕 740"/>
-              <a:ea typeface="한컴 윤고딕 740"/>
-              <a:cs typeface="Source Han Sans KR"/>
-              <a:sym typeface="Source Han Sans KR"/>
-            </a:endParaRPr>
           </a:p>
         </p:txBody>
       </p:sp>
@@ -7484,15 +7474,6 @@
               </a:rPr>
               <a:t>Git</a:t>
             </a:r>
-            <a:endParaRPr lang="en-US" altLang="ko-KR" sz="3199" b="1">
-              <a:solidFill>
-                <a:srgbClr val="475570"/>
-              </a:solidFill>
-              <a:latin typeface="한컴 윤고딕 740"/>
-              <a:ea typeface="한컴 윤고딕 740"/>
-              <a:cs typeface="Source Han Sans KR Bold"/>
-              <a:sym typeface="Source Han Sans KR Bold"/>
-            </a:endParaRPr>
           </a:p>
         </p:txBody>
       </p:sp>
@@ -7538,15 +7519,6 @@
               </a:rPr>
               <a:t>-</a:t>
             </a:r>
-            <a:endParaRPr lang="en-US" altLang="ko-KR" sz="3199">
-              <a:solidFill>
-                <a:srgbClr val="475570"/>
-              </a:solidFill>
-              <a:latin typeface="한컴 윤고딕 740"/>
-              <a:ea typeface="한컴 윤고딕 740"/>
-              <a:cs typeface="Source Han Sans KR"/>
-              <a:sym typeface="Source Han Sans KR"/>
-            </a:endParaRPr>
           </a:p>
         </p:txBody>
       </p:sp>
@@ -8579,13 +8551,14 @@
 </file>
 
 <file path=ppt/slides/slide2.xml><?xml version="1.0" encoding="utf-8"?>
-<p:sld xmlns:r="http://schemas.openxmlformats.org/officeDocument/2006/relationships" xmlns:c="http://schemas.openxmlformats.org/drawingml/2006/chart" xmlns:a="http://schemas.openxmlformats.org/drawingml/2006/main" xmlns:dgm="http://schemas.openxmlformats.org/drawingml/2006/diagram" xmlns:dsp="http://schemas.microsoft.com/office/drawing/2008/diagram" xmlns:p="http://schemas.openxmlformats.org/presentationml/2006/main">
+<p:sld xmlns:a="http://schemas.openxmlformats.org/drawingml/2006/main" xmlns:r="http://schemas.openxmlformats.org/officeDocument/2006/relationships" xmlns:p="http://schemas.openxmlformats.org/presentationml/2006/main">
   <p:cSld>
     <p:bg>
-      <p:bgPr shadeToTitle="0">
+      <p:bgPr>
         <a:solidFill>
           <a:srgbClr val="475570"/>
         </a:solidFill>
+        <a:effectLst/>
       </p:bgPr>
     </p:bg>
     <p:spTree>
@@ -8842,7 +8815,7 @@
             <a:r>
               <a:rPr lang="en-US" sz="3399">
                 <a:solidFill>
-                  <a:srgbClr val="fcfdf8"/>
+                  <a:srgbClr val="FCFDF8"/>
                 </a:solidFill>
                 <a:latin typeface="한컴 윤고딕 760"/>
                 <a:ea typeface="한컴 윤고딕 760"/>
@@ -8851,15 +8824,6 @@
               </a:rPr>
               <a:t>BomeGame (제작중)</a:t>
             </a:r>
-            <a:endParaRPr lang="en-US" sz="3399">
-              <a:solidFill>
-                <a:srgbClr val="fcfdf8"/>
-              </a:solidFill>
-              <a:latin typeface="한컴 윤고딕 760"/>
-              <a:ea typeface="한컴 윤고딕 760"/>
-              <a:cs typeface="Canva Sans"/>
-              <a:sym typeface="Canva Sans"/>
-            </a:endParaRPr>
           </a:p>
         </p:txBody>
       </p:sp>
@@ -10255,13 +10219,14 @@
 </file>
 
 <file path=ppt/slides/slide3.xml><?xml version="1.0" encoding="utf-8"?>
-<p:sld xmlns:r="http://schemas.openxmlformats.org/officeDocument/2006/relationships" xmlns:c="http://schemas.openxmlformats.org/drawingml/2006/chart" xmlns:a="http://schemas.openxmlformats.org/drawingml/2006/main" xmlns:dgm="http://schemas.openxmlformats.org/drawingml/2006/diagram" xmlns:dsp="http://schemas.microsoft.com/office/drawing/2008/diagram" xmlns:p="http://schemas.openxmlformats.org/presentationml/2006/main">
+<p:sld xmlns:a="http://schemas.openxmlformats.org/drawingml/2006/main" xmlns:r="http://schemas.openxmlformats.org/officeDocument/2006/relationships" xmlns:p="http://schemas.openxmlformats.org/presentationml/2006/main">
   <p:cSld>
     <p:bg>
-      <p:bgPr shadeToTitle="0">
+      <p:bgPr>
         <a:solidFill>
-          <a:srgbClr val="fcfdf8"/>
+          <a:srgbClr val="FCFDF8"/>
         </a:solidFill>
+        <a:effectLst/>
       </p:bgPr>
     </p:bg>
     <p:spTree>
@@ -10320,15 +10285,6 @@
               </a:rPr>
               <a:t>개발기간</a:t>
             </a:r>
-            <a:endParaRPr lang="en-US" sz="3199" b="1">
-              <a:solidFill>
-                <a:srgbClr val="475570"/>
-              </a:solidFill>
-              <a:latin typeface="한컴 윤고딕 740"/>
-              <a:ea typeface="한컴 윤고딕 740"/>
-              <a:cs typeface="Source Han Sans KR Bold"/>
-              <a:sym typeface="Source Han Sans KR Bold"/>
-            </a:endParaRPr>
           </a:p>
         </p:txBody>
       </p:sp>
@@ -10464,15 +10420,6 @@
               </a:rPr>
               <a:t>개발도구</a:t>
             </a:r>
-            <a:endParaRPr lang="en-US" sz="3199" b="1">
-              <a:solidFill>
-                <a:srgbClr val="475570"/>
-              </a:solidFill>
-              <a:latin typeface="한컴 윤고딕 740"/>
-              <a:ea typeface="한컴 윤고딕 740"/>
-              <a:cs typeface="Source Han Sans KR Bold"/>
-              <a:sym typeface="Source Han Sans KR Bold"/>
-            </a:endParaRPr>
           </a:p>
         </p:txBody>
       </p:sp>
@@ -10518,15 +10465,6 @@
               </a:rPr>
               <a:t>개발인원</a:t>
             </a:r>
-            <a:endParaRPr lang="en-US" sz="3199" b="1">
-              <a:solidFill>
-                <a:srgbClr val="475570"/>
-              </a:solidFill>
-              <a:latin typeface="한컴 윤고딕 740"/>
-              <a:ea typeface="한컴 윤고딕 740"/>
-              <a:cs typeface="Source Han Sans KR Bold"/>
-              <a:sym typeface="Source Han Sans KR Bold"/>
-            </a:endParaRPr>
           </a:p>
         </p:txBody>
       </p:sp>
@@ -10572,15 +10510,6 @@
               </a:rPr>
               <a:t>담당업무</a:t>
             </a:r>
-            <a:endParaRPr lang="en-US" sz="3199" b="1">
-              <a:solidFill>
-                <a:srgbClr val="475570"/>
-              </a:solidFill>
-              <a:latin typeface="한컴 윤고딕 740"/>
-              <a:ea typeface="한컴 윤고딕 740"/>
-              <a:cs typeface="Source Han Sans KR Bold"/>
-              <a:sym typeface="Source Han Sans KR Bold"/>
-            </a:endParaRPr>
           </a:p>
         </p:txBody>
       </p:sp>
@@ -10626,15 +10555,6 @@
               </a:rPr>
               <a:t>24.11 ~ 25.07</a:t>
             </a:r>
-            <a:endParaRPr lang="en-US" sz="3199">
-              <a:solidFill>
-                <a:srgbClr val="475570"/>
-              </a:solidFill>
-              <a:latin typeface="한컴 윤고딕 740"/>
-              <a:ea typeface="한컴 윤고딕 740"/>
-              <a:cs typeface="Source Han Sans KR"/>
-              <a:sym typeface="Source Han Sans KR"/>
-            </a:endParaRPr>
           </a:p>
         </p:txBody>
       </p:sp>
@@ -10685,7 +10605,7 @@
                 <a:srgbClr val="475570"/>
               </a:solidFill>
               <a:highlight>
-                <a:srgbClr val="ffff00"/>
+                <a:srgbClr val="FFFF00"/>
               </a:highlight>
               <a:latin typeface="한컴 윤고딕 740"/>
               <a:ea typeface="한컴 윤고딕 740"/>
@@ -10776,15 +10696,6 @@
               </a:rPr>
               <a:t>3명 (서버 1, 클라이언트1, 모델링1)</a:t>
             </a:r>
-            <a:endParaRPr lang="en-US" sz="3199">
-              <a:solidFill>
-                <a:srgbClr val="475570"/>
-              </a:solidFill>
-              <a:latin typeface="한컴 윤고딕 740"/>
-              <a:ea typeface="한컴 윤고딕 740"/>
-              <a:cs typeface="Source Han Sans KR"/>
-              <a:sym typeface="Source Han Sans KR"/>
-            </a:endParaRPr>
           </a:p>
         </p:txBody>
       </p:sp>
@@ -11073,15 +10984,6 @@
               </a:rPr>
               <a:t> 20%)</a:t>
             </a:r>
-            <a:endParaRPr lang="en-US" altLang="ko-KR" sz="3199">
-              <a:solidFill>
-                <a:srgbClr val="475570"/>
-              </a:solidFill>
-              <a:latin typeface="한컴 윤고딕 740"/>
-              <a:ea typeface="한컴 윤고딕 740"/>
-              <a:cs typeface="Source Han Sans KR"/>
-              <a:sym typeface="Source Han Sans KR"/>
-            </a:endParaRPr>
           </a:p>
           <a:p>
             <a:pPr lvl="0" algn="l">
@@ -11102,15 +11004,6 @@
               </a:rPr>
               <a:t>서버 중심 구조의 게임 로직 구현</a:t>
             </a:r>
-            <a:endParaRPr lang="en-US" sz="3199">
-              <a:solidFill>
-                <a:srgbClr val="475570"/>
-              </a:solidFill>
-              <a:latin typeface="한컴 윤고딕 740"/>
-              <a:ea typeface="한컴 윤고딕 740"/>
-              <a:cs typeface="Source Han Sans KR"/>
-              <a:sym typeface="Source Han Sans KR"/>
-            </a:endParaRPr>
           </a:p>
           <a:p>
             <a:pPr lvl="0" algn="l">
@@ -11131,15 +11024,6 @@
               </a:rPr>
               <a:t>IOCP 기반 세션 병렬 처리</a:t>
             </a:r>
-            <a:endParaRPr lang="en-US" sz="3199">
-              <a:solidFill>
-                <a:srgbClr val="475570"/>
-              </a:solidFill>
-              <a:latin typeface="한컴 윤고딕 740"/>
-              <a:ea typeface="한컴 윤고딕 740"/>
-              <a:cs typeface="Source Han Sans KR"/>
-              <a:sym typeface="Source Han Sans KR"/>
-            </a:endParaRPr>
           </a:p>
           <a:p>
             <a:pPr lvl="0" algn="l">
@@ -11187,15 +11071,6 @@
               </a:rPr>
               <a:t>설계 및 연동</a:t>
             </a:r>
-            <a:endParaRPr lang="en-US" sz="3199">
-              <a:solidFill>
-                <a:srgbClr val="475570"/>
-              </a:solidFill>
-              <a:latin typeface="한컴 윤고딕 740"/>
-              <a:ea typeface="한컴 윤고딕 740"/>
-              <a:cs typeface="Source Han Sans KR"/>
-              <a:sym typeface="Source Han Sans KR"/>
-            </a:endParaRPr>
           </a:p>
         </p:txBody>
       </p:sp>
@@ -11241,15 +11116,6 @@
               </a:rPr>
               <a:t>Git</a:t>
             </a:r>
-            <a:endParaRPr lang="en-US" altLang="ko-KR" sz="3199" b="1">
-              <a:solidFill>
-                <a:srgbClr val="475570"/>
-              </a:solidFill>
-              <a:latin typeface="한컴 윤고딕 740"/>
-              <a:ea typeface="한컴 윤고딕 740"/>
-              <a:cs typeface="Source Han Sans KR Bold"/>
-              <a:sym typeface="Source Han Sans KR Bold"/>
-            </a:endParaRPr>
           </a:p>
         </p:txBody>
       </p:sp>
@@ -11297,15 +11163,6 @@
               </a:rPr>
               <a:t>https://github.com/sungone/GP2025.git</a:t>
             </a:r>
-            <a:endParaRPr lang="en-US" altLang="ko-KR" sz="3199">
-              <a:solidFill>
-                <a:srgbClr val="475570"/>
-              </a:solidFill>
-              <a:latin typeface="한컴 윤고딕 740"/>
-              <a:ea typeface="한컴 윤고딕 740"/>
-              <a:cs typeface="Source Han Sans KR"/>
-              <a:sym typeface="Source Han Sans KR"/>
-            </a:endParaRPr>
           </a:p>
         </p:txBody>
       </p:sp>
@@ -11357,13 +11214,14 @@
 </file>
 
 <file path=ppt/slides/slide4.xml><?xml version="1.0" encoding="utf-8"?>
-<p:sld xmlns:r="http://schemas.openxmlformats.org/officeDocument/2006/relationships" xmlns:c="http://schemas.openxmlformats.org/drawingml/2006/chart" xmlns:a="http://schemas.openxmlformats.org/drawingml/2006/main" xmlns:dgm="http://schemas.openxmlformats.org/drawingml/2006/diagram" xmlns:dsp="http://schemas.microsoft.com/office/drawing/2008/diagram" xmlns:p="http://schemas.openxmlformats.org/presentationml/2006/main">
+<p:sld xmlns:a="http://schemas.openxmlformats.org/drawingml/2006/main" xmlns:r="http://schemas.openxmlformats.org/officeDocument/2006/relationships" xmlns:p="http://schemas.openxmlformats.org/presentationml/2006/main">
   <p:cSld>
     <p:bg>
-      <p:bgPr shadeToTitle="0">
+      <p:bgPr>
         <a:solidFill>
-          <a:srgbClr val="fcfdf8"/>
+          <a:srgbClr val="FCFDF8"/>
         </a:solidFill>
+        <a:effectLst/>
       </p:bgPr>
     </p:bg>
     <p:spTree>
@@ -11506,7 +11364,7 @@
                 <a:ea typeface="한컴 윤고딕 720"/>
                 <a:cs typeface="Arimo"/>
                 <a:sym typeface="Arimo"/>
-                <a:hlinkClick r:id="rId2" tooltip="https://www.youtube.com/watch?v=NkqPZXgjn8c"/>
+                <a:hlinkClick r:id="rId3" tooltip="https://www.youtube.com/watch?v=NkqPZXgjn8c"/>
               </a:rPr>
               <a:t>https://www.youtube.com/watch?v=NkqPZXgjn8c</a:t>
             </a:r>
@@ -11531,7 +11389,7 @@
             <a:picLocks noRot="1" noChangeAspect="1"/>
           </p:cNvPicPr>
           <p:nvPr>
-            <a:videoFile r:link="rId3"/>
+            <a:videoFile r:link="rId1"/>
           </p:nvPr>
         </p:nvPicPr>
         <p:blipFill rotWithShape="1">
@@ -11589,6 +11447,34 @@
               </a:rPr>
               <a:t>한국공학대학교를 배경으로 몬스터를 잡고</a:t>
             </a:r>
+          </a:p>
+          <a:p>
+            <a:pPr lvl="0" algn="l">
+              <a:lnSpc>
+                <a:spcPts val="4479"/>
+              </a:lnSpc>
+              <a:defRPr/>
+            </a:pPr>
+            <a:r>
+              <a:rPr lang="ko-KR" altLang="en-US" sz="2400">
+                <a:solidFill>
+                  <a:srgbClr val="475570"/>
+                </a:solidFill>
+                <a:latin typeface="한컴 윤고딕 740"/>
+                <a:ea typeface="한컴 윤고딕 740"/>
+                <a:cs typeface="Source Han Sans KR"/>
+                <a:sym typeface="Source Han Sans KR"/>
+              </a:rPr>
+              <a:t>퀘스트를 풀면서 학교의 미스터리를 해결하는 MMORPG</a:t>
+            </a:r>
+          </a:p>
+          <a:p>
+            <a:pPr lvl="0" algn="l">
+              <a:lnSpc>
+                <a:spcPts val="4479"/>
+              </a:lnSpc>
+              <a:defRPr/>
+            </a:pPr>
             <a:endParaRPr lang="ko-KR" altLang="en-US" sz="2400">
               <a:solidFill>
                 <a:srgbClr val="475570"/>
@@ -11616,8 +11502,117 @@
                 <a:cs typeface="Source Han Sans KR"/>
                 <a:sym typeface="Source Han Sans KR"/>
               </a:rPr>
-              <a:t>퀘스트를 풀면서 학교의 미스터리를 해결하는 MMORPG</a:t>
-            </a:r>
+              <a:t>퀘스트: 총 </a:t>
+            </a:r>
+            <a:r>
+              <a:rPr lang="en-US" altLang="ko-KR" sz="2400">
+                <a:solidFill>
+                  <a:srgbClr val="475570"/>
+                </a:solidFill>
+                <a:latin typeface="한컴 윤고딕 740"/>
+                <a:ea typeface="한컴 윤고딕 740"/>
+                <a:cs typeface="Source Han Sans KR"/>
+                <a:sym typeface="Source Han Sans KR"/>
+              </a:rPr>
+              <a:t>18</a:t>
+            </a:r>
+            <a:r>
+              <a:rPr lang="ko-KR" altLang="en-US" sz="2400">
+                <a:solidFill>
+                  <a:srgbClr val="475570"/>
+                </a:solidFill>
+                <a:latin typeface="한컴 윤고딕 740"/>
+                <a:ea typeface="한컴 윤고딕 740"/>
+                <a:cs typeface="Source Han Sans KR"/>
+                <a:sym typeface="Source Han Sans KR"/>
+              </a:rPr>
+              <a:t>개</a:t>
+            </a:r>
+            <a:endParaRPr lang="en-US" altLang="ko-KR" sz="2400">
+              <a:solidFill>
+                <a:srgbClr val="475570"/>
+              </a:solidFill>
+              <a:latin typeface="한컴 윤고딕 740"/>
+              <a:ea typeface="한컴 윤고딕 740"/>
+              <a:cs typeface="Source Han Sans KR"/>
+              <a:sym typeface="Source Han Sans KR"/>
+            </a:endParaRPr>
+          </a:p>
+          <a:p>
+            <a:pPr lvl="0" algn="l">
+              <a:lnSpc>
+                <a:spcPts val="4479"/>
+              </a:lnSpc>
+              <a:defRPr/>
+            </a:pPr>
+            <a:r>
+              <a:rPr lang="en-US" altLang="ko-KR" sz="2400">
+                <a:solidFill>
+                  <a:srgbClr val="475570"/>
+                </a:solidFill>
+                <a:latin typeface="한컴 윤고딕 740"/>
+                <a:ea typeface="한컴 윤고딕 740"/>
+                <a:cs typeface="Source Han Sans KR"/>
+                <a:sym typeface="Source Han Sans KR"/>
+              </a:rPr>
+              <a:t>(</a:t>
+            </a:r>
+            <a:r>
+              <a:rPr lang="ko-KR" altLang="en-US" sz="2400">
+                <a:solidFill>
+                  <a:srgbClr val="475570"/>
+                </a:solidFill>
+                <a:latin typeface="한컴 윤고딕 740"/>
+                <a:ea typeface="한컴 윤고딕 740"/>
+                <a:cs typeface="Source Han Sans KR"/>
+                <a:sym typeface="Source Han Sans KR"/>
+              </a:rPr>
+              <a:t>튜토리얼 퀘스트 4개</a:t>
+            </a:r>
+            <a:r>
+              <a:rPr lang="en-US" altLang="ko-KR" sz="2400">
+                <a:solidFill>
+                  <a:srgbClr val="475570"/>
+                </a:solidFill>
+                <a:latin typeface="한컴 윤고딕 740"/>
+                <a:ea typeface="한컴 윤고딕 740"/>
+                <a:cs typeface="Source Han Sans KR"/>
+                <a:sym typeface="Source Han Sans KR"/>
+              </a:rPr>
+              <a:t> + </a:t>
+            </a:r>
+            <a:r>
+              <a:rPr lang="ko-KR" altLang="en-US" sz="2400">
+                <a:solidFill>
+                  <a:srgbClr val="475570"/>
+                </a:solidFill>
+                <a:latin typeface="한컴 윤고딕 740"/>
+                <a:ea typeface="한컴 윤고딕 740"/>
+                <a:cs typeface="Source Han Sans KR"/>
+                <a:sym typeface="Source Han Sans KR"/>
+              </a:rPr>
+              <a:t>메인 퀘스트 14개</a:t>
+            </a:r>
+            <a:r>
+              <a:rPr lang="en-US" altLang="ko-KR" sz="2400">
+                <a:solidFill>
+                  <a:srgbClr val="475570"/>
+                </a:solidFill>
+                <a:latin typeface="한컴 윤고딕 740"/>
+                <a:ea typeface="한컴 윤고딕 740"/>
+                <a:cs typeface="Source Han Sans KR"/>
+                <a:sym typeface="Source Han Sans KR"/>
+              </a:rPr>
+              <a:t>)</a:t>
+            </a:r>
+          </a:p>
+          <a:p>
+            <a:pPr lvl="0" algn="l">
+              <a:lnSpc>
+                <a:spcPts val="4479"/>
+              </a:lnSpc>
+              <a:defRPr/>
+            </a:pPr>
             <a:endParaRPr lang="ko-KR" altLang="en-US" sz="2400">
               <a:solidFill>
                 <a:srgbClr val="475570"/>
@@ -11635,15 +11630,18 @@
               </a:lnSpc>
               <a:defRPr/>
             </a:pPr>
-            <a:endParaRPr lang="ko-KR" altLang="en-US" sz="2400">
-              <a:solidFill>
-                <a:srgbClr val="475570"/>
-              </a:solidFill>
-              <a:latin typeface="한컴 윤고딕 740"/>
-              <a:ea typeface="한컴 윤고딕 740"/>
-              <a:cs typeface="Source Han Sans KR"/>
-              <a:sym typeface="Source Han Sans KR"/>
-            </a:endParaRPr>
+            <a:r>
+              <a:rPr lang="ko-KR" altLang="en-US" sz="2400">
+                <a:solidFill>
+                  <a:srgbClr val="475570"/>
+                </a:solidFill>
+                <a:latin typeface="한컴 윤고딕 740"/>
+                <a:ea typeface="한컴 윤고딕 740"/>
+                <a:cs typeface="Source Han Sans KR"/>
+                <a:sym typeface="Source Han Sans KR"/>
+              </a:rPr>
+              <a:t>몬스터: 10종 (보스 몬스터 포함)</a:t>
+            </a:r>
           </a:p>
           <a:p>
             <a:pPr lvl="0" algn="l">
@@ -11662,7 +11660,47 @@
                 <a:cs typeface="Source Han Sans KR"/>
                 <a:sym typeface="Source Han Sans KR"/>
               </a:rPr>
-              <a:t>퀘스트: 총 </a:t>
+              <a:t>인던: 3곳 (학교 건물 4개 중 3곳이 전투 던전, 1곳은 상점)</a:t>
+            </a:r>
+          </a:p>
+          <a:p>
+            <a:pPr lvl="0" algn="l">
+              <a:lnSpc>
+                <a:spcPts val="4479"/>
+              </a:lnSpc>
+              <a:defRPr/>
+            </a:pPr>
+            <a:r>
+              <a:rPr lang="ko-KR" altLang="en-US" sz="2400">
+                <a:solidFill>
+                  <a:srgbClr val="475570"/>
+                </a:solidFill>
+                <a:latin typeface="한컴 윤고딕 740"/>
+                <a:ea typeface="한컴 윤고딕 740"/>
+                <a:cs typeface="Source Han Sans KR"/>
+                <a:sym typeface="Source Han Sans KR"/>
+              </a:rPr>
+              <a:t>아이템: 23종 (무기/방어구/소모품 등)</a:t>
+            </a:r>
+          </a:p>
+          <a:p>
+            <a:pPr lvl="0" algn="l">
+              <a:lnSpc>
+                <a:spcPts val="4479"/>
+              </a:lnSpc>
+              <a:defRPr/>
+            </a:pPr>
+            <a:r>
+              <a:rPr lang="ko-KR" altLang="en-US" sz="2400">
+                <a:solidFill>
+                  <a:srgbClr val="475570"/>
+                </a:solidFill>
+                <a:latin typeface="한컴 윤고딕 740"/>
+                <a:ea typeface="한컴 윤고딕 740"/>
+                <a:cs typeface="Source Han Sans KR"/>
+                <a:sym typeface="Source Han Sans KR"/>
+              </a:rPr>
+              <a:t>캐릭터</a:t>
             </a:r>
             <a:r>
               <a:rPr lang="en-US" altLang="ko-KR" sz="2400">
@@ -11674,7 +11712,7 @@
                 <a:cs typeface="Source Han Sans KR"/>
                 <a:sym typeface="Source Han Sans KR"/>
               </a:rPr>
-              <a:t>18</a:t>
+              <a:t>:</a:t>
             </a:r>
             <a:r>
               <a:rPr lang="ko-KR" altLang="en-US" sz="2400">
@@ -11686,17 +11724,32 @@
                 <a:cs typeface="Source Han Sans KR"/>
                 <a:sym typeface="Source Han Sans KR"/>
               </a:rPr>
-              <a:t>개</a:t>
-            </a:r>
-            <a:endParaRPr lang="en-US" altLang="ko-KR" sz="2400">
-              <a:solidFill>
-                <a:srgbClr val="475570"/>
-              </a:solidFill>
-              <a:latin typeface="한컴 윤고딕 740"/>
-              <a:ea typeface="한컴 윤고딕 740"/>
-              <a:cs typeface="Source Han Sans KR"/>
-              <a:sym typeface="Source Han Sans KR"/>
-            </a:endParaRPr>
+              <a:t> </a:t>
+            </a:r>
+            <a:r>
+              <a:rPr lang="en-US" altLang="ko-KR" sz="2400">
+                <a:solidFill>
+                  <a:srgbClr val="475570"/>
+                </a:solidFill>
+                <a:latin typeface="한컴 윤고딕 740"/>
+                <a:ea typeface="한컴 윤고딕 740"/>
+                <a:cs typeface="Source Han Sans KR"/>
+                <a:sym typeface="Source Han Sans KR"/>
+              </a:rPr>
+              <a:t>2</a:t>
+            </a:r>
+            <a:r>
+              <a:rPr lang="ko-KR" altLang="en-US" sz="2400">
+                <a:solidFill>
+                  <a:srgbClr val="475570"/>
+                </a:solidFill>
+                <a:latin typeface="한컴 윤고딕 740"/>
+                <a:ea typeface="한컴 윤고딕 740"/>
+                <a:cs typeface="Source Han Sans KR"/>
+                <a:sym typeface="Source Han Sans KR"/>
+              </a:rPr>
+              <a:t>종</a:t>
+            </a:r>
           </a:p>
           <a:p>
             <a:pPr lvl="0" algn="l">
@@ -11706,6 +11759,18 @@
               <a:defRPr/>
             </a:pPr>
             <a:r>
+              <a:rPr lang="ko-KR" altLang="en-US" sz="2400">
+                <a:solidFill>
+                  <a:srgbClr val="475570"/>
+                </a:solidFill>
+                <a:latin typeface="한컴 윤고딕 740"/>
+                <a:ea typeface="한컴 윤고딕 740"/>
+                <a:cs typeface="Source Han Sans KR"/>
+                <a:sym typeface="Source Han Sans KR"/>
+              </a:rPr>
+              <a:t>스킬: </a:t>
+            </a:r>
+            <a:r>
               <a:rPr lang="en-US" altLang="ko-KR" sz="2400">
                 <a:solidFill>
                   <a:srgbClr val="475570"/>
@@ -11715,7 +11780,7 @@
                 <a:cs typeface="Source Han Sans KR"/>
                 <a:sym typeface="Source Han Sans KR"/>
               </a:rPr>
-              <a:t>(</a:t>
+              <a:t>6</a:t>
             </a:r>
             <a:r>
               <a:rPr lang="ko-KR" altLang="en-US" sz="2400">
@@ -11727,287 +11792,8 @@
                 <a:cs typeface="Source Han Sans KR"/>
                 <a:sym typeface="Source Han Sans KR"/>
               </a:rPr>
-              <a:t>튜토리얼 퀘스트 4개</a:t>
-            </a:r>
-            <a:r>
-              <a:rPr lang="en-US" altLang="ko-KR" sz="2400">
-                <a:solidFill>
-                  <a:srgbClr val="475570"/>
-                </a:solidFill>
-                <a:latin typeface="한컴 윤고딕 740"/>
-                <a:ea typeface="한컴 윤고딕 740"/>
-                <a:cs typeface="Source Han Sans KR"/>
-                <a:sym typeface="Source Han Sans KR"/>
-              </a:rPr>
-              <a:t> + </a:t>
-            </a:r>
-            <a:r>
-              <a:rPr lang="ko-KR" altLang="en-US" sz="2400">
-                <a:solidFill>
-                  <a:srgbClr val="475570"/>
-                </a:solidFill>
-                <a:latin typeface="한컴 윤고딕 740"/>
-                <a:ea typeface="한컴 윤고딕 740"/>
-                <a:cs typeface="Source Han Sans KR"/>
-                <a:sym typeface="Source Han Sans KR"/>
-              </a:rPr>
-              <a:t>메인 퀘스트 14개</a:t>
-            </a:r>
-            <a:r>
-              <a:rPr lang="en-US" altLang="ko-KR" sz="2400">
-                <a:solidFill>
-                  <a:srgbClr val="475570"/>
-                </a:solidFill>
-                <a:latin typeface="한컴 윤고딕 740"/>
-                <a:ea typeface="한컴 윤고딕 740"/>
-                <a:cs typeface="Source Han Sans KR"/>
-                <a:sym typeface="Source Han Sans KR"/>
-              </a:rPr>
-              <a:t>)</a:t>
-            </a:r>
-            <a:endParaRPr lang="en-US" altLang="ko-KR" sz="2400">
-              <a:solidFill>
-                <a:srgbClr val="475570"/>
-              </a:solidFill>
-              <a:latin typeface="한컴 윤고딕 740"/>
-              <a:ea typeface="한컴 윤고딕 740"/>
-              <a:cs typeface="Source Han Sans KR"/>
-              <a:sym typeface="Source Han Sans KR"/>
-            </a:endParaRPr>
-          </a:p>
-          <a:p>
-            <a:pPr lvl="0" algn="l">
-              <a:lnSpc>
-                <a:spcPts val="4479"/>
-              </a:lnSpc>
-              <a:defRPr/>
-            </a:pPr>
-            <a:endParaRPr lang="ko-KR" altLang="en-US" sz="2400">
-              <a:solidFill>
-                <a:srgbClr val="475570"/>
-              </a:solidFill>
-              <a:latin typeface="한컴 윤고딕 740"/>
-              <a:ea typeface="한컴 윤고딕 740"/>
-              <a:cs typeface="Source Han Sans KR"/>
-              <a:sym typeface="Source Han Sans KR"/>
-            </a:endParaRPr>
-          </a:p>
-          <a:p>
-            <a:pPr lvl="0" algn="l">
-              <a:lnSpc>
-                <a:spcPts val="4479"/>
-              </a:lnSpc>
-              <a:defRPr/>
-            </a:pPr>
-            <a:r>
-              <a:rPr lang="ko-KR" altLang="en-US" sz="2400">
-                <a:solidFill>
-                  <a:srgbClr val="475570"/>
-                </a:solidFill>
-                <a:latin typeface="한컴 윤고딕 740"/>
-                <a:ea typeface="한컴 윤고딕 740"/>
-                <a:cs typeface="Source Han Sans KR"/>
-                <a:sym typeface="Source Han Sans KR"/>
-              </a:rPr>
-              <a:t>몬스터: 10종 (보스 몬스터 포함)</a:t>
-            </a:r>
-            <a:endParaRPr lang="ko-KR" altLang="en-US" sz="2400">
-              <a:solidFill>
-                <a:srgbClr val="475570"/>
-              </a:solidFill>
-              <a:latin typeface="한컴 윤고딕 740"/>
-              <a:ea typeface="한컴 윤고딕 740"/>
-              <a:cs typeface="Source Han Sans KR"/>
-              <a:sym typeface="Source Han Sans KR"/>
-            </a:endParaRPr>
-          </a:p>
-          <a:p>
-            <a:pPr lvl="0" algn="l">
-              <a:lnSpc>
-                <a:spcPts val="4479"/>
-              </a:lnSpc>
-              <a:defRPr/>
-            </a:pPr>
-            <a:r>
-              <a:rPr lang="ko-KR" altLang="en-US" sz="2400">
-                <a:solidFill>
-                  <a:srgbClr val="475570"/>
-                </a:solidFill>
-                <a:latin typeface="한컴 윤고딕 740"/>
-                <a:ea typeface="한컴 윤고딕 740"/>
-                <a:cs typeface="Source Han Sans KR"/>
-                <a:sym typeface="Source Han Sans KR"/>
-              </a:rPr>
-              <a:t>인던: 3곳 (학교 건물 4개 중 3곳이 전투 던전, 1곳은 상점)</a:t>
-            </a:r>
-            <a:endParaRPr lang="ko-KR" altLang="en-US" sz="2400">
-              <a:solidFill>
-                <a:srgbClr val="475570"/>
-              </a:solidFill>
-              <a:latin typeface="한컴 윤고딕 740"/>
-              <a:ea typeface="한컴 윤고딕 740"/>
-              <a:cs typeface="Source Han Sans KR"/>
-              <a:sym typeface="Source Han Sans KR"/>
-            </a:endParaRPr>
-          </a:p>
-          <a:p>
-            <a:pPr lvl="0" algn="l">
-              <a:lnSpc>
-                <a:spcPts val="4479"/>
-              </a:lnSpc>
-              <a:defRPr/>
-            </a:pPr>
-            <a:r>
-              <a:rPr lang="ko-KR" altLang="en-US" sz="2400">
-                <a:solidFill>
-                  <a:srgbClr val="475570"/>
-                </a:solidFill>
-                <a:latin typeface="한컴 윤고딕 740"/>
-                <a:ea typeface="한컴 윤고딕 740"/>
-                <a:cs typeface="Source Han Sans KR"/>
-                <a:sym typeface="Source Han Sans KR"/>
-              </a:rPr>
-              <a:t>아이템: 23종 (무기/방어구/소모품 등)</a:t>
-            </a:r>
-            <a:endParaRPr lang="ko-KR" altLang="en-US" sz="2400">
-              <a:solidFill>
-                <a:srgbClr val="475570"/>
-              </a:solidFill>
-              <a:latin typeface="한컴 윤고딕 740"/>
-              <a:ea typeface="한컴 윤고딕 740"/>
-              <a:cs typeface="Source Han Sans KR"/>
-              <a:sym typeface="Source Han Sans KR"/>
-            </a:endParaRPr>
-          </a:p>
-          <a:p>
-            <a:pPr lvl="0" algn="l">
-              <a:lnSpc>
-                <a:spcPts val="4479"/>
-              </a:lnSpc>
-              <a:defRPr/>
-            </a:pPr>
-            <a:r>
-              <a:rPr lang="ko-KR" altLang="en-US" sz="2400">
-                <a:solidFill>
-                  <a:srgbClr val="475570"/>
-                </a:solidFill>
-                <a:latin typeface="한컴 윤고딕 740"/>
-                <a:ea typeface="한컴 윤고딕 740"/>
-                <a:cs typeface="Source Han Sans KR"/>
-                <a:sym typeface="Source Han Sans KR"/>
-              </a:rPr>
-              <a:t>캐릭터</a:t>
-            </a:r>
-            <a:r>
-              <a:rPr lang="en-US" altLang="ko-KR" sz="2400">
-                <a:solidFill>
-                  <a:srgbClr val="475570"/>
-                </a:solidFill>
-                <a:latin typeface="한컴 윤고딕 740"/>
-                <a:ea typeface="한컴 윤고딕 740"/>
-                <a:cs typeface="Source Han Sans KR"/>
-                <a:sym typeface="Source Han Sans KR"/>
-              </a:rPr>
-              <a:t>:</a:t>
-            </a:r>
-            <a:r>
-              <a:rPr lang="ko-KR" altLang="en-US" sz="2400">
-                <a:solidFill>
-                  <a:srgbClr val="475570"/>
-                </a:solidFill>
-                <a:latin typeface="한컴 윤고딕 740"/>
-                <a:ea typeface="한컴 윤고딕 740"/>
-                <a:cs typeface="Source Han Sans KR"/>
-                <a:sym typeface="Source Han Sans KR"/>
-              </a:rPr>
-              <a:t> </a:t>
-            </a:r>
-            <a:r>
-              <a:rPr lang="en-US" altLang="ko-KR" sz="2400">
-                <a:solidFill>
-                  <a:srgbClr val="475570"/>
-                </a:solidFill>
-                <a:latin typeface="한컴 윤고딕 740"/>
-                <a:ea typeface="한컴 윤고딕 740"/>
-                <a:cs typeface="Source Han Sans KR"/>
-                <a:sym typeface="Source Han Sans KR"/>
-              </a:rPr>
-              <a:t>2</a:t>
-            </a:r>
-            <a:r>
-              <a:rPr lang="ko-KR" altLang="en-US" sz="2400">
-                <a:solidFill>
-                  <a:srgbClr val="475570"/>
-                </a:solidFill>
-                <a:latin typeface="한컴 윤고딕 740"/>
-                <a:ea typeface="한컴 윤고딕 740"/>
-                <a:cs typeface="Source Han Sans KR"/>
-                <a:sym typeface="Source Han Sans KR"/>
-              </a:rPr>
               <a:t>종</a:t>
             </a:r>
-            <a:endParaRPr lang="ko-KR" altLang="en-US" sz="2400">
-              <a:solidFill>
-                <a:srgbClr val="475570"/>
-              </a:solidFill>
-              <a:latin typeface="한컴 윤고딕 740"/>
-              <a:ea typeface="한컴 윤고딕 740"/>
-              <a:cs typeface="Source Han Sans KR"/>
-              <a:sym typeface="Source Han Sans KR"/>
-            </a:endParaRPr>
-          </a:p>
-          <a:p>
-            <a:pPr lvl="0" algn="l">
-              <a:lnSpc>
-                <a:spcPts val="4479"/>
-              </a:lnSpc>
-              <a:defRPr/>
-            </a:pPr>
-            <a:r>
-              <a:rPr lang="ko-KR" altLang="en-US" sz="2400">
-                <a:solidFill>
-                  <a:srgbClr val="475570"/>
-                </a:solidFill>
-                <a:latin typeface="한컴 윤고딕 740"/>
-                <a:ea typeface="한컴 윤고딕 740"/>
-                <a:cs typeface="Source Han Sans KR"/>
-                <a:sym typeface="Source Han Sans KR"/>
-              </a:rPr>
-              <a:t>스킬: </a:t>
-            </a:r>
-            <a:r>
-              <a:rPr lang="en-US" altLang="ko-KR" sz="2400">
-                <a:solidFill>
-                  <a:srgbClr val="475570"/>
-                </a:solidFill>
-                <a:latin typeface="한컴 윤고딕 740"/>
-                <a:ea typeface="한컴 윤고딕 740"/>
-                <a:cs typeface="Source Han Sans KR"/>
-                <a:sym typeface="Source Han Sans KR"/>
-              </a:rPr>
-              <a:t>6</a:t>
-            </a:r>
-            <a:r>
-              <a:rPr lang="ko-KR" altLang="en-US" sz="2400">
-                <a:solidFill>
-                  <a:srgbClr val="475570"/>
-                </a:solidFill>
-                <a:latin typeface="한컴 윤고딕 740"/>
-                <a:ea typeface="한컴 윤고딕 740"/>
-                <a:cs typeface="Source Han Sans KR"/>
-                <a:sym typeface="Source Han Sans KR"/>
-              </a:rPr>
-              <a:t>종</a:t>
-            </a:r>
-            <a:endParaRPr lang="ko-KR" altLang="en-US" sz="2400">
-              <a:solidFill>
-                <a:srgbClr val="475570"/>
-              </a:solidFill>
-              <a:latin typeface="한컴 윤고딕 740"/>
-              <a:ea typeface="한컴 윤고딕 740"/>
-              <a:cs typeface="Source Han Sans KR"/>
-              <a:sym typeface="Source Han Sans KR"/>
-            </a:endParaRPr>
           </a:p>
         </p:txBody>
       </p:sp>
@@ -14304,41 +14090,41 @@
 </file>
 
 <file path=ppt/theme/theme1.xml><?xml version="1.0" encoding="utf-8"?>
-<a:theme xmlns:r="http://schemas.openxmlformats.org/officeDocument/2006/relationships" xmlns:c="http://schemas.openxmlformats.org/drawingml/2006/chart" xmlns:dgm="http://schemas.openxmlformats.org/drawingml/2006/diagram" xmlns:dsp="http://schemas.microsoft.com/office/drawing/2008/diagram" xmlns:a="http://schemas.openxmlformats.org/drawingml/2006/main" xmlns:pic="http://schemas.openxmlformats.org/drawingml/2006/picture" xmlns:wp="http://schemas.openxmlformats.org/drawingml/2006/wordprocessingDrawing" xmlns:xdr="http://schemas.openxmlformats.org/drawingml/2006/spreadsheetDrawing" xmlns:lc="http://schemas.openxmlformats.org/drawingml/2006/lockedCanvas" xmlns:p="http://schemas.openxmlformats.org/presentationml/2006/main" name="Office Theme">
+<a:theme xmlns:a="http://schemas.openxmlformats.org/drawingml/2006/main" name="Office Theme">
   <a:themeElements>
     <a:clrScheme name="Office">
       <a:dk1>
         <a:sysClr val="windowText" lastClr="000000"/>
       </a:dk1>
       <a:lt1>
-        <a:sysClr val="window" lastClr="ffffff"/>
+        <a:sysClr val="window" lastClr="FFFFFF"/>
       </a:lt1>
       <a:dk2>
-        <a:srgbClr val="1f497d"/>
+        <a:srgbClr val="1F497D"/>
       </a:dk2>
       <a:lt2>
-        <a:srgbClr val="eeece1"/>
+        <a:srgbClr val="EEECE1"/>
       </a:lt2>
       <a:accent1>
-        <a:srgbClr val="4f81bd"/>
+        <a:srgbClr val="4F81BD"/>
       </a:accent1>
       <a:accent2>
-        <a:srgbClr val="c0504d"/>
+        <a:srgbClr val="C0504D"/>
       </a:accent2>
       <a:accent3>
-        <a:srgbClr val="9bbb59"/>
+        <a:srgbClr val="9BBB59"/>
       </a:accent3>
       <a:accent4>
-        <a:srgbClr val="8064a2"/>
+        <a:srgbClr val="8064A2"/>
       </a:accent4>
       <a:accent5>
-        <a:srgbClr val="4bacc6"/>
+        <a:srgbClr val="4BACC6"/>
       </a:accent5>
       <a:accent6>
-        <a:srgbClr val="f79646"/>
+        <a:srgbClr val="F79646"/>
       </a:accent6>
       <a:hlink>
-        <a:srgbClr val="0000ff"/>
+        <a:srgbClr val="0000FF"/>
       </a:hlink>
       <a:folHlink>
         <a:srgbClr val="800080"/>
@@ -14581,5 +14367,7 @@
       </a:bgFillStyleLst>
     </a:fmtScheme>
   </a:themeElements>
+  <a:objectDefaults/>
+  <a:extraClrSchemeLst/>
 </a:theme>
 </file>